--- a/assignment3-nlp-template.pptx
+++ b/assignment3-nlp-template.pptx
@@ -6223,6 +6223,570 @@
           </a:p>
         </p:txBody>
       </p:sp>
+      <p:sp>
+        <p:nvSpPr>
+          <p:cNvPr id="2" name="TextBox 1">
+            <a:extLst>
+              <a:ext uri="{FF2B5EF4-FFF2-40B4-BE49-F238E27FC236}">
+                <a16:creationId xmlns:a16="http://schemas.microsoft.com/office/drawing/2014/main" id="{E59F7C66-D857-6EB6-9DEE-7512BA0E0FFA}"/>
+              </a:ext>
+            </a:extLst>
+          </p:cNvPr>
+          <p:cNvSpPr txBox="1"/>
+          <p:nvPr/>
+        </p:nvSpPr>
+        <p:spPr>
+          <a:xfrm>
+            <a:off x="344159" y="983484"/>
+            <a:ext cx="8485921" cy="4068999"/>
+          </a:xfrm>
+          <a:prstGeom prst="rect">
+            <a:avLst/>
+          </a:prstGeom>
+          <a:noFill/>
+        </p:spPr>
+        <p:txBody>
+          <a:bodyPr wrap="square" rtlCol="0">
+            <a:spAutoFit/>
+          </a:bodyPr>
+          <a:lstStyle/>
+          <a:p>
+            <a:pPr>
+              <a:lnSpc>
+                <a:spcPts val="2400"/>
+              </a:lnSpc>
+            </a:pPr>
+            <a:r>
+              <a:rPr lang="en-US" altLang="zh-CN" dirty="0"/>
+              <a:t>Best</a:t>
+            </a:r>
+            <a:r>
+              <a:rPr lang="zh-CN" altLang="en-US" dirty="0"/>
+              <a:t> </a:t>
+            </a:r>
+            <a:r>
+              <a:rPr lang="en-US" altLang="zh-CN" dirty="0"/>
+              <a:t>Model</a:t>
+            </a:r>
+            <a:r>
+              <a:rPr lang="zh-CN" altLang="en-US" dirty="0"/>
+              <a:t> </a:t>
+            </a:r>
+            <a:r>
+              <a:rPr lang="en-US" altLang="zh-CN" dirty="0"/>
+              <a:t>details:</a:t>
+            </a:r>
+            <a:r>
+              <a:rPr lang="zh-CN" altLang="en-US" dirty="0"/>
+              <a:t> </a:t>
+            </a:r>
+            <a:endParaRPr lang="en-US" altLang="zh-CN" dirty="0"/>
+          </a:p>
+          <a:p>
+            <a:pPr marL="285750" indent="-285750">
+              <a:lnSpc>
+                <a:spcPts val="2400"/>
+              </a:lnSpc>
+              <a:buFontTx/>
+              <a:buChar char="-"/>
+            </a:pPr>
+            <a:r>
+              <a:rPr lang="en-US" altLang="zh-CN" dirty="0"/>
+              <a:t>Full</a:t>
+            </a:r>
+            <a:r>
+              <a:rPr lang="zh-CN" altLang="en-US" dirty="0"/>
+              <a:t> </a:t>
+            </a:r>
+            <a:r>
+              <a:rPr lang="en-US" altLang="zh-CN" dirty="0"/>
+              <a:t>transformer</a:t>
+            </a:r>
+            <a:r>
+              <a:rPr lang="zh-CN" altLang="en-US" dirty="0"/>
+              <a:t> </a:t>
+            </a:r>
+            <a:r>
+              <a:rPr lang="en-US" altLang="zh-CN" dirty="0"/>
+              <a:t>combo:</a:t>
+            </a:r>
+            <a:r>
+              <a:rPr lang="zh-CN" altLang="en-US" dirty="0"/>
+              <a:t> </a:t>
+            </a:r>
+            <a:r>
+              <a:rPr lang="en-US" altLang="zh-CN" dirty="0"/>
+              <a:t>encoder</a:t>
+            </a:r>
+            <a:r>
+              <a:rPr lang="zh-CN" altLang="en-US" dirty="0"/>
+              <a:t> </a:t>
+            </a:r>
+            <a:r>
+              <a:rPr lang="en-US" altLang="zh-CN" dirty="0"/>
+              <a:t>+</a:t>
+            </a:r>
+            <a:r>
+              <a:rPr lang="zh-CN" altLang="en-US" dirty="0"/>
+              <a:t> </a:t>
+            </a:r>
+            <a:r>
+              <a:rPr lang="en-US" altLang="zh-CN" dirty="0"/>
+              <a:t>decoder</a:t>
+            </a:r>
+            <a:r>
+              <a:rPr lang="zh-CN" altLang="en-US" dirty="0"/>
+              <a:t> </a:t>
+            </a:r>
+            <a:r>
+              <a:rPr lang="en-US" altLang="zh-CN" dirty="0"/>
+              <a:t>+</a:t>
+            </a:r>
+            <a:r>
+              <a:rPr lang="zh-CN" altLang="en-US" dirty="0"/>
+              <a:t> </a:t>
+            </a:r>
+            <a:r>
+              <a:rPr lang="en-US" altLang="zh-CN" dirty="0"/>
+              <a:t>multi-heads</a:t>
+            </a:r>
+            <a:r>
+              <a:rPr lang="zh-CN" altLang="en-US" dirty="0"/>
+              <a:t> </a:t>
+            </a:r>
+            <a:r>
+              <a:rPr lang="en-US" altLang="zh-CN" dirty="0"/>
+              <a:t>attention</a:t>
+            </a:r>
+            <a:r>
+              <a:rPr lang="zh-CN" altLang="en-US" dirty="0"/>
+              <a:t> </a:t>
+            </a:r>
+            <a:r>
+              <a:rPr lang="en-US" altLang="zh-CN" dirty="0"/>
+              <a:t>gives</a:t>
+            </a:r>
+            <a:r>
+              <a:rPr lang="zh-CN" altLang="en-US" dirty="0"/>
+              <a:t> </a:t>
+            </a:r>
+            <a:r>
+              <a:rPr lang="en-US" altLang="zh-CN" dirty="0"/>
+              <a:t>the</a:t>
+            </a:r>
+            <a:r>
+              <a:rPr lang="zh-CN" altLang="en-US" dirty="0"/>
+              <a:t> </a:t>
+            </a:r>
+            <a:r>
+              <a:rPr lang="en-US" altLang="zh-CN" dirty="0"/>
+              <a:t>best</a:t>
+            </a:r>
+            <a:r>
+              <a:rPr lang="zh-CN" altLang="en-US" dirty="0"/>
+              <a:t> </a:t>
+            </a:r>
+            <a:r>
+              <a:rPr lang="en-US" altLang="zh-CN" dirty="0"/>
+              <a:t>performance</a:t>
+            </a:r>
+          </a:p>
+          <a:p>
+            <a:pPr marL="285750" indent="-285750">
+              <a:lnSpc>
+                <a:spcPts val="2400"/>
+              </a:lnSpc>
+              <a:buFontTx/>
+              <a:buChar char="-"/>
+            </a:pPr>
+            <a:r>
+              <a:rPr lang="en-US" altLang="zh-CN" dirty="0"/>
+              <a:t>Improvement</a:t>
+            </a:r>
+            <a:r>
+              <a:rPr lang="zh-CN" altLang="en-US" dirty="0"/>
+              <a:t> </a:t>
+            </a:r>
+            <a:r>
+              <a:rPr lang="en-US" altLang="zh-CN" dirty="0"/>
+              <a:t>done:</a:t>
+            </a:r>
+          </a:p>
+          <a:p>
+            <a:pPr marL="742950" lvl="1" indent="-285750">
+              <a:lnSpc>
+                <a:spcPts val="2400"/>
+              </a:lnSpc>
+              <a:buFontTx/>
+              <a:buChar char="-"/>
+            </a:pPr>
+            <a:r>
+              <a:rPr lang="en-US" altLang="zh-CN" dirty="0"/>
+              <a:t>Added</a:t>
+            </a:r>
+            <a:r>
+              <a:rPr lang="zh-CN" altLang="en-US" dirty="0"/>
+              <a:t> </a:t>
+            </a:r>
+            <a:r>
+              <a:rPr lang="en-US" altLang="zh-CN" dirty="0"/>
+              <a:t>positional</a:t>
+            </a:r>
+            <a:r>
+              <a:rPr lang="zh-CN" altLang="en-US" dirty="0"/>
+              <a:t> </a:t>
+            </a:r>
+            <a:r>
+              <a:rPr lang="en-US" altLang="zh-CN" dirty="0"/>
+              <a:t>encoding</a:t>
+            </a:r>
+            <a:r>
+              <a:rPr lang="zh-CN" altLang="en-US" dirty="0"/>
+              <a:t> </a:t>
+            </a:r>
+            <a:r>
+              <a:rPr lang="en-US" altLang="zh-CN" dirty="0"/>
+              <a:t>for</a:t>
+            </a:r>
+            <a:r>
+              <a:rPr lang="zh-CN" altLang="en-US" dirty="0"/>
+              <a:t> </a:t>
+            </a:r>
+            <a:r>
+              <a:rPr lang="en-US" altLang="zh-CN" dirty="0"/>
+              <a:t>sequential</a:t>
+            </a:r>
+            <a:r>
+              <a:rPr lang="zh-CN" altLang="en-US" dirty="0"/>
+              <a:t> </a:t>
+            </a:r>
+            <a:r>
+              <a:rPr lang="en-US" altLang="zh-CN" dirty="0"/>
+              <a:t>info</a:t>
+            </a:r>
+          </a:p>
+          <a:p>
+            <a:pPr marL="742950" lvl="1" indent="-285750">
+              <a:lnSpc>
+                <a:spcPts val="2400"/>
+              </a:lnSpc>
+              <a:buFontTx/>
+              <a:buChar char="-"/>
+            </a:pPr>
+            <a:r>
+              <a:rPr lang="en-US" altLang="zh-CN" dirty="0"/>
+              <a:t>Tuned</a:t>
+            </a:r>
+            <a:r>
+              <a:rPr lang="zh-CN" altLang="en-US" dirty="0"/>
+              <a:t> </a:t>
+            </a:r>
+            <a:r>
+              <a:rPr lang="en-US" altLang="zh-CN" dirty="0"/>
+              <a:t>hyperparameters:</a:t>
+            </a:r>
+            <a:r>
+              <a:rPr lang="zh-CN" altLang="en-US" dirty="0"/>
+              <a:t> </a:t>
+            </a:r>
+            <a:r>
+              <a:rPr lang="en-US" altLang="zh-CN" dirty="0"/>
+              <a:t>embedding</a:t>
+            </a:r>
+            <a:r>
+              <a:rPr lang="zh-CN" altLang="en-US" dirty="0"/>
+              <a:t> </a:t>
+            </a:r>
+            <a:r>
+              <a:rPr lang="en-US" altLang="zh-CN" dirty="0"/>
+              <a:t>&amp;</a:t>
+            </a:r>
+            <a:r>
+              <a:rPr lang="zh-CN" altLang="en-US" dirty="0"/>
+              <a:t> </a:t>
+            </a:r>
+            <a:r>
+              <a:rPr lang="en-US" altLang="zh-CN" dirty="0"/>
+              <a:t>hidden</a:t>
+            </a:r>
+            <a:r>
+              <a:rPr lang="zh-CN" altLang="en-US" dirty="0"/>
+              <a:t> </a:t>
+            </a:r>
+            <a:r>
+              <a:rPr lang="en-US" altLang="zh-CN" dirty="0"/>
+              <a:t>sizes</a:t>
+            </a:r>
+          </a:p>
+          <a:p>
+            <a:pPr marL="742950" lvl="1" indent="-285750">
+              <a:lnSpc>
+                <a:spcPts val="2400"/>
+              </a:lnSpc>
+              <a:buFontTx/>
+              <a:buChar char="-"/>
+            </a:pPr>
+            <a:r>
+              <a:rPr lang="en-US" altLang="zh-CN" dirty="0"/>
+              <a:t>Used</a:t>
+            </a:r>
+            <a:r>
+              <a:rPr lang="zh-CN" altLang="en-US" dirty="0"/>
+              <a:t> </a:t>
+            </a:r>
+            <a:r>
+              <a:rPr lang="en-US" altLang="zh-CN" dirty="0"/>
+              <a:t>residual</a:t>
+            </a:r>
+            <a:r>
+              <a:rPr lang="zh-CN" altLang="en-US" dirty="0"/>
+              <a:t> </a:t>
+            </a:r>
+            <a:r>
+              <a:rPr lang="en-US" altLang="zh-CN" dirty="0"/>
+              <a:t>connections</a:t>
+            </a:r>
+            <a:r>
+              <a:rPr lang="zh-CN" altLang="en-US" dirty="0"/>
+              <a:t> </a:t>
+            </a:r>
+            <a:r>
+              <a:rPr lang="en-US" altLang="zh-CN" dirty="0"/>
+              <a:t>and</a:t>
+            </a:r>
+            <a:r>
+              <a:rPr lang="zh-CN" altLang="en-US" dirty="0"/>
+              <a:t> </a:t>
+            </a:r>
+            <a:r>
+              <a:rPr lang="en-US" altLang="zh-CN" dirty="0"/>
+              <a:t>layer</a:t>
+            </a:r>
+            <a:r>
+              <a:rPr lang="zh-CN" altLang="en-US" dirty="0"/>
+              <a:t> </a:t>
+            </a:r>
+            <a:r>
+              <a:rPr lang="en-US" altLang="zh-CN" dirty="0"/>
+              <a:t>normalization</a:t>
+            </a:r>
+          </a:p>
+          <a:p>
+            <a:pPr marL="742950" lvl="1" indent="-285750">
+              <a:lnSpc>
+                <a:spcPts val="2400"/>
+              </a:lnSpc>
+              <a:buFontTx/>
+              <a:buChar char="-"/>
+            </a:pPr>
+            <a:endParaRPr lang="en-US" altLang="zh-CN" dirty="0"/>
+          </a:p>
+          <a:p>
+            <a:pPr>
+              <a:lnSpc>
+                <a:spcPts val="2400"/>
+              </a:lnSpc>
+            </a:pPr>
+            <a:r>
+              <a:rPr lang="en-US" altLang="zh-CN" dirty="0"/>
+              <a:t>Reasoning:</a:t>
+            </a:r>
+          </a:p>
+          <a:p>
+            <a:pPr marL="285750" indent="-285750">
+              <a:lnSpc>
+                <a:spcPts val="2400"/>
+              </a:lnSpc>
+              <a:buFontTx/>
+              <a:buChar char="-"/>
+            </a:pPr>
+            <a:r>
+              <a:rPr lang="en-US" altLang="zh-CN" dirty="0"/>
+              <a:t>Attention</a:t>
+            </a:r>
+            <a:r>
+              <a:rPr lang="zh-CN" altLang="en-US" dirty="0"/>
+              <a:t> </a:t>
+            </a:r>
+            <a:r>
+              <a:rPr lang="en-US" altLang="zh-CN" dirty="0"/>
+              <a:t>mechanism</a:t>
+            </a:r>
+            <a:r>
+              <a:rPr lang="zh-CN" altLang="en-US" dirty="0"/>
+              <a:t> </a:t>
+            </a:r>
+            <a:r>
+              <a:rPr lang="en-US" altLang="zh-CN" dirty="0"/>
+              <a:t>allows</a:t>
+            </a:r>
+            <a:r>
+              <a:rPr lang="zh-CN" altLang="en-US" dirty="0"/>
+              <a:t> </a:t>
+            </a:r>
+            <a:r>
+              <a:rPr lang="en-US" altLang="zh-CN" dirty="0"/>
+              <a:t>global</a:t>
+            </a:r>
+            <a:r>
+              <a:rPr lang="zh-CN" altLang="en-US" dirty="0"/>
+              <a:t> </a:t>
+            </a:r>
+            <a:r>
+              <a:rPr lang="en-US" altLang="zh-CN" dirty="0"/>
+              <a:t>context</a:t>
+            </a:r>
+            <a:r>
+              <a:rPr lang="zh-CN" altLang="en-US" dirty="0"/>
+              <a:t> </a:t>
+            </a:r>
+            <a:r>
+              <a:rPr lang="en-US" altLang="zh-CN" dirty="0"/>
+              <a:t>access</a:t>
+            </a:r>
+            <a:r>
+              <a:rPr lang="zh-CN" altLang="en-US" dirty="0"/>
+              <a:t> </a:t>
+            </a:r>
+            <a:r>
+              <a:rPr lang="en-US" altLang="zh-CN" dirty="0"/>
+              <a:t>(not</a:t>
+            </a:r>
+            <a:r>
+              <a:rPr lang="zh-CN" altLang="en-US" dirty="0"/>
+              <a:t> </a:t>
+            </a:r>
+            <a:r>
+              <a:rPr lang="en-US" altLang="zh-CN" dirty="0"/>
+              <a:t>sequential</a:t>
+            </a:r>
+            <a:r>
+              <a:rPr lang="zh-CN" altLang="en-US" dirty="0"/>
+              <a:t> </a:t>
+            </a:r>
+            <a:r>
+              <a:rPr lang="en-US" altLang="zh-CN" dirty="0"/>
+              <a:t>like</a:t>
+            </a:r>
+            <a:r>
+              <a:rPr lang="zh-CN" altLang="en-US" dirty="0"/>
+              <a:t> </a:t>
+            </a:r>
+            <a:r>
+              <a:rPr lang="en-US" altLang="zh-CN" dirty="0"/>
+              <a:t>RNN)</a:t>
+            </a:r>
+          </a:p>
+          <a:p>
+            <a:pPr marL="285750" indent="-285750">
+              <a:lnSpc>
+                <a:spcPts val="2400"/>
+              </a:lnSpc>
+              <a:buFontTx/>
+              <a:buChar char="-"/>
+            </a:pPr>
+            <a:r>
+              <a:rPr lang="en-US" altLang="zh-CN" dirty="0"/>
+              <a:t>Multi-heads</a:t>
+            </a:r>
+            <a:r>
+              <a:rPr lang="zh-CN" altLang="en-US" dirty="0"/>
+              <a:t> </a:t>
+            </a:r>
+            <a:r>
+              <a:rPr lang="en-US" altLang="zh-CN" dirty="0"/>
+              <a:t>attention</a:t>
+            </a:r>
+            <a:r>
+              <a:rPr lang="zh-CN" altLang="en-US" dirty="0"/>
+              <a:t> </a:t>
+            </a:r>
+            <a:r>
+              <a:rPr lang="en-US" altLang="zh-CN" dirty="0"/>
+              <a:t>allows</a:t>
+            </a:r>
+            <a:r>
+              <a:rPr lang="zh-CN" altLang="en-US" dirty="0"/>
+              <a:t> </a:t>
+            </a:r>
+            <a:r>
+              <a:rPr lang="en-US" altLang="zh-CN" dirty="0"/>
+              <a:t>multiple</a:t>
+            </a:r>
+            <a:r>
+              <a:rPr lang="zh-CN" altLang="en-US" dirty="0"/>
+              <a:t> </a:t>
+            </a:r>
+            <a:r>
+              <a:rPr lang="en-US" altLang="zh-CN" dirty="0"/>
+              <a:t>representation</a:t>
+            </a:r>
+            <a:r>
+              <a:rPr lang="zh-CN" altLang="en-US" dirty="0"/>
+              <a:t> </a:t>
+            </a:r>
+            <a:r>
+              <a:rPr lang="en-US" altLang="zh-CN" dirty="0"/>
+              <a:t>subspaces</a:t>
+            </a:r>
+          </a:p>
+          <a:p>
+            <a:pPr marL="285750" indent="-285750">
+              <a:lnSpc>
+                <a:spcPts val="2400"/>
+              </a:lnSpc>
+              <a:buFontTx/>
+              <a:buChar char="-"/>
+            </a:pPr>
+            <a:r>
+              <a:rPr lang="en-US" altLang="zh-CN" dirty="0"/>
+              <a:t>Residual</a:t>
+            </a:r>
+            <a:r>
+              <a:rPr lang="zh-CN" altLang="en-US" dirty="0"/>
+              <a:t> </a:t>
+            </a:r>
+            <a:r>
+              <a:rPr lang="en-US" altLang="zh-CN" dirty="0"/>
+              <a:t>+</a:t>
+            </a:r>
+            <a:r>
+              <a:rPr lang="zh-CN" altLang="en-US" dirty="0"/>
+              <a:t> </a:t>
+            </a:r>
+            <a:r>
+              <a:rPr lang="en-US" altLang="zh-CN" dirty="0"/>
+              <a:t>normalization</a:t>
+            </a:r>
+            <a:r>
+              <a:rPr lang="zh-CN" altLang="en-US" dirty="0"/>
+              <a:t> </a:t>
+            </a:r>
+            <a:r>
+              <a:rPr lang="en-US" altLang="zh-CN"/>
+              <a:t>stableizes</a:t>
+            </a:r>
+            <a:r>
+              <a:rPr lang="zh-CN" altLang="en-US"/>
+              <a:t> </a:t>
+            </a:r>
+            <a:r>
+              <a:rPr lang="en-US" altLang="zh-CN" dirty="0"/>
+              <a:t>training</a:t>
+            </a:r>
+          </a:p>
+          <a:p>
+            <a:pPr marL="742950" lvl="1" indent="-285750">
+              <a:lnSpc>
+                <a:spcPts val="2400"/>
+              </a:lnSpc>
+              <a:buFontTx/>
+              <a:buChar char="-"/>
+            </a:pPr>
+            <a:endParaRPr lang="en-US" dirty="0"/>
+          </a:p>
+        </p:txBody>
+      </p:sp>
     </p:spTree>
   </p:cSld>
   <p:clrMapOvr>
@@ -6282,7 +6846,7 @@
           <p:nvPr>
             <p:extLst>
               <p:ext uri="{D42A27DB-BD31-4B8C-83A1-F6EECF244321}">
-                <p14:modId xmlns:p14="http://schemas.microsoft.com/office/powerpoint/2010/main" val="3139478562"/>
+                <p14:modId xmlns:p14="http://schemas.microsoft.com/office/powerpoint/2010/main" val="2530799080"/>
               </p:ext>
             </p:extLst>
           </p:nvPr>
@@ -10674,10 +11238,10 @@
       </p:sp>
       <p:grpSp>
         <p:nvGrpSpPr>
-          <p:cNvPr id="16" name="Group 15">
+          <p:cNvPr id="2" name="Group 1">
             <a:extLst>
               <a:ext uri="{FF2B5EF4-FFF2-40B4-BE49-F238E27FC236}">
-                <a16:creationId xmlns:a16="http://schemas.microsoft.com/office/drawing/2014/main" id="{327EA207-EC35-E972-48D2-09A65F042B85}"/>
+                <a16:creationId xmlns:a16="http://schemas.microsoft.com/office/drawing/2014/main" id="{264B7954-87E1-6A90-16B0-29B0E69814A7}"/>
               </a:ext>
             </a:extLst>
           </p:cNvPr>
@@ -10694,10 +11258,10 @@
         </p:grpSpPr>
         <p:sp>
           <p:nvSpPr>
-            <p:cNvPr id="12" name="TextBox 11">
+            <p:cNvPr id="3" name="TextBox 2">
               <a:extLst>
                 <a:ext uri="{FF2B5EF4-FFF2-40B4-BE49-F238E27FC236}">
-                  <a16:creationId xmlns:a16="http://schemas.microsoft.com/office/drawing/2014/main" id="{67B8C98F-AEAC-8BC0-8E13-1C59FE48BF95}"/>
+                  <a16:creationId xmlns:a16="http://schemas.microsoft.com/office/drawing/2014/main" id="{8B16EA21-ECC7-AD1D-1372-1EA74BE4407C}"/>
                 </a:ext>
               </a:extLst>
             </p:cNvPr>
@@ -10707,7 +11271,7 @@
           <p:spPr>
             <a:xfrm>
               <a:off x="390418" y="1036280"/>
-              <a:ext cx="3056563" cy="1606850"/>
+              <a:ext cx="3342002" cy="1606850"/>
             </a:xfrm>
             <a:prstGeom prst="rect">
               <a:avLst/>
@@ -10742,7 +11306,11 @@
               </a:pPr>
               <a:r>
                 <a:rPr lang="en-US" dirty="0"/>
-                <a:t>Training Loss: ?</a:t>
+                <a:t>Training Loss: </a:t>
+              </a:r>
+              <a:r>
+                <a:rPr lang="en-US" altLang="zh-CN" dirty="0"/>
+                <a:t>4.61</a:t>
               </a:r>
             </a:p>
             <a:p>
@@ -10753,8 +11321,17 @@
               </a:pPr>
               <a:r>
                 <a:rPr lang="en-US" dirty="0"/>
-                <a:t>Training Perplexity: ?</a:t>
+                <a:t>Training Perplexity:</a:t>
               </a:r>
+              <a:r>
+                <a:rPr lang="zh-CN" altLang="en-US" dirty="0"/>
+                <a:t> </a:t>
+              </a:r>
+              <a:r>
+                <a:rPr lang="en-US" altLang="zh-CN" dirty="0"/>
+                <a:t>100.72</a:t>
+              </a:r>
+              <a:endParaRPr lang="en-US" dirty="0"/>
             </a:p>
             <a:p>
               <a:pPr>
@@ -10764,8 +11341,13 @@
               </a:pPr>
               <a:r>
                 <a:rPr lang="en-US" dirty="0"/>
-                <a:t>Validation Loss: ?</a:t>
+                <a:t>Validation Loss: 4.</a:t>
               </a:r>
+              <a:r>
+                <a:rPr lang="en-US" altLang="zh-CN" dirty="0"/>
+                <a:t>70</a:t>
+              </a:r>
+              <a:endParaRPr lang="en-US" dirty="0"/>
             </a:p>
             <a:p>
               <a:pPr>
@@ -10775,17 +11357,22 @@
               </a:pPr>
               <a:r>
                 <a:rPr lang="en-US" dirty="0"/>
-                <a:t>Validation Perplexity: ?</a:t>
+                <a:t>Validation Perplexity: </a:t>
               </a:r>
+              <a:r>
+                <a:rPr lang="en-US" altLang="zh-CN" dirty="0"/>
+                <a:t>109.83</a:t>
+              </a:r>
+              <a:endParaRPr lang="en-US" dirty="0"/>
             </a:p>
           </p:txBody>
         </p:sp>
         <p:sp>
           <p:nvSpPr>
-            <p:cNvPr id="13" name="TextBox 12">
+            <p:cNvPr id="4" name="TextBox 3">
               <a:extLst>
                 <a:ext uri="{FF2B5EF4-FFF2-40B4-BE49-F238E27FC236}">
-                  <a16:creationId xmlns:a16="http://schemas.microsoft.com/office/drawing/2014/main" id="{B48C824F-5283-60BB-A126-AC1CA44235B2}"/>
+                  <a16:creationId xmlns:a16="http://schemas.microsoft.com/office/drawing/2014/main" id="{79A90808-3F9E-F1B8-DF30-64CA2527E02A}"/>
                 </a:ext>
               </a:extLst>
             </p:cNvPr>
@@ -10830,8 +11417,13 @@
               </a:pPr>
               <a:r>
                 <a:rPr lang="en-US" dirty="0"/>
-                <a:t>Training Loss: ?</a:t>
+                <a:t>Training Loss: </a:t>
               </a:r>
+              <a:r>
+                <a:rPr lang="en-US" altLang="zh-CN" dirty="0"/>
+                <a:t>3.15</a:t>
+              </a:r>
+              <a:endParaRPr lang="en-US" dirty="0"/>
             </a:p>
             <a:p>
               <a:pPr>
@@ -10841,8 +11433,13 @@
               </a:pPr>
               <a:r>
                 <a:rPr lang="en-US" dirty="0"/>
-                <a:t>Training Perplexity: ?</a:t>
+                <a:t>Training Perplexity: </a:t>
               </a:r>
+              <a:r>
+                <a:rPr lang="en-US" altLang="zh-CN" dirty="0"/>
+                <a:t>23.28</a:t>
+              </a:r>
+              <a:endParaRPr lang="en-US" dirty="0"/>
             </a:p>
             <a:p>
               <a:pPr>
@@ -10852,8 +11449,13 @@
               </a:pPr>
               <a:r>
                 <a:rPr lang="en-US" dirty="0"/>
-                <a:t>Validation Loss: ?</a:t>
+                <a:t>Validation Loss: </a:t>
               </a:r>
+              <a:r>
+                <a:rPr lang="en-US" altLang="zh-CN" dirty="0"/>
+                <a:t>3.32</a:t>
+              </a:r>
+              <a:endParaRPr lang="en-US" dirty="0"/>
             </a:p>
             <a:p>
               <a:pPr>
@@ -10863,18 +11465,23 @@
               </a:pPr>
               <a:r>
                 <a:rPr lang="en-US" dirty="0"/>
-                <a:t>Validation Perplexity: ?</a:t>
+                <a:t>Validation Perplexity: </a:t>
               </a:r>
+              <a:r>
+                <a:rPr lang="en-US" altLang="zh-CN" dirty="0"/>
+                <a:t>27.59</a:t>
+              </a:r>
+              <a:endParaRPr lang="en-US" dirty="0"/>
             </a:p>
           </p:txBody>
         </p:sp>
       </p:grpSp>
       <p:grpSp>
         <p:nvGrpSpPr>
-          <p:cNvPr id="20" name="Group 19">
+          <p:cNvPr id="6" name="Group 5">
             <a:extLst>
               <a:ext uri="{FF2B5EF4-FFF2-40B4-BE49-F238E27FC236}">
-                <a16:creationId xmlns:a16="http://schemas.microsoft.com/office/drawing/2014/main" id="{42277F97-0B46-55B9-1978-53A8700943CA}"/>
+                <a16:creationId xmlns:a16="http://schemas.microsoft.com/office/drawing/2014/main" id="{28901A60-6BB8-FCD0-9BC0-3C06F1F25AF2}"/>
               </a:ext>
             </a:extLst>
           </p:cNvPr>
@@ -10891,10 +11498,10 @@
         </p:grpSpPr>
         <p:sp>
           <p:nvSpPr>
-            <p:cNvPr id="21" name="TextBox 20">
+            <p:cNvPr id="7" name="TextBox 6">
               <a:extLst>
                 <a:ext uri="{FF2B5EF4-FFF2-40B4-BE49-F238E27FC236}">
-                  <a16:creationId xmlns:a16="http://schemas.microsoft.com/office/drawing/2014/main" id="{8FD89530-4810-B9EA-289E-1950DB5618C1}"/>
+                  <a16:creationId xmlns:a16="http://schemas.microsoft.com/office/drawing/2014/main" id="{B17CB046-71F5-913E-41B5-5620BAC94D6F}"/>
                 </a:ext>
               </a:extLst>
             </p:cNvPr>
@@ -10904,7 +11511,7 @@
           <p:spPr>
             <a:xfrm>
               <a:off x="390418" y="1036280"/>
-              <a:ext cx="3056563" cy="1606850"/>
+              <a:ext cx="3148364" cy="1606850"/>
             </a:xfrm>
             <a:prstGeom prst="rect">
               <a:avLst/>
@@ -10939,8 +11546,13 @@
               </a:pPr>
               <a:r>
                 <a:rPr lang="en-US" dirty="0"/>
-                <a:t>Training Loss: ?</a:t>
+                <a:t>Training Loss: </a:t>
               </a:r>
+              <a:r>
+                <a:rPr lang="en-US" altLang="zh-CN" dirty="0"/>
+                <a:t>1.49</a:t>
+              </a:r>
+              <a:endParaRPr lang="en-US" dirty="0"/>
             </a:p>
             <a:p>
               <a:pPr>
@@ -10950,8 +11562,13 @@
               </a:pPr>
               <a:r>
                 <a:rPr lang="en-US" dirty="0"/>
-                <a:t>Training Perplexity: ?</a:t>
+                <a:t>Training Perplexity: </a:t>
               </a:r>
+              <a:r>
+                <a:rPr lang="en-US" altLang="zh-CN" dirty="0"/>
+                <a:t>4.46</a:t>
+              </a:r>
+              <a:endParaRPr lang="en-US" dirty="0"/>
             </a:p>
             <a:p>
               <a:pPr>
@@ -10961,8 +11578,13 @@
               </a:pPr>
               <a:r>
                 <a:rPr lang="en-US" dirty="0"/>
-                <a:t>Validation Loss: ?</a:t>
+                <a:t>Validation Loss: </a:t>
               </a:r>
+              <a:r>
+                <a:rPr lang="en-US" altLang="zh-CN" dirty="0"/>
+                <a:t>1.85</a:t>
+              </a:r>
+              <a:endParaRPr lang="en-US" dirty="0"/>
             </a:p>
             <a:p>
               <a:pPr>
@@ -10972,17 +11594,22 @@
               </a:pPr>
               <a:r>
                 <a:rPr lang="en-US" dirty="0"/>
-                <a:t>Validation Perplexity: ?</a:t>
+                <a:t>Validation Perplexity: </a:t>
               </a:r>
+              <a:r>
+                <a:rPr lang="en-US" altLang="zh-CN" dirty="0"/>
+                <a:t>6.37</a:t>
+              </a:r>
+              <a:endParaRPr lang="en-US" dirty="0"/>
             </a:p>
           </p:txBody>
         </p:sp>
         <p:sp>
           <p:nvSpPr>
-            <p:cNvPr id="22" name="TextBox 21">
+            <p:cNvPr id="8" name="TextBox 7">
               <a:extLst>
                 <a:ext uri="{FF2B5EF4-FFF2-40B4-BE49-F238E27FC236}">
-                  <a16:creationId xmlns:a16="http://schemas.microsoft.com/office/drawing/2014/main" id="{01B11F87-184B-166C-A8AD-A2C6A9A8678A}"/>
+                  <a16:creationId xmlns:a16="http://schemas.microsoft.com/office/drawing/2014/main" id="{E8B619F4-A0A0-5892-017E-AA711304B03A}"/>
                 </a:ext>
               </a:extLst>
             </p:cNvPr>
@@ -11027,8 +11654,13 @@
               </a:pPr>
               <a:r>
                 <a:rPr lang="en-US" dirty="0"/>
-                <a:t>Training Loss: ?</a:t>
+                <a:t>Training Loss: </a:t>
               </a:r>
+              <a:r>
+                <a:rPr lang="en-US" altLang="zh-CN" dirty="0"/>
+                <a:t>3.66</a:t>
+              </a:r>
+              <a:endParaRPr lang="en-US" dirty="0"/>
             </a:p>
             <a:p>
               <a:pPr>
@@ -11038,8 +11670,13 @@
               </a:pPr>
               <a:r>
                 <a:rPr lang="en-US" dirty="0"/>
-                <a:t>Training Perplexity: ?</a:t>
+                <a:t>Training Perplexity: </a:t>
               </a:r>
+              <a:r>
+                <a:rPr lang="en-US" altLang="zh-CN" dirty="0"/>
+                <a:t>38.99</a:t>
+              </a:r>
+              <a:endParaRPr lang="en-US" dirty="0"/>
             </a:p>
             <a:p>
               <a:pPr>
@@ -11049,8 +11686,13 @@
               </a:pPr>
               <a:r>
                 <a:rPr lang="en-US" dirty="0"/>
-                <a:t>Validation Loss: ?</a:t>
+                <a:t>Validation Loss: </a:t>
               </a:r>
+              <a:r>
+                <a:rPr lang="en-US" altLang="zh-CN" dirty="0"/>
+                <a:t>3.65</a:t>
+              </a:r>
+              <a:endParaRPr lang="en-US" dirty="0"/>
             </a:p>
             <a:p>
               <a:pPr>
@@ -11060,8 +11702,13 @@
               </a:pPr>
               <a:r>
                 <a:rPr lang="en-US" dirty="0"/>
-                <a:t>Validation Perplexity: ?</a:t>
+                <a:t>Validation Perplexity: </a:t>
               </a:r>
+              <a:r>
+                <a:rPr lang="en-US" altLang="zh-CN" dirty="0"/>
+                <a:t>38.70</a:t>
+              </a:r>
+              <a:endParaRPr lang="en-US" dirty="0"/>
             </a:p>
           </p:txBody>
         </p:sp>
@@ -11205,6 +11852,1490 @@
               </a:rPr>
               <a:t>Compare your RNN result to your LSTM result and explain why they differ.</a:t>
             </a:r>
+            <a:endParaRPr lang="en-US" sz="1200" b="0" strike="noStrike" spc="-1" dirty="0">
+              <a:latin typeface="Arial"/>
+            </a:endParaRPr>
+          </a:p>
+        </p:txBody>
+      </p:sp>
+      <p:sp>
+        <p:nvSpPr>
+          <p:cNvPr id="2" name="CustomShape 2">
+            <a:extLst>
+              <a:ext uri="{FF2B5EF4-FFF2-40B4-BE49-F238E27FC236}">
+                <a16:creationId xmlns:a16="http://schemas.microsoft.com/office/drawing/2014/main" id="{21BD931A-AEA2-91DB-5045-E6409E13BEC8}"/>
+              </a:ext>
+            </a:extLst>
+          </p:cNvPr>
+          <p:cNvSpPr/>
+          <p:nvPr/>
+        </p:nvSpPr>
+        <p:spPr>
+          <a:xfrm>
+            <a:off x="344160" y="1052444"/>
+            <a:ext cx="7277400" cy="600120"/>
+          </a:xfrm>
+          <a:prstGeom prst="rect">
+            <a:avLst/>
+          </a:prstGeom>
+          <a:noFill/>
+          <a:ln>
+            <a:noFill/>
+          </a:ln>
+        </p:spPr>
+        <p:style>
+          <a:lnRef idx="0">
+            <a:scrgbClr r="0" g="0" b="0"/>
+          </a:lnRef>
+          <a:fillRef idx="0">
+            <a:scrgbClr r="0" g="0" b="0"/>
+          </a:fillRef>
+          <a:effectRef idx="0">
+            <a:scrgbClr r="0" g="0" b="0"/>
+          </a:effectRef>
+          <a:fontRef idx="minor"/>
+        </p:style>
+        <p:txBody>
+          <a:bodyPr lIns="90000" tIns="45000" rIns="90000" bIns="45000"/>
+          <a:lstStyle/>
+          <a:p>
+            <a:pPr>
+              <a:lnSpc>
+                <a:spcPct val="100000"/>
+              </a:lnSpc>
+            </a:pPr>
+            <a:r>
+              <a:rPr lang="en-US" altLang="zh-CN" sz="1200" b="1" strike="noStrike" spc="-1" dirty="0">
+                <a:latin typeface="Arial"/>
+                <a:ea typeface="Arial"/>
+              </a:rPr>
+              <a:t>Comparison</a:t>
+            </a:r>
+            <a:r>
+              <a:rPr lang="zh-CN" altLang="en-US" sz="1200" b="1" strike="noStrike" spc="-1" dirty="0">
+                <a:latin typeface="Arial"/>
+                <a:ea typeface="Arial"/>
+              </a:rPr>
+              <a:t> </a:t>
+            </a:r>
+            <a:r>
+              <a:rPr lang="en-US" altLang="zh-CN" sz="1200" b="1" strike="noStrike" spc="-1" dirty="0">
+                <a:latin typeface="Arial"/>
+                <a:ea typeface="Arial"/>
+              </a:rPr>
+              <a:t>Item</a:t>
+            </a:r>
+            <a:r>
+              <a:rPr lang="zh-CN" altLang="en-US" sz="1200" b="1" strike="noStrike" spc="-1" dirty="0">
+                <a:latin typeface="Arial"/>
+                <a:ea typeface="Arial"/>
+              </a:rPr>
+              <a:t> </a:t>
+            </a:r>
+            <a:r>
+              <a:rPr lang="en-US" altLang="zh-CN" sz="1200" b="1" strike="noStrike" spc="-1" dirty="0">
+                <a:latin typeface="Arial"/>
+                <a:ea typeface="Arial"/>
+              </a:rPr>
+              <a:t>w/</a:t>
+            </a:r>
+            <a:r>
+              <a:rPr lang="zh-CN" altLang="en-US" sz="1200" b="1" strike="noStrike" spc="-1" dirty="0">
+                <a:latin typeface="Arial"/>
+                <a:ea typeface="Arial"/>
+              </a:rPr>
+              <a:t> </a:t>
+            </a:r>
+            <a:r>
+              <a:rPr lang="en-US" altLang="zh-CN" sz="1200" b="1" strike="noStrike" spc="-1" dirty="0">
+                <a:latin typeface="Arial"/>
+                <a:ea typeface="Arial"/>
+              </a:rPr>
+              <a:t>results</a:t>
+            </a:r>
+            <a:r>
+              <a:rPr lang="en-US" altLang="zh-CN" sz="1200" b="0" strike="noStrike" spc="-1" dirty="0">
+                <a:latin typeface="Arial"/>
+                <a:ea typeface="Arial"/>
+              </a:rPr>
+              <a:t>:</a:t>
+            </a:r>
+          </a:p>
+          <a:p>
+            <a:pPr>
+              <a:lnSpc>
+                <a:spcPct val="100000"/>
+              </a:lnSpc>
+            </a:pPr>
+            <a:r>
+              <a:rPr lang="en-US" altLang="zh-CN" sz="1200" spc="-1" dirty="0">
+                <a:latin typeface="Arial"/>
+              </a:rPr>
+              <a:t>RNN:</a:t>
+            </a:r>
+            <a:r>
+              <a:rPr lang="zh-CN" altLang="en-US" sz="1200" spc="-1" dirty="0">
+                <a:latin typeface="Arial"/>
+              </a:rPr>
+              <a:t> </a:t>
+            </a:r>
+            <a:r>
+              <a:rPr lang="en-US" sz="1200" dirty="0"/>
+              <a:t>Training Perplexity ≈ 100, Validation Perplexity ≈ </a:t>
+            </a:r>
+            <a:r>
+              <a:rPr lang="en-US" altLang="zh-CN" sz="1200" dirty="0"/>
+              <a:t>110</a:t>
+            </a:r>
+            <a:endParaRPr lang="en-US" altLang="zh-CN" sz="1200" spc="-1" dirty="0">
+              <a:latin typeface="Arial"/>
+            </a:endParaRPr>
+          </a:p>
+          <a:p>
+            <a:pPr>
+              <a:lnSpc>
+                <a:spcPct val="100000"/>
+              </a:lnSpc>
+            </a:pPr>
+            <a:r>
+              <a:rPr lang="en-US" altLang="zh-CN" sz="1200" spc="-1" dirty="0">
+                <a:latin typeface="Arial"/>
+              </a:rPr>
+              <a:t>LSTM:</a:t>
+            </a:r>
+            <a:r>
+              <a:rPr lang="zh-CN" altLang="en-US" sz="1200" spc="-1" dirty="0">
+                <a:latin typeface="Arial"/>
+              </a:rPr>
+              <a:t> </a:t>
+            </a:r>
+            <a:r>
+              <a:rPr lang="en-US" sz="1200" dirty="0"/>
+              <a:t>Training Perplexity ≈ </a:t>
+            </a:r>
+            <a:r>
+              <a:rPr lang="en-US" altLang="zh-CN" sz="1200" dirty="0"/>
+              <a:t>4.46</a:t>
+            </a:r>
+            <a:r>
+              <a:rPr lang="en-US" sz="1200" dirty="0"/>
+              <a:t>, Validation Perplexity ≈ 27.6</a:t>
+            </a:r>
+          </a:p>
+        </p:txBody>
+      </p:sp>
+      <p:sp>
+        <p:nvSpPr>
+          <p:cNvPr id="3" name="CustomShape 2">
+            <a:extLst>
+              <a:ext uri="{FF2B5EF4-FFF2-40B4-BE49-F238E27FC236}">
+                <a16:creationId xmlns:a16="http://schemas.microsoft.com/office/drawing/2014/main" id="{6847C048-F2CF-FE68-4C5A-FA5AE7B1F4D0}"/>
+              </a:ext>
+            </a:extLst>
+          </p:cNvPr>
+          <p:cNvSpPr/>
+          <p:nvPr/>
+        </p:nvSpPr>
+        <p:spPr>
+          <a:xfrm>
+            <a:off x="344160" y="1816570"/>
+            <a:ext cx="7277400" cy="600120"/>
+          </a:xfrm>
+          <a:prstGeom prst="rect">
+            <a:avLst/>
+          </a:prstGeom>
+          <a:noFill/>
+          <a:ln>
+            <a:noFill/>
+          </a:ln>
+        </p:spPr>
+        <p:style>
+          <a:lnRef idx="0">
+            <a:scrgbClr r="0" g="0" b="0"/>
+          </a:lnRef>
+          <a:fillRef idx="0">
+            <a:scrgbClr r="0" g="0" b="0"/>
+          </a:fillRef>
+          <a:effectRef idx="0">
+            <a:scrgbClr r="0" g="0" b="0"/>
+          </a:effectRef>
+          <a:fontRef idx="minor"/>
+        </p:style>
+        <p:txBody>
+          <a:bodyPr lIns="90000" tIns="45000" rIns="90000" bIns="45000"/>
+          <a:lstStyle/>
+          <a:p>
+            <a:pPr>
+              <a:lnSpc>
+                <a:spcPct val="100000"/>
+              </a:lnSpc>
+            </a:pPr>
+            <a:r>
+              <a:rPr lang="en-US" altLang="zh-CN" sz="1200" b="1" strike="noStrike" spc="-1" dirty="0">
+                <a:latin typeface="Arial"/>
+                <a:ea typeface="Arial"/>
+              </a:rPr>
+              <a:t>Observations:</a:t>
+            </a:r>
+          </a:p>
+          <a:p>
+            <a:pPr marL="228600" indent="-228600">
+              <a:lnSpc>
+                <a:spcPct val="100000"/>
+              </a:lnSpc>
+              <a:buAutoNum type="arabicPeriod"/>
+            </a:pPr>
+            <a:r>
+              <a:rPr lang="en-US" altLang="zh-CN" sz="1200" dirty="0"/>
+              <a:t>I</a:t>
+            </a:r>
+            <a:r>
+              <a:rPr lang="zh-CN" altLang="en-US" sz="1200" dirty="0"/>
+              <a:t> </a:t>
+            </a:r>
+            <a:r>
+              <a:rPr lang="en-US" altLang="zh-CN" sz="1200" dirty="0" err="1"/>
+              <a:t>summerized</a:t>
+            </a:r>
+            <a:r>
+              <a:rPr lang="zh-CN" altLang="en-US" sz="1200" dirty="0"/>
+              <a:t> </a:t>
+            </a:r>
+            <a:r>
+              <a:rPr lang="en-US" altLang="zh-CN" sz="1200" dirty="0"/>
+              <a:t>the</a:t>
+            </a:r>
+            <a:r>
+              <a:rPr lang="zh-CN" altLang="en-US" sz="1200" dirty="0"/>
+              <a:t> </a:t>
+            </a:r>
+            <a:r>
+              <a:rPr lang="en-US" altLang="zh-CN" sz="1200" dirty="0"/>
+              <a:t>differences</a:t>
+            </a:r>
+            <a:r>
+              <a:rPr lang="zh-CN" altLang="en-US" sz="1200" dirty="0"/>
+              <a:t> </a:t>
+            </a:r>
+            <a:r>
+              <a:rPr lang="en-US" altLang="zh-CN" sz="1200" dirty="0"/>
+              <a:t>in</a:t>
+            </a:r>
+            <a:r>
+              <a:rPr lang="zh-CN" altLang="en-US" sz="1200" dirty="0"/>
+              <a:t> </a:t>
+            </a:r>
+            <a:r>
+              <a:rPr lang="en-US" altLang="zh-CN" sz="1200" dirty="0"/>
+              <a:t>four</a:t>
+            </a:r>
+            <a:r>
+              <a:rPr lang="zh-CN" altLang="en-US" sz="1200" dirty="0"/>
+              <a:t> </a:t>
+            </a:r>
+            <a:r>
+              <a:rPr lang="en-US" altLang="zh-CN" sz="1200" dirty="0"/>
+              <a:t>metrics:</a:t>
+            </a:r>
+            <a:r>
+              <a:rPr lang="zh-CN" altLang="en-US" sz="1200" dirty="0"/>
+              <a:t> </a:t>
+            </a:r>
+            <a:endParaRPr lang="en-US" altLang="zh-CN" sz="1200" dirty="0"/>
+          </a:p>
+          <a:p>
+            <a:pPr marL="171450" indent="-171450">
+              <a:lnSpc>
+                <a:spcPct val="100000"/>
+              </a:lnSpc>
+              <a:buFont typeface="Arial" panose="020B0604020202020204" pitchFamily="34" charset="0"/>
+              <a:buChar char="•"/>
+            </a:pPr>
+            <a:r>
+              <a:rPr lang="en-US" altLang="zh-CN" sz="1200" strike="noStrike" spc="-1" dirty="0">
+                <a:latin typeface="Arial"/>
+                <a:ea typeface="Arial"/>
+              </a:rPr>
+              <a:t>Training</a:t>
+            </a:r>
+            <a:r>
+              <a:rPr lang="zh-CN" altLang="en-US" sz="1200" strike="noStrike" spc="-1" dirty="0">
+                <a:latin typeface="Arial"/>
+                <a:ea typeface="Arial"/>
+              </a:rPr>
+              <a:t> </a:t>
+            </a:r>
+            <a:r>
+              <a:rPr lang="en-US" altLang="zh-CN" sz="1200" strike="noStrike" spc="-1" dirty="0">
+                <a:latin typeface="Arial"/>
+                <a:ea typeface="Arial"/>
+              </a:rPr>
+              <a:t>loss:</a:t>
+            </a:r>
+            <a:r>
+              <a:rPr lang="en-US" sz="1200" dirty="0"/>
+              <a:t> LSTM learns faster and fits data better</a:t>
+            </a:r>
+          </a:p>
+          <a:p>
+            <a:pPr marL="171450" indent="-171450">
+              <a:lnSpc>
+                <a:spcPct val="100000"/>
+              </a:lnSpc>
+              <a:buFont typeface="Arial" panose="020B0604020202020204" pitchFamily="34" charset="0"/>
+              <a:buChar char="•"/>
+            </a:pPr>
+            <a:r>
+              <a:rPr lang="en-US" altLang="zh-CN" sz="1200" strike="noStrike" spc="-1" dirty="0">
+                <a:latin typeface="Arial"/>
+                <a:ea typeface="Arial"/>
+              </a:rPr>
+              <a:t>Training</a:t>
+            </a:r>
+            <a:r>
+              <a:rPr lang="zh-CN" altLang="en-US" sz="1200" strike="noStrike" spc="-1" dirty="0">
+                <a:latin typeface="Arial"/>
+                <a:ea typeface="Arial"/>
+              </a:rPr>
+              <a:t> </a:t>
+            </a:r>
+            <a:r>
+              <a:rPr lang="en-US" altLang="zh-CN" sz="1200" strike="noStrike" spc="-1" dirty="0">
+                <a:latin typeface="Arial"/>
+                <a:ea typeface="Arial"/>
+              </a:rPr>
+              <a:t>Perplexity:</a:t>
+            </a:r>
+            <a:r>
+              <a:rPr lang="zh-CN" altLang="en-US" sz="1200" strike="noStrike" spc="-1" dirty="0">
+                <a:latin typeface="Arial"/>
+                <a:ea typeface="Arial"/>
+              </a:rPr>
+              <a:t> </a:t>
+            </a:r>
+            <a:r>
+              <a:rPr lang="en-US" altLang="zh-CN" sz="1200" strike="noStrike" spc="-1" dirty="0">
+                <a:latin typeface="Arial"/>
+                <a:ea typeface="Arial"/>
+              </a:rPr>
+              <a:t>LSTM</a:t>
+            </a:r>
+            <a:r>
+              <a:rPr lang="zh-CN" altLang="en-US" sz="1200" strike="noStrike" spc="-1" dirty="0">
+                <a:latin typeface="Arial"/>
+                <a:ea typeface="Arial"/>
+              </a:rPr>
+              <a:t> </a:t>
+            </a:r>
+            <a:r>
+              <a:rPr lang="en-US" altLang="zh-CN" sz="1200" strike="noStrike" spc="-1" dirty="0">
+                <a:latin typeface="Arial"/>
+                <a:ea typeface="Arial"/>
+              </a:rPr>
+              <a:t>outperforms</a:t>
+            </a:r>
+            <a:r>
+              <a:rPr lang="zh-CN" altLang="en-US" sz="1200" strike="noStrike" spc="-1" dirty="0">
+                <a:latin typeface="Arial"/>
+                <a:ea typeface="Arial"/>
+              </a:rPr>
+              <a:t> </a:t>
+            </a:r>
+            <a:r>
+              <a:rPr lang="en-US" altLang="zh-CN" sz="1200" strike="noStrike" spc="-1" dirty="0">
+                <a:latin typeface="Arial"/>
+                <a:ea typeface="Arial"/>
+              </a:rPr>
+              <a:t>RNN</a:t>
+            </a:r>
+            <a:r>
+              <a:rPr lang="zh-CN" altLang="en-US" sz="1200" strike="noStrike" spc="-1" dirty="0">
+                <a:latin typeface="Arial"/>
+                <a:ea typeface="Arial"/>
+              </a:rPr>
+              <a:t> </a:t>
+            </a:r>
+            <a:r>
+              <a:rPr lang="en-US" altLang="zh-CN" sz="1200" strike="noStrike" spc="-1" dirty="0">
+                <a:latin typeface="Arial"/>
+                <a:ea typeface="Arial"/>
+              </a:rPr>
+              <a:t>in</a:t>
+            </a:r>
+            <a:r>
+              <a:rPr lang="zh-CN" altLang="en-US" sz="1200" strike="noStrike" spc="-1" dirty="0">
+                <a:latin typeface="Arial"/>
+                <a:ea typeface="Arial"/>
+              </a:rPr>
+              <a:t> </a:t>
+            </a:r>
+            <a:r>
+              <a:rPr lang="en-US" altLang="zh-CN" sz="1200" strike="noStrike" spc="-1" dirty="0">
+                <a:latin typeface="Arial"/>
+                <a:ea typeface="Arial"/>
+              </a:rPr>
+              <a:t>prediction</a:t>
+            </a:r>
+            <a:r>
+              <a:rPr lang="en-US" altLang="zh-CN" sz="1200" spc="-1" dirty="0">
+                <a:latin typeface="Arial"/>
+                <a:ea typeface="Arial"/>
+              </a:rPr>
+              <a:t>.</a:t>
+            </a:r>
+          </a:p>
+          <a:p>
+            <a:pPr marL="171450" indent="-171450">
+              <a:lnSpc>
+                <a:spcPct val="100000"/>
+              </a:lnSpc>
+              <a:buFont typeface="Arial" panose="020B0604020202020204" pitchFamily="34" charset="0"/>
+              <a:buChar char="•"/>
+            </a:pPr>
+            <a:r>
+              <a:rPr lang="en-US" altLang="zh-CN" sz="1200" strike="noStrike" spc="-1" dirty="0">
+                <a:latin typeface="Arial"/>
+                <a:ea typeface="Arial"/>
+              </a:rPr>
+              <a:t>Validation</a:t>
+            </a:r>
+            <a:r>
+              <a:rPr lang="zh-CN" altLang="en-US" sz="1200" strike="noStrike" spc="-1" dirty="0">
+                <a:latin typeface="Arial"/>
+                <a:ea typeface="Arial"/>
+              </a:rPr>
+              <a:t> </a:t>
+            </a:r>
+            <a:r>
+              <a:rPr lang="en-US" altLang="zh-CN" sz="1200" spc="-1" dirty="0">
+                <a:latin typeface="Arial"/>
+                <a:ea typeface="Arial"/>
+              </a:rPr>
+              <a:t>Loss:</a:t>
+            </a:r>
+            <a:r>
+              <a:rPr lang="zh-CN" altLang="en-US" sz="1200" spc="-1" dirty="0">
+                <a:latin typeface="Arial"/>
+                <a:ea typeface="Arial"/>
+              </a:rPr>
+              <a:t> </a:t>
+            </a:r>
+            <a:r>
+              <a:rPr lang="en-US" altLang="zh-CN" sz="1200" strike="noStrike" spc="-1" dirty="0">
+                <a:latin typeface="Arial"/>
+                <a:ea typeface="Arial"/>
+              </a:rPr>
+              <a:t>LSTM</a:t>
+            </a:r>
+            <a:r>
+              <a:rPr lang="zh-CN" altLang="en-US" sz="1200" strike="noStrike" spc="-1" dirty="0">
+                <a:latin typeface="Arial"/>
+                <a:ea typeface="Arial"/>
+              </a:rPr>
+              <a:t> </a:t>
+            </a:r>
+            <a:r>
+              <a:rPr lang="en-US" altLang="zh-CN" sz="1200" strike="noStrike" spc="-1" dirty="0">
+                <a:latin typeface="Arial"/>
+                <a:ea typeface="Arial"/>
+              </a:rPr>
+              <a:t>generalize</a:t>
+            </a:r>
+            <a:r>
+              <a:rPr lang="zh-CN" altLang="en-US" sz="1200" strike="noStrike" spc="-1" dirty="0">
+                <a:latin typeface="Arial"/>
+                <a:ea typeface="Arial"/>
+              </a:rPr>
+              <a:t> </a:t>
+            </a:r>
+            <a:r>
+              <a:rPr lang="en-US" altLang="zh-CN" sz="1200" strike="noStrike" spc="-1" dirty="0">
+                <a:latin typeface="Arial"/>
+                <a:ea typeface="Arial"/>
+              </a:rPr>
+              <a:t>better</a:t>
+            </a:r>
+            <a:r>
+              <a:rPr lang="zh-CN" altLang="en-US" sz="1200" strike="noStrike" spc="-1" dirty="0">
+                <a:latin typeface="Arial"/>
+                <a:ea typeface="Arial"/>
+              </a:rPr>
+              <a:t> </a:t>
+            </a:r>
+            <a:r>
+              <a:rPr lang="en-US" altLang="zh-CN" sz="1200" strike="noStrike" spc="-1" dirty="0">
+                <a:latin typeface="Arial"/>
+                <a:ea typeface="Arial"/>
+              </a:rPr>
+              <a:t>than</a:t>
+            </a:r>
+            <a:r>
+              <a:rPr lang="zh-CN" altLang="en-US" sz="1200" strike="noStrike" spc="-1" dirty="0">
+                <a:latin typeface="Arial"/>
+                <a:ea typeface="Arial"/>
+              </a:rPr>
+              <a:t> </a:t>
+            </a:r>
+            <a:r>
+              <a:rPr lang="en-US" altLang="zh-CN" sz="1200" strike="noStrike" spc="-1" dirty="0">
+                <a:latin typeface="Arial"/>
+                <a:ea typeface="Arial"/>
+              </a:rPr>
+              <a:t>RNN</a:t>
+            </a:r>
+            <a:endParaRPr lang="en-US" altLang="zh-CN" sz="1200" spc="-1" dirty="0">
+              <a:latin typeface="Arial"/>
+              <a:ea typeface="Arial"/>
+            </a:endParaRPr>
+          </a:p>
+          <a:p>
+            <a:pPr marL="171450" indent="-171450">
+              <a:lnSpc>
+                <a:spcPct val="100000"/>
+              </a:lnSpc>
+              <a:buFont typeface="Arial" panose="020B0604020202020204" pitchFamily="34" charset="0"/>
+              <a:buChar char="•"/>
+            </a:pPr>
+            <a:r>
+              <a:rPr lang="en-US" altLang="zh-CN" sz="1200" strike="noStrike" spc="-1" dirty="0">
+                <a:latin typeface="Arial"/>
+                <a:ea typeface="Arial"/>
+              </a:rPr>
+              <a:t>Validation</a:t>
+            </a:r>
+            <a:r>
+              <a:rPr lang="zh-CN" altLang="en-US" sz="1200" strike="noStrike" spc="-1" dirty="0">
+                <a:latin typeface="Arial"/>
+                <a:ea typeface="Arial"/>
+              </a:rPr>
+              <a:t> </a:t>
+            </a:r>
+            <a:r>
+              <a:rPr lang="en-US" altLang="zh-CN" sz="1200" strike="noStrike" spc="-1" dirty="0">
+                <a:latin typeface="Arial"/>
+                <a:ea typeface="Arial"/>
+              </a:rPr>
+              <a:t>Perplexity:</a:t>
+            </a:r>
+            <a:r>
+              <a:rPr lang="zh-CN" altLang="en-US" sz="1200" strike="noStrike" spc="-1" dirty="0">
+                <a:latin typeface="Arial"/>
+                <a:ea typeface="Arial"/>
+              </a:rPr>
+              <a:t> </a:t>
+            </a:r>
+            <a:r>
+              <a:rPr lang="en-US" altLang="zh-CN" sz="1200" strike="noStrike" spc="-1" dirty="0">
+                <a:latin typeface="Arial"/>
+                <a:ea typeface="Arial"/>
+              </a:rPr>
+              <a:t>LSTM</a:t>
+            </a:r>
+            <a:r>
+              <a:rPr lang="zh-CN" altLang="en-US" sz="1200" strike="noStrike" spc="-1" dirty="0">
+                <a:latin typeface="Arial"/>
+                <a:ea typeface="Arial"/>
+              </a:rPr>
+              <a:t> </a:t>
+            </a:r>
+            <a:r>
+              <a:rPr lang="en-US" altLang="zh-CN" sz="1200" strike="noStrike" spc="-1" dirty="0">
+                <a:latin typeface="Arial"/>
+                <a:ea typeface="Arial"/>
+              </a:rPr>
+              <a:t>has</a:t>
+            </a:r>
+            <a:r>
+              <a:rPr lang="zh-CN" altLang="en-US" sz="1200" strike="noStrike" spc="-1" dirty="0">
+                <a:latin typeface="Arial"/>
+                <a:ea typeface="Arial"/>
+              </a:rPr>
+              <a:t> </a:t>
+            </a:r>
+            <a:r>
+              <a:rPr lang="en-US" altLang="zh-CN" sz="1200" strike="noStrike" spc="-1" dirty="0">
+                <a:latin typeface="Arial"/>
+                <a:ea typeface="Arial"/>
+              </a:rPr>
+              <a:t>lower</a:t>
+            </a:r>
+            <a:r>
+              <a:rPr lang="zh-CN" altLang="en-US" sz="1200" strike="noStrike" spc="-1" dirty="0">
+                <a:latin typeface="Arial"/>
+                <a:ea typeface="Arial"/>
+              </a:rPr>
+              <a:t> </a:t>
+            </a:r>
+            <a:r>
+              <a:rPr lang="en-US" altLang="zh-CN" sz="1200" strike="noStrike" spc="-1" dirty="0">
+                <a:latin typeface="Arial"/>
+                <a:ea typeface="Arial"/>
+              </a:rPr>
+              <a:t>uncertainty</a:t>
+            </a:r>
+            <a:r>
+              <a:rPr lang="zh-CN" altLang="en-US" sz="1200" strike="noStrike" spc="-1" dirty="0">
+                <a:latin typeface="Arial"/>
+                <a:ea typeface="Arial"/>
+              </a:rPr>
+              <a:t> </a:t>
+            </a:r>
+            <a:r>
+              <a:rPr lang="en-US" altLang="zh-CN" sz="1200" spc="-1" dirty="0">
+                <a:latin typeface="Arial"/>
+                <a:ea typeface="Arial"/>
+              </a:rPr>
+              <a:t>on</a:t>
+            </a:r>
+            <a:r>
+              <a:rPr lang="zh-CN" altLang="en-US" sz="1200" spc="-1" dirty="0">
+                <a:latin typeface="Arial"/>
+                <a:ea typeface="Arial"/>
+              </a:rPr>
+              <a:t> </a:t>
+            </a:r>
+            <a:r>
+              <a:rPr lang="en-US" altLang="zh-CN" sz="1200" spc="-1" dirty="0">
+                <a:latin typeface="Arial"/>
+                <a:ea typeface="Arial"/>
+              </a:rPr>
+              <a:t>unseen</a:t>
+            </a:r>
+            <a:r>
+              <a:rPr lang="zh-CN" altLang="en-US" sz="1200" spc="-1" dirty="0">
+                <a:latin typeface="Arial"/>
+                <a:ea typeface="Arial"/>
+              </a:rPr>
+              <a:t> </a:t>
+            </a:r>
+            <a:r>
+              <a:rPr lang="en-US" altLang="zh-CN" sz="1200" spc="-1" dirty="0">
+                <a:latin typeface="Arial"/>
+                <a:ea typeface="Arial"/>
+              </a:rPr>
+              <a:t>data</a:t>
+            </a:r>
+          </a:p>
+          <a:p>
+            <a:pPr>
+              <a:lnSpc>
+                <a:spcPct val="100000"/>
+              </a:lnSpc>
+            </a:pPr>
+            <a:endParaRPr lang="en-US" altLang="zh-CN" sz="1200" strike="noStrike" spc="-1" dirty="0">
+              <a:latin typeface="Arial"/>
+              <a:ea typeface="Arial"/>
+            </a:endParaRPr>
+          </a:p>
+          <a:p>
+            <a:pPr>
+              <a:lnSpc>
+                <a:spcPct val="100000"/>
+              </a:lnSpc>
+            </a:pPr>
+            <a:r>
+              <a:rPr lang="en-US" altLang="zh-CN" sz="1200" b="1" strike="noStrike" spc="-1" dirty="0">
+                <a:latin typeface="Arial"/>
+                <a:ea typeface="Arial"/>
+              </a:rPr>
+              <a:t>Explanation of difference:</a:t>
+            </a:r>
+          </a:p>
+          <a:p>
+            <a:pPr marL="228600" indent="-228600">
+              <a:buFontTx/>
+              <a:buAutoNum type="arabicPeriod"/>
+            </a:pPr>
+            <a:r>
+              <a:rPr lang="en-US" altLang="zh-CN" sz="1200" spc="-1" dirty="0">
+                <a:latin typeface="Arial"/>
+              </a:rPr>
+              <a:t>RNN</a:t>
+            </a:r>
+            <a:r>
+              <a:rPr lang="zh-CN" altLang="en-US" sz="1200" spc="-1" dirty="0">
+                <a:latin typeface="Arial"/>
+              </a:rPr>
+              <a:t> </a:t>
+            </a:r>
+            <a:r>
+              <a:rPr lang="en-US" altLang="zh-CN" sz="1200" spc="-1" dirty="0">
+                <a:latin typeface="Arial"/>
+              </a:rPr>
+              <a:t>forgets</a:t>
+            </a:r>
+            <a:r>
+              <a:rPr lang="zh-CN" altLang="en-US" sz="1200" spc="-1" dirty="0">
+                <a:latin typeface="Arial"/>
+              </a:rPr>
+              <a:t> </a:t>
+            </a:r>
+            <a:r>
+              <a:rPr lang="en-US" altLang="zh-CN" sz="1200" spc="-1" dirty="0">
+                <a:latin typeface="Arial"/>
+              </a:rPr>
+              <a:t>earlier</a:t>
+            </a:r>
+            <a:r>
+              <a:rPr lang="zh-CN" altLang="en-US" sz="1200" spc="-1" dirty="0">
+                <a:latin typeface="Arial"/>
+              </a:rPr>
+              <a:t> </a:t>
+            </a:r>
+            <a:r>
+              <a:rPr lang="en-US" altLang="zh-CN" sz="1200" spc="-1" dirty="0">
+                <a:latin typeface="Arial"/>
+              </a:rPr>
+              <a:t>token</a:t>
+            </a:r>
+            <a:r>
+              <a:rPr lang="zh-CN" altLang="en-US" sz="1200" spc="-1" dirty="0">
+                <a:latin typeface="Arial"/>
+              </a:rPr>
+              <a:t> </a:t>
+            </a:r>
+            <a:r>
+              <a:rPr lang="en-US" altLang="zh-CN" sz="1200" spc="-1" dirty="0">
+                <a:latin typeface="Arial"/>
+              </a:rPr>
+              <a:t>quickly</a:t>
+            </a:r>
+            <a:r>
+              <a:rPr lang="zh-CN" altLang="en-US" sz="1200" spc="-1" dirty="0">
+                <a:latin typeface="Arial"/>
+              </a:rPr>
+              <a:t> </a:t>
+            </a:r>
+            <a:r>
+              <a:rPr lang="en-US" altLang="zh-CN" sz="1200" spc="-1" dirty="0">
+                <a:latin typeface="Arial"/>
+              </a:rPr>
+              <a:t>due</a:t>
+            </a:r>
+            <a:r>
+              <a:rPr lang="zh-CN" altLang="en-US" sz="1200" spc="-1" dirty="0">
+                <a:latin typeface="Arial"/>
+              </a:rPr>
+              <a:t> </a:t>
+            </a:r>
+            <a:r>
+              <a:rPr lang="en-US" altLang="zh-CN" sz="1200" spc="-1" dirty="0">
+                <a:latin typeface="Arial"/>
+              </a:rPr>
+              <a:t>to</a:t>
+            </a:r>
+            <a:r>
+              <a:rPr lang="zh-CN" altLang="en-US" sz="1200" spc="-1" dirty="0">
+                <a:latin typeface="Arial"/>
+              </a:rPr>
+              <a:t> </a:t>
+            </a:r>
+            <a:r>
+              <a:rPr lang="en-US" altLang="zh-CN" sz="1200" spc="-1" dirty="0">
+                <a:latin typeface="Arial"/>
+              </a:rPr>
+              <a:t>the</a:t>
+            </a:r>
+            <a:r>
+              <a:rPr lang="zh-CN" altLang="en-US" sz="1200" spc="-1" dirty="0">
+                <a:latin typeface="Arial"/>
+              </a:rPr>
+              <a:t> </a:t>
+            </a:r>
+            <a:r>
+              <a:rPr lang="en-US" altLang="zh-CN" sz="1200" b="1" spc="-1" dirty="0">
+                <a:latin typeface="Arial"/>
+              </a:rPr>
+              <a:t>vanishing</a:t>
+            </a:r>
+            <a:r>
+              <a:rPr lang="zh-CN" altLang="en-US" sz="1200" b="1" spc="-1" dirty="0">
+                <a:latin typeface="Arial"/>
+              </a:rPr>
+              <a:t> </a:t>
+            </a:r>
+            <a:r>
+              <a:rPr lang="en-US" altLang="zh-CN" sz="1200" b="1" spc="-1" dirty="0">
+                <a:latin typeface="Arial"/>
+              </a:rPr>
+              <a:t>gradient</a:t>
+            </a:r>
+            <a:r>
+              <a:rPr lang="zh-CN" altLang="en-US" sz="1200" b="1" spc="-1" dirty="0">
+                <a:latin typeface="Arial"/>
+              </a:rPr>
+              <a:t> </a:t>
+            </a:r>
+            <a:r>
+              <a:rPr lang="en-US" altLang="zh-CN" sz="1200" spc="-1" dirty="0">
+                <a:latin typeface="Arial"/>
+              </a:rPr>
+              <a:t>problem,</a:t>
+            </a:r>
+            <a:r>
+              <a:rPr lang="zh-CN" altLang="en-US" sz="1200" spc="-1" dirty="0">
+                <a:latin typeface="Arial"/>
+              </a:rPr>
+              <a:t> </a:t>
+            </a:r>
+            <a:r>
+              <a:rPr lang="en-US" altLang="zh-CN" sz="1200" spc="-1" dirty="0">
+                <a:latin typeface="Arial"/>
+              </a:rPr>
+              <a:t>while</a:t>
+            </a:r>
+            <a:r>
+              <a:rPr lang="zh-CN" altLang="en-US" sz="1200" spc="-1" dirty="0">
+                <a:latin typeface="Arial"/>
+              </a:rPr>
+              <a:t> </a:t>
+            </a:r>
+            <a:r>
+              <a:rPr lang="en-US" altLang="zh-CN" sz="1200" spc="-1" dirty="0">
+                <a:latin typeface="Arial"/>
+              </a:rPr>
+              <a:t>LSTM</a:t>
+            </a:r>
+            <a:r>
+              <a:rPr lang="zh-CN" altLang="en-US" sz="1200" spc="-1" dirty="0">
+                <a:latin typeface="Arial"/>
+              </a:rPr>
+              <a:t> </a:t>
+            </a:r>
+            <a:r>
+              <a:rPr lang="en-US" altLang="zh-CN" sz="1200" spc="-1" dirty="0">
+                <a:latin typeface="Arial"/>
+              </a:rPr>
+              <a:t>selectively</a:t>
+            </a:r>
+            <a:r>
+              <a:rPr lang="zh-CN" altLang="en-US" sz="1200" spc="-1" dirty="0">
+                <a:latin typeface="Arial"/>
+              </a:rPr>
+              <a:t> </a:t>
+            </a:r>
+            <a:r>
+              <a:rPr lang="en-US" altLang="zh-CN" sz="1200" spc="-1" dirty="0">
+                <a:latin typeface="Arial"/>
+              </a:rPr>
+              <a:t>remembers</a:t>
+            </a:r>
+            <a:r>
+              <a:rPr lang="zh-CN" altLang="en-US" sz="1200" spc="-1" dirty="0">
+                <a:latin typeface="Arial"/>
+              </a:rPr>
+              <a:t> </a:t>
+            </a:r>
+            <a:r>
+              <a:rPr lang="en-US" altLang="zh-CN" sz="1200" spc="-1" dirty="0">
+                <a:latin typeface="Arial"/>
+              </a:rPr>
+              <a:t>over</a:t>
+            </a:r>
+            <a:r>
+              <a:rPr lang="zh-CN" altLang="en-US" sz="1200" b="1" spc="-1" dirty="0">
+                <a:latin typeface="Arial"/>
+              </a:rPr>
+              <a:t> </a:t>
+            </a:r>
+            <a:r>
+              <a:rPr lang="en-US" altLang="zh-CN" sz="1200" b="1" spc="-1" dirty="0">
+                <a:latin typeface="Arial"/>
+              </a:rPr>
+              <a:t>long</a:t>
+            </a:r>
+            <a:r>
+              <a:rPr lang="zh-CN" altLang="en-US" sz="1200" b="1" spc="-1" dirty="0">
+                <a:latin typeface="Arial"/>
+              </a:rPr>
+              <a:t> </a:t>
+            </a:r>
+            <a:r>
+              <a:rPr lang="en-US" altLang="zh-CN" sz="1200" b="1" spc="-1" dirty="0">
+                <a:latin typeface="Arial"/>
+              </a:rPr>
+              <a:t>sequence</a:t>
+            </a:r>
+            <a:r>
+              <a:rPr lang="zh-CN" altLang="en-US" sz="1200" b="1" spc="-1" dirty="0">
+                <a:latin typeface="Arial"/>
+              </a:rPr>
+              <a:t> </a:t>
+            </a:r>
+            <a:r>
+              <a:rPr lang="en-US" altLang="zh-CN" sz="1200" b="1" spc="-1" dirty="0">
+                <a:latin typeface="Arial"/>
+              </a:rPr>
+              <a:t>dependencies</a:t>
+            </a:r>
+            <a:r>
+              <a:rPr lang="zh-CN" altLang="en-US" sz="1200" spc="-1" dirty="0">
+                <a:latin typeface="Arial"/>
+              </a:rPr>
+              <a:t> </a:t>
+            </a:r>
+            <a:r>
+              <a:rPr lang="en-US" altLang="zh-CN" sz="1200" spc="-1" dirty="0">
+                <a:latin typeface="Arial"/>
+              </a:rPr>
+              <a:t>(</a:t>
+            </a:r>
+            <a:r>
+              <a:rPr lang="zh-CN" altLang="en-US" sz="1200" spc="-1" dirty="0">
+                <a:latin typeface="Arial"/>
+              </a:rPr>
+              <a:t> </a:t>
+            </a:r>
+            <a:r>
+              <a:rPr lang="en-US" altLang="zh-CN" sz="1200" spc="-1" dirty="0">
+                <a:latin typeface="Arial"/>
+              </a:rPr>
+              <a:t>it</a:t>
+            </a:r>
+            <a:r>
+              <a:rPr lang="zh-CN" altLang="en-US" sz="1200" spc="-1" dirty="0">
+                <a:latin typeface="Arial"/>
+              </a:rPr>
+              <a:t> </a:t>
+            </a:r>
+            <a:r>
+              <a:rPr lang="en-US" altLang="zh-CN" sz="1200" spc="-1" dirty="0">
+                <a:latin typeface="Arial"/>
+              </a:rPr>
+              <a:t>has</a:t>
+            </a:r>
+            <a:r>
+              <a:rPr lang="zh-CN" altLang="en-US" sz="1200" spc="-1" dirty="0">
+                <a:latin typeface="Arial"/>
+              </a:rPr>
+              <a:t> </a:t>
+            </a:r>
+            <a:r>
+              <a:rPr lang="en-US" altLang="zh-CN" sz="1200" spc="-1" dirty="0">
+                <a:latin typeface="Arial"/>
+              </a:rPr>
+              <a:t>a</a:t>
+            </a:r>
+            <a:r>
+              <a:rPr lang="zh-CN" altLang="en-US" sz="1200" spc="-1" dirty="0">
+                <a:latin typeface="Arial"/>
+              </a:rPr>
+              <a:t> </a:t>
+            </a:r>
+            <a:r>
+              <a:rPr lang="en-US" altLang="zh-CN" sz="1200" b="1" strike="noStrike" spc="-1" dirty="0">
+                <a:latin typeface="Arial"/>
+              </a:rPr>
+              <a:t>LSTM</a:t>
+            </a:r>
+            <a:r>
+              <a:rPr lang="zh-CN" altLang="en-US" sz="1200" b="1" strike="noStrike" spc="-1" dirty="0">
+                <a:latin typeface="Arial"/>
+              </a:rPr>
+              <a:t> </a:t>
+            </a:r>
+            <a:r>
+              <a:rPr lang="en-US" altLang="zh-CN" sz="1200" b="1" strike="noStrike" spc="-1" dirty="0">
+                <a:latin typeface="Arial"/>
+              </a:rPr>
+              <a:t>Memory</a:t>
+            </a:r>
+            <a:r>
+              <a:rPr lang="zh-CN" altLang="en-US" sz="1200" b="1" strike="noStrike" spc="-1" dirty="0">
+                <a:latin typeface="Arial"/>
+              </a:rPr>
+              <a:t> </a:t>
+            </a:r>
+            <a:r>
+              <a:rPr lang="en-US" altLang="zh-CN" sz="1200" b="1" strike="noStrike" spc="-1" dirty="0">
+                <a:latin typeface="Arial"/>
+              </a:rPr>
+              <a:t>Mechanism</a:t>
+            </a:r>
+            <a:r>
+              <a:rPr lang="zh-CN" altLang="en-US" sz="1200" b="1" strike="noStrike" spc="-1" dirty="0">
+                <a:latin typeface="Arial"/>
+              </a:rPr>
+              <a:t> </a:t>
+            </a:r>
+            <a:r>
+              <a:rPr lang="en-US" altLang="zh-CN" sz="1200" b="1" strike="noStrike" spc="-1" dirty="0">
+                <a:latin typeface="Arial"/>
+              </a:rPr>
+              <a:t>of</a:t>
+            </a:r>
+            <a:r>
+              <a:rPr lang="zh-CN" altLang="en-US" sz="1200" b="1" strike="noStrike" spc="-1" dirty="0">
+                <a:latin typeface="Arial"/>
+              </a:rPr>
+              <a:t> </a:t>
+            </a:r>
+            <a:r>
+              <a:rPr lang="en-US" sz="1200" dirty="0"/>
+              <a:t>us</a:t>
+            </a:r>
+            <a:r>
+              <a:rPr lang="en-US" altLang="zh-CN" sz="1200" dirty="0"/>
+              <a:t>ing</a:t>
+            </a:r>
+            <a:r>
+              <a:rPr lang="zh-CN" altLang="en-US" sz="1200" dirty="0"/>
+              <a:t> </a:t>
+            </a:r>
+            <a:r>
+              <a:rPr lang="en-US" sz="1200" dirty="0"/>
+              <a:t>gates (input, forget, output) to control flow of information</a:t>
+            </a:r>
+            <a:r>
+              <a:rPr lang="zh-CN" altLang="en-US" sz="1200" dirty="0"/>
+              <a:t> </a:t>
+            </a:r>
+            <a:r>
+              <a:rPr lang="en-US" altLang="zh-CN" sz="1200" b="0" strike="noStrike" spc="-1" dirty="0">
+                <a:latin typeface="Arial"/>
+              </a:rPr>
+              <a:t>I</a:t>
+            </a:r>
+            <a:r>
+              <a:rPr lang="en-US" altLang="zh-CN" sz="1200" spc="-1" dirty="0">
+                <a:latin typeface="Arial"/>
+              </a:rPr>
+              <a:t>n</a:t>
+            </a:r>
+            <a:r>
+              <a:rPr lang="zh-CN" altLang="en-US" sz="1200" spc="-1" dirty="0">
+                <a:latin typeface="Arial"/>
+              </a:rPr>
+              <a:t> </a:t>
+            </a:r>
+            <a:r>
+              <a:rPr lang="en-US" altLang="zh-CN" sz="1200" spc="-1" dirty="0">
+                <a:latin typeface="Arial"/>
+              </a:rPr>
+              <a:t>the</a:t>
+            </a:r>
+            <a:r>
+              <a:rPr lang="zh-CN" altLang="en-US" sz="1200" spc="-1" dirty="0">
+                <a:latin typeface="Arial"/>
+              </a:rPr>
+              <a:t> </a:t>
+            </a:r>
+            <a:r>
+              <a:rPr lang="en-US" altLang="zh-CN" sz="1200" spc="-1" dirty="0">
+                <a:latin typeface="Arial"/>
+              </a:rPr>
+              <a:t>task</a:t>
+            </a:r>
+            <a:r>
+              <a:rPr lang="zh-CN" altLang="en-US" sz="1200" spc="-1" dirty="0">
+                <a:latin typeface="Arial"/>
+              </a:rPr>
+              <a:t> </a:t>
+            </a:r>
+            <a:r>
+              <a:rPr lang="en-US" altLang="zh-CN" sz="1200" spc="-1" dirty="0">
+                <a:latin typeface="Arial"/>
+              </a:rPr>
+              <a:t>like</a:t>
+            </a:r>
+            <a:r>
+              <a:rPr lang="zh-CN" altLang="en-US" sz="1200" spc="-1" dirty="0">
+                <a:latin typeface="Arial"/>
+              </a:rPr>
+              <a:t> </a:t>
+            </a:r>
+            <a:r>
+              <a:rPr lang="en-US" altLang="zh-CN" sz="1200" spc="-1" dirty="0">
+                <a:latin typeface="Arial"/>
+              </a:rPr>
+              <a:t>seq2seq</a:t>
+            </a:r>
+            <a:r>
+              <a:rPr lang="zh-CN" altLang="en-US" sz="1200" spc="-1" dirty="0">
+                <a:latin typeface="Arial"/>
+              </a:rPr>
+              <a:t> </a:t>
+            </a:r>
+            <a:r>
+              <a:rPr lang="en-US" altLang="zh-CN" sz="1200" spc="-1" dirty="0">
+                <a:latin typeface="Arial"/>
+              </a:rPr>
+              <a:t>(translation)</a:t>
+            </a:r>
+            <a:r>
+              <a:rPr lang="zh-CN" altLang="en-US" sz="1200" spc="-1" dirty="0">
+                <a:latin typeface="Arial"/>
+              </a:rPr>
+              <a:t> </a:t>
+            </a:r>
+            <a:r>
+              <a:rPr lang="en-US" altLang="zh-CN" sz="1200" spc="-1" dirty="0">
+                <a:latin typeface="Arial"/>
+                <a:sym typeface="Wingdings" pitchFamily="2" charset="2"/>
+              </a:rPr>
+              <a:t></a:t>
+            </a:r>
+            <a:r>
+              <a:rPr lang="zh-CN" altLang="en-US" sz="1200" spc="-1" dirty="0">
+                <a:latin typeface="Arial"/>
+                <a:sym typeface="Wingdings" pitchFamily="2" charset="2"/>
+              </a:rPr>
+              <a:t> </a:t>
+            </a:r>
+            <a:r>
+              <a:rPr lang="en-US" altLang="zh-CN" sz="1200" spc="-1" dirty="0">
+                <a:latin typeface="Arial"/>
+                <a:sym typeface="Wingdings" pitchFamily="2" charset="2"/>
+              </a:rPr>
+              <a:t>thus</a:t>
+            </a:r>
+            <a:r>
+              <a:rPr lang="zh-CN" altLang="en-US" sz="1200" spc="-1" dirty="0">
+                <a:latin typeface="Arial"/>
+                <a:sym typeface="Wingdings" pitchFamily="2" charset="2"/>
+              </a:rPr>
+              <a:t> </a:t>
+            </a:r>
+            <a:r>
+              <a:rPr lang="en-US" altLang="zh-CN" sz="1200" spc="-1" dirty="0">
+                <a:latin typeface="Arial"/>
+                <a:sym typeface="Wingdings" pitchFamily="2" charset="2"/>
+              </a:rPr>
+              <a:t>LSTM</a:t>
+            </a:r>
+            <a:r>
+              <a:rPr lang="zh-CN" altLang="en-US" sz="1200" spc="-1" dirty="0">
+                <a:latin typeface="Arial"/>
+                <a:sym typeface="Wingdings" pitchFamily="2" charset="2"/>
+              </a:rPr>
+              <a:t> </a:t>
+            </a:r>
+            <a:r>
+              <a:rPr lang="en-US" altLang="zh-CN" sz="1200" spc="-1" dirty="0">
+                <a:latin typeface="Arial"/>
+                <a:sym typeface="Wingdings" pitchFamily="2" charset="2"/>
+              </a:rPr>
+              <a:t>performs</a:t>
+            </a:r>
+            <a:r>
+              <a:rPr lang="zh-CN" altLang="en-US" sz="1200" spc="-1" dirty="0">
+                <a:latin typeface="Arial"/>
+                <a:sym typeface="Wingdings" pitchFamily="2" charset="2"/>
+              </a:rPr>
+              <a:t> </a:t>
+            </a:r>
+            <a:r>
+              <a:rPr lang="en-US" altLang="zh-CN" sz="1200" spc="-1" dirty="0">
+                <a:latin typeface="Arial"/>
+                <a:sym typeface="Wingdings" pitchFamily="2" charset="2"/>
+              </a:rPr>
+              <a:t>better</a:t>
+            </a:r>
+            <a:r>
+              <a:rPr lang="zh-CN" altLang="en-US" sz="1200" spc="-1" dirty="0">
+                <a:latin typeface="Arial"/>
+                <a:sym typeface="Wingdings" pitchFamily="2" charset="2"/>
+              </a:rPr>
+              <a:t> </a:t>
+            </a:r>
+            <a:r>
+              <a:rPr lang="en-US" altLang="zh-CN" sz="1200" spc="-1" dirty="0">
+                <a:latin typeface="Arial"/>
+                <a:sym typeface="Wingdings" pitchFamily="2" charset="2"/>
+              </a:rPr>
+              <a:t>than</a:t>
+            </a:r>
+            <a:r>
+              <a:rPr lang="zh-CN" altLang="en-US" sz="1200" spc="-1" dirty="0">
+                <a:latin typeface="Arial"/>
+                <a:sym typeface="Wingdings" pitchFamily="2" charset="2"/>
+              </a:rPr>
+              <a:t> </a:t>
+            </a:r>
+            <a:r>
+              <a:rPr lang="en-US" altLang="zh-CN" sz="1200" spc="-1" dirty="0">
+                <a:latin typeface="Arial"/>
+                <a:sym typeface="Wingdings" pitchFamily="2" charset="2"/>
+              </a:rPr>
+              <a:t>the</a:t>
+            </a:r>
+            <a:r>
+              <a:rPr lang="zh-CN" altLang="en-US" sz="1200" spc="-1" dirty="0">
+                <a:latin typeface="Arial"/>
+                <a:sym typeface="Wingdings" pitchFamily="2" charset="2"/>
+              </a:rPr>
+              <a:t> </a:t>
+            </a:r>
+            <a:r>
+              <a:rPr lang="en-US" altLang="zh-CN" sz="1200" spc="-1" dirty="0" err="1">
+                <a:latin typeface="Arial"/>
+                <a:sym typeface="Wingdings" pitchFamily="2" charset="2"/>
+              </a:rPr>
+              <a:t>vanila</a:t>
+            </a:r>
+            <a:r>
+              <a:rPr lang="zh-CN" altLang="en-US" sz="1200" spc="-1" dirty="0">
+                <a:latin typeface="Arial"/>
+                <a:sym typeface="Wingdings" pitchFamily="2" charset="2"/>
+              </a:rPr>
+              <a:t> </a:t>
+            </a:r>
+            <a:r>
+              <a:rPr lang="en-US" altLang="zh-CN" sz="1200" spc="-1" dirty="0">
+                <a:latin typeface="Arial"/>
+                <a:sym typeface="Wingdings" pitchFamily="2" charset="2"/>
+              </a:rPr>
+              <a:t>RNN</a:t>
+            </a:r>
+            <a:r>
+              <a:rPr lang="zh-CN" altLang="en-US" sz="1200" spc="-1" dirty="0">
+                <a:latin typeface="Arial"/>
+                <a:sym typeface="Wingdings" pitchFamily="2" charset="2"/>
+              </a:rPr>
+              <a:t> </a:t>
+            </a:r>
+            <a:endParaRPr lang="en-US" altLang="zh-CN" sz="1200" b="0" strike="noStrike" spc="-1" dirty="0">
+              <a:latin typeface="Arial"/>
+            </a:endParaRPr>
+          </a:p>
+          <a:p>
+            <a:pPr marL="228600" indent="-228600">
+              <a:buFontTx/>
+              <a:buAutoNum type="arabicPeriod"/>
+            </a:pPr>
+            <a:r>
+              <a:rPr lang="en-US" altLang="zh-CN" sz="1200" b="0" strike="noStrike" spc="-1" dirty="0">
+                <a:latin typeface="Arial"/>
+              </a:rPr>
+              <a:t>In</a:t>
+            </a:r>
+            <a:r>
+              <a:rPr lang="zh-CN" altLang="en-US" sz="1200" b="0" strike="noStrike" spc="-1" dirty="0">
+                <a:latin typeface="Arial"/>
+              </a:rPr>
+              <a:t> </a:t>
+            </a:r>
+            <a:r>
+              <a:rPr lang="en-US" altLang="zh-CN" sz="1200" b="0" strike="noStrike" spc="-1" dirty="0">
+                <a:latin typeface="Arial"/>
+              </a:rPr>
+              <a:t>short:</a:t>
+            </a:r>
+            <a:r>
+              <a:rPr lang="zh-CN" altLang="en-US" sz="1200" b="0" strike="noStrike" spc="-1" dirty="0">
+                <a:latin typeface="Arial"/>
+              </a:rPr>
+              <a:t> </a:t>
+            </a:r>
+            <a:r>
+              <a:rPr lang="en-US" altLang="zh-CN" sz="1200" b="0" strike="noStrike" spc="-1" dirty="0">
+                <a:latin typeface="Arial"/>
+              </a:rPr>
+              <a:t>LSTM</a:t>
+            </a:r>
+            <a:r>
+              <a:rPr lang="zh-CN" altLang="en-US" sz="1200" b="0" strike="noStrike" spc="-1" dirty="0">
+                <a:latin typeface="Arial"/>
+              </a:rPr>
+              <a:t> </a:t>
+            </a:r>
+            <a:r>
+              <a:rPr lang="en-US" altLang="zh-CN" sz="1200" b="0" strike="noStrike" spc="-1" dirty="0">
+                <a:latin typeface="Arial"/>
+              </a:rPr>
+              <a:t>out</a:t>
+            </a:r>
+            <a:r>
+              <a:rPr lang="en-US" altLang="zh-CN" sz="1200" spc="-1" dirty="0">
+                <a:latin typeface="Arial"/>
+              </a:rPr>
+              <a:t>performs</a:t>
+            </a:r>
+            <a:r>
+              <a:rPr lang="zh-CN" altLang="en-US" sz="1200" spc="-1" dirty="0">
+                <a:latin typeface="Arial"/>
+              </a:rPr>
+              <a:t> </a:t>
+            </a:r>
+            <a:r>
+              <a:rPr lang="en-US" altLang="zh-CN" sz="1200" spc="-1" dirty="0">
+                <a:latin typeface="Arial"/>
+              </a:rPr>
+              <a:t>RNN</a:t>
+            </a:r>
+            <a:r>
+              <a:rPr lang="zh-CN" altLang="en-US" sz="1200" spc="-1" dirty="0">
+                <a:latin typeface="Arial"/>
+              </a:rPr>
+              <a:t> </a:t>
+            </a:r>
+            <a:r>
+              <a:rPr lang="en-US" altLang="zh-CN" sz="1200" spc="-1" dirty="0">
+                <a:latin typeface="Arial"/>
+              </a:rPr>
+              <a:t>because</a:t>
+            </a:r>
+            <a:r>
+              <a:rPr lang="zh-CN" altLang="en-US" sz="1200" spc="-1" dirty="0">
+                <a:latin typeface="Arial"/>
+              </a:rPr>
+              <a:t> </a:t>
+            </a:r>
+            <a:r>
+              <a:rPr lang="en-US" altLang="zh-CN" sz="1200" spc="-1" dirty="0">
+                <a:latin typeface="Arial"/>
+              </a:rPr>
+              <a:t>it</a:t>
+            </a:r>
+            <a:r>
+              <a:rPr lang="zh-CN" altLang="en-US" sz="1200" spc="-1" dirty="0">
+                <a:latin typeface="Arial"/>
+              </a:rPr>
+              <a:t> </a:t>
+            </a:r>
+            <a:r>
+              <a:rPr lang="en-US" altLang="zh-CN" sz="1200" spc="-1" dirty="0">
+                <a:latin typeface="Arial"/>
+              </a:rPr>
+              <a:t>migrates</a:t>
+            </a:r>
+            <a:r>
+              <a:rPr lang="zh-CN" altLang="en-US" sz="1200" spc="-1" dirty="0">
+                <a:latin typeface="Arial"/>
+              </a:rPr>
+              <a:t> </a:t>
+            </a:r>
+            <a:r>
+              <a:rPr lang="en-US" altLang="zh-CN" sz="1200" spc="-1" dirty="0">
+                <a:latin typeface="Arial"/>
+              </a:rPr>
+              <a:t>the</a:t>
+            </a:r>
+            <a:r>
+              <a:rPr lang="zh-CN" altLang="en-US" sz="1200" spc="-1" dirty="0">
+                <a:latin typeface="Arial"/>
+              </a:rPr>
+              <a:t> </a:t>
+            </a:r>
+            <a:r>
+              <a:rPr lang="en-US" altLang="zh-CN" sz="1200" spc="-1" dirty="0">
+                <a:latin typeface="Arial"/>
+              </a:rPr>
+              <a:t>vanishing</a:t>
+            </a:r>
+            <a:r>
+              <a:rPr lang="zh-CN" altLang="en-US" sz="1200" spc="-1" dirty="0">
+                <a:latin typeface="Arial"/>
+              </a:rPr>
+              <a:t> </a:t>
+            </a:r>
+            <a:r>
+              <a:rPr lang="en-US" altLang="zh-CN" sz="1200" spc="-1" dirty="0">
+                <a:latin typeface="Arial"/>
+              </a:rPr>
+              <a:t>gradient</a:t>
+            </a:r>
+            <a:r>
+              <a:rPr lang="zh-CN" altLang="en-US" sz="1200" spc="-1" dirty="0">
+                <a:latin typeface="Arial"/>
+              </a:rPr>
+              <a:t> </a:t>
+            </a:r>
+            <a:r>
+              <a:rPr lang="en-US" altLang="zh-CN" sz="1200" spc="-1" dirty="0">
+                <a:latin typeface="Arial"/>
+              </a:rPr>
+              <a:t>problem</a:t>
+            </a:r>
+            <a:r>
+              <a:rPr lang="zh-CN" altLang="en-US" sz="1200" spc="-1" dirty="0">
+                <a:latin typeface="Arial"/>
+              </a:rPr>
+              <a:t> </a:t>
+            </a:r>
+            <a:r>
+              <a:rPr lang="en-US" altLang="zh-CN" sz="1200" spc="-1" dirty="0">
+                <a:latin typeface="Arial"/>
+              </a:rPr>
+              <a:t>and</a:t>
+            </a:r>
+            <a:r>
+              <a:rPr lang="zh-CN" altLang="en-US" sz="1200" spc="-1" dirty="0">
+                <a:latin typeface="Arial"/>
+              </a:rPr>
+              <a:t> </a:t>
+            </a:r>
+            <a:r>
+              <a:rPr lang="en-US" altLang="zh-CN" sz="1200" spc="-1" dirty="0">
+                <a:latin typeface="Arial"/>
+              </a:rPr>
+              <a:t>captures</a:t>
+            </a:r>
+            <a:r>
+              <a:rPr lang="zh-CN" altLang="en-US" sz="1200" spc="-1" dirty="0">
+                <a:latin typeface="Arial"/>
+              </a:rPr>
+              <a:t> </a:t>
+            </a:r>
+            <a:r>
+              <a:rPr lang="en-US" altLang="zh-CN" sz="1200" spc="-1" dirty="0">
+                <a:latin typeface="Arial"/>
+              </a:rPr>
+              <a:t>long</a:t>
+            </a:r>
+            <a:r>
+              <a:rPr lang="zh-CN" altLang="en-US" sz="1200" spc="-1" dirty="0">
+                <a:latin typeface="Arial"/>
+              </a:rPr>
+              <a:t> </a:t>
+            </a:r>
+            <a:r>
+              <a:rPr lang="en-US" altLang="zh-CN" sz="1200" spc="-1" dirty="0">
+                <a:latin typeface="Arial"/>
+              </a:rPr>
+              <a:t>range</a:t>
+            </a:r>
+            <a:r>
+              <a:rPr lang="zh-CN" altLang="en-US" sz="1200" spc="-1" dirty="0">
+                <a:latin typeface="Arial"/>
+              </a:rPr>
+              <a:t> </a:t>
+            </a:r>
+            <a:r>
+              <a:rPr lang="en-US" altLang="zh-CN" sz="1200" spc="-1" dirty="0">
+                <a:latin typeface="Arial"/>
+              </a:rPr>
+              <a:t>dependencies</a:t>
+            </a:r>
+            <a:r>
+              <a:rPr lang="zh-CN" altLang="en-US" sz="1200" spc="-1" dirty="0">
+                <a:latin typeface="Arial"/>
+              </a:rPr>
+              <a:t> </a:t>
+            </a:r>
+            <a:r>
+              <a:rPr lang="en-US" altLang="zh-CN" sz="1200" spc="-1" dirty="0">
+                <a:latin typeface="Arial"/>
+              </a:rPr>
+              <a:t>more</a:t>
+            </a:r>
+            <a:r>
+              <a:rPr lang="zh-CN" altLang="en-US" sz="1200" spc="-1" dirty="0">
+                <a:latin typeface="Arial"/>
+              </a:rPr>
+              <a:t> </a:t>
+            </a:r>
+            <a:r>
+              <a:rPr lang="en-US" altLang="zh-CN" sz="1200" spc="-1" dirty="0">
+                <a:latin typeface="Arial"/>
+              </a:rPr>
+              <a:t>effectively.</a:t>
+            </a:r>
+            <a:endParaRPr lang="en-US" sz="1200" b="0" strike="noStrike" spc="-1" dirty="0">
+              <a:latin typeface="Arial"/>
+            </a:endParaRPr>
+          </a:p>
+          <a:p>
             <a:endParaRPr lang="en-US" sz="1200" b="0" strike="noStrike" spc="-1" dirty="0">
               <a:latin typeface="Arial"/>
             </a:endParaRPr>
@@ -11378,6 +13509,1374 @@
           </a:p>
         </p:txBody>
       </p:sp>
+      <p:sp>
+        <p:nvSpPr>
+          <p:cNvPr id="6" name="CustomShape 2">
+            <a:extLst>
+              <a:ext uri="{FF2B5EF4-FFF2-40B4-BE49-F238E27FC236}">
+                <a16:creationId xmlns:a16="http://schemas.microsoft.com/office/drawing/2014/main" id="{0A8A69C9-7427-D1C4-0962-4972638A90B6}"/>
+              </a:ext>
+            </a:extLst>
+          </p:cNvPr>
+          <p:cNvSpPr/>
+          <p:nvPr/>
+        </p:nvSpPr>
+        <p:spPr>
+          <a:xfrm>
+            <a:off x="344160" y="1052444"/>
+            <a:ext cx="7277400" cy="600120"/>
+          </a:xfrm>
+          <a:prstGeom prst="rect">
+            <a:avLst/>
+          </a:prstGeom>
+          <a:noFill/>
+          <a:ln>
+            <a:noFill/>
+          </a:ln>
+        </p:spPr>
+        <p:style>
+          <a:lnRef idx="0">
+            <a:scrgbClr r="0" g="0" b="0"/>
+          </a:lnRef>
+          <a:fillRef idx="0">
+            <a:scrgbClr r="0" g="0" b="0"/>
+          </a:fillRef>
+          <a:effectRef idx="0">
+            <a:scrgbClr r="0" g="0" b="0"/>
+          </a:effectRef>
+          <a:fontRef idx="minor"/>
+        </p:style>
+        <p:txBody>
+          <a:bodyPr lIns="90000" tIns="45000" rIns="90000" bIns="45000"/>
+          <a:lstStyle/>
+          <a:p>
+            <a:pPr>
+              <a:lnSpc>
+                <a:spcPct val="100000"/>
+              </a:lnSpc>
+            </a:pPr>
+            <a:r>
+              <a:rPr lang="en-US" altLang="zh-CN" sz="1200" b="1" strike="noStrike" spc="-1" dirty="0">
+                <a:latin typeface="Arial"/>
+                <a:ea typeface="Arial"/>
+              </a:rPr>
+              <a:t>Comparison</a:t>
+            </a:r>
+            <a:r>
+              <a:rPr lang="zh-CN" altLang="en-US" sz="1200" b="1" strike="noStrike" spc="-1" dirty="0">
+                <a:latin typeface="Arial"/>
+                <a:ea typeface="Arial"/>
+              </a:rPr>
+              <a:t> </a:t>
+            </a:r>
+            <a:r>
+              <a:rPr lang="en-US" altLang="zh-CN" sz="1200" b="1" strike="noStrike" spc="-1" dirty="0">
+                <a:latin typeface="Arial"/>
+                <a:ea typeface="Arial"/>
+              </a:rPr>
+              <a:t>Item</a:t>
+            </a:r>
+            <a:r>
+              <a:rPr lang="zh-CN" altLang="en-US" sz="1200" b="1" strike="noStrike" spc="-1" dirty="0">
+                <a:latin typeface="Arial"/>
+                <a:ea typeface="Arial"/>
+              </a:rPr>
+              <a:t> </a:t>
+            </a:r>
+            <a:r>
+              <a:rPr lang="en-US" altLang="zh-CN" sz="1200" b="1" strike="noStrike" spc="-1" dirty="0">
+                <a:latin typeface="Arial"/>
+                <a:ea typeface="Arial"/>
+              </a:rPr>
+              <a:t>w/</a:t>
+            </a:r>
+            <a:r>
+              <a:rPr lang="zh-CN" altLang="en-US" sz="1200" b="1" strike="noStrike" spc="-1" dirty="0">
+                <a:latin typeface="Arial"/>
+                <a:ea typeface="Arial"/>
+              </a:rPr>
+              <a:t> </a:t>
+            </a:r>
+            <a:r>
+              <a:rPr lang="en-US" altLang="zh-CN" sz="1200" b="1" strike="noStrike" spc="-1" dirty="0">
+                <a:latin typeface="Arial"/>
+                <a:ea typeface="Arial"/>
+              </a:rPr>
+              <a:t>results</a:t>
+            </a:r>
+            <a:r>
+              <a:rPr lang="en-US" altLang="zh-CN" sz="1200" b="0" strike="noStrike" spc="-1" dirty="0">
+                <a:latin typeface="Arial"/>
+                <a:ea typeface="Arial"/>
+              </a:rPr>
+              <a:t>:</a:t>
+            </a:r>
+          </a:p>
+          <a:p>
+            <a:pPr>
+              <a:lnSpc>
+                <a:spcPct val="100000"/>
+              </a:lnSpc>
+            </a:pPr>
+            <a:r>
+              <a:rPr lang="en-US" altLang="zh-CN" sz="1200" spc="-1" dirty="0">
+                <a:latin typeface="Arial"/>
+              </a:rPr>
+              <a:t>RNN:</a:t>
+            </a:r>
+            <a:r>
+              <a:rPr lang="zh-CN" altLang="en-US" sz="1200" spc="-1" dirty="0">
+                <a:latin typeface="Arial"/>
+              </a:rPr>
+              <a:t> </a:t>
+            </a:r>
+            <a:r>
+              <a:rPr lang="en-US" sz="1200" dirty="0"/>
+              <a:t>Training Perplexity ≈ 100, Validation Perplexity ≈ </a:t>
+            </a:r>
+            <a:r>
+              <a:rPr lang="en-US" altLang="zh-CN" sz="1200" dirty="0"/>
+              <a:t>110</a:t>
+            </a:r>
+            <a:endParaRPr lang="en-US" altLang="zh-CN" sz="1200" spc="-1" dirty="0">
+              <a:latin typeface="Arial"/>
+            </a:endParaRPr>
+          </a:p>
+          <a:p>
+            <a:pPr>
+              <a:lnSpc>
+                <a:spcPct val="100000"/>
+              </a:lnSpc>
+            </a:pPr>
+            <a:r>
+              <a:rPr lang="en-US" altLang="zh-CN" sz="1200" spc="-1" dirty="0">
+                <a:latin typeface="Arial"/>
+              </a:rPr>
+              <a:t>RNN w/</a:t>
+            </a:r>
+            <a:r>
+              <a:rPr lang="zh-CN" altLang="en-US" sz="1200" spc="-1" dirty="0">
+                <a:latin typeface="Arial"/>
+              </a:rPr>
+              <a:t> </a:t>
+            </a:r>
+            <a:r>
+              <a:rPr lang="en-US" altLang="zh-CN" sz="1200" spc="-1" dirty="0">
+                <a:latin typeface="Arial"/>
+              </a:rPr>
+              <a:t>attention:</a:t>
+            </a:r>
+            <a:r>
+              <a:rPr lang="zh-CN" altLang="en-US" sz="1200" spc="-1" dirty="0">
+                <a:latin typeface="Arial"/>
+              </a:rPr>
+              <a:t> </a:t>
+            </a:r>
+            <a:r>
+              <a:rPr lang="en-US" sz="1200" dirty="0"/>
+              <a:t>Training Perplexity ≈ </a:t>
+            </a:r>
+            <a:r>
+              <a:rPr lang="en-US" altLang="zh-CN" sz="1200" dirty="0"/>
+              <a:t>4.5</a:t>
+            </a:r>
+            <a:r>
+              <a:rPr lang="en-US" sz="1200" dirty="0"/>
+              <a:t>, Validation Perplexity ≈ </a:t>
+            </a:r>
+            <a:r>
+              <a:rPr lang="en-US" altLang="zh-CN" sz="1200" dirty="0"/>
+              <a:t>6</a:t>
+            </a:r>
+            <a:endParaRPr lang="en-US" sz="1200" b="0" strike="noStrike" spc="-1" dirty="0">
+              <a:latin typeface="Arial"/>
+            </a:endParaRPr>
+          </a:p>
+        </p:txBody>
+      </p:sp>
+      <p:sp>
+        <p:nvSpPr>
+          <p:cNvPr id="7" name="CustomShape 2">
+            <a:extLst>
+              <a:ext uri="{FF2B5EF4-FFF2-40B4-BE49-F238E27FC236}">
+                <a16:creationId xmlns:a16="http://schemas.microsoft.com/office/drawing/2014/main" id="{4F986CDA-B085-CCB4-2E43-5A975A5948A4}"/>
+              </a:ext>
+            </a:extLst>
+          </p:cNvPr>
+          <p:cNvSpPr/>
+          <p:nvPr/>
+        </p:nvSpPr>
+        <p:spPr>
+          <a:xfrm>
+            <a:off x="344159" y="1816570"/>
+            <a:ext cx="7616499" cy="600120"/>
+          </a:xfrm>
+          <a:prstGeom prst="rect">
+            <a:avLst/>
+          </a:prstGeom>
+          <a:noFill/>
+          <a:ln>
+            <a:noFill/>
+          </a:ln>
+        </p:spPr>
+        <p:style>
+          <a:lnRef idx="0">
+            <a:scrgbClr r="0" g="0" b="0"/>
+          </a:lnRef>
+          <a:fillRef idx="0">
+            <a:scrgbClr r="0" g="0" b="0"/>
+          </a:fillRef>
+          <a:effectRef idx="0">
+            <a:scrgbClr r="0" g="0" b="0"/>
+          </a:effectRef>
+          <a:fontRef idx="minor"/>
+        </p:style>
+        <p:txBody>
+          <a:bodyPr lIns="90000" tIns="45000" rIns="90000" bIns="45000"/>
+          <a:lstStyle/>
+          <a:p>
+            <a:pPr>
+              <a:lnSpc>
+                <a:spcPct val="100000"/>
+              </a:lnSpc>
+            </a:pPr>
+            <a:r>
+              <a:rPr lang="en-US" altLang="zh-CN" sz="1200" b="1" strike="noStrike" spc="-1" dirty="0">
+                <a:latin typeface="Arial"/>
+                <a:ea typeface="Arial"/>
+              </a:rPr>
+              <a:t>Observations:</a:t>
+            </a:r>
+          </a:p>
+          <a:p>
+            <a:pPr marL="228600" indent="-228600">
+              <a:lnSpc>
+                <a:spcPct val="100000"/>
+              </a:lnSpc>
+              <a:buAutoNum type="arabicPeriod"/>
+            </a:pPr>
+            <a:r>
+              <a:rPr lang="en-US" altLang="zh-CN" sz="1200" dirty="0"/>
+              <a:t>I</a:t>
+            </a:r>
+            <a:r>
+              <a:rPr lang="zh-CN" altLang="en-US" sz="1200" dirty="0"/>
+              <a:t> </a:t>
+            </a:r>
+            <a:r>
+              <a:rPr lang="en-US" altLang="zh-CN" sz="1200" dirty="0"/>
+              <a:t>summarized</a:t>
+            </a:r>
+            <a:r>
+              <a:rPr lang="zh-CN" altLang="en-US" sz="1200" dirty="0"/>
+              <a:t> </a:t>
+            </a:r>
+            <a:r>
+              <a:rPr lang="en-US" altLang="zh-CN" sz="1200" dirty="0"/>
+              <a:t>the</a:t>
+            </a:r>
+            <a:r>
+              <a:rPr lang="zh-CN" altLang="en-US" sz="1200" dirty="0"/>
+              <a:t> </a:t>
+            </a:r>
+            <a:r>
+              <a:rPr lang="en-US" altLang="zh-CN" sz="1200" dirty="0"/>
+              <a:t>differences</a:t>
+            </a:r>
+            <a:r>
+              <a:rPr lang="zh-CN" altLang="en-US" sz="1200" dirty="0"/>
+              <a:t> </a:t>
+            </a:r>
+            <a:r>
+              <a:rPr lang="en-US" altLang="zh-CN" sz="1200" dirty="0"/>
+              <a:t>&amp;&amp;</a:t>
+            </a:r>
+            <a:r>
+              <a:rPr lang="zh-CN" altLang="en-US" sz="1200" dirty="0"/>
+              <a:t> </a:t>
+            </a:r>
+            <a:r>
+              <a:rPr lang="en-US" altLang="zh-CN" sz="1200" dirty="0"/>
+              <a:t>observations</a:t>
+            </a:r>
+            <a:r>
+              <a:rPr lang="zh-CN" altLang="en-US" sz="1200" dirty="0"/>
+              <a:t> </a:t>
+            </a:r>
+            <a:r>
+              <a:rPr lang="en-US" altLang="zh-CN" sz="1200" dirty="0"/>
+              <a:t>in</a:t>
+            </a:r>
+            <a:r>
+              <a:rPr lang="zh-CN" altLang="en-US" sz="1200" dirty="0"/>
+              <a:t> </a:t>
+            </a:r>
+            <a:r>
+              <a:rPr lang="en-US" altLang="zh-CN" sz="1200" dirty="0"/>
+              <a:t>four</a:t>
+            </a:r>
+            <a:r>
+              <a:rPr lang="zh-CN" altLang="en-US" sz="1200" dirty="0"/>
+              <a:t> </a:t>
+            </a:r>
+            <a:r>
+              <a:rPr lang="en-US" altLang="zh-CN" sz="1200" dirty="0"/>
+              <a:t>metrics:</a:t>
+            </a:r>
+            <a:r>
+              <a:rPr lang="zh-CN" altLang="en-US" sz="1200" dirty="0"/>
+              <a:t> </a:t>
+            </a:r>
+            <a:endParaRPr lang="en-US" altLang="zh-CN" sz="1200" dirty="0"/>
+          </a:p>
+          <a:p>
+            <a:pPr marL="171450" indent="-171450">
+              <a:lnSpc>
+                <a:spcPct val="100000"/>
+              </a:lnSpc>
+              <a:buFont typeface="Arial" panose="020B0604020202020204" pitchFamily="34" charset="0"/>
+              <a:buChar char="•"/>
+            </a:pPr>
+            <a:r>
+              <a:rPr lang="en-US" altLang="zh-CN" sz="1200" strike="noStrike" spc="-1" dirty="0">
+                <a:latin typeface="Arial"/>
+                <a:ea typeface="Arial"/>
+              </a:rPr>
+              <a:t>Training</a:t>
+            </a:r>
+            <a:r>
+              <a:rPr lang="zh-CN" altLang="en-US" sz="1200" strike="noStrike" spc="-1" dirty="0">
+                <a:latin typeface="Arial"/>
+                <a:ea typeface="Arial"/>
+              </a:rPr>
+              <a:t> </a:t>
+            </a:r>
+            <a:r>
+              <a:rPr lang="en-US" altLang="zh-CN" sz="1200" strike="noStrike" spc="-1" dirty="0">
+                <a:latin typeface="Arial"/>
+                <a:ea typeface="Arial"/>
+              </a:rPr>
+              <a:t>loss:</a:t>
+            </a:r>
+            <a:r>
+              <a:rPr lang="en-US" sz="1200" dirty="0"/>
+              <a:t> </a:t>
+            </a:r>
+            <a:r>
+              <a:rPr lang="en-US" altLang="zh-CN" sz="1200" dirty="0"/>
+              <a:t>attention</a:t>
+            </a:r>
+            <a:r>
+              <a:rPr lang="zh-CN" altLang="en-US" sz="1200" dirty="0"/>
+              <a:t> </a:t>
+            </a:r>
+            <a:r>
+              <a:rPr lang="en-US" altLang="zh-CN" sz="1200" dirty="0"/>
+              <a:t>added</a:t>
+            </a:r>
+            <a:r>
+              <a:rPr lang="zh-CN" altLang="en-US" sz="1200" dirty="0"/>
+              <a:t> </a:t>
+            </a:r>
+            <a:r>
+              <a:rPr lang="en-US" altLang="zh-CN" sz="1200" dirty="0"/>
+              <a:t>is</a:t>
+            </a:r>
+            <a:r>
+              <a:rPr lang="zh-CN" altLang="en-US" sz="1200" dirty="0"/>
+              <a:t> </a:t>
+            </a:r>
+            <a:r>
+              <a:rPr lang="en-US" altLang="zh-CN" sz="1200" dirty="0"/>
+              <a:t>faster</a:t>
+            </a:r>
+            <a:r>
+              <a:rPr lang="zh-CN" altLang="en-US" sz="1200" dirty="0"/>
+              <a:t> </a:t>
+            </a:r>
+            <a:r>
+              <a:rPr lang="en-US" altLang="zh-CN" sz="1200" dirty="0"/>
+              <a:t>and</a:t>
+            </a:r>
+            <a:r>
+              <a:rPr lang="zh-CN" altLang="en-US" sz="1200" dirty="0"/>
+              <a:t> </a:t>
+            </a:r>
+            <a:r>
+              <a:rPr lang="en-US" altLang="zh-CN" sz="1200" dirty="0"/>
+              <a:t>helps</a:t>
+            </a:r>
+            <a:r>
+              <a:rPr lang="zh-CN" altLang="en-US" sz="1200" dirty="0"/>
+              <a:t> </a:t>
+            </a:r>
+            <a:r>
+              <a:rPr lang="en-US" sz="1200" dirty="0"/>
+              <a:t>LSTM </a:t>
+            </a:r>
+            <a:r>
+              <a:rPr lang="en-US" altLang="zh-CN" sz="1200" dirty="0"/>
+              <a:t>in</a:t>
+            </a:r>
+            <a:r>
+              <a:rPr lang="zh-CN" altLang="en-US" sz="1200" dirty="0"/>
+              <a:t> </a:t>
+            </a:r>
+            <a:r>
+              <a:rPr lang="en-US" altLang="zh-CN" sz="1200" dirty="0"/>
+              <a:t>convergence.</a:t>
+            </a:r>
+            <a:endParaRPr lang="en-US" sz="1200" dirty="0"/>
+          </a:p>
+          <a:p>
+            <a:pPr marL="171450" indent="-171450">
+              <a:lnSpc>
+                <a:spcPct val="100000"/>
+              </a:lnSpc>
+              <a:buFont typeface="Arial" panose="020B0604020202020204" pitchFamily="34" charset="0"/>
+              <a:buChar char="•"/>
+            </a:pPr>
+            <a:r>
+              <a:rPr lang="en-US" altLang="zh-CN" sz="1200" strike="noStrike" spc="-1" dirty="0">
+                <a:latin typeface="Arial"/>
+                <a:ea typeface="Arial"/>
+              </a:rPr>
+              <a:t>Training</a:t>
+            </a:r>
+            <a:r>
+              <a:rPr lang="zh-CN" altLang="en-US" sz="1200" strike="noStrike" spc="-1" dirty="0">
+                <a:latin typeface="Arial"/>
+                <a:ea typeface="Arial"/>
+              </a:rPr>
+              <a:t> </a:t>
+            </a:r>
+            <a:r>
+              <a:rPr lang="en-US" altLang="zh-CN" sz="1200" strike="noStrike" spc="-1" dirty="0">
+                <a:latin typeface="Arial"/>
+                <a:ea typeface="Arial"/>
+              </a:rPr>
+              <a:t>Perplexity:</a:t>
+            </a:r>
+            <a:r>
+              <a:rPr lang="zh-CN" altLang="en-US" sz="1200" strike="noStrike" spc="-1" dirty="0">
+                <a:latin typeface="Arial"/>
+                <a:ea typeface="Arial"/>
+              </a:rPr>
+              <a:t> </a:t>
+            </a:r>
+            <a:r>
+              <a:rPr lang="en-US" altLang="zh-CN" sz="1200" strike="noStrike" spc="-1" dirty="0">
+                <a:latin typeface="Arial"/>
+                <a:ea typeface="Arial"/>
+              </a:rPr>
+              <a:t>attention</a:t>
+            </a:r>
+            <a:r>
+              <a:rPr lang="zh-CN" altLang="en-US" sz="1200" strike="noStrike" spc="-1" dirty="0">
+                <a:latin typeface="Arial"/>
+                <a:ea typeface="Arial"/>
+              </a:rPr>
+              <a:t> </a:t>
+            </a:r>
+            <a:r>
+              <a:rPr lang="en-US" altLang="zh-CN" sz="1200" strike="noStrike" spc="-1" dirty="0">
+                <a:latin typeface="Arial"/>
+                <a:ea typeface="Arial"/>
+              </a:rPr>
+              <a:t>added</a:t>
+            </a:r>
+            <a:r>
+              <a:rPr lang="zh-CN" altLang="en-US" sz="1200" strike="noStrike" spc="-1" dirty="0">
+                <a:latin typeface="Arial"/>
+                <a:ea typeface="Arial"/>
+              </a:rPr>
+              <a:t> </a:t>
+            </a:r>
+            <a:r>
+              <a:rPr lang="en-US" altLang="zh-CN" sz="1200" strike="noStrike" spc="-1" dirty="0">
+                <a:latin typeface="Arial"/>
+                <a:ea typeface="Arial"/>
+              </a:rPr>
+              <a:t>helps</a:t>
+            </a:r>
+            <a:r>
+              <a:rPr lang="zh-CN" altLang="en-US" sz="1200" strike="noStrike" spc="-1" dirty="0">
+                <a:latin typeface="Arial"/>
+                <a:ea typeface="Arial"/>
+              </a:rPr>
+              <a:t> </a:t>
+            </a:r>
+            <a:r>
+              <a:rPr lang="en-US" altLang="zh-CN" sz="1200" spc="-1" dirty="0">
+                <a:latin typeface="Arial"/>
+                <a:ea typeface="Arial"/>
+              </a:rPr>
+              <a:t>to</a:t>
+            </a:r>
+            <a:r>
+              <a:rPr lang="zh-CN" altLang="en-US" sz="1200" spc="-1" dirty="0">
+                <a:latin typeface="Arial"/>
+                <a:ea typeface="Arial"/>
+              </a:rPr>
+              <a:t> </a:t>
+            </a:r>
+            <a:r>
+              <a:rPr lang="en-US" altLang="zh-CN" sz="1200" spc="-1" dirty="0">
+                <a:latin typeface="Arial"/>
+                <a:ea typeface="Arial"/>
+              </a:rPr>
+              <a:t>get</a:t>
+            </a:r>
+            <a:r>
+              <a:rPr lang="zh-CN" altLang="en-US" sz="1200" spc="-1" dirty="0">
+                <a:latin typeface="Arial"/>
+                <a:ea typeface="Arial"/>
+              </a:rPr>
+              <a:t> </a:t>
+            </a:r>
+            <a:r>
+              <a:rPr lang="en-US" altLang="zh-CN" sz="1200" spc="-1" dirty="0">
+                <a:latin typeface="Arial"/>
+                <a:ea typeface="Arial"/>
+              </a:rPr>
+              <a:t>more</a:t>
+            </a:r>
+            <a:r>
+              <a:rPr lang="zh-CN" altLang="en-US" sz="1200" spc="-1" dirty="0">
+                <a:latin typeface="Arial"/>
+                <a:ea typeface="Arial"/>
+              </a:rPr>
+              <a:t> </a:t>
+            </a:r>
+            <a:r>
+              <a:rPr lang="en-US" altLang="zh-CN" sz="1200" spc="-1" dirty="0">
+                <a:latin typeface="Arial"/>
+                <a:ea typeface="Arial"/>
+              </a:rPr>
+              <a:t>accuracy</a:t>
+            </a:r>
+            <a:r>
+              <a:rPr lang="zh-CN" altLang="en-US" sz="1200" spc="-1" dirty="0">
+                <a:latin typeface="Arial"/>
+                <a:ea typeface="Arial"/>
+              </a:rPr>
+              <a:t> </a:t>
+            </a:r>
+            <a:r>
+              <a:rPr lang="en-US" altLang="zh-CN" sz="1200" spc="-1" dirty="0">
+                <a:latin typeface="Arial"/>
+                <a:ea typeface="Arial"/>
+              </a:rPr>
+              <a:t>in</a:t>
+            </a:r>
+            <a:r>
+              <a:rPr lang="zh-CN" altLang="en-US" sz="1200" spc="-1" dirty="0">
+                <a:latin typeface="Arial"/>
+                <a:ea typeface="Arial"/>
+              </a:rPr>
+              <a:t> </a:t>
+            </a:r>
+            <a:r>
+              <a:rPr lang="en-US" altLang="zh-CN" sz="1200" strike="noStrike" spc="-1" dirty="0">
+                <a:latin typeface="Arial"/>
+                <a:ea typeface="Arial"/>
+              </a:rPr>
+              <a:t>prediction</a:t>
+            </a:r>
+            <a:r>
+              <a:rPr lang="en-US" altLang="zh-CN" sz="1200" spc="-1" dirty="0">
+                <a:latin typeface="Arial"/>
+                <a:ea typeface="Arial"/>
+              </a:rPr>
+              <a:t>.</a:t>
+            </a:r>
+          </a:p>
+          <a:p>
+            <a:pPr marL="171450" indent="-171450">
+              <a:lnSpc>
+                <a:spcPct val="100000"/>
+              </a:lnSpc>
+              <a:buFont typeface="Arial" panose="020B0604020202020204" pitchFamily="34" charset="0"/>
+              <a:buChar char="•"/>
+            </a:pPr>
+            <a:r>
+              <a:rPr lang="en-US" altLang="zh-CN" sz="1200" strike="noStrike" spc="-1" dirty="0">
+                <a:latin typeface="Arial"/>
+                <a:ea typeface="Arial"/>
+              </a:rPr>
+              <a:t>Validation</a:t>
+            </a:r>
+            <a:r>
+              <a:rPr lang="zh-CN" altLang="en-US" sz="1200" strike="noStrike" spc="-1" dirty="0">
+                <a:latin typeface="Arial"/>
+                <a:ea typeface="Arial"/>
+              </a:rPr>
+              <a:t> </a:t>
+            </a:r>
+            <a:r>
+              <a:rPr lang="en-US" altLang="zh-CN" sz="1200" spc="-1" dirty="0">
+                <a:latin typeface="Arial"/>
+                <a:ea typeface="Arial"/>
+              </a:rPr>
+              <a:t>Loss:</a:t>
+            </a:r>
+            <a:r>
+              <a:rPr lang="zh-CN" altLang="en-US" sz="1200" spc="-1" dirty="0">
+                <a:latin typeface="Arial"/>
+                <a:ea typeface="Arial"/>
+              </a:rPr>
+              <a:t> </a:t>
+            </a:r>
+            <a:r>
+              <a:rPr lang="en-US" altLang="zh-CN" sz="1200" strike="noStrike" spc="-1" dirty="0">
+                <a:latin typeface="Arial"/>
+                <a:ea typeface="Arial"/>
+              </a:rPr>
+              <a:t>generalization</a:t>
+            </a:r>
+            <a:r>
+              <a:rPr lang="zh-CN" altLang="en-US" sz="1200" strike="noStrike" spc="-1" dirty="0">
+                <a:latin typeface="Arial"/>
+                <a:ea typeface="Arial"/>
+              </a:rPr>
+              <a:t> </a:t>
+            </a:r>
+            <a:r>
+              <a:rPr lang="en-US" altLang="zh-CN" sz="1200" strike="noStrike" spc="-1" dirty="0">
+                <a:latin typeface="Arial"/>
+                <a:ea typeface="Arial"/>
+              </a:rPr>
+              <a:t>improves.</a:t>
+            </a:r>
+          </a:p>
+          <a:p>
+            <a:pPr marL="171450" indent="-171450">
+              <a:lnSpc>
+                <a:spcPct val="100000"/>
+              </a:lnSpc>
+              <a:buFont typeface="Arial" panose="020B0604020202020204" pitchFamily="34" charset="0"/>
+              <a:buChar char="•"/>
+            </a:pPr>
+            <a:r>
+              <a:rPr lang="en-US" altLang="zh-CN" sz="1200" strike="noStrike" spc="-1" dirty="0">
+                <a:latin typeface="Arial"/>
+                <a:ea typeface="Arial"/>
+              </a:rPr>
+              <a:t>Validation</a:t>
+            </a:r>
+            <a:r>
+              <a:rPr lang="zh-CN" altLang="en-US" sz="1200" strike="noStrike" spc="-1" dirty="0">
+                <a:latin typeface="Arial"/>
+                <a:ea typeface="Arial"/>
+              </a:rPr>
+              <a:t> </a:t>
+            </a:r>
+            <a:r>
+              <a:rPr lang="en-US" altLang="zh-CN" sz="1200" strike="noStrike" spc="-1" dirty="0">
+                <a:latin typeface="Arial"/>
+                <a:ea typeface="Arial"/>
+              </a:rPr>
+              <a:t>Perplexity:</a:t>
+            </a:r>
+            <a:r>
+              <a:rPr lang="zh-CN" altLang="en-US" sz="1200" strike="noStrike" spc="-1" dirty="0">
+                <a:latin typeface="Arial"/>
+                <a:ea typeface="Arial"/>
+              </a:rPr>
+              <a:t> </a:t>
+            </a:r>
+            <a:r>
+              <a:rPr lang="en-US" altLang="zh-CN" sz="1200" strike="noStrike" spc="-1" dirty="0">
+                <a:latin typeface="Arial"/>
+                <a:ea typeface="Arial"/>
+              </a:rPr>
+              <a:t>attention</a:t>
+            </a:r>
+            <a:r>
+              <a:rPr lang="zh-CN" altLang="en-US" sz="1200" strike="noStrike" spc="-1" dirty="0">
+                <a:latin typeface="Arial"/>
+                <a:ea typeface="Arial"/>
+              </a:rPr>
+              <a:t> </a:t>
+            </a:r>
+            <a:r>
+              <a:rPr lang="en-US" altLang="zh-CN" sz="1200" strike="noStrike" spc="-1" dirty="0">
+                <a:latin typeface="Arial"/>
+                <a:ea typeface="Arial"/>
+              </a:rPr>
+              <a:t>added</a:t>
+            </a:r>
+            <a:r>
+              <a:rPr lang="zh-CN" altLang="en-US" sz="1200" strike="noStrike" spc="-1" dirty="0">
+                <a:latin typeface="Arial"/>
+                <a:ea typeface="Arial"/>
+              </a:rPr>
+              <a:t> </a:t>
+            </a:r>
+            <a:r>
+              <a:rPr lang="en-US" altLang="zh-CN" sz="1200" strike="noStrike" spc="-1" dirty="0">
+                <a:latin typeface="Arial"/>
+                <a:ea typeface="Arial"/>
+              </a:rPr>
+              <a:t>helps</a:t>
+            </a:r>
+            <a:r>
+              <a:rPr lang="zh-CN" altLang="en-US" sz="1200" strike="noStrike" spc="-1" dirty="0">
+                <a:latin typeface="Arial"/>
+                <a:ea typeface="Arial"/>
+              </a:rPr>
+              <a:t> </a:t>
+            </a:r>
+            <a:r>
+              <a:rPr lang="en-US" altLang="zh-CN" sz="1200" strike="noStrike" spc="-1" dirty="0">
+                <a:latin typeface="Arial"/>
+                <a:ea typeface="Arial"/>
+              </a:rPr>
+              <a:t>to</a:t>
+            </a:r>
+            <a:r>
+              <a:rPr lang="zh-CN" altLang="en-US" sz="1200" strike="noStrike" spc="-1" dirty="0">
+                <a:latin typeface="Arial"/>
+                <a:ea typeface="Arial"/>
+              </a:rPr>
+              <a:t> </a:t>
+            </a:r>
+            <a:r>
+              <a:rPr lang="en-US" altLang="zh-CN" sz="1200" strike="noStrike" spc="-1" dirty="0">
+                <a:latin typeface="Arial"/>
+                <a:ea typeface="Arial"/>
+              </a:rPr>
+              <a:t>perform</a:t>
+            </a:r>
+            <a:r>
+              <a:rPr lang="zh-CN" altLang="en-US" sz="1200" strike="noStrike" spc="-1" dirty="0">
+                <a:latin typeface="Arial"/>
+                <a:ea typeface="Arial"/>
+              </a:rPr>
+              <a:t> </a:t>
+            </a:r>
+            <a:r>
+              <a:rPr lang="en-US" altLang="zh-CN" sz="1200" strike="noStrike" spc="-1" dirty="0">
+                <a:latin typeface="Arial"/>
+                <a:ea typeface="Arial"/>
+              </a:rPr>
+              <a:t>better,</a:t>
+            </a:r>
+            <a:r>
+              <a:rPr lang="zh-CN" altLang="en-US" sz="1200" strike="noStrike" spc="-1" dirty="0">
+                <a:latin typeface="Arial"/>
+                <a:ea typeface="Arial"/>
+              </a:rPr>
+              <a:t> </a:t>
+            </a:r>
+            <a:r>
+              <a:rPr lang="en-US" altLang="zh-CN" sz="1200" strike="noStrike" spc="-1" dirty="0">
+                <a:latin typeface="Arial"/>
+                <a:ea typeface="Arial"/>
+              </a:rPr>
+              <a:t>the</a:t>
+            </a:r>
+            <a:r>
+              <a:rPr lang="zh-CN" altLang="en-US" sz="1200" strike="noStrike" spc="-1" dirty="0">
+                <a:latin typeface="Arial"/>
+                <a:ea typeface="Arial"/>
+              </a:rPr>
+              <a:t> </a:t>
+            </a:r>
+            <a:r>
+              <a:rPr lang="en-US" altLang="zh-CN" sz="1200" strike="noStrike" spc="-1" dirty="0">
+                <a:latin typeface="Arial"/>
+                <a:ea typeface="Arial"/>
+              </a:rPr>
+              <a:t>decoder</a:t>
+            </a:r>
+            <a:r>
+              <a:rPr lang="zh-CN" altLang="en-US" sz="1200" strike="noStrike" spc="-1" dirty="0">
+                <a:latin typeface="Arial"/>
+                <a:ea typeface="Arial"/>
+              </a:rPr>
+              <a:t> </a:t>
+            </a:r>
+            <a:r>
+              <a:rPr lang="en-US" altLang="zh-CN" sz="1200" strike="noStrike" spc="-1" dirty="0">
+                <a:latin typeface="Arial"/>
+                <a:ea typeface="Arial"/>
+              </a:rPr>
+              <a:t>can</a:t>
+            </a:r>
+            <a:r>
+              <a:rPr lang="zh-CN" altLang="en-US" sz="1200" strike="noStrike" spc="-1" dirty="0">
+                <a:latin typeface="Arial"/>
+                <a:ea typeface="Arial"/>
+              </a:rPr>
+              <a:t> </a:t>
+            </a:r>
+            <a:r>
+              <a:rPr lang="en-US" altLang="zh-CN" sz="1200" strike="noStrike" spc="-1" dirty="0">
+                <a:latin typeface="Arial"/>
+                <a:ea typeface="Arial"/>
+              </a:rPr>
+              <a:t>selectively</a:t>
+            </a:r>
+            <a:r>
+              <a:rPr lang="zh-CN" altLang="en-US" sz="1200" strike="noStrike" spc="-1" dirty="0">
+                <a:latin typeface="Arial"/>
+                <a:ea typeface="Arial"/>
+              </a:rPr>
+              <a:t> </a:t>
+            </a:r>
+            <a:r>
+              <a:rPr lang="en-US" altLang="zh-CN" sz="1200" strike="noStrike" spc="-1" dirty="0">
+                <a:latin typeface="Arial"/>
+                <a:ea typeface="Arial"/>
+              </a:rPr>
+              <a:t>use</a:t>
+            </a:r>
+            <a:r>
+              <a:rPr lang="zh-CN" altLang="en-US" sz="1200" strike="noStrike" spc="-1" dirty="0">
+                <a:latin typeface="Arial"/>
+                <a:ea typeface="Arial"/>
+              </a:rPr>
+              <a:t> </a:t>
+            </a:r>
+            <a:r>
+              <a:rPr lang="en-US" altLang="zh-CN" sz="1200" strike="noStrike" spc="-1" dirty="0">
+                <a:latin typeface="Arial"/>
+                <a:ea typeface="Arial"/>
+              </a:rPr>
+              <a:t>encoder</a:t>
+            </a:r>
+            <a:r>
+              <a:rPr lang="zh-CN" altLang="en-US" sz="1200" strike="noStrike" spc="-1" dirty="0">
+                <a:latin typeface="Arial"/>
+                <a:ea typeface="Arial"/>
+              </a:rPr>
+              <a:t> </a:t>
+            </a:r>
+            <a:r>
+              <a:rPr lang="en-US" altLang="zh-CN" sz="1200" strike="noStrike" spc="-1" dirty="0">
+                <a:latin typeface="Arial"/>
+                <a:ea typeface="Arial"/>
+              </a:rPr>
+              <a:t>info.</a:t>
+            </a:r>
+            <a:endParaRPr lang="en-US" altLang="zh-CN" sz="1200" spc="-1" dirty="0">
+              <a:latin typeface="Arial"/>
+              <a:ea typeface="Arial"/>
+            </a:endParaRPr>
+          </a:p>
+          <a:p>
+            <a:pPr>
+              <a:lnSpc>
+                <a:spcPct val="100000"/>
+              </a:lnSpc>
+            </a:pPr>
+            <a:endParaRPr lang="en-US" altLang="zh-CN" sz="1200" strike="noStrike" spc="-1" dirty="0">
+              <a:latin typeface="Arial"/>
+              <a:ea typeface="Arial"/>
+            </a:endParaRPr>
+          </a:p>
+          <a:p>
+            <a:pPr>
+              <a:lnSpc>
+                <a:spcPct val="100000"/>
+              </a:lnSpc>
+            </a:pPr>
+            <a:r>
+              <a:rPr lang="en-US" altLang="zh-CN" sz="1200" b="1" strike="noStrike" spc="-1" dirty="0">
+                <a:latin typeface="Arial"/>
+                <a:ea typeface="Arial"/>
+              </a:rPr>
+              <a:t>Explanation of difference:</a:t>
+            </a:r>
+          </a:p>
+          <a:p>
+            <a:pPr marL="228600" indent="-228600">
+              <a:buFontTx/>
+              <a:buAutoNum type="arabicPeriod"/>
+            </a:pPr>
+            <a:r>
+              <a:rPr lang="en-US" altLang="zh-CN" sz="1200" spc="-1" dirty="0">
+                <a:latin typeface="Arial"/>
+              </a:rPr>
+              <a:t>Adding</a:t>
+            </a:r>
+            <a:r>
+              <a:rPr lang="zh-CN" altLang="en-US" sz="1200" spc="-1" dirty="0">
+                <a:latin typeface="Arial"/>
+              </a:rPr>
+              <a:t> </a:t>
+            </a:r>
+            <a:r>
+              <a:rPr lang="en-US" altLang="zh-CN" sz="1200" spc="-1" dirty="0">
+                <a:latin typeface="Arial"/>
+              </a:rPr>
+              <a:t>attention</a:t>
+            </a:r>
+            <a:r>
+              <a:rPr lang="zh-CN" altLang="en-US" sz="1200" spc="-1" dirty="0">
+                <a:latin typeface="Arial"/>
+              </a:rPr>
+              <a:t> </a:t>
+            </a:r>
+            <a:r>
+              <a:rPr lang="en-US" altLang="zh-CN" sz="1200" spc="-1" dirty="0">
+                <a:latin typeface="Arial"/>
+              </a:rPr>
+              <a:t>to</a:t>
+            </a:r>
+            <a:r>
+              <a:rPr lang="zh-CN" altLang="en-US" sz="1200" spc="-1" dirty="0">
+                <a:latin typeface="Arial"/>
+              </a:rPr>
+              <a:t> </a:t>
+            </a:r>
+            <a:r>
+              <a:rPr lang="en-US" altLang="zh-CN" sz="1200" spc="-1" dirty="0">
+                <a:latin typeface="Arial"/>
+              </a:rPr>
+              <a:t>vanilla</a:t>
+            </a:r>
+            <a:r>
+              <a:rPr lang="zh-CN" altLang="en-US" sz="1200" spc="-1" dirty="0">
+                <a:latin typeface="Arial"/>
+              </a:rPr>
+              <a:t> </a:t>
+            </a:r>
+            <a:r>
+              <a:rPr lang="en-US" altLang="zh-CN" sz="1200" spc="-1" dirty="0">
+                <a:latin typeface="Arial"/>
+              </a:rPr>
+              <a:t>dramatically</a:t>
+            </a:r>
+            <a:r>
+              <a:rPr lang="zh-CN" altLang="en-US" sz="1200" spc="-1" dirty="0">
+                <a:latin typeface="Arial"/>
+              </a:rPr>
+              <a:t> </a:t>
+            </a:r>
+            <a:r>
+              <a:rPr lang="en-US" altLang="zh-CN" sz="1200" spc="-1" dirty="0">
+                <a:latin typeface="Arial"/>
+              </a:rPr>
+              <a:t>improves</a:t>
+            </a:r>
+            <a:r>
+              <a:rPr lang="zh-CN" altLang="en-US" sz="1200" spc="-1" dirty="0">
+                <a:latin typeface="Arial"/>
+              </a:rPr>
+              <a:t> </a:t>
+            </a:r>
+            <a:r>
+              <a:rPr lang="en-US" altLang="zh-CN" sz="1200" spc="-1" dirty="0">
+                <a:latin typeface="Arial"/>
+              </a:rPr>
+              <a:t>the</a:t>
+            </a:r>
+            <a:r>
+              <a:rPr lang="zh-CN" altLang="en-US" sz="1200" spc="-1" dirty="0">
+                <a:latin typeface="Arial"/>
+              </a:rPr>
+              <a:t> </a:t>
+            </a:r>
+            <a:r>
+              <a:rPr lang="en-US" altLang="zh-CN" sz="1200" spc="-1" dirty="0">
+                <a:latin typeface="Arial"/>
+              </a:rPr>
+              <a:t>validation</a:t>
+            </a:r>
+            <a:r>
+              <a:rPr lang="zh-CN" altLang="en-US" sz="1200" spc="-1" dirty="0">
+                <a:latin typeface="Arial"/>
+              </a:rPr>
+              <a:t> </a:t>
+            </a:r>
+            <a:r>
+              <a:rPr lang="en-US" altLang="zh-CN" sz="1200" spc="-1" dirty="0">
+                <a:latin typeface="Arial"/>
+              </a:rPr>
+              <a:t>perplexity</a:t>
+            </a:r>
+          </a:p>
+          <a:p>
+            <a:pPr marL="228600" indent="-228600">
+              <a:buFontTx/>
+              <a:buAutoNum type="arabicPeriod"/>
+            </a:pPr>
+            <a:r>
+              <a:rPr lang="en-US" altLang="zh-CN" sz="1200" b="0" strike="noStrike" spc="-1" dirty="0">
+                <a:latin typeface="Arial"/>
+              </a:rPr>
+              <a:t>Attention</a:t>
+            </a:r>
+            <a:r>
+              <a:rPr lang="zh-CN" altLang="en-US" sz="1200" b="0" strike="noStrike" spc="-1" dirty="0">
+                <a:latin typeface="Arial"/>
+              </a:rPr>
+              <a:t> </a:t>
+            </a:r>
+            <a:r>
+              <a:rPr lang="en-US" altLang="zh-CN" sz="1200" b="0" strike="noStrike" spc="-1" dirty="0">
+                <a:latin typeface="Arial"/>
+              </a:rPr>
+              <a:t>added</a:t>
+            </a:r>
+            <a:r>
+              <a:rPr lang="zh-CN" altLang="en-US" sz="1200" b="0" strike="noStrike" spc="-1" dirty="0">
+                <a:latin typeface="Arial"/>
+              </a:rPr>
+              <a:t> </a:t>
+            </a:r>
+            <a:r>
+              <a:rPr lang="en-US" altLang="zh-CN" sz="1200" b="0" strike="noStrike" spc="-1" dirty="0">
+                <a:latin typeface="Arial"/>
+              </a:rPr>
+              <a:t>allows</a:t>
+            </a:r>
+            <a:r>
+              <a:rPr lang="zh-CN" altLang="en-US" sz="1200" b="0" strike="noStrike" spc="-1" dirty="0">
+                <a:latin typeface="Arial"/>
+              </a:rPr>
+              <a:t> </a:t>
+            </a:r>
+            <a:r>
+              <a:rPr lang="en-US" altLang="zh-CN" sz="1200" b="0" strike="noStrike" spc="-1" dirty="0">
+                <a:latin typeface="Arial"/>
+              </a:rPr>
+              <a:t>the</a:t>
+            </a:r>
+            <a:r>
+              <a:rPr lang="zh-CN" altLang="en-US" sz="1200" b="0" strike="noStrike" spc="-1" dirty="0">
+                <a:latin typeface="Arial"/>
+              </a:rPr>
+              <a:t> </a:t>
+            </a:r>
+            <a:r>
+              <a:rPr lang="en-US" altLang="zh-CN" sz="1200" b="0" strike="noStrike" spc="-1" dirty="0">
+                <a:latin typeface="Arial"/>
+              </a:rPr>
+              <a:t>decoder</a:t>
+            </a:r>
+            <a:r>
+              <a:rPr lang="zh-CN" altLang="en-US" sz="1200" b="0" strike="noStrike" spc="-1" dirty="0">
+                <a:latin typeface="Arial"/>
+              </a:rPr>
+              <a:t> </a:t>
+            </a:r>
+            <a:r>
+              <a:rPr lang="en-US" altLang="zh-CN" sz="1200" b="0" strike="noStrike" spc="-1" dirty="0">
+                <a:latin typeface="Arial"/>
+              </a:rPr>
+              <a:t>to</a:t>
+            </a:r>
+            <a:r>
+              <a:rPr lang="zh-CN" altLang="en-US" sz="1200" b="0" strike="noStrike" spc="-1" dirty="0">
+                <a:latin typeface="Arial"/>
+              </a:rPr>
+              <a:t> </a:t>
+            </a:r>
+            <a:r>
+              <a:rPr lang="en-US" altLang="zh-CN" sz="1200" b="0" strike="noStrike" spc="-1" dirty="0">
+                <a:latin typeface="Arial"/>
+              </a:rPr>
+              <a:t>focus</a:t>
+            </a:r>
+            <a:r>
+              <a:rPr lang="zh-CN" altLang="en-US" sz="1200" b="0" strike="noStrike" spc="-1" dirty="0">
+                <a:latin typeface="Arial"/>
+              </a:rPr>
+              <a:t> </a:t>
+            </a:r>
+            <a:r>
+              <a:rPr lang="en-US" altLang="zh-CN" sz="1200" spc="-1" dirty="0">
+                <a:latin typeface="Arial"/>
+              </a:rPr>
+              <a:t>on</a:t>
+            </a:r>
+            <a:r>
+              <a:rPr lang="zh-CN" altLang="en-US" sz="1200" spc="-1" dirty="0">
+                <a:latin typeface="Arial"/>
+              </a:rPr>
+              <a:t> </a:t>
+            </a:r>
+            <a:r>
+              <a:rPr lang="en-US" altLang="zh-CN" sz="1200" spc="-1" dirty="0">
+                <a:latin typeface="Arial"/>
+              </a:rPr>
+              <a:t>the</a:t>
+            </a:r>
+            <a:r>
+              <a:rPr lang="zh-CN" altLang="en-US" sz="1200" spc="-1" dirty="0">
+                <a:latin typeface="Arial"/>
+              </a:rPr>
+              <a:t> </a:t>
+            </a:r>
+            <a:r>
+              <a:rPr lang="en-US" altLang="zh-CN" sz="1200" spc="-1" dirty="0">
+                <a:latin typeface="Arial"/>
+              </a:rPr>
+              <a:t>most</a:t>
+            </a:r>
+            <a:r>
+              <a:rPr lang="zh-CN" altLang="en-US" sz="1200" spc="-1" dirty="0">
+                <a:latin typeface="Arial"/>
+              </a:rPr>
+              <a:t> </a:t>
+            </a:r>
+            <a:r>
+              <a:rPr lang="en-US" altLang="zh-CN" sz="1200" spc="-1" dirty="0">
+                <a:latin typeface="Arial"/>
+              </a:rPr>
+              <a:t>relevant</a:t>
+            </a:r>
+            <a:r>
+              <a:rPr lang="zh-CN" altLang="en-US" sz="1200" spc="-1" dirty="0">
+                <a:latin typeface="Arial"/>
+              </a:rPr>
+              <a:t> </a:t>
+            </a:r>
+            <a:r>
+              <a:rPr lang="en-US" altLang="zh-CN" sz="1200" spc="-1" dirty="0">
+                <a:latin typeface="Arial"/>
+              </a:rPr>
+              <a:t>part</a:t>
+            </a:r>
+            <a:r>
+              <a:rPr lang="zh-CN" altLang="en-US" sz="1200" spc="-1" dirty="0">
+                <a:latin typeface="Arial"/>
+              </a:rPr>
+              <a:t> </a:t>
+            </a:r>
+            <a:r>
+              <a:rPr lang="en-US" altLang="zh-CN" sz="1200" spc="-1" dirty="0">
+                <a:latin typeface="Arial"/>
+              </a:rPr>
+              <a:t>of</a:t>
+            </a:r>
+            <a:r>
+              <a:rPr lang="zh-CN" altLang="en-US" sz="1200" spc="-1" dirty="0">
+                <a:latin typeface="Arial"/>
+              </a:rPr>
+              <a:t> </a:t>
+            </a:r>
+            <a:r>
+              <a:rPr lang="en-US" altLang="zh-CN" sz="1200" spc="-1" dirty="0">
+                <a:latin typeface="Arial"/>
+              </a:rPr>
+              <a:t>the</a:t>
+            </a:r>
+            <a:r>
+              <a:rPr lang="zh-CN" altLang="en-US" sz="1200" spc="-1" dirty="0">
+                <a:latin typeface="Arial"/>
+              </a:rPr>
+              <a:t> </a:t>
+            </a:r>
+            <a:r>
+              <a:rPr lang="en-US" altLang="zh-CN" sz="1200" spc="-1" dirty="0">
+                <a:latin typeface="Arial"/>
+              </a:rPr>
+              <a:t>sequence</a:t>
+            </a:r>
+            <a:r>
+              <a:rPr lang="zh-CN" altLang="en-US" sz="1200" spc="-1" dirty="0">
+                <a:latin typeface="Arial"/>
+              </a:rPr>
+              <a:t> </a:t>
+            </a:r>
+            <a:r>
+              <a:rPr lang="en-US" altLang="zh-CN" sz="1200" spc="-1" dirty="0">
+                <a:latin typeface="Arial"/>
+              </a:rPr>
+              <a:t>sources</a:t>
+            </a:r>
+            <a:r>
+              <a:rPr lang="zh-CN" altLang="en-US" sz="1200" spc="-1" dirty="0">
+                <a:latin typeface="Arial"/>
+              </a:rPr>
+              <a:t> </a:t>
+            </a:r>
+            <a:r>
+              <a:rPr lang="en-US" altLang="zh-CN" sz="1200" spc="-1" dirty="0">
+                <a:latin typeface="Arial"/>
+              </a:rPr>
+              <a:t>of</a:t>
+            </a:r>
+            <a:r>
+              <a:rPr lang="zh-CN" altLang="en-US" sz="1200" spc="-1" dirty="0">
+                <a:latin typeface="Arial"/>
+              </a:rPr>
+              <a:t> </a:t>
+            </a:r>
+            <a:r>
+              <a:rPr lang="en-US" altLang="zh-CN" sz="1200" spc="-1" dirty="0">
+                <a:latin typeface="Arial"/>
+              </a:rPr>
+              <a:t>each</a:t>
+            </a:r>
+            <a:r>
+              <a:rPr lang="zh-CN" altLang="en-US" sz="1200" spc="-1" dirty="0">
+                <a:latin typeface="Arial"/>
+              </a:rPr>
+              <a:t> </a:t>
+            </a:r>
+            <a:r>
+              <a:rPr lang="en-US" altLang="zh-CN" sz="1200" spc="-1" dirty="0">
+                <a:latin typeface="Arial"/>
+              </a:rPr>
+              <a:t>step,</a:t>
+            </a:r>
+            <a:r>
+              <a:rPr lang="zh-CN" altLang="en-US" sz="1200" spc="-1" dirty="0">
+                <a:latin typeface="Arial"/>
+              </a:rPr>
+              <a:t> </a:t>
+            </a:r>
+            <a:r>
+              <a:rPr lang="en-US" altLang="zh-CN" sz="1200" spc="-1" dirty="0">
+                <a:latin typeface="Arial"/>
+              </a:rPr>
+              <a:t>instead</a:t>
+            </a:r>
+            <a:r>
+              <a:rPr lang="zh-CN" altLang="en-US" sz="1200" spc="-1" dirty="0">
+                <a:latin typeface="Arial"/>
+              </a:rPr>
+              <a:t> </a:t>
+            </a:r>
+            <a:r>
+              <a:rPr lang="en-US" altLang="zh-CN" sz="1200" spc="-1" dirty="0">
+                <a:latin typeface="Arial"/>
+              </a:rPr>
+              <a:t>of</a:t>
+            </a:r>
+            <a:r>
+              <a:rPr lang="zh-CN" altLang="en-US" sz="1200" spc="-1" dirty="0">
+                <a:latin typeface="Arial"/>
+              </a:rPr>
+              <a:t> </a:t>
+            </a:r>
+            <a:r>
+              <a:rPr lang="en-US" altLang="zh-CN" sz="1200" spc="-1" dirty="0">
+                <a:latin typeface="Arial"/>
+              </a:rPr>
+              <a:t>solely</a:t>
+            </a:r>
+            <a:r>
+              <a:rPr lang="zh-CN" altLang="en-US" sz="1200" spc="-1" dirty="0">
+                <a:latin typeface="Arial"/>
+              </a:rPr>
+              <a:t> </a:t>
+            </a:r>
+            <a:r>
+              <a:rPr lang="en-US" altLang="zh-CN" sz="1200" spc="-1" dirty="0">
+                <a:latin typeface="Arial"/>
+              </a:rPr>
+              <a:t>relying</a:t>
+            </a:r>
+            <a:r>
+              <a:rPr lang="zh-CN" altLang="en-US" sz="1200" spc="-1" dirty="0">
+                <a:latin typeface="Arial"/>
+              </a:rPr>
+              <a:t> </a:t>
+            </a:r>
+            <a:r>
+              <a:rPr lang="en-US" altLang="zh-CN" sz="1200" spc="-1" dirty="0">
+                <a:latin typeface="Arial"/>
+              </a:rPr>
+              <a:t>on</a:t>
+            </a:r>
+            <a:r>
+              <a:rPr lang="zh-CN" altLang="en-US" sz="1200" spc="-1" dirty="0">
+                <a:latin typeface="Arial"/>
+              </a:rPr>
+              <a:t> </a:t>
+            </a:r>
+            <a:r>
+              <a:rPr lang="en-US" altLang="zh-CN" sz="1200" spc="-1" dirty="0">
+                <a:latin typeface="Arial"/>
+              </a:rPr>
+              <a:t>the</a:t>
+            </a:r>
+            <a:r>
+              <a:rPr lang="zh-CN" altLang="en-US" sz="1200" spc="-1" dirty="0">
+                <a:latin typeface="Arial"/>
+              </a:rPr>
+              <a:t> </a:t>
+            </a:r>
+            <a:r>
+              <a:rPr lang="en-US" altLang="zh-CN" sz="1200" spc="-1" dirty="0">
+                <a:latin typeface="Arial"/>
+              </a:rPr>
+              <a:t>last</a:t>
+            </a:r>
+            <a:r>
+              <a:rPr lang="zh-CN" altLang="en-US" sz="1200" spc="-1" dirty="0">
+                <a:latin typeface="Arial"/>
+              </a:rPr>
+              <a:t> </a:t>
+            </a:r>
+            <a:r>
+              <a:rPr lang="en-US" altLang="zh-CN" sz="1200" spc="-1" dirty="0">
+                <a:latin typeface="Arial"/>
+              </a:rPr>
+              <a:t>hidden</a:t>
+            </a:r>
+            <a:r>
+              <a:rPr lang="zh-CN" altLang="en-US" sz="1200" spc="-1" dirty="0">
+                <a:latin typeface="Arial"/>
+              </a:rPr>
+              <a:t> </a:t>
+            </a:r>
+            <a:r>
+              <a:rPr lang="en-US" altLang="zh-CN" sz="1200" spc="-1" dirty="0">
+                <a:latin typeface="Arial"/>
+              </a:rPr>
+              <a:t>state</a:t>
+            </a:r>
+            <a:r>
+              <a:rPr lang="zh-CN" altLang="en-US" sz="1200" spc="-1" dirty="0">
+                <a:latin typeface="Arial"/>
+              </a:rPr>
+              <a:t> </a:t>
+            </a:r>
+            <a:r>
+              <a:rPr lang="en-US" altLang="zh-CN" sz="1200" spc="-1" dirty="0">
+                <a:latin typeface="Arial"/>
+              </a:rPr>
+              <a:t>of</a:t>
+            </a:r>
+            <a:r>
+              <a:rPr lang="zh-CN" altLang="en-US" sz="1200" spc="-1" dirty="0">
+                <a:latin typeface="Arial"/>
+              </a:rPr>
+              <a:t> </a:t>
+            </a:r>
+            <a:r>
+              <a:rPr lang="en-US" altLang="zh-CN" sz="1200" spc="-1" dirty="0">
+                <a:latin typeface="Arial"/>
+              </a:rPr>
+              <a:t>the</a:t>
+            </a:r>
+            <a:r>
+              <a:rPr lang="zh-CN" altLang="en-US" sz="1200" spc="-1" dirty="0">
+                <a:latin typeface="Arial"/>
+              </a:rPr>
+              <a:t> </a:t>
+            </a:r>
+            <a:r>
+              <a:rPr lang="en-US" altLang="zh-CN" sz="1200" spc="-1" dirty="0">
+                <a:latin typeface="Arial"/>
+              </a:rPr>
+              <a:t>encoder.</a:t>
+            </a:r>
+          </a:p>
+          <a:p>
+            <a:endParaRPr lang="en-US" sz="1200" b="0" strike="noStrike" spc="-1" dirty="0">
+              <a:latin typeface="Arial"/>
+            </a:endParaRPr>
+          </a:p>
+        </p:txBody>
+      </p:sp>
     </p:spTree>
     <p:extLst>
       <p:ext uri="{BB962C8B-B14F-4D97-AF65-F5344CB8AC3E}">
@@ -11536,7 +15035,7 @@
         </p:nvSpPr>
         <p:spPr>
           <a:xfrm>
-            <a:off x="380144" y="1067102"/>
+            <a:off x="4840941" y="681109"/>
             <a:ext cx="3056563" cy="1606850"/>
           </a:xfrm>
           <a:prstGeom prst="rect">
@@ -11572,8 +15071,13 @@
             </a:pPr>
             <a:r>
               <a:rPr lang="en-US" dirty="0"/>
-              <a:t>Training Loss: ?</a:t>
-            </a:r>
+              <a:t>Training Loss: </a:t>
+            </a:r>
+            <a:r>
+              <a:rPr lang="en-US" altLang="zh-CN" dirty="0"/>
+              <a:t>1.49</a:t>
+            </a:r>
+            <a:endParaRPr lang="en-US" dirty="0"/>
           </a:p>
           <a:p>
             <a:pPr>
@@ -11583,8 +15087,13 @@
             </a:pPr>
             <a:r>
               <a:rPr lang="en-US" dirty="0"/>
-              <a:t>Training Perplexity: ?</a:t>
-            </a:r>
+              <a:t>Training Perplexity: </a:t>
+            </a:r>
+            <a:r>
+              <a:rPr lang="en-US" altLang="zh-CN" dirty="0"/>
+              <a:t>4.46</a:t>
+            </a:r>
+            <a:endParaRPr lang="en-US" dirty="0"/>
           </a:p>
           <a:p>
             <a:pPr>
@@ -11594,8 +15103,13 @@
             </a:pPr>
             <a:r>
               <a:rPr lang="en-US" dirty="0"/>
-              <a:t>Validation Loss: ?</a:t>
-            </a:r>
+              <a:t>Validation Loss: </a:t>
+            </a:r>
+            <a:r>
+              <a:rPr lang="en-US" altLang="zh-CN" dirty="0"/>
+              <a:t>1.85</a:t>
+            </a:r>
+            <a:endParaRPr lang="en-US" dirty="0"/>
           </a:p>
           <a:p>
             <a:pPr>
@@ -11605,8 +15119,13 @@
             </a:pPr>
             <a:r>
               <a:rPr lang="en-US" dirty="0"/>
-              <a:t>Validation Perplexity: ?</a:t>
-            </a:r>
+              <a:t>Validation Perplexity: </a:t>
+            </a:r>
+            <a:r>
+              <a:rPr lang="en-US" altLang="zh-CN" dirty="0"/>
+              <a:t>6.37</a:t>
+            </a:r>
+            <a:endParaRPr lang="en-US" dirty="0"/>
           </a:p>
         </p:txBody>
       </p:sp>
@@ -11624,7 +15143,7 @@
         </p:nvSpPr>
         <p:spPr>
           <a:xfrm>
-            <a:off x="380144" y="3058578"/>
+            <a:off x="375008" y="2479798"/>
             <a:ext cx="8024117" cy="375744"/>
           </a:xfrm>
           <a:prstGeom prst="rect">
@@ -11647,6 +15166,284 @@
               <a:rPr lang="en-US" dirty="0"/>
               <a:t>List your best model hyper-parameter values including model type: ? </a:t>
             </a:r>
+          </a:p>
+        </p:txBody>
+      </p:sp>
+      <p:sp>
+        <p:nvSpPr>
+          <p:cNvPr id="4" name="TextBox 3">
+            <a:extLst>
+              <a:ext uri="{FF2B5EF4-FFF2-40B4-BE49-F238E27FC236}">
+                <a16:creationId xmlns:a16="http://schemas.microsoft.com/office/drawing/2014/main" id="{5FE5F15D-F817-73BC-CF10-A0E30DFEC131}"/>
+              </a:ext>
+            </a:extLst>
+          </p:cNvPr>
+          <p:cNvSpPr txBox="1"/>
+          <p:nvPr/>
+        </p:nvSpPr>
+        <p:spPr>
+          <a:xfrm>
+            <a:off x="375008" y="2773620"/>
+            <a:ext cx="7047951" cy="2369880"/>
+          </a:xfrm>
+          <a:prstGeom prst="rect">
+            <a:avLst/>
+          </a:prstGeom>
+          <a:noFill/>
+        </p:spPr>
+        <p:txBody>
+          <a:bodyPr wrap="square" rtlCol="0">
+            <a:spAutoFit/>
+          </a:bodyPr>
+          <a:lstStyle/>
+          <a:p>
+            <a:pPr algn="ctr">
+              <a:lnSpc>
+                <a:spcPts val="2400"/>
+              </a:lnSpc>
+            </a:pPr>
+            <a:r>
+              <a:rPr lang="en-US" dirty="0">
+                <a:solidFill>
+                  <a:srgbClr val="0070C0"/>
+                </a:solidFill>
+              </a:rPr>
+              <a:t>Best model</a:t>
+            </a:r>
+            <a:r>
+              <a:rPr lang="zh-CN" altLang="en-US" dirty="0">
+                <a:solidFill>
+                  <a:srgbClr val="0070C0"/>
+                </a:solidFill>
+              </a:rPr>
+              <a:t> </a:t>
+            </a:r>
+            <a:r>
+              <a:rPr lang="en-US" altLang="zh-CN" dirty="0">
+                <a:solidFill>
+                  <a:srgbClr val="0070C0"/>
+                </a:solidFill>
+              </a:rPr>
+              <a:t>hyper</a:t>
+            </a:r>
+            <a:r>
+              <a:rPr lang="zh-CN" altLang="en-US" dirty="0">
+                <a:solidFill>
+                  <a:srgbClr val="0070C0"/>
+                </a:solidFill>
+              </a:rPr>
+              <a:t> </a:t>
+            </a:r>
+            <a:r>
+              <a:rPr lang="en-US" altLang="zh-CN" dirty="0">
+                <a:solidFill>
+                  <a:srgbClr val="0070C0"/>
+                </a:solidFill>
+              </a:rPr>
+              <a:t>parameter</a:t>
+            </a:r>
+            <a:r>
+              <a:rPr lang="zh-CN" altLang="en-US" dirty="0">
+                <a:solidFill>
+                  <a:srgbClr val="0070C0"/>
+                </a:solidFill>
+              </a:rPr>
+              <a:t> </a:t>
+            </a:r>
+            <a:r>
+              <a:rPr lang="en-US" altLang="zh-CN" dirty="0">
+                <a:solidFill>
+                  <a:srgbClr val="0070C0"/>
+                </a:solidFill>
+              </a:rPr>
+              <a:t>values</a:t>
+            </a:r>
+            <a:r>
+              <a:rPr lang="zh-CN" altLang="en-US" dirty="0">
+                <a:solidFill>
+                  <a:srgbClr val="0070C0"/>
+                </a:solidFill>
+              </a:rPr>
+              <a:t> </a:t>
+            </a:r>
+            <a:r>
+              <a:rPr lang="en-US" altLang="zh-CN" dirty="0">
+                <a:solidFill>
+                  <a:srgbClr val="0070C0"/>
+                </a:solidFill>
+              </a:rPr>
+              <a:t>including</a:t>
+            </a:r>
+            <a:r>
+              <a:rPr lang="zh-CN" altLang="en-US" dirty="0">
+                <a:solidFill>
+                  <a:srgbClr val="0070C0"/>
+                </a:solidFill>
+              </a:rPr>
+              <a:t> </a:t>
+            </a:r>
+            <a:r>
+              <a:rPr lang="en-US" altLang="zh-CN" dirty="0">
+                <a:solidFill>
+                  <a:srgbClr val="0070C0"/>
+                </a:solidFill>
+              </a:rPr>
+              <a:t>model</a:t>
+            </a:r>
+            <a:r>
+              <a:rPr lang="zh-CN" altLang="en-US" dirty="0">
+                <a:solidFill>
+                  <a:srgbClr val="0070C0"/>
+                </a:solidFill>
+              </a:rPr>
+              <a:t> </a:t>
+            </a:r>
+            <a:r>
+              <a:rPr lang="en-US" altLang="zh-CN" dirty="0">
+                <a:solidFill>
+                  <a:srgbClr val="0070C0"/>
+                </a:solidFill>
+              </a:rPr>
+              <a:t>type:</a:t>
+            </a:r>
+            <a:r>
+              <a:rPr lang="zh-CN" altLang="en-US" dirty="0">
+                <a:solidFill>
+                  <a:srgbClr val="0070C0"/>
+                </a:solidFill>
+              </a:rPr>
+              <a:t> </a:t>
+            </a:r>
+            <a:endParaRPr lang="en-US" dirty="0">
+              <a:solidFill>
+                <a:srgbClr val="0070C0"/>
+              </a:solidFill>
+            </a:endParaRPr>
+          </a:p>
+          <a:p>
+            <a:pPr>
+              <a:lnSpc>
+                <a:spcPts val="2400"/>
+              </a:lnSpc>
+            </a:pPr>
+            <a:r>
+              <a:rPr lang="en-US" altLang="zh-CN" dirty="0"/>
+              <a:t>Model</a:t>
+            </a:r>
+            <a:r>
+              <a:rPr lang="zh-CN" altLang="en-US" dirty="0"/>
+              <a:t> </a:t>
+            </a:r>
+            <a:r>
+              <a:rPr lang="en-US" altLang="zh-CN" dirty="0"/>
+              <a:t>type</a:t>
+            </a:r>
+            <a:r>
+              <a:rPr lang="en-US" dirty="0"/>
+              <a:t>: </a:t>
+            </a:r>
+            <a:r>
+              <a:rPr lang="en-US" altLang="zh-CN" dirty="0"/>
+              <a:t>RNN</a:t>
+            </a:r>
+            <a:r>
+              <a:rPr lang="zh-CN" altLang="en-US" dirty="0"/>
+              <a:t> </a:t>
+            </a:r>
+            <a:r>
+              <a:rPr lang="en-US" altLang="zh-CN" dirty="0"/>
+              <a:t>+</a:t>
+            </a:r>
+            <a:r>
+              <a:rPr lang="zh-CN" altLang="en-US" dirty="0"/>
+              <a:t> </a:t>
+            </a:r>
+            <a:r>
+              <a:rPr lang="en-US" altLang="zh-CN" dirty="0"/>
+              <a:t>Attention</a:t>
+            </a:r>
+            <a:endParaRPr lang="en-US" dirty="0"/>
+          </a:p>
+          <a:p>
+            <a:pPr>
+              <a:buNone/>
+            </a:pPr>
+            <a:r>
+              <a:rPr lang="en-US" dirty="0"/>
+              <a:t>Hidden size: 2</a:t>
+            </a:r>
+          </a:p>
+          <a:p>
+            <a:pPr>
+              <a:buNone/>
+            </a:pPr>
+            <a:r>
+              <a:rPr lang="en-US" dirty="0"/>
+              <a:t>Embedding size: </a:t>
+            </a:r>
+            <a:r>
+              <a:rPr lang="en-US" altLang="zh-CN" dirty="0"/>
+              <a:t>4</a:t>
+            </a:r>
+            <a:endParaRPr lang="en-US" dirty="0"/>
+          </a:p>
+          <a:p>
+            <a:pPr>
+              <a:buNone/>
+            </a:pPr>
+            <a:r>
+              <a:rPr lang="en-US" dirty="0"/>
+              <a:t>Number of attention heads: </a:t>
+            </a:r>
+            <a:r>
+              <a:rPr lang="en-US" altLang="zh-CN" dirty="0"/>
+              <a:t>1</a:t>
+            </a:r>
+            <a:endParaRPr lang="en-US" dirty="0"/>
+          </a:p>
+          <a:p>
+            <a:pPr>
+              <a:buNone/>
+            </a:pPr>
+            <a:r>
+              <a:rPr lang="en-US" dirty="0"/>
+              <a:t>Feedforward hidden size:</a:t>
+            </a:r>
+            <a:r>
+              <a:rPr lang="zh-CN" altLang="en-US" dirty="0"/>
+              <a:t> </a:t>
+            </a:r>
+            <a:r>
+              <a:rPr lang="en-US" altLang="zh-CN" dirty="0"/>
+              <a:t>2</a:t>
+            </a:r>
+          </a:p>
+          <a:p>
+            <a:pPr>
+              <a:buNone/>
+            </a:pPr>
+            <a:r>
+              <a:rPr lang="en-US" altLang="zh-CN" dirty="0"/>
+              <a:t>LR:</a:t>
+            </a:r>
+            <a:r>
+              <a:rPr lang="zh-CN" altLang="en-US" dirty="0"/>
+              <a:t> </a:t>
+            </a:r>
+            <a:r>
+              <a:rPr lang="en-US" altLang="zh-CN" dirty="0"/>
+              <a:t>1e-3</a:t>
+            </a:r>
+          </a:p>
+          <a:p>
+            <a:pPr>
+              <a:buNone/>
+            </a:pPr>
+            <a:r>
+              <a:rPr lang="en-US" altLang="zh-CN" dirty="0"/>
+              <a:t>Dropout:0.2</a:t>
+            </a:r>
+            <a:endParaRPr lang="en-US" dirty="0"/>
           </a:p>
         </p:txBody>
       </p:sp>
@@ -11714,6 +15511,352 @@
               </a:rPr>
               <a:t>Seq2Seq Best model Learning Curves (Perplexity)</a:t>
             </a:r>
+          </a:p>
+        </p:txBody>
+      </p:sp>
+      <p:pic>
+        <p:nvPicPr>
+          <p:cNvPr id="4" name="Picture 3" descr="A graph of a number of graphs&#10;&#10;AI-generated content may be incorrect.">
+            <a:extLst>
+              <a:ext uri="{FF2B5EF4-FFF2-40B4-BE49-F238E27FC236}">
+                <a16:creationId xmlns:a16="http://schemas.microsoft.com/office/drawing/2014/main" id="{E4370F34-148A-BF45-861E-929A86CB2816}"/>
+              </a:ext>
+            </a:extLst>
+          </p:cNvPr>
+          <p:cNvPicPr>
+            <a:picLocks noChangeAspect="1"/>
+          </p:cNvPicPr>
+          <p:nvPr/>
+        </p:nvPicPr>
+        <p:blipFill>
+          <a:blip r:embed="rId2">
+            <a:extLst>
+              <a:ext uri="{28A0092B-C50C-407E-A947-70E740481C1C}">
+                <a14:useLocalDpi xmlns:a14="http://schemas.microsoft.com/office/drawing/2010/main" val="0"/>
+              </a:ext>
+            </a:extLst>
+          </a:blip>
+          <a:stretch>
+            <a:fillRect/>
+          </a:stretch>
+        </p:blipFill>
+        <p:spPr>
+          <a:xfrm>
+            <a:off x="493160" y="1054290"/>
+            <a:ext cx="4240205" cy="3417816"/>
+          </a:xfrm>
+          <a:prstGeom prst="rect">
+            <a:avLst/>
+          </a:prstGeom>
+        </p:spPr>
+      </p:pic>
+      <p:sp>
+        <p:nvSpPr>
+          <p:cNvPr id="6" name="TextBox 5">
+            <a:extLst>
+              <a:ext uri="{FF2B5EF4-FFF2-40B4-BE49-F238E27FC236}">
+                <a16:creationId xmlns:a16="http://schemas.microsoft.com/office/drawing/2014/main" id="{18B0DA95-F9DA-FE46-8A63-DCCB7F33E742}"/>
+              </a:ext>
+            </a:extLst>
+          </p:cNvPr>
+          <p:cNvSpPr txBox="1"/>
+          <p:nvPr/>
+        </p:nvSpPr>
+        <p:spPr>
+          <a:xfrm>
+            <a:off x="5065161" y="1364695"/>
+            <a:ext cx="3614571" cy="2204834"/>
+          </a:xfrm>
+          <a:prstGeom prst="rect">
+            <a:avLst/>
+          </a:prstGeom>
+          <a:noFill/>
+        </p:spPr>
+        <p:txBody>
+          <a:bodyPr wrap="square" rtlCol="0">
+            <a:spAutoFit/>
+          </a:bodyPr>
+          <a:lstStyle/>
+          <a:p>
+            <a:pPr algn="ctr">
+              <a:lnSpc>
+                <a:spcPts val="2400"/>
+              </a:lnSpc>
+            </a:pPr>
+            <a:r>
+              <a:rPr lang="en-US" altLang="zh-CN" sz="1200" dirty="0">
+                <a:solidFill>
+                  <a:srgbClr val="0070C0"/>
+                </a:solidFill>
+              </a:rPr>
+              <a:t>Describe</a:t>
+            </a:r>
+            <a:r>
+              <a:rPr lang="zh-CN" altLang="en-US" sz="1200" dirty="0">
+                <a:solidFill>
+                  <a:srgbClr val="0070C0"/>
+                </a:solidFill>
+              </a:rPr>
+              <a:t> </a:t>
+            </a:r>
+            <a:r>
+              <a:rPr lang="en-US" altLang="zh-CN" sz="1200" dirty="0">
+                <a:solidFill>
+                  <a:srgbClr val="0070C0"/>
+                </a:solidFill>
+              </a:rPr>
+              <a:t>in</a:t>
+            </a:r>
+            <a:r>
+              <a:rPr lang="zh-CN" altLang="en-US" sz="1200" dirty="0">
+                <a:solidFill>
+                  <a:srgbClr val="0070C0"/>
+                </a:solidFill>
+              </a:rPr>
+              <a:t> </a:t>
+            </a:r>
+            <a:r>
+              <a:rPr lang="en-US" altLang="zh-CN" sz="1200" dirty="0">
+                <a:solidFill>
+                  <a:srgbClr val="0070C0"/>
+                </a:solidFill>
+              </a:rPr>
+              <a:t>text:</a:t>
+            </a:r>
+            <a:endParaRPr lang="en-US" sz="1200" dirty="0">
+              <a:solidFill>
+                <a:srgbClr val="0070C0"/>
+              </a:solidFill>
+            </a:endParaRPr>
+          </a:p>
+          <a:p>
+            <a:pPr>
+              <a:lnSpc>
+                <a:spcPts val="2400"/>
+              </a:lnSpc>
+            </a:pPr>
+            <a:r>
+              <a:rPr lang="en-US" altLang="zh-CN" sz="1200" dirty="0"/>
+              <a:t>-</a:t>
+            </a:r>
+            <a:r>
+              <a:rPr lang="zh-CN" altLang="en-US" sz="1200" dirty="0"/>
+              <a:t> </a:t>
+            </a:r>
+            <a:r>
+              <a:rPr lang="en-US" altLang="zh-CN" sz="1200" dirty="0"/>
+              <a:t>Learning</a:t>
+            </a:r>
+            <a:r>
+              <a:rPr lang="zh-CN" altLang="en-US" sz="1200" dirty="0"/>
+              <a:t> </a:t>
+            </a:r>
+            <a:r>
+              <a:rPr lang="en-US" altLang="zh-CN" sz="1200" dirty="0"/>
+              <a:t>curve</a:t>
+            </a:r>
+            <a:r>
+              <a:rPr lang="zh-CN" altLang="en-US" sz="1200" dirty="0"/>
+              <a:t> </a:t>
+            </a:r>
+            <a:r>
+              <a:rPr lang="en-US" altLang="zh-CN" sz="1200" dirty="0"/>
+              <a:t>starts</a:t>
+            </a:r>
+            <a:r>
+              <a:rPr lang="zh-CN" altLang="en-US" sz="1200" dirty="0"/>
+              <a:t> </a:t>
+            </a:r>
+            <a:r>
+              <a:rPr lang="en-US" altLang="zh-CN" sz="1200" dirty="0"/>
+              <a:t>very</a:t>
+            </a:r>
+            <a:r>
+              <a:rPr lang="zh-CN" altLang="en-US" sz="1200" dirty="0"/>
+              <a:t> </a:t>
+            </a:r>
+            <a:r>
+              <a:rPr lang="en-US" altLang="zh-CN" sz="1200" dirty="0"/>
+              <a:t>high</a:t>
+            </a:r>
+            <a:r>
+              <a:rPr lang="zh-CN" altLang="en-US" sz="1200" dirty="0"/>
+              <a:t> </a:t>
+            </a:r>
+            <a:r>
+              <a:rPr lang="en-US" altLang="zh-CN" sz="1200" dirty="0"/>
+              <a:t>for</a:t>
+            </a:r>
+            <a:r>
+              <a:rPr lang="zh-CN" altLang="en-US" sz="1200" dirty="0"/>
+              <a:t> </a:t>
+            </a:r>
+            <a:r>
+              <a:rPr lang="en-US" altLang="zh-CN" sz="1200" dirty="0"/>
+              <a:t>seq2seqRNN</a:t>
+            </a:r>
+          </a:p>
+          <a:p>
+            <a:pPr marL="171450" indent="-171450">
+              <a:lnSpc>
+                <a:spcPts val="2400"/>
+              </a:lnSpc>
+              <a:buFontTx/>
+              <a:buChar char="-"/>
+            </a:pPr>
+            <a:r>
+              <a:rPr lang="en-US" altLang="zh-CN" sz="1200" dirty="0"/>
+              <a:t>Gets</a:t>
+            </a:r>
+            <a:r>
+              <a:rPr lang="zh-CN" altLang="en-US" sz="1200" dirty="0"/>
+              <a:t> </a:t>
+            </a:r>
+            <a:r>
+              <a:rPr lang="en-US" altLang="zh-CN" sz="1200" dirty="0"/>
+              <a:t>flatten</a:t>
+            </a:r>
+            <a:r>
+              <a:rPr lang="zh-CN" altLang="en-US" sz="1200" dirty="0"/>
+              <a:t> </a:t>
+            </a:r>
+            <a:r>
+              <a:rPr lang="en-US" altLang="zh-CN" sz="1200" dirty="0"/>
+              <a:t>after</a:t>
+            </a:r>
+            <a:r>
+              <a:rPr lang="zh-CN" altLang="en-US" sz="1200" dirty="0"/>
+              <a:t> </a:t>
+            </a:r>
+            <a:r>
+              <a:rPr lang="en-US" altLang="zh-CN" sz="1200" dirty="0"/>
+              <a:t>around</a:t>
+            </a:r>
+            <a:r>
+              <a:rPr lang="zh-CN" altLang="en-US" sz="1200" dirty="0"/>
+              <a:t> </a:t>
+            </a:r>
+            <a:r>
+              <a:rPr lang="en-US" altLang="zh-CN" sz="1200" dirty="0"/>
+              <a:t>10</a:t>
+            </a:r>
+            <a:r>
+              <a:rPr lang="zh-CN" altLang="en-US" sz="1200" dirty="0"/>
+              <a:t> </a:t>
+            </a:r>
+            <a:r>
+              <a:rPr lang="en-US" altLang="zh-CN" sz="1200" dirty="0"/>
+              <a:t>epochs,</a:t>
+            </a:r>
+            <a:r>
+              <a:rPr lang="zh-CN" altLang="en-US" sz="1200" dirty="0"/>
+              <a:t> </a:t>
+            </a:r>
+            <a:r>
+              <a:rPr lang="en-US" altLang="zh-CN" sz="1200" dirty="0"/>
+              <a:t>indicating</a:t>
+            </a:r>
+            <a:r>
+              <a:rPr lang="zh-CN" altLang="en-US" sz="1200" dirty="0"/>
+              <a:t> </a:t>
+            </a:r>
+            <a:r>
+              <a:rPr lang="en-US" altLang="zh-CN" sz="1200" dirty="0"/>
+              <a:t>convergence</a:t>
+            </a:r>
+          </a:p>
+          <a:p>
+            <a:pPr marL="171450" indent="-171450">
+              <a:lnSpc>
+                <a:spcPts val="2400"/>
+              </a:lnSpc>
+              <a:buFontTx/>
+              <a:buChar char="-"/>
+            </a:pPr>
+            <a:r>
+              <a:rPr lang="en-US" altLang="zh-CN" sz="1200" dirty="0"/>
+              <a:t>Validation</a:t>
+            </a:r>
+            <a:r>
+              <a:rPr lang="zh-CN" altLang="en-US" sz="1200" dirty="0"/>
+              <a:t> </a:t>
+            </a:r>
+            <a:r>
+              <a:rPr lang="en-US" altLang="zh-CN" sz="1200" dirty="0"/>
+              <a:t>closely</a:t>
+            </a:r>
+            <a:r>
+              <a:rPr lang="zh-CN" altLang="en-US" sz="1200" dirty="0"/>
+              <a:t> </a:t>
+            </a:r>
+            <a:r>
+              <a:rPr lang="en-US" altLang="zh-CN" sz="1200" dirty="0"/>
+              <a:t>follows</a:t>
+            </a:r>
+            <a:r>
+              <a:rPr lang="zh-CN" altLang="en-US" sz="1200" dirty="0"/>
+              <a:t> </a:t>
+            </a:r>
+            <a:r>
+              <a:rPr lang="en-US" altLang="zh-CN" sz="1200" dirty="0"/>
+              <a:t>the</a:t>
+            </a:r>
+            <a:r>
+              <a:rPr lang="zh-CN" altLang="en-US" sz="1200" dirty="0"/>
+              <a:t> </a:t>
+            </a:r>
+            <a:r>
+              <a:rPr lang="en-US" altLang="zh-CN" sz="1200" dirty="0"/>
+              <a:t>training</a:t>
+            </a:r>
+            <a:r>
+              <a:rPr lang="zh-CN" altLang="en-US" sz="1200" dirty="0"/>
+              <a:t> </a:t>
+            </a:r>
+            <a:r>
+              <a:rPr lang="en-US" altLang="zh-CN" sz="1200" dirty="0"/>
+              <a:t>perplexity,</a:t>
+            </a:r>
+            <a:r>
+              <a:rPr lang="zh-CN" altLang="en-US" sz="1200" dirty="0"/>
+              <a:t> </a:t>
+            </a:r>
+            <a:r>
+              <a:rPr lang="en-US" altLang="zh-CN" sz="1200" dirty="0"/>
+              <a:t>indicating</a:t>
+            </a:r>
+            <a:r>
+              <a:rPr lang="zh-CN" altLang="en-US" sz="1200" dirty="0"/>
+              <a:t> </a:t>
+            </a:r>
+            <a:r>
+              <a:rPr lang="en-US" altLang="zh-CN" sz="1200" dirty="0"/>
+              <a:t>no</a:t>
+            </a:r>
+            <a:r>
+              <a:rPr lang="zh-CN" altLang="en-US" sz="1200" dirty="0"/>
+              <a:t> </a:t>
+            </a:r>
+            <a:r>
+              <a:rPr lang="en-US" altLang="zh-CN" sz="1200" dirty="0"/>
+              <a:t>severe</a:t>
+            </a:r>
+            <a:r>
+              <a:rPr lang="zh-CN" altLang="en-US" sz="1200" dirty="0"/>
+              <a:t> </a:t>
+            </a:r>
+            <a:r>
+              <a:rPr lang="en-US" altLang="zh-CN" sz="1200" dirty="0"/>
+              <a:t>overfitting</a:t>
+            </a:r>
+          </a:p>
+          <a:p>
+            <a:pPr>
+              <a:lnSpc>
+                <a:spcPts val="2400"/>
+              </a:lnSpc>
+            </a:pPr>
+            <a:endParaRPr lang="en-US" sz="1200" dirty="0"/>
           </a:p>
         </p:txBody>
       </p:sp>
@@ -11921,6 +16064,529 @@
             <a:endParaRPr lang="en-US" sz="1200" b="0" strike="noStrike" spc="-1" dirty="0">
               <a:latin typeface="Arial"/>
             </a:endParaRPr>
+          </a:p>
+        </p:txBody>
+      </p:sp>
+      <p:sp>
+        <p:nvSpPr>
+          <p:cNvPr id="5" name="TextBox 4">
+            <a:extLst>
+              <a:ext uri="{FF2B5EF4-FFF2-40B4-BE49-F238E27FC236}">
+                <a16:creationId xmlns:a16="http://schemas.microsoft.com/office/drawing/2014/main" id="{A9B82E2E-0FA1-9893-EA8D-403EB0967023}"/>
+              </a:ext>
+            </a:extLst>
+          </p:cNvPr>
+          <p:cNvSpPr txBox="1"/>
+          <p:nvPr/>
+        </p:nvSpPr>
+        <p:spPr>
+          <a:xfrm>
+            <a:off x="344159" y="983484"/>
+            <a:ext cx="8024117" cy="3761222"/>
+          </a:xfrm>
+          <a:prstGeom prst="rect">
+            <a:avLst/>
+          </a:prstGeom>
+          <a:noFill/>
+        </p:spPr>
+        <p:txBody>
+          <a:bodyPr wrap="square" rtlCol="0">
+            <a:spAutoFit/>
+          </a:bodyPr>
+          <a:lstStyle/>
+          <a:p>
+            <a:pPr>
+              <a:lnSpc>
+                <a:spcPts val="2400"/>
+              </a:lnSpc>
+            </a:pPr>
+            <a:r>
+              <a:rPr lang="en-US" altLang="zh-CN" dirty="0"/>
+              <a:t>Best</a:t>
+            </a:r>
+            <a:r>
+              <a:rPr lang="zh-CN" altLang="en-US" dirty="0"/>
+              <a:t> </a:t>
+            </a:r>
+            <a:r>
+              <a:rPr lang="en-US" altLang="zh-CN" dirty="0"/>
+              <a:t>Model</a:t>
+            </a:r>
+            <a:r>
+              <a:rPr lang="zh-CN" altLang="en-US" dirty="0"/>
+              <a:t> </a:t>
+            </a:r>
+            <a:r>
+              <a:rPr lang="en-US" altLang="zh-CN" dirty="0"/>
+              <a:t>details:</a:t>
+            </a:r>
+            <a:r>
+              <a:rPr lang="zh-CN" altLang="en-US" dirty="0"/>
+              <a:t> </a:t>
+            </a:r>
+            <a:endParaRPr lang="en-US" altLang="zh-CN" dirty="0"/>
+          </a:p>
+          <a:p>
+            <a:pPr marL="285750" indent="-285750">
+              <a:lnSpc>
+                <a:spcPts val="2400"/>
+              </a:lnSpc>
+              <a:buFontTx/>
+              <a:buChar char="-"/>
+            </a:pPr>
+            <a:r>
+              <a:rPr lang="en-US" altLang="zh-CN" dirty="0"/>
+              <a:t>Uses</a:t>
+            </a:r>
+            <a:r>
+              <a:rPr lang="zh-CN" altLang="en-US" dirty="0"/>
+              <a:t> </a:t>
+            </a:r>
+            <a:r>
+              <a:rPr lang="en-US" altLang="zh-CN" dirty="0"/>
+              <a:t>attention</a:t>
+            </a:r>
+            <a:r>
+              <a:rPr lang="zh-CN" altLang="en-US" dirty="0"/>
+              <a:t> </a:t>
+            </a:r>
+            <a:r>
+              <a:rPr lang="en-US" altLang="zh-CN" dirty="0"/>
+              <a:t>to</a:t>
+            </a:r>
+            <a:r>
+              <a:rPr lang="zh-CN" altLang="en-US" dirty="0"/>
+              <a:t> </a:t>
+            </a:r>
+            <a:r>
+              <a:rPr lang="en-US" altLang="zh-CN" dirty="0"/>
+              <a:t>focus</a:t>
+            </a:r>
+            <a:r>
+              <a:rPr lang="zh-CN" altLang="en-US" dirty="0"/>
+              <a:t> </a:t>
+            </a:r>
+            <a:r>
+              <a:rPr lang="en-US" altLang="zh-CN" dirty="0"/>
+              <a:t>on</a:t>
+            </a:r>
+            <a:r>
+              <a:rPr lang="zh-CN" altLang="en-US" dirty="0"/>
+              <a:t> </a:t>
+            </a:r>
+            <a:r>
+              <a:rPr lang="en-US" altLang="zh-CN" dirty="0"/>
+              <a:t>relevant</a:t>
+            </a:r>
+            <a:r>
+              <a:rPr lang="zh-CN" altLang="en-US" dirty="0"/>
+              <a:t> </a:t>
+            </a:r>
+            <a:r>
+              <a:rPr lang="en-US" altLang="zh-CN" dirty="0"/>
+              <a:t>input</a:t>
+            </a:r>
+            <a:r>
+              <a:rPr lang="zh-CN" altLang="en-US" dirty="0"/>
+              <a:t> </a:t>
+            </a:r>
+            <a:r>
+              <a:rPr lang="en-US" altLang="zh-CN" dirty="0"/>
+              <a:t>tokens.</a:t>
+            </a:r>
+          </a:p>
+          <a:p>
+            <a:pPr marL="285750" indent="-285750">
+              <a:lnSpc>
+                <a:spcPts val="2400"/>
+              </a:lnSpc>
+              <a:buFontTx/>
+              <a:buChar char="-"/>
+            </a:pPr>
+            <a:r>
+              <a:rPr lang="en-US" altLang="zh-CN" dirty="0"/>
+              <a:t>Improvement</a:t>
+            </a:r>
+            <a:r>
+              <a:rPr lang="zh-CN" altLang="en-US" dirty="0"/>
+              <a:t> </a:t>
+            </a:r>
+            <a:r>
+              <a:rPr lang="en-US" altLang="zh-CN" dirty="0"/>
+              <a:t>done:</a:t>
+            </a:r>
+          </a:p>
+          <a:p>
+            <a:pPr marL="742950" lvl="1" indent="-285750">
+              <a:lnSpc>
+                <a:spcPts val="2400"/>
+              </a:lnSpc>
+              <a:buFontTx/>
+              <a:buChar char="-"/>
+            </a:pPr>
+            <a:r>
+              <a:rPr lang="en-US" altLang="zh-CN" dirty="0"/>
+              <a:t>Added</a:t>
+            </a:r>
+            <a:r>
+              <a:rPr lang="zh-CN" altLang="en-US" dirty="0"/>
+              <a:t> </a:t>
+            </a:r>
+            <a:r>
+              <a:rPr lang="en-US" altLang="zh-CN" dirty="0"/>
+              <a:t>attention</a:t>
+            </a:r>
+            <a:r>
+              <a:rPr lang="zh-CN" altLang="en-US" dirty="0"/>
+              <a:t> </a:t>
+            </a:r>
+            <a:r>
+              <a:rPr lang="en-US" altLang="zh-CN" dirty="0"/>
+              <a:t>mechanism</a:t>
+            </a:r>
+          </a:p>
+          <a:p>
+            <a:pPr marL="742950" lvl="1" indent="-285750">
+              <a:lnSpc>
+                <a:spcPts val="2400"/>
+              </a:lnSpc>
+              <a:buFontTx/>
+              <a:buChar char="-"/>
+            </a:pPr>
+            <a:r>
+              <a:rPr lang="en-US" altLang="zh-CN" dirty="0"/>
+              <a:t>Tuned</a:t>
+            </a:r>
+            <a:r>
+              <a:rPr lang="zh-CN" altLang="en-US" dirty="0"/>
+              <a:t> </a:t>
+            </a:r>
+            <a:r>
+              <a:rPr lang="en-US" altLang="zh-CN" dirty="0"/>
+              <a:t>hidden</a:t>
+            </a:r>
+            <a:r>
+              <a:rPr lang="zh-CN" altLang="en-US" dirty="0"/>
+              <a:t> </a:t>
+            </a:r>
+            <a:r>
+              <a:rPr lang="en-US" altLang="zh-CN" dirty="0"/>
+              <a:t>size,</a:t>
+            </a:r>
+            <a:r>
+              <a:rPr lang="zh-CN" altLang="en-US" dirty="0"/>
+              <a:t> </a:t>
+            </a:r>
+            <a:r>
+              <a:rPr lang="en-US" altLang="zh-CN" dirty="0"/>
+              <a:t>and</a:t>
+            </a:r>
+            <a:r>
+              <a:rPr lang="zh-CN" altLang="en-US" dirty="0"/>
+              <a:t> </a:t>
+            </a:r>
+            <a:r>
+              <a:rPr lang="en-US" altLang="zh-CN" dirty="0"/>
+              <a:t>embedding</a:t>
+            </a:r>
+            <a:r>
+              <a:rPr lang="zh-CN" altLang="en-US" dirty="0"/>
+              <a:t> </a:t>
+            </a:r>
+            <a:r>
+              <a:rPr lang="en-US" altLang="zh-CN" dirty="0"/>
+              <a:t>size,</a:t>
+            </a:r>
+            <a:r>
+              <a:rPr lang="zh-CN" altLang="en-US" dirty="0"/>
+              <a:t> </a:t>
+            </a:r>
+            <a:r>
+              <a:rPr lang="en-US" altLang="zh-CN" dirty="0"/>
+              <a:t>did</a:t>
+            </a:r>
+            <a:r>
+              <a:rPr lang="zh-CN" altLang="en-US" dirty="0"/>
+              <a:t> </a:t>
+            </a:r>
+            <a:r>
+              <a:rPr lang="en-US" altLang="zh-CN" dirty="0"/>
+              <a:t>not</a:t>
+            </a:r>
+            <a:r>
+              <a:rPr lang="zh-CN" altLang="en-US" dirty="0"/>
+              <a:t> </a:t>
+            </a:r>
+            <a:r>
+              <a:rPr lang="en-US" altLang="zh-CN" dirty="0"/>
+              <a:t>change</a:t>
+            </a:r>
+            <a:r>
+              <a:rPr lang="zh-CN" altLang="en-US" dirty="0"/>
+              <a:t> </a:t>
+            </a:r>
+            <a:r>
+              <a:rPr lang="en-US" altLang="zh-CN" dirty="0"/>
+              <a:t>the</a:t>
+            </a:r>
+            <a:r>
+              <a:rPr lang="zh-CN" altLang="en-US" dirty="0"/>
+              <a:t> </a:t>
+            </a:r>
+            <a:r>
+              <a:rPr lang="en-US" altLang="zh-CN" dirty="0" err="1"/>
+              <a:t>lr</a:t>
+            </a:r>
+            <a:endParaRPr lang="en-US" altLang="zh-CN" dirty="0"/>
+          </a:p>
+          <a:p>
+            <a:pPr marL="742950" lvl="1" indent="-285750">
+              <a:lnSpc>
+                <a:spcPts val="2400"/>
+              </a:lnSpc>
+              <a:buFontTx/>
+              <a:buChar char="-"/>
+            </a:pPr>
+            <a:endParaRPr lang="en-US" altLang="zh-CN" dirty="0"/>
+          </a:p>
+          <a:p>
+            <a:pPr>
+              <a:lnSpc>
+                <a:spcPts val="2400"/>
+              </a:lnSpc>
+            </a:pPr>
+            <a:r>
+              <a:rPr lang="en-US" altLang="zh-CN" dirty="0"/>
+              <a:t>Reasoning:</a:t>
+            </a:r>
+          </a:p>
+          <a:p>
+            <a:pPr marL="285750" indent="-285750">
+              <a:lnSpc>
+                <a:spcPts val="2400"/>
+              </a:lnSpc>
+              <a:buFontTx/>
+              <a:buChar char="-"/>
+            </a:pPr>
+            <a:r>
+              <a:rPr lang="en-US" altLang="zh-CN" dirty="0"/>
+              <a:t>Attention</a:t>
+            </a:r>
+            <a:r>
+              <a:rPr lang="zh-CN" altLang="en-US" dirty="0"/>
+              <a:t> </a:t>
+            </a:r>
+            <a:r>
+              <a:rPr lang="en-US" altLang="zh-CN" dirty="0"/>
+              <a:t>mechanism</a:t>
+            </a:r>
+            <a:r>
+              <a:rPr lang="zh-CN" altLang="en-US" dirty="0"/>
+              <a:t> </a:t>
+            </a:r>
+            <a:r>
+              <a:rPr lang="en-US" altLang="zh-CN" dirty="0"/>
+              <a:t>allows</a:t>
+            </a:r>
+            <a:r>
+              <a:rPr lang="zh-CN" altLang="en-US" dirty="0"/>
+              <a:t> </a:t>
+            </a:r>
+            <a:r>
+              <a:rPr lang="en-US" altLang="zh-CN" dirty="0"/>
+              <a:t>dynamic</a:t>
+            </a:r>
+            <a:r>
+              <a:rPr lang="zh-CN" altLang="en-US" dirty="0"/>
+              <a:t> </a:t>
+            </a:r>
+            <a:r>
+              <a:rPr lang="en-US" altLang="zh-CN" dirty="0"/>
+              <a:t>weighting</a:t>
+            </a:r>
+            <a:r>
+              <a:rPr lang="zh-CN" altLang="en-US" dirty="0"/>
+              <a:t> </a:t>
+            </a:r>
+            <a:r>
+              <a:rPr lang="en-US" altLang="zh-CN" dirty="0"/>
+              <a:t>on</a:t>
+            </a:r>
+            <a:r>
+              <a:rPr lang="zh-CN" altLang="en-US" dirty="0"/>
+              <a:t> </a:t>
+            </a:r>
+            <a:r>
+              <a:rPr lang="en-US" altLang="zh-CN" dirty="0"/>
+              <a:t>input</a:t>
+            </a:r>
+            <a:r>
+              <a:rPr lang="zh-CN" altLang="en-US" dirty="0"/>
+              <a:t> </a:t>
+            </a:r>
+            <a:r>
+              <a:rPr lang="en-US" altLang="zh-CN" dirty="0"/>
+              <a:t>token</a:t>
+            </a:r>
+            <a:r>
+              <a:rPr lang="zh-CN" altLang="en-US" dirty="0"/>
+              <a:t> </a:t>
+            </a:r>
+            <a:r>
+              <a:rPr lang="en-US" altLang="zh-CN" dirty="0"/>
+              <a:t>in</a:t>
+            </a:r>
+            <a:r>
+              <a:rPr lang="zh-CN" altLang="en-US" dirty="0"/>
+              <a:t> </a:t>
+            </a:r>
+            <a:r>
+              <a:rPr lang="en-US" altLang="zh-CN" dirty="0"/>
+              <a:t>tern</a:t>
+            </a:r>
+            <a:r>
+              <a:rPr lang="zh-CN" altLang="en-US" dirty="0"/>
+              <a:t> </a:t>
+            </a:r>
+            <a:r>
+              <a:rPr lang="en-US" altLang="zh-CN" dirty="0"/>
+              <a:t>of</a:t>
+            </a:r>
+            <a:r>
+              <a:rPr lang="zh-CN" altLang="en-US" dirty="0"/>
+              <a:t> </a:t>
+            </a:r>
+            <a:r>
+              <a:rPr lang="en-US" altLang="zh-CN" dirty="0"/>
+              <a:t>relevance</a:t>
+            </a:r>
+            <a:r>
+              <a:rPr lang="zh-CN" altLang="en-US" dirty="0"/>
+              <a:t> </a:t>
+            </a:r>
+            <a:r>
+              <a:rPr lang="en-US" altLang="zh-CN" dirty="0"/>
+              <a:t>for</a:t>
+            </a:r>
+            <a:r>
+              <a:rPr lang="zh-CN" altLang="en-US" dirty="0"/>
+              <a:t> </a:t>
+            </a:r>
+            <a:r>
+              <a:rPr lang="en-US" altLang="zh-CN" dirty="0"/>
+              <a:t>sequence</a:t>
+            </a:r>
+            <a:r>
+              <a:rPr lang="zh-CN" altLang="en-US" dirty="0"/>
+              <a:t> </a:t>
+            </a:r>
+            <a:r>
+              <a:rPr lang="en-US" altLang="zh-CN" dirty="0"/>
+              <a:t>resource,</a:t>
+            </a:r>
+            <a:r>
+              <a:rPr lang="zh-CN" altLang="en-US" dirty="0"/>
+              <a:t> </a:t>
+            </a:r>
+            <a:r>
+              <a:rPr lang="en-US" altLang="zh-CN" dirty="0"/>
+              <a:t>improving</a:t>
+            </a:r>
+            <a:r>
+              <a:rPr lang="zh-CN" altLang="en-US" dirty="0"/>
+              <a:t> </a:t>
+            </a:r>
+            <a:r>
+              <a:rPr lang="en-US" altLang="zh-CN" dirty="0"/>
+              <a:t>prediction</a:t>
+            </a:r>
+            <a:r>
+              <a:rPr lang="zh-CN" altLang="en-US" dirty="0"/>
+              <a:t> </a:t>
+            </a:r>
+            <a:r>
+              <a:rPr lang="en-US" altLang="zh-CN" dirty="0"/>
+              <a:t>accuracy.</a:t>
+            </a:r>
+          </a:p>
+          <a:p>
+            <a:pPr marL="285750" indent="-285750">
+              <a:lnSpc>
+                <a:spcPts val="2400"/>
+              </a:lnSpc>
+              <a:buFontTx/>
+              <a:buChar char="-"/>
+            </a:pPr>
+            <a:r>
+              <a:rPr lang="en-US" altLang="zh-CN" dirty="0"/>
+              <a:t>Hyperparameters</a:t>
+            </a:r>
+            <a:r>
+              <a:rPr lang="zh-CN" altLang="en-US" dirty="0"/>
+              <a:t> </a:t>
+            </a:r>
+            <a:r>
+              <a:rPr lang="en-US" altLang="zh-CN" dirty="0"/>
+              <a:t>tuning</a:t>
+            </a:r>
+            <a:r>
+              <a:rPr lang="zh-CN" altLang="en-US" dirty="0"/>
+              <a:t> </a:t>
+            </a:r>
+            <a:r>
+              <a:rPr lang="en-US" altLang="zh-CN" dirty="0"/>
+              <a:t>ensure</a:t>
+            </a:r>
+            <a:r>
+              <a:rPr lang="zh-CN" altLang="en-US" dirty="0"/>
+              <a:t> </a:t>
+            </a:r>
+            <a:r>
+              <a:rPr lang="en-US" altLang="zh-CN" dirty="0"/>
+              <a:t>stable</a:t>
+            </a:r>
+            <a:r>
+              <a:rPr lang="zh-CN" altLang="en-US" dirty="0"/>
+              <a:t> </a:t>
+            </a:r>
+            <a:r>
+              <a:rPr lang="en-US" altLang="zh-CN" dirty="0"/>
+              <a:t>training</a:t>
+            </a:r>
+            <a:r>
+              <a:rPr lang="zh-CN" altLang="en-US" dirty="0"/>
+              <a:t> </a:t>
+            </a:r>
+            <a:r>
+              <a:rPr lang="en-US" altLang="zh-CN" dirty="0"/>
+              <a:t>and</a:t>
+            </a:r>
+            <a:r>
+              <a:rPr lang="zh-CN" altLang="en-US" dirty="0"/>
+              <a:t> </a:t>
+            </a:r>
+            <a:r>
+              <a:rPr lang="en-US" altLang="zh-CN" dirty="0"/>
+              <a:t>prevent</a:t>
+            </a:r>
+            <a:r>
+              <a:rPr lang="zh-CN" altLang="en-US" dirty="0"/>
+              <a:t> </a:t>
+            </a:r>
+            <a:r>
+              <a:rPr lang="en-US" altLang="zh-CN" dirty="0"/>
+              <a:t>overfitting/underfitting.</a:t>
+            </a:r>
+          </a:p>
+          <a:p>
+            <a:pPr marL="742950" lvl="1" indent="-285750">
+              <a:lnSpc>
+                <a:spcPts val="2400"/>
+              </a:lnSpc>
+              <a:buFontTx/>
+              <a:buChar char="-"/>
+            </a:pPr>
+            <a:endParaRPr lang="en-US" dirty="0"/>
           </a:p>
         </p:txBody>
       </p:sp>
@@ -12047,7 +16713,7 @@
         </p:nvGrpSpPr>
         <p:grpSpPr>
           <a:xfrm>
-            <a:off x="380144" y="790518"/>
+            <a:off x="380144" y="704456"/>
             <a:ext cx="7575480" cy="1914627"/>
             <a:chOff x="390418" y="1036280"/>
             <a:chExt cx="7575480" cy="1914627"/>
@@ -12103,8 +16769,13 @@
               </a:pPr>
               <a:r>
                 <a:rPr lang="en-US" dirty="0"/>
-                <a:t>Training Loss: ?</a:t>
+                <a:t>Training Loss: </a:t>
               </a:r>
+              <a:r>
+                <a:rPr lang="en-US" altLang="zh-CN" dirty="0"/>
+                <a:t>2.17</a:t>
+              </a:r>
+              <a:endParaRPr lang="en-US" dirty="0"/>
             </a:p>
             <a:p>
               <a:pPr>
@@ -12114,8 +16785,17 @@
               </a:pPr>
               <a:r>
                 <a:rPr lang="en-US" dirty="0"/>
-                <a:t>Training Perplexity: ?</a:t>
+                <a:t>Training Perplexity:</a:t>
               </a:r>
+              <a:r>
+                <a:rPr lang="zh-CN" altLang="en-US" dirty="0"/>
+                <a:t> </a:t>
+              </a:r>
+              <a:r>
+                <a:rPr lang="en-US" altLang="zh-CN" dirty="0"/>
+                <a:t>8.73</a:t>
+              </a:r>
+              <a:endParaRPr lang="en-US" dirty="0"/>
             </a:p>
             <a:p>
               <a:pPr>
@@ -12125,8 +16805,13 @@
               </a:pPr>
               <a:r>
                 <a:rPr lang="en-US" dirty="0"/>
-                <a:t>Validation Loss: ?</a:t>
+                <a:t>Validation Loss: </a:t>
               </a:r>
+              <a:r>
+                <a:rPr lang="en-US" altLang="zh-CN" dirty="0"/>
+                <a:t>3.09</a:t>
+              </a:r>
+              <a:endParaRPr lang="en-US" dirty="0"/>
             </a:p>
             <a:p>
               <a:pPr>
@@ -12136,8 +16821,13 @@
               </a:pPr>
               <a:r>
                 <a:rPr lang="en-US" dirty="0"/>
-                <a:t>Validation Perplexity: ?</a:t>
+                <a:t>Validation Perplexity: </a:t>
               </a:r>
+              <a:r>
+                <a:rPr lang="en-US" altLang="zh-CN" dirty="0"/>
+                <a:t>21.89</a:t>
+              </a:r>
+              <a:endParaRPr lang="en-US" dirty="0"/>
             </a:p>
           </p:txBody>
         </p:sp>
@@ -12191,8 +16881,13 @@
               </a:pPr>
               <a:r>
                 <a:rPr lang="en-US" dirty="0"/>
-                <a:t>Training Loss: ?</a:t>
+                <a:t>Training Loss: </a:t>
               </a:r>
+              <a:r>
+                <a:rPr lang="en-US" altLang="zh-CN" dirty="0"/>
+                <a:t>1.49</a:t>
+              </a:r>
+              <a:endParaRPr lang="en-US" dirty="0"/>
             </a:p>
             <a:p>
               <a:pPr>
@@ -12202,8 +16897,13 @@
               </a:pPr>
               <a:r>
                 <a:rPr lang="en-US" dirty="0"/>
-                <a:t>Training Perplexity: ?</a:t>
+                <a:t>Training Perplexity: </a:t>
               </a:r>
+              <a:r>
+                <a:rPr lang="en-US" altLang="zh-CN" dirty="0"/>
+                <a:t>4.46</a:t>
+              </a:r>
+              <a:endParaRPr lang="en-US" dirty="0"/>
             </a:p>
             <a:p>
               <a:pPr>
@@ -12213,8 +16913,13 @@
               </a:pPr>
               <a:r>
                 <a:rPr lang="en-US" dirty="0"/>
-                <a:t>Validation Loss: ?</a:t>
+                <a:t>Validation Loss: </a:t>
               </a:r>
+              <a:r>
+                <a:rPr lang="en-US" altLang="zh-CN" dirty="0"/>
+                <a:t>1.85</a:t>
+              </a:r>
+              <a:endParaRPr lang="en-US" dirty="0"/>
             </a:p>
             <a:p>
               <a:pPr>
@@ -12224,8 +16929,13 @@
               </a:pPr>
               <a:r>
                 <a:rPr lang="en-US" dirty="0"/>
-                <a:t>Validation Perplexity: ?</a:t>
+                <a:t>Validation Perplexity: </a:t>
               </a:r>
+              <a:r>
+                <a:rPr lang="en-US" altLang="zh-CN" dirty="0"/>
+                <a:t>6.37</a:t>
+              </a:r>
+              <a:endParaRPr lang="en-US" dirty="0"/>
             </a:p>
           </p:txBody>
         </p:sp>
@@ -12314,7 +17024,7 @@
         <p:spPr>
           <a:xfrm>
             <a:off x="364734" y="2868715"/>
-            <a:ext cx="3071973" cy="1606850"/>
+            <a:ext cx="3071973" cy="1914563"/>
           </a:xfrm>
           <a:prstGeom prst="rect">
             <a:avLst/>
@@ -12349,8 +17059,13 @@
             </a:pPr>
             <a:r>
               <a:rPr lang="en-US" dirty="0"/>
-              <a:t>Training Loss: ?</a:t>
-            </a:r>
+              <a:t>Training Loss: </a:t>
+            </a:r>
+            <a:r>
+              <a:rPr lang="en-US" altLang="zh-CN" dirty="0"/>
+              <a:t>1.49</a:t>
+            </a:r>
+            <a:endParaRPr lang="en-US" dirty="0"/>
           </a:p>
           <a:p>
             <a:pPr>
@@ -12360,8 +17075,13 @@
             </a:pPr>
             <a:r>
               <a:rPr lang="en-US" dirty="0"/>
-              <a:t>Training Perplexity: ?</a:t>
-            </a:r>
+              <a:t>Training Perplexity: </a:t>
+            </a:r>
+            <a:r>
+              <a:rPr lang="en-US" altLang="zh-CN" dirty="0"/>
+              <a:t>4.46</a:t>
+            </a:r>
+            <a:endParaRPr lang="en-US" dirty="0"/>
           </a:p>
           <a:p>
             <a:pPr>
@@ -12371,8 +17091,13 @@
             </a:pPr>
             <a:r>
               <a:rPr lang="en-US" dirty="0"/>
-              <a:t>Validation Loss: ?</a:t>
-            </a:r>
+              <a:t>Validation Loss: </a:t>
+            </a:r>
+            <a:r>
+              <a:rPr lang="en-US" altLang="zh-CN" dirty="0"/>
+              <a:t>1.85</a:t>
+            </a:r>
+            <a:endParaRPr lang="en-US" dirty="0"/>
           </a:p>
           <a:p>
             <a:pPr>
@@ -12382,8 +17107,21 @@
             </a:pPr>
             <a:r>
               <a:rPr lang="en-US" dirty="0"/>
-              <a:t>Validation Perplexity: ?</a:t>
-            </a:r>
+              <a:t>Validation Perplexity: </a:t>
+            </a:r>
+            <a:r>
+              <a:rPr lang="en-US" altLang="zh-CN" dirty="0"/>
+              <a:t>6.37</a:t>
+            </a:r>
+            <a:endParaRPr lang="en-US" dirty="0"/>
+          </a:p>
+          <a:p>
+            <a:pPr>
+              <a:lnSpc>
+                <a:spcPts val="2400"/>
+              </a:lnSpc>
+            </a:pPr>
+            <a:endParaRPr lang="en-US" dirty="0"/>
           </a:p>
         </p:txBody>
       </p:sp>
@@ -12401,8 +17139,8 @@
         </p:nvSpPr>
         <p:spPr>
           <a:xfrm>
-            <a:off x="4827143" y="2868715"/>
-            <a:ext cx="3071973" cy="2222403"/>
+            <a:off x="4827143" y="2675077"/>
+            <a:ext cx="4316857" cy="3576557"/>
           </a:xfrm>
           <a:prstGeom prst="rect">
             <a:avLst/>
@@ -12428,6 +17166,106 @@
               </a:rPr>
               <a:t>List your best model hyper-parameter values (full transformer): ?</a:t>
             </a:r>
+          </a:p>
+          <a:p>
+            <a:pPr>
+              <a:buNone/>
+            </a:pPr>
+            <a:r>
+              <a:rPr lang="en-US" dirty="0"/>
+              <a:t>Hidden size: </a:t>
+            </a:r>
+            <a:r>
+              <a:rPr lang="en-US" altLang="zh-CN" dirty="0"/>
+              <a:t>128</a:t>
+            </a:r>
+            <a:endParaRPr lang="en-US" dirty="0"/>
+          </a:p>
+          <a:p>
+            <a:pPr>
+              <a:buNone/>
+            </a:pPr>
+            <a:r>
+              <a:rPr lang="en-US" dirty="0"/>
+              <a:t>Embedding size: </a:t>
+            </a:r>
+            <a:r>
+              <a:rPr lang="en-US" altLang="zh-CN" dirty="0"/>
+              <a:t>128</a:t>
+            </a:r>
+            <a:endParaRPr lang="en-US" dirty="0"/>
+          </a:p>
+          <a:p>
+            <a:pPr>
+              <a:buNone/>
+            </a:pPr>
+            <a:r>
+              <a:rPr lang="en-US" dirty="0"/>
+              <a:t>Number of attention heads: </a:t>
+            </a:r>
+            <a:r>
+              <a:rPr lang="en-US" altLang="zh-CN" dirty="0"/>
+              <a:t>2</a:t>
+            </a:r>
+            <a:r>
+              <a:rPr lang="zh-CN" altLang="en-US" dirty="0"/>
+              <a:t> </a:t>
+            </a:r>
+            <a:r>
+              <a:rPr lang="en-US" altLang="zh-CN" dirty="0"/>
+              <a:t>heads</a:t>
+            </a:r>
+            <a:endParaRPr lang="en-US" dirty="0"/>
+          </a:p>
+          <a:p>
+            <a:pPr>
+              <a:buNone/>
+            </a:pPr>
+            <a:r>
+              <a:rPr lang="en-US" dirty="0"/>
+              <a:t>Feedforward hidden size: </a:t>
+            </a:r>
+            <a:r>
+              <a:rPr lang="en-US" altLang="zh-CN" dirty="0"/>
+              <a:t>2048</a:t>
+            </a:r>
+            <a:r>
+              <a:rPr lang="en-US" dirty="0"/>
+              <a:t> </a:t>
+            </a:r>
+          </a:p>
+          <a:p>
+            <a:pPr>
+              <a:buNone/>
+            </a:pPr>
+            <a:r>
+              <a:rPr lang="en-US" dirty="0"/>
+              <a:t>Optimizer / learning rate: </a:t>
+            </a:r>
+            <a:r>
+              <a:rPr lang="en-US" altLang="zh-CN" dirty="0"/>
+              <a:t>Adam</a:t>
+            </a:r>
+            <a:r>
+              <a:rPr lang="zh-CN" altLang="en-US" dirty="0"/>
+              <a:t> </a:t>
+            </a:r>
+            <a:r>
+              <a:rPr lang="en-US" altLang="zh-CN" dirty="0"/>
+              <a:t>1e-3</a:t>
+            </a:r>
+            <a:endParaRPr lang="en-US" dirty="0"/>
+          </a:p>
+          <a:p>
+            <a:r>
+              <a:rPr lang="en-US" dirty="0"/>
+              <a:t>Dropout: </a:t>
+            </a:r>
+            <a:r>
+              <a:rPr lang="en-US" altLang="zh-CN" dirty="0"/>
+              <a:t>0.2</a:t>
+            </a:r>
+            <a:endParaRPr lang="en-US" dirty="0"/>
           </a:p>
           <a:p>
             <a:pPr>
@@ -12546,6 +17384,392 @@
               </a:rPr>
               <a:t>Full Transformer Best model Learning Curves (Perplexity)</a:t>
             </a:r>
+          </a:p>
+        </p:txBody>
+      </p:sp>
+      <p:pic>
+        <p:nvPicPr>
+          <p:cNvPr id="6" name="Picture 5" descr="A graph of a number of objects&#10;&#10;AI-generated content may be incorrect.">
+            <a:extLst>
+              <a:ext uri="{FF2B5EF4-FFF2-40B4-BE49-F238E27FC236}">
+                <a16:creationId xmlns:a16="http://schemas.microsoft.com/office/drawing/2014/main" id="{C6D7B4CE-A7D4-5373-905D-E45FD420ED00}"/>
+              </a:ext>
+            </a:extLst>
+          </p:cNvPr>
+          <p:cNvPicPr>
+            <a:picLocks noChangeAspect="1"/>
+          </p:cNvPicPr>
+          <p:nvPr/>
+        </p:nvPicPr>
+        <p:blipFill>
+          <a:blip r:embed="rId2">
+            <a:extLst>
+              <a:ext uri="{28A0092B-C50C-407E-A947-70E740481C1C}">
+                <a14:useLocalDpi xmlns:a14="http://schemas.microsoft.com/office/drawing/2010/main" val="0"/>
+              </a:ext>
+            </a:extLst>
+          </a:blip>
+          <a:stretch>
+            <a:fillRect/>
+          </a:stretch>
+        </p:blipFill>
+        <p:spPr>
+          <a:xfrm>
+            <a:off x="725224" y="1032734"/>
+            <a:ext cx="4365853" cy="3519095"/>
+          </a:xfrm>
+          <a:prstGeom prst="rect">
+            <a:avLst/>
+          </a:prstGeom>
+        </p:spPr>
+      </p:pic>
+      <p:sp>
+        <p:nvSpPr>
+          <p:cNvPr id="9" name="TextBox 8">
+            <a:extLst>
+              <a:ext uri="{FF2B5EF4-FFF2-40B4-BE49-F238E27FC236}">
+                <a16:creationId xmlns:a16="http://schemas.microsoft.com/office/drawing/2014/main" id="{A0F62658-CC74-4076-255F-0638827A7841}"/>
+              </a:ext>
+            </a:extLst>
+          </p:cNvPr>
+          <p:cNvSpPr txBox="1"/>
+          <p:nvPr/>
+        </p:nvSpPr>
+        <p:spPr>
+          <a:xfrm>
+            <a:off x="5335793" y="1535975"/>
+            <a:ext cx="3614571" cy="2512611"/>
+          </a:xfrm>
+          <a:prstGeom prst="rect">
+            <a:avLst/>
+          </a:prstGeom>
+          <a:noFill/>
+        </p:spPr>
+        <p:txBody>
+          <a:bodyPr wrap="square" rtlCol="0">
+            <a:spAutoFit/>
+          </a:bodyPr>
+          <a:lstStyle/>
+          <a:p>
+            <a:pPr algn="ctr">
+              <a:lnSpc>
+                <a:spcPts val="2400"/>
+              </a:lnSpc>
+            </a:pPr>
+            <a:r>
+              <a:rPr lang="en-US" altLang="zh-CN" sz="1200" dirty="0">
+                <a:solidFill>
+                  <a:srgbClr val="0070C0"/>
+                </a:solidFill>
+              </a:rPr>
+              <a:t>Describe</a:t>
+            </a:r>
+            <a:r>
+              <a:rPr lang="zh-CN" altLang="en-US" sz="1200" dirty="0">
+                <a:solidFill>
+                  <a:srgbClr val="0070C0"/>
+                </a:solidFill>
+              </a:rPr>
+              <a:t> </a:t>
+            </a:r>
+            <a:r>
+              <a:rPr lang="en-US" altLang="zh-CN" sz="1200" dirty="0">
+                <a:solidFill>
+                  <a:srgbClr val="0070C0"/>
+                </a:solidFill>
+              </a:rPr>
+              <a:t>in</a:t>
+            </a:r>
+            <a:r>
+              <a:rPr lang="zh-CN" altLang="en-US" sz="1200" dirty="0">
+                <a:solidFill>
+                  <a:srgbClr val="0070C0"/>
+                </a:solidFill>
+              </a:rPr>
+              <a:t> </a:t>
+            </a:r>
+            <a:r>
+              <a:rPr lang="en-US" altLang="zh-CN" sz="1200" dirty="0">
+                <a:solidFill>
+                  <a:srgbClr val="0070C0"/>
+                </a:solidFill>
+              </a:rPr>
+              <a:t>text:</a:t>
+            </a:r>
+            <a:endParaRPr lang="en-US" sz="1200" dirty="0">
+              <a:solidFill>
+                <a:srgbClr val="0070C0"/>
+              </a:solidFill>
+            </a:endParaRPr>
+          </a:p>
+          <a:p>
+            <a:pPr>
+              <a:lnSpc>
+                <a:spcPts val="2400"/>
+              </a:lnSpc>
+            </a:pPr>
+            <a:r>
+              <a:rPr lang="en-US" altLang="zh-CN" sz="1200" dirty="0"/>
+              <a:t>-</a:t>
+            </a:r>
+            <a:r>
+              <a:rPr lang="zh-CN" altLang="en-US" sz="1200" dirty="0"/>
+              <a:t> </a:t>
+            </a:r>
+            <a:r>
+              <a:rPr lang="en-US" altLang="zh-CN" sz="1200" dirty="0"/>
+              <a:t>The</a:t>
+            </a:r>
+            <a:r>
+              <a:rPr lang="zh-CN" altLang="en-US" sz="1200" dirty="0"/>
+              <a:t> </a:t>
+            </a:r>
+            <a:r>
+              <a:rPr lang="en-US" sz="1200" dirty="0"/>
+              <a:t>Perplexity</a:t>
+            </a:r>
+            <a:r>
+              <a:rPr lang="zh-CN" altLang="en-US" sz="1200" dirty="0"/>
+              <a:t> </a:t>
+            </a:r>
+            <a:r>
+              <a:rPr lang="en-US" altLang="zh-CN" sz="1200" dirty="0"/>
+              <a:t>drops</a:t>
+            </a:r>
+            <a:r>
+              <a:rPr lang="zh-CN" altLang="en-US" sz="1200" dirty="0"/>
+              <a:t> </a:t>
+            </a:r>
+            <a:r>
+              <a:rPr lang="en-US" altLang="zh-CN" sz="1200" dirty="0"/>
+              <a:t>fast</a:t>
+            </a:r>
+            <a:r>
+              <a:rPr lang="zh-CN" altLang="en-US" sz="1200" dirty="0"/>
+              <a:t> </a:t>
+            </a:r>
+            <a:r>
+              <a:rPr lang="en-US" altLang="zh-CN" sz="1200" dirty="0"/>
+              <a:t>in</a:t>
+            </a:r>
+            <a:r>
+              <a:rPr lang="zh-CN" altLang="en-US" sz="1200" dirty="0"/>
+              <a:t> </a:t>
+            </a:r>
+            <a:r>
+              <a:rPr lang="en-US" altLang="zh-CN" sz="1200" dirty="0"/>
+              <a:t>early</a:t>
+            </a:r>
+            <a:r>
+              <a:rPr lang="zh-CN" altLang="en-US" sz="1200" dirty="0"/>
+              <a:t> </a:t>
+            </a:r>
+            <a:r>
+              <a:rPr lang="en-US" altLang="zh-CN" sz="1200" dirty="0"/>
+              <a:t>epochs,</a:t>
+            </a:r>
+            <a:r>
+              <a:rPr lang="zh-CN" altLang="en-US" sz="1200" dirty="0"/>
+              <a:t> </a:t>
+            </a:r>
+            <a:r>
+              <a:rPr lang="en-US" altLang="zh-CN" sz="1200" dirty="0"/>
+              <a:t>and</a:t>
+            </a:r>
+            <a:r>
+              <a:rPr lang="zh-CN" altLang="en-US" sz="1200" dirty="0"/>
+              <a:t> </a:t>
+            </a:r>
+            <a:r>
+              <a:rPr lang="en-US" altLang="zh-CN" sz="1200" dirty="0"/>
+              <a:t>then</a:t>
+            </a:r>
+            <a:r>
+              <a:rPr lang="zh-CN" altLang="en-US" sz="1200" dirty="0"/>
+              <a:t> </a:t>
+            </a:r>
+            <a:r>
+              <a:rPr lang="en-US" altLang="zh-CN" sz="1200" dirty="0"/>
+              <a:t>slowly</a:t>
+            </a:r>
+            <a:r>
+              <a:rPr lang="zh-CN" altLang="en-US" sz="1200" dirty="0"/>
+              <a:t> </a:t>
+            </a:r>
+            <a:r>
+              <a:rPr lang="en-US" altLang="zh-CN" sz="1200" dirty="0"/>
+              <a:t>converge</a:t>
+            </a:r>
+          </a:p>
+          <a:p>
+            <a:pPr marL="171450" indent="-171450">
+              <a:lnSpc>
+                <a:spcPts val="2400"/>
+              </a:lnSpc>
+              <a:buFontTx/>
+              <a:buChar char="-"/>
+            </a:pPr>
+            <a:r>
+              <a:rPr lang="en-US" altLang="zh-CN" sz="1200" dirty="0"/>
+              <a:t>Train</a:t>
+            </a:r>
+            <a:r>
+              <a:rPr lang="zh-CN" altLang="en-US" sz="1200" dirty="0"/>
+              <a:t> </a:t>
+            </a:r>
+            <a:r>
+              <a:rPr lang="en-US" altLang="zh-CN" sz="1200" dirty="0"/>
+              <a:t>&amp;&amp;</a:t>
+            </a:r>
+            <a:r>
+              <a:rPr lang="zh-CN" altLang="en-US" sz="1200" dirty="0"/>
+              <a:t> </a:t>
+            </a:r>
+            <a:r>
+              <a:rPr lang="en-US" altLang="zh-CN" sz="1200" dirty="0"/>
+              <a:t>valid</a:t>
+            </a:r>
+            <a:r>
+              <a:rPr lang="zh-CN" altLang="en-US" sz="1200" dirty="0"/>
+              <a:t> </a:t>
+            </a:r>
+            <a:r>
+              <a:rPr lang="en-US" altLang="zh-CN" sz="1200" dirty="0"/>
+              <a:t>curves</a:t>
+            </a:r>
+            <a:r>
+              <a:rPr lang="zh-CN" altLang="en-US" sz="1200" dirty="0"/>
+              <a:t> </a:t>
+            </a:r>
+            <a:r>
+              <a:rPr lang="en-US" altLang="zh-CN" sz="1200" dirty="0"/>
+              <a:t>are</a:t>
+            </a:r>
+            <a:r>
+              <a:rPr lang="zh-CN" altLang="en-US" sz="1200" dirty="0"/>
+              <a:t> </a:t>
+            </a:r>
+            <a:r>
+              <a:rPr lang="en-US" altLang="zh-CN" sz="1200" dirty="0"/>
+              <a:t>very</a:t>
+            </a:r>
+            <a:r>
+              <a:rPr lang="zh-CN" altLang="en-US" sz="1200" dirty="0"/>
+              <a:t> </a:t>
+            </a:r>
+            <a:r>
+              <a:rPr lang="en-US" altLang="zh-CN" sz="1200" dirty="0"/>
+              <a:t>close,</a:t>
+            </a:r>
+            <a:r>
+              <a:rPr lang="zh-CN" altLang="en-US" sz="1200" dirty="0"/>
+              <a:t> </a:t>
+            </a:r>
+            <a:r>
+              <a:rPr lang="en-US" altLang="zh-CN" sz="1200" dirty="0"/>
+              <a:t>indicating</a:t>
+            </a:r>
+            <a:r>
+              <a:rPr lang="zh-CN" altLang="en-US" sz="1200" dirty="0"/>
+              <a:t> </a:t>
+            </a:r>
+            <a:r>
+              <a:rPr lang="en-US" altLang="zh-CN" sz="1200" dirty="0"/>
+              <a:t>minimal</a:t>
+            </a:r>
+            <a:r>
+              <a:rPr lang="zh-CN" altLang="en-US" sz="1200" dirty="0"/>
+              <a:t> </a:t>
+            </a:r>
+            <a:r>
+              <a:rPr lang="en-US" altLang="zh-CN" sz="1200" dirty="0"/>
+              <a:t>overfitting</a:t>
+            </a:r>
+          </a:p>
+          <a:p>
+            <a:pPr marL="171450" indent="-171450">
+              <a:lnSpc>
+                <a:spcPts val="2400"/>
+              </a:lnSpc>
+              <a:buFontTx/>
+              <a:buChar char="-"/>
+            </a:pPr>
+            <a:r>
+              <a:rPr lang="en-US" altLang="zh-CN" sz="1200" dirty="0"/>
+              <a:t>Full</a:t>
+            </a:r>
+            <a:r>
+              <a:rPr lang="zh-CN" altLang="en-US" sz="1200" dirty="0"/>
+              <a:t> </a:t>
+            </a:r>
+            <a:r>
+              <a:rPr lang="en-US" altLang="zh-CN" sz="1200" dirty="0"/>
+              <a:t>transfer</a:t>
+            </a:r>
+            <a:r>
+              <a:rPr lang="zh-CN" altLang="en-US" sz="1200" dirty="0"/>
+              <a:t> </a:t>
+            </a:r>
+            <a:r>
+              <a:rPr lang="en-US" altLang="zh-CN" sz="1200" dirty="0"/>
+              <a:t>converge</a:t>
+            </a:r>
+            <a:r>
+              <a:rPr lang="zh-CN" altLang="en-US" sz="1200" dirty="0"/>
+              <a:t> </a:t>
+            </a:r>
+            <a:r>
+              <a:rPr lang="en-US" altLang="zh-CN" sz="1200" dirty="0"/>
+              <a:t>faster</a:t>
+            </a:r>
+            <a:r>
+              <a:rPr lang="zh-CN" altLang="en-US" sz="1200" dirty="0"/>
+              <a:t> </a:t>
+            </a:r>
+            <a:r>
+              <a:rPr lang="en-US" altLang="zh-CN" sz="1200" dirty="0"/>
+              <a:t>than</a:t>
+            </a:r>
+            <a:r>
+              <a:rPr lang="zh-CN" altLang="en-US" sz="1200" dirty="0"/>
+              <a:t> </a:t>
+            </a:r>
+            <a:r>
+              <a:rPr lang="en-US" altLang="zh-CN" sz="1200" dirty="0"/>
+              <a:t>seq2seq</a:t>
+            </a:r>
+            <a:r>
+              <a:rPr lang="zh-CN" altLang="en-US" sz="1200" dirty="0"/>
+              <a:t> </a:t>
+            </a:r>
+            <a:r>
+              <a:rPr lang="en-US" altLang="zh-CN" sz="1200" dirty="0"/>
+              <a:t>RNN</a:t>
+            </a:r>
+            <a:r>
+              <a:rPr lang="zh-CN" altLang="en-US" sz="1200" dirty="0"/>
+              <a:t> </a:t>
+            </a:r>
+            <a:r>
+              <a:rPr lang="en-US" altLang="zh-CN" sz="1200" dirty="0"/>
+              <a:t>or</a:t>
+            </a:r>
+            <a:r>
+              <a:rPr lang="zh-CN" altLang="en-US" sz="1200" dirty="0"/>
+              <a:t> </a:t>
+            </a:r>
+            <a:r>
+              <a:rPr lang="en-US" altLang="zh-CN" sz="1200" dirty="0"/>
+              <a:t>LSTM</a:t>
+            </a:r>
+          </a:p>
+          <a:p>
+            <a:pPr>
+              <a:lnSpc>
+                <a:spcPts val="2400"/>
+              </a:lnSpc>
+            </a:pPr>
+            <a:endParaRPr lang="en-US" sz="1200" dirty="0"/>
           </a:p>
         </p:txBody>
       </p:sp>

--- a/assignment3-nlp-template.pptx
+++ b/assignment3-nlp-template.pptx
@@ -6763,11 +6763,11 @@
               <a:t> </a:t>
             </a:r>
             <a:r>
-              <a:rPr lang="en-US" altLang="zh-CN"/>
-              <a:t>stableizes</a:t>
-            </a:r>
-            <a:r>
-              <a:rPr lang="zh-CN" altLang="en-US"/>
+              <a:rPr lang="en-US" altLang="zh-CN" dirty="0" err="1"/>
+              <a:t>stableize</a:t>
+            </a:r>
+            <a:r>
+              <a:rPr lang="zh-CN" altLang="en-US" dirty="0"/>
               <a:t> </a:t>
             </a:r>
             <a:r>
@@ -6839,919 +6839,6 @@
           <a:chExt cx="0" cy="0"/>
         </a:xfrm>
       </p:grpSpPr>
-      <p:graphicFrame>
-        <p:nvGraphicFramePr>
-          <p:cNvPr id="132" name="Table 1"/>
-          <p:cNvGraphicFramePr/>
-          <p:nvPr>
-            <p:extLst>
-              <p:ext uri="{D42A27DB-BD31-4B8C-83A1-F6EECF244321}">
-                <p14:modId xmlns:p14="http://schemas.microsoft.com/office/powerpoint/2010/main" val="2530799080"/>
-              </p:ext>
-            </p:extLst>
-          </p:nvPr>
-        </p:nvGraphicFramePr>
-        <p:xfrm>
-          <a:off x="0" y="752327"/>
-          <a:ext cx="9144000" cy="4054920"/>
-        </p:xfrm>
-        <a:graphic>
-          <a:graphicData uri="http://schemas.openxmlformats.org/drawingml/2006/table">
-            <a:tbl>
-              <a:tblPr/>
-              <a:tblGrid>
-                <a:gridCol w="4571280">
-                  <a:extLst>
-                    <a:ext uri="{9D8B030D-6E8A-4147-A177-3AD203B41FA5}">
-                      <a16:colId xmlns:a16="http://schemas.microsoft.com/office/drawing/2014/main" val="20000"/>
-                    </a:ext>
-                  </a:extLst>
-                </a:gridCol>
-                <a:gridCol w="4572720">
-                  <a:extLst>
-                    <a:ext uri="{9D8B030D-6E8A-4147-A177-3AD203B41FA5}">
-                      <a16:colId xmlns:a16="http://schemas.microsoft.com/office/drawing/2014/main" val="20001"/>
-                    </a:ext>
-                  </a:extLst>
-                </a:gridCol>
-              </a:tblGrid>
-              <a:tr h="347760">
-                <a:tc>
-                  <a:txBody>
-                    <a:bodyPr/>
-                    <a:lstStyle/>
-                    <a:p>
-                      <a:pPr>
-                        <a:lnSpc>
-                          <a:spcPct val="100000"/>
-                        </a:lnSpc>
-                      </a:pPr>
-                      <a:r>
-                        <a:rPr lang="en-US" sz="1800" b="0" strike="noStrike" spc="-1" dirty="0">
-                          <a:latin typeface="Arial"/>
-                        </a:rPr>
-                        <a:t>True Translation</a:t>
-                      </a:r>
-                    </a:p>
-                  </a:txBody>
-                  <a:tcPr marL="90000" marR="90000">
-                    <a:lnL w="720">
-                      <a:solidFill>
-                        <a:srgbClr val="FFFFFF"/>
-                      </a:solidFill>
-                    </a:lnL>
-                    <a:lnR w="720">
-                      <a:solidFill>
-                        <a:srgbClr val="FFFFFF"/>
-                      </a:solidFill>
-                    </a:lnR>
-                    <a:lnT w="720">
-                      <a:solidFill>
-                        <a:srgbClr val="FFFFFF"/>
-                      </a:solidFill>
-                    </a:lnT>
-                    <a:lnB w="720">
-                      <a:solidFill>
-                        <a:srgbClr val="FFFFFF"/>
-                      </a:solidFill>
-                    </a:lnB>
-                    <a:solidFill>
-                      <a:srgbClr val="B3B3B3"/>
-                    </a:solidFill>
-                  </a:tcPr>
-                </a:tc>
-                <a:tc>
-                  <a:txBody>
-                    <a:bodyPr/>
-                    <a:lstStyle/>
-                    <a:p>
-                      <a:pPr>
-                        <a:lnSpc>
-                          <a:spcPct val="100000"/>
-                        </a:lnSpc>
-                      </a:pPr>
-                      <a:r>
-                        <a:rPr lang="en-US" sz="1800" b="0" strike="noStrike" spc="-1" dirty="0">
-                          <a:latin typeface="Arial"/>
-                        </a:rPr>
-                        <a:t>Predicted Translation</a:t>
-                      </a:r>
-                    </a:p>
-                  </a:txBody>
-                  <a:tcPr marL="90000" marR="90000">
-                    <a:lnL w="720">
-                      <a:solidFill>
-                        <a:srgbClr val="FFFFFF"/>
-                      </a:solidFill>
-                    </a:lnL>
-                    <a:lnR w="720">
-                      <a:solidFill>
-                        <a:srgbClr val="FFFFFF"/>
-                      </a:solidFill>
-                    </a:lnR>
-                    <a:lnT w="720">
-                      <a:solidFill>
-                        <a:srgbClr val="FFFFFF"/>
-                      </a:solidFill>
-                    </a:lnT>
-                    <a:lnB w="720">
-                      <a:solidFill>
-                        <a:srgbClr val="FFFFFF"/>
-                      </a:solidFill>
-                    </a:lnB>
-                    <a:solidFill>
-                      <a:srgbClr val="B3B3B3"/>
-                    </a:solidFill>
-                  </a:tcPr>
-                </a:tc>
-                <a:extLst>
-                  <a:ext uri="{0D108BD9-81ED-4DB2-BD59-A6C34878D82A}">
-                    <a16:rowId xmlns:a16="http://schemas.microsoft.com/office/drawing/2014/main" val="10000"/>
-                  </a:ext>
-                </a:extLst>
-              </a:tr>
-              <a:tr h="247320">
-                <a:tc>
-                  <a:txBody>
-                    <a:bodyPr/>
-                    <a:lstStyle/>
-                    <a:p>
-                      <a:pPr>
-                        <a:lnSpc>
-                          <a:spcPct val="100000"/>
-                        </a:lnSpc>
-                      </a:pPr>
-                      <a:r>
-                        <a:rPr lang="en-US" sz="1100" b="0" strike="noStrike" spc="-1" dirty="0">
-                          <a:latin typeface="Arial"/>
-                        </a:rPr>
-                        <a:t>‘&lt;</a:t>
-                      </a:r>
-                      <a:r>
-                        <a:rPr lang="en-US" sz="1100" b="0" strike="noStrike" spc="-1" dirty="0" err="1">
-                          <a:latin typeface="Arial"/>
-                        </a:rPr>
-                        <a:t>sos</a:t>
-                      </a:r>
-                      <a:r>
-                        <a:rPr lang="en-US" sz="1100" b="0" strike="noStrike" spc="-1" dirty="0">
-                          <a:latin typeface="Arial"/>
-                        </a:rPr>
-                        <a:t>&gt;'word_1’,’word_2’,….., '&lt;</a:t>
-                      </a:r>
-                      <a:r>
-                        <a:rPr lang="en-US" sz="1100" b="0" strike="noStrike" spc="-1" dirty="0" err="1">
-                          <a:latin typeface="Arial"/>
-                        </a:rPr>
-                        <a:t>eos</a:t>
-                      </a:r>
-                      <a:r>
-                        <a:rPr lang="en-US" sz="1100" b="0" strike="noStrike" spc="-1" dirty="0">
-                          <a:latin typeface="Arial"/>
-                        </a:rPr>
-                        <a:t>&gt;'</a:t>
-                      </a:r>
-                    </a:p>
-                  </a:txBody>
-                  <a:tcPr marL="90000" marR="90000">
-                    <a:lnL w="720">
-                      <a:solidFill>
-                        <a:srgbClr val="FFFFFF"/>
-                      </a:solidFill>
-                    </a:lnL>
-                    <a:lnR w="720">
-                      <a:solidFill>
-                        <a:srgbClr val="FFFFFF"/>
-                      </a:solidFill>
-                    </a:lnR>
-                    <a:lnT w="720">
-                      <a:solidFill>
-                        <a:srgbClr val="FFFFFF"/>
-                      </a:solidFill>
-                    </a:lnT>
-                    <a:lnB w="720">
-                      <a:solidFill>
-                        <a:srgbClr val="FFFFFF"/>
-                      </a:solidFill>
-                    </a:lnB>
-                    <a:solidFill>
-                      <a:srgbClr val="CCCCCC"/>
-                    </a:solidFill>
-                  </a:tcPr>
-                </a:tc>
-                <a:tc>
-                  <a:txBody>
-                    <a:bodyPr/>
-                    <a:lstStyle/>
-                    <a:p>
-                      <a:pPr>
-                        <a:lnSpc>
-                          <a:spcPct val="100000"/>
-                        </a:lnSpc>
-                      </a:pPr>
-                      <a:r>
-                        <a:rPr lang="en-US" sz="1100" b="0" strike="noStrike" spc="-1">
-                          <a:latin typeface="Times New Roman"/>
-                        </a:rPr>
-                        <a:t>‘&lt;sos&gt;'word_1’,’word_2’,….., '&lt;eos&gt;'</a:t>
-                      </a:r>
-                      <a:endParaRPr lang="en-US" sz="1100" b="0" strike="noStrike" spc="-1">
-                        <a:latin typeface="Arial"/>
-                      </a:endParaRPr>
-                    </a:p>
-                  </a:txBody>
-                  <a:tcPr marL="90000" marR="90000">
-                    <a:lnL w="720">
-                      <a:solidFill>
-                        <a:srgbClr val="FFFFFF"/>
-                      </a:solidFill>
-                    </a:lnL>
-                    <a:lnR w="720">
-                      <a:solidFill>
-                        <a:srgbClr val="FFFFFF"/>
-                      </a:solidFill>
-                    </a:lnR>
-                    <a:lnT w="720">
-                      <a:solidFill>
-                        <a:srgbClr val="FFFFFF"/>
-                      </a:solidFill>
-                    </a:lnT>
-                    <a:lnB w="720">
-                      <a:solidFill>
-                        <a:srgbClr val="FFFFFF"/>
-                      </a:solidFill>
-                    </a:lnB>
-                    <a:solidFill>
-                      <a:srgbClr val="CCCCCC"/>
-                    </a:solidFill>
-                  </a:tcPr>
-                </a:tc>
-                <a:extLst>
-                  <a:ext uri="{0D108BD9-81ED-4DB2-BD59-A6C34878D82A}">
-                    <a16:rowId xmlns:a16="http://schemas.microsoft.com/office/drawing/2014/main" val="10001"/>
-                  </a:ext>
-                </a:extLst>
-              </a:tr>
-              <a:tr h="428760">
-                <a:tc>
-                  <a:txBody>
-                    <a:bodyPr/>
-                    <a:lstStyle/>
-                    <a:p>
-                      <a:endParaRPr lang="en-US" sz="1100" dirty="0"/>
-                    </a:p>
-                  </a:txBody>
-                  <a:tcPr marL="90000" marR="90000">
-                    <a:lnL w="720">
-                      <a:solidFill>
-                        <a:srgbClr val="FFFFFF"/>
-                      </a:solidFill>
-                    </a:lnL>
-                    <a:lnR w="720">
-                      <a:solidFill>
-                        <a:srgbClr val="FFFFFF"/>
-                      </a:solidFill>
-                    </a:lnR>
-                    <a:lnT w="720">
-                      <a:solidFill>
-                        <a:srgbClr val="FFFFFF"/>
-                      </a:solidFill>
-                    </a:lnT>
-                    <a:lnB w="720">
-                      <a:solidFill>
-                        <a:srgbClr val="FFFFFF"/>
-                      </a:solidFill>
-                    </a:lnB>
-                    <a:solidFill>
-                      <a:srgbClr val="E6E6E6"/>
-                    </a:solidFill>
-                  </a:tcPr>
-                </a:tc>
-                <a:tc>
-                  <a:txBody>
-                    <a:bodyPr/>
-                    <a:lstStyle/>
-                    <a:p>
-                      <a:endParaRPr lang="en-US" sz="1100"/>
-                    </a:p>
-                  </a:txBody>
-                  <a:tcPr marL="90000" marR="90000">
-                    <a:lnL w="720">
-                      <a:solidFill>
-                        <a:srgbClr val="FFFFFF"/>
-                      </a:solidFill>
-                    </a:lnL>
-                    <a:lnR w="720">
-                      <a:solidFill>
-                        <a:srgbClr val="FFFFFF"/>
-                      </a:solidFill>
-                    </a:lnR>
-                    <a:lnT w="720">
-                      <a:solidFill>
-                        <a:srgbClr val="FFFFFF"/>
-                      </a:solidFill>
-                    </a:lnT>
-                    <a:lnB w="720">
-                      <a:solidFill>
-                        <a:srgbClr val="FFFFFF"/>
-                      </a:solidFill>
-                    </a:lnB>
-                    <a:solidFill>
-                      <a:srgbClr val="E6E6E6"/>
-                    </a:solidFill>
-                  </a:tcPr>
-                </a:tc>
-                <a:extLst>
-                  <a:ext uri="{0D108BD9-81ED-4DB2-BD59-A6C34878D82A}">
-                    <a16:rowId xmlns:a16="http://schemas.microsoft.com/office/drawing/2014/main" val="10002"/>
-                  </a:ext>
-                </a:extLst>
-              </a:tr>
-              <a:tr h="428760">
-                <a:tc>
-                  <a:txBody>
-                    <a:bodyPr/>
-                    <a:lstStyle/>
-                    <a:p>
-                      <a:endParaRPr lang="en-US" sz="1100" dirty="0"/>
-                    </a:p>
-                  </a:txBody>
-                  <a:tcPr marL="90000" marR="90000">
-                    <a:lnL w="720">
-                      <a:solidFill>
-                        <a:srgbClr val="FFFFFF"/>
-                      </a:solidFill>
-                    </a:lnL>
-                    <a:lnR w="720">
-                      <a:solidFill>
-                        <a:srgbClr val="FFFFFF"/>
-                      </a:solidFill>
-                    </a:lnR>
-                    <a:lnT w="720">
-                      <a:solidFill>
-                        <a:srgbClr val="FFFFFF"/>
-                      </a:solidFill>
-                    </a:lnT>
-                    <a:lnB w="720">
-                      <a:solidFill>
-                        <a:srgbClr val="FFFFFF"/>
-                      </a:solidFill>
-                    </a:lnB>
-                    <a:solidFill>
-                      <a:srgbClr val="CCCCCC"/>
-                    </a:solidFill>
-                  </a:tcPr>
-                </a:tc>
-                <a:tc>
-                  <a:txBody>
-                    <a:bodyPr/>
-                    <a:lstStyle/>
-                    <a:p>
-                      <a:endParaRPr lang="en-US" sz="1100" dirty="0"/>
-                    </a:p>
-                  </a:txBody>
-                  <a:tcPr marL="90000" marR="90000">
-                    <a:lnL w="720">
-                      <a:solidFill>
-                        <a:srgbClr val="FFFFFF"/>
-                      </a:solidFill>
-                    </a:lnL>
-                    <a:lnR w="720">
-                      <a:solidFill>
-                        <a:srgbClr val="FFFFFF"/>
-                      </a:solidFill>
-                    </a:lnR>
-                    <a:lnT w="720">
-                      <a:solidFill>
-                        <a:srgbClr val="FFFFFF"/>
-                      </a:solidFill>
-                    </a:lnT>
-                    <a:lnB w="720">
-                      <a:solidFill>
-                        <a:srgbClr val="FFFFFF"/>
-                      </a:solidFill>
-                    </a:lnB>
-                    <a:solidFill>
-                      <a:srgbClr val="CCCCCC"/>
-                    </a:solidFill>
-                  </a:tcPr>
-                </a:tc>
-                <a:extLst>
-                  <a:ext uri="{0D108BD9-81ED-4DB2-BD59-A6C34878D82A}">
-                    <a16:rowId xmlns:a16="http://schemas.microsoft.com/office/drawing/2014/main" val="10003"/>
-                  </a:ext>
-                </a:extLst>
-              </a:tr>
-              <a:tr h="428760">
-                <a:tc>
-                  <a:txBody>
-                    <a:bodyPr/>
-                    <a:lstStyle/>
-                    <a:p>
-                      <a:endParaRPr lang="en-US" sz="1100"/>
-                    </a:p>
-                  </a:txBody>
-                  <a:tcPr marL="90000" marR="90000">
-                    <a:lnL w="720">
-                      <a:solidFill>
-                        <a:srgbClr val="FFFFFF"/>
-                      </a:solidFill>
-                    </a:lnL>
-                    <a:lnR w="720">
-                      <a:solidFill>
-                        <a:srgbClr val="FFFFFF"/>
-                      </a:solidFill>
-                    </a:lnR>
-                    <a:lnT w="720">
-                      <a:solidFill>
-                        <a:srgbClr val="FFFFFF"/>
-                      </a:solidFill>
-                    </a:lnT>
-                    <a:lnB w="720">
-                      <a:solidFill>
-                        <a:srgbClr val="FFFFFF"/>
-                      </a:solidFill>
-                    </a:lnB>
-                    <a:solidFill>
-                      <a:srgbClr val="E6E6E6"/>
-                    </a:solidFill>
-                  </a:tcPr>
-                </a:tc>
-                <a:tc>
-                  <a:txBody>
-                    <a:bodyPr/>
-                    <a:lstStyle/>
-                    <a:p>
-                      <a:endParaRPr lang="en-US" sz="1100" dirty="0"/>
-                    </a:p>
-                  </a:txBody>
-                  <a:tcPr marL="90000" marR="90000">
-                    <a:lnL w="720">
-                      <a:solidFill>
-                        <a:srgbClr val="FFFFFF"/>
-                      </a:solidFill>
-                    </a:lnL>
-                    <a:lnR w="720">
-                      <a:solidFill>
-                        <a:srgbClr val="FFFFFF"/>
-                      </a:solidFill>
-                    </a:lnR>
-                    <a:lnT w="720">
-                      <a:solidFill>
-                        <a:srgbClr val="FFFFFF"/>
-                      </a:solidFill>
-                    </a:lnT>
-                    <a:lnB w="720">
-                      <a:solidFill>
-                        <a:srgbClr val="FFFFFF"/>
-                      </a:solidFill>
-                    </a:lnB>
-                    <a:solidFill>
-                      <a:srgbClr val="E6E6E6"/>
-                    </a:solidFill>
-                  </a:tcPr>
-                </a:tc>
-                <a:extLst>
-                  <a:ext uri="{0D108BD9-81ED-4DB2-BD59-A6C34878D82A}">
-                    <a16:rowId xmlns:a16="http://schemas.microsoft.com/office/drawing/2014/main" val="10004"/>
-                  </a:ext>
-                </a:extLst>
-              </a:tr>
-              <a:tr h="428760">
-                <a:tc>
-                  <a:txBody>
-                    <a:bodyPr/>
-                    <a:lstStyle/>
-                    <a:p>
-                      <a:endParaRPr lang="en-US" sz="1100"/>
-                    </a:p>
-                  </a:txBody>
-                  <a:tcPr marL="90000" marR="90000">
-                    <a:lnL w="720">
-                      <a:solidFill>
-                        <a:srgbClr val="FFFFFF"/>
-                      </a:solidFill>
-                    </a:lnL>
-                    <a:lnR w="720">
-                      <a:solidFill>
-                        <a:srgbClr val="FFFFFF"/>
-                      </a:solidFill>
-                    </a:lnR>
-                    <a:lnT w="720">
-                      <a:solidFill>
-                        <a:srgbClr val="FFFFFF"/>
-                      </a:solidFill>
-                    </a:lnT>
-                    <a:lnB w="720">
-                      <a:solidFill>
-                        <a:srgbClr val="FFFFFF"/>
-                      </a:solidFill>
-                    </a:lnB>
-                    <a:solidFill>
-                      <a:srgbClr val="CCCCCC"/>
-                    </a:solidFill>
-                  </a:tcPr>
-                </a:tc>
-                <a:tc>
-                  <a:txBody>
-                    <a:bodyPr/>
-                    <a:lstStyle/>
-                    <a:p>
-                      <a:endParaRPr lang="en-US" sz="1100" dirty="0"/>
-                    </a:p>
-                  </a:txBody>
-                  <a:tcPr marL="90000" marR="90000">
-                    <a:lnL w="720">
-                      <a:solidFill>
-                        <a:srgbClr val="FFFFFF"/>
-                      </a:solidFill>
-                    </a:lnL>
-                    <a:lnR w="720">
-                      <a:solidFill>
-                        <a:srgbClr val="FFFFFF"/>
-                      </a:solidFill>
-                    </a:lnR>
-                    <a:lnT w="720">
-                      <a:solidFill>
-                        <a:srgbClr val="FFFFFF"/>
-                      </a:solidFill>
-                    </a:lnT>
-                    <a:lnB w="720">
-                      <a:solidFill>
-                        <a:srgbClr val="FFFFFF"/>
-                      </a:solidFill>
-                    </a:lnB>
-                    <a:solidFill>
-                      <a:srgbClr val="CCCCCC"/>
-                    </a:solidFill>
-                  </a:tcPr>
-                </a:tc>
-                <a:extLst>
-                  <a:ext uri="{0D108BD9-81ED-4DB2-BD59-A6C34878D82A}">
-                    <a16:rowId xmlns:a16="http://schemas.microsoft.com/office/drawing/2014/main" val="10005"/>
-                  </a:ext>
-                </a:extLst>
-              </a:tr>
-              <a:tr h="428760">
-                <a:tc>
-                  <a:txBody>
-                    <a:bodyPr/>
-                    <a:lstStyle/>
-                    <a:p>
-                      <a:endParaRPr lang="en-US" sz="1100"/>
-                    </a:p>
-                  </a:txBody>
-                  <a:tcPr marL="90000" marR="90000">
-                    <a:lnL w="720">
-                      <a:solidFill>
-                        <a:srgbClr val="FFFFFF"/>
-                      </a:solidFill>
-                    </a:lnL>
-                    <a:lnR w="720">
-                      <a:solidFill>
-                        <a:srgbClr val="FFFFFF"/>
-                      </a:solidFill>
-                    </a:lnR>
-                    <a:lnT w="720">
-                      <a:solidFill>
-                        <a:srgbClr val="FFFFFF"/>
-                      </a:solidFill>
-                    </a:lnT>
-                    <a:lnB w="720">
-                      <a:solidFill>
-                        <a:srgbClr val="FFFFFF"/>
-                      </a:solidFill>
-                    </a:lnB>
-                    <a:solidFill>
-                      <a:srgbClr val="E6E6E6"/>
-                    </a:solidFill>
-                  </a:tcPr>
-                </a:tc>
-                <a:tc>
-                  <a:txBody>
-                    <a:bodyPr/>
-                    <a:lstStyle/>
-                    <a:p>
-                      <a:endParaRPr lang="en-US" sz="1100" dirty="0"/>
-                    </a:p>
-                  </a:txBody>
-                  <a:tcPr marL="90000" marR="90000">
-                    <a:lnL w="720">
-                      <a:solidFill>
-                        <a:srgbClr val="FFFFFF"/>
-                      </a:solidFill>
-                    </a:lnL>
-                    <a:lnR w="720">
-                      <a:solidFill>
-                        <a:srgbClr val="FFFFFF"/>
-                      </a:solidFill>
-                    </a:lnR>
-                    <a:lnT w="720">
-                      <a:solidFill>
-                        <a:srgbClr val="FFFFFF"/>
-                      </a:solidFill>
-                    </a:lnT>
-                    <a:lnB w="720">
-                      <a:solidFill>
-                        <a:srgbClr val="FFFFFF"/>
-                      </a:solidFill>
-                    </a:lnB>
-                    <a:solidFill>
-                      <a:srgbClr val="E6E6E6"/>
-                    </a:solidFill>
-                  </a:tcPr>
-                </a:tc>
-                <a:extLst>
-                  <a:ext uri="{0D108BD9-81ED-4DB2-BD59-A6C34878D82A}">
-                    <a16:rowId xmlns:a16="http://schemas.microsoft.com/office/drawing/2014/main" val="10006"/>
-                  </a:ext>
-                </a:extLst>
-              </a:tr>
-              <a:tr h="428760">
-                <a:tc>
-                  <a:txBody>
-                    <a:bodyPr/>
-                    <a:lstStyle/>
-                    <a:p>
-                      <a:endParaRPr lang="en-US" sz="1100"/>
-                    </a:p>
-                  </a:txBody>
-                  <a:tcPr marL="90000" marR="90000">
-                    <a:lnL w="720">
-                      <a:solidFill>
-                        <a:srgbClr val="FFFFFF"/>
-                      </a:solidFill>
-                    </a:lnL>
-                    <a:lnR w="720">
-                      <a:solidFill>
-                        <a:srgbClr val="FFFFFF"/>
-                      </a:solidFill>
-                    </a:lnR>
-                    <a:lnT w="720">
-                      <a:solidFill>
-                        <a:srgbClr val="FFFFFF"/>
-                      </a:solidFill>
-                    </a:lnT>
-                    <a:lnB w="720">
-                      <a:solidFill>
-                        <a:srgbClr val="FFFFFF"/>
-                      </a:solidFill>
-                    </a:lnB>
-                    <a:solidFill>
-                      <a:srgbClr val="CCCCCC"/>
-                    </a:solidFill>
-                  </a:tcPr>
-                </a:tc>
-                <a:tc>
-                  <a:txBody>
-                    <a:bodyPr/>
-                    <a:lstStyle/>
-                    <a:p>
-                      <a:endParaRPr lang="en-US" sz="1100" dirty="0"/>
-                    </a:p>
-                  </a:txBody>
-                  <a:tcPr marL="90000" marR="90000">
-                    <a:lnL w="720">
-                      <a:solidFill>
-                        <a:srgbClr val="FFFFFF"/>
-                      </a:solidFill>
-                    </a:lnL>
-                    <a:lnR w="720">
-                      <a:solidFill>
-                        <a:srgbClr val="FFFFFF"/>
-                      </a:solidFill>
-                    </a:lnR>
-                    <a:lnT w="720">
-                      <a:solidFill>
-                        <a:srgbClr val="FFFFFF"/>
-                      </a:solidFill>
-                    </a:lnT>
-                    <a:lnB w="720">
-                      <a:solidFill>
-                        <a:srgbClr val="FFFFFF"/>
-                      </a:solidFill>
-                    </a:lnB>
-                    <a:solidFill>
-                      <a:srgbClr val="CCCCCC"/>
-                    </a:solidFill>
-                  </a:tcPr>
-                </a:tc>
-                <a:extLst>
-                  <a:ext uri="{0D108BD9-81ED-4DB2-BD59-A6C34878D82A}">
-                    <a16:rowId xmlns:a16="http://schemas.microsoft.com/office/drawing/2014/main" val="10007"/>
-                  </a:ext>
-                </a:extLst>
-              </a:tr>
-              <a:tr h="428760">
-                <a:tc>
-                  <a:txBody>
-                    <a:bodyPr/>
-                    <a:lstStyle/>
-                    <a:p>
-                      <a:endParaRPr lang="en-US" sz="1100"/>
-                    </a:p>
-                  </a:txBody>
-                  <a:tcPr marL="90000" marR="90000">
-                    <a:lnL w="720">
-                      <a:solidFill>
-                        <a:srgbClr val="FFFFFF"/>
-                      </a:solidFill>
-                    </a:lnL>
-                    <a:lnR w="720">
-                      <a:solidFill>
-                        <a:srgbClr val="FFFFFF"/>
-                      </a:solidFill>
-                    </a:lnR>
-                    <a:lnT w="720">
-                      <a:solidFill>
-                        <a:srgbClr val="FFFFFF"/>
-                      </a:solidFill>
-                    </a:lnT>
-                    <a:lnB w="720">
-                      <a:solidFill>
-                        <a:srgbClr val="FFFFFF"/>
-                      </a:solidFill>
-                    </a:lnB>
-                    <a:solidFill>
-                      <a:srgbClr val="E6E6E6"/>
-                    </a:solidFill>
-                  </a:tcPr>
-                </a:tc>
-                <a:tc>
-                  <a:txBody>
-                    <a:bodyPr/>
-                    <a:lstStyle/>
-                    <a:p>
-                      <a:endParaRPr lang="en-US" sz="1100" dirty="0"/>
-                    </a:p>
-                  </a:txBody>
-                  <a:tcPr marL="90000" marR="90000">
-                    <a:lnL w="720">
-                      <a:solidFill>
-                        <a:srgbClr val="FFFFFF"/>
-                      </a:solidFill>
-                    </a:lnL>
-                    <a:lnR w="720">
-                      <a:solidFill>
-                        <a:srgbClr val="FFFFFF"/>
-                      </a:solidFill>
-                    </a:lnR>
-                    <a:lnT w="720">
-                      <a:solidFill>
-                        <a:srgbClr val="FFFFFF"/>
-                      </a:solidFill>
-                    </a:lnT>
-                    <a:lnB w="720">
-                      <a:solidFill>
-                        <a:srgbClr val="FFFFFF"/>
-                      </a:solidFill>
-                    </a:lnB>
-                    <a:solidFill>
-                      <a:srgbClr val="E6E6E6"/>
-                    </a:solidFill>
-                  </a:tcPr>
-                </a:tc>
-                <a:extLst>
-                  <a:ext uri="{0D108BD9-81ED-4DB2-BD59-A6C34878D82A}">
-                    <a16:rowId xmlns:a16="http://schemas.microsoft.com/office/drawing/2014/main" val="10008"/>
-                  </a:ext>
-                </a:extLst>
-              </a:tr>
-              <a:tr h="428760">
-                <a:tc>
-                  <a:txBody>
-                    <a:bodyPr/>
-                    <a:lstStyle/>
-                    <a:p>
-                      <a:endParaRPr lang="en-US" sz="1100" dirty="0"/>
-                    </a:p>
-                  </a:txBody>
-                  <a:tcPr marL="90000" marR="90000">
-                    <a:lnL w="720">
-                      <a:solidFill>
-                        <a:srgbClr val="FFFFFF"/>
-                      </a:solidFill>
-                    </a:lnL>
-                    <a:lnR w="720">
-                      <a:solidFill>
-                        <a:srgbClr val="FFFFFF"/>
-                      </a:solidFill>
-                    </a:lnR>
-                    <a:lnT w="720">
-                      <a:solidFill>
-                        <a:srgbClr val="FFFFFF"/>
-                      </a:solidFill>
-                    </a:lnT>
-                    <a:lnB w="720">
-                      <a:solidFill>
-                        <a:srgbClr val="FFFFFF"/>
-                      </a:solidFill>
-                    </a:lnB>
-                    <a:solidFill>
-                      <a:srgbClr val="CCCCCC"/>
-                    </a:solidFill>
-                  </a:tcPr>
-                </a:tc>
-                <a:tc>
-                  <a:txBody>
-                    <a:bodyPr/>
-                    <a:lstStyle/>
-                    <a:p>
-                      <a:endParaRPr lang="en-US" sz="1100" dirty="0"/>
-                    </a:p>
-                  </a:txBody>
-                  <a:tcPr marL="90000" marR="90000">
-                    <a:lnL w="720">
-                      <a:solidFill>
-                        <a:srgbClr val="FFFFFF"/>
-                      </a:solidFill>
-                    </a:lnL>
-                    <a:lnR w="720">
-                      <a:solidFill>
-                        <a:srgbClr val="FFFFFF"/>
-                      </a:solidFill>
-                    </a:lnR>
-                    <a:lnT w="720">
-                      <a:solidFill>
-                        <a:srgbClr val="FFFFFF"/>
-                      </a:solidFill>
-                    </a:lnT>
-                    <a:lnB w="720">
-                      <a:solidFill>
-                        <a:srgbClr val="FFFFFF"/>
-                      </a:solidFill>
-                    </a:lnB>
-                    <a:solidFill>
-                      <a:srgbClr val="CCCCCC"/>
-                    </a:solidFill>
-                  </a:tcPr>
-                </a:tc>
-                <a:extLst>
-                  <a:ext uri="{0D108BD9-81ED-4DB2-BD59-A6C34878D82A}">
-                    <a16:rowId xmlns:a16="http://schemas.microsoft.com/office/drawing/2014/main" val="10009"/>
-                  </a:ext>
-                </a:extLst>
-              </a:tr>
-            </a:tbl>
-          </a:graphicData>
-        </a:graphic>
-      </p:graphicFrame>
-      <p:sp>
-        <p:nvSpPr>
-          <p:cNvPr id="133" name="CustomShape 2"/>
-          <p:cNvSpPr/>
-          <p:nvPr/>
-        </p:nvSpPr>
-        <p:spPr>
-          <a:xfrm>
-            <a:off x="3909600" y="4773960"/>
-            <a:ext cx="1002240" cy="362160"/>
-          </a:xfrm>
-          <a:prstGeom prst="rect">
-            <a:avLst/>
-          </a:prstGeom>
-          <a:noFill/>
-          <a:ln>
-            <a:noFill/>
-          </a:ln>
-        </p:spPr>
-        <p:style>
-          <a:lnRef idx="0">
-            <a:scrgbClr r="0" g="0" b="0"/>
-          </a:lnRef>
-          <a:fillRef idx="0">
-            <a:scrgbClr r="0" g="0" b="0"/>
-          </a:fillRef>
-          <a:effectRef idx="0">
-            <a:scrgbClr r="0" g="0" b="0"/>
-          </a:effectRef>
-          <a:fontRef idx="minor"/>
-        </p:style>
-        <p:txBody>
-          <a:bodyPr lIns="90000" tIns="45000" rIns="90000" bIns="45000"/>
-          <a:lstStyle/>
-          <a:p>
-            <a:pPr>
-              <a:lnSpc>
-                <a:spcPct val="100000"/>
-              </a:lnSpc>
-            </a:pPr>
-            <a:r>
-              <a:rPr lang="en-US" sz="1800" b="0" strike="noStrike" spc="-1" dirty="0">
-                <a:solidFill>
-                  <a:srgbClr val="000000"/>
-                </a:solidFill>
-                <a:latin typeface="Arial"/>
-                <a:ea typeface="DejaVu Sans"/>
-              </a:rPr>
-              <a:t>Table 1</a:t>
-            </a:r>
-            <a:endParaRPr lang="en-US" sz="1800" b="0" strike="noStrike" spc="-1" dirty="0">
-              <a:latin typeface="Arial"/>
-            </a:endParaRPr>
-          </a:p>
-        </p:txBody>
-      </p:sp>
       <p:sp>
         <p:nvSpPr>
           <p:cNvPr id="134" name="CustomShape 3"/>
@@ -7907,6 +6994,1234 @@
           </a:p>
         </p:txBody>
       </p:sp>
+      <p:graphicFrame>
+        <p:nvGraphicFramePr>
+          <p:cNvPr id="4" name="Table 1">
+            <a:extLst>
+              <a:ext uri="{FF2B5EF4-FFF2-40B4-BE49-F238E27FC236}">
+                <a16:creationId xmlns:a16="http://schemas.microsoft.com/office/drawing/2014/main" id="{FC617C39-00A3-0CE1-C54B-1ABEEB912D37}"/>
+              </a:ext>
+            </a:extLst>
+          </p:cNvPr>
+          <p:cNvGraphicFramePr/>
+          <p:nvPr>
+            <p:extLst>
+              <p:ext uri="{D42A27DB-BD31-4B8C-83A1-F6EECF244321}">
+                <p14:modId xmlns:p14="http://schemas.microsoft.com/office/powerpoint/2010/main" val="3360619438"/>
+              </p:ext>
+            </p:extLst>
+          </p:nvPr>
+        </p:nvGraphicFramePr>
+        <p:xfrm>
+          <a:off x="0" y="742068"/>
+          <a:ext cx="9144000" cy="4036920"/>
+        </p:xfrm>
+        <a:graphic>
+          <a:graphicData uri="http://schemas.openxmlformats.org/drawingml/2006/table">
+            <a:tbl>
+              <a:tblPr/>
+              <a:tblGrid>
+                <a:gridCol w="4571280">
+                  <a:extLst>
+                    <a:ext uri="{9D8B030D-6E8A-4147-A177-3AD203B41FA5}">
+                      <a16:colId xmlns:a16="http://schemas.microsoft.com/office/drawing/2014/main" val="20000"/>
+                    </a:ext>
+                  </a:extLst>
+                </a:gridCol>
+                <a:gridCol w="4572720">
+                  <a:extLst>
+                    <a:ext uri="{9D8B030D-6E8A-4147-A177-3AD203B41FA5}">
+                      <a16:colId xmlns:a16="http://schemas.microsoft.com/office/drawing/2014/main" val="20001"/>
+                    </a:ext>
+                  </a:extLst>
+                </a:gridCol>
+              </a:tblGrid>
+              <a:tr h="347760">
+                <a:tc>
+                  <a:txBody>
+                    <a:bodyPr/>
+                    <a:lstStyle/>
+                    <a:p>
+                      <a:pPr>
+                        <a:lnSpc>
+                          <a:spcPct val="100000"/>
+                        </a:lnSpc>
+                      </a:pPr>
+                      <a:r>
+                        <a:rPr lang="en-US" sz="1100" b="0" strike="noStrike" spc="-1" dirty="0">
+                          <a:latin typeface="+mn-lt"/>
+                        </a:rPr>
+                        <a:t>True Translation</a:t>
+                      </a:r>
+                      <a:endParaRPr lang="en-US" sz="1100" b="0" strike="noStrike" spc="-1" dirty="0">
+                        <a:latin typeface="Arial"/>
+                      </a:endParaRPr>
+                    </a:p>
+                  </a:txBody>
+                  <a:tcPr marL="90000" marR="90000">
+                    <a:lnL w="720">
+                      <a:solidFill>
+                        <a:srgbClr val="FFFFFF"/>
+                      </a:solidFill>
+                    </a:lnL>
+                    <a:lnR w="720">
+                      <a:solidFill>
+                        <a:srgbClr val="FFFFFF"/>
+                      </a:solidFill>
+                    </a:lnR>
+                    <a:lnT w="720">
+                      <a:solidFill>
+                        <a:srgbClr val="FFFFFF"/>
+                      </a:solidFill>
+                    </a:lnT>
+                    <a:lnB w="720" cap="flat" cmpd="sng" algn="ctr">
+                      <a:solidFill>
+                        <a:srgbClr val="FFFFFF"/>
+                      </a:solidFill>
+                      <a:prstDash val="solid"/>
+                      <a:round/>
+                      <a:headEnd type="none" w="med" len="med"/>
+                      <a:tailEnd type="none" w="med" len="med"/>
+                    </a:lnB>
+                    <a:solidFill>
+                      <a:srgbClr val="B3B3B3"/>
+                    </a:solidFill>
+                  </a:tcPr>
+                </a:tc>
+                <a:tc>
+                  <a:txBody>
+                    <a:bodyPr/>
+                    <a:lstStyle/>
+                    <a:p>
+                      <a:pPr>
+                        <a:lnSpc>
+                          <a:spcPct val="100000"/>
+                        </a:lnSpc>
+                      </a:pPr>
+                      <a:r>
+                        <a:rPr lang="en-US" sz="1100" b="0" strike="noStrike" spc="-1" dirty="0">
+                          <a:latin typeface="+mn-lt"/>
+                        </a:rPr>
+                        <a:t>Predicted Translation</a:t>
+                      </a:r>
+                      <a:endParaRPr lang="en-US" sz="1100" b="0" strike="noStrike" spc="-1" dirty="0">
+                        <a:latin typeface="Arial"/>
+                      </a:endParaRPr>
+                    </a:p>
+                  </a:txBody>
+                  <a:tcPr marL="90000" marR="90000">
+                    <a:lnL w="720">
+                      <a:solidFill>
+                        <a:srgbClr val="FFFFFF"/>
+                      </a:solidFill>
+                    </a:lnL>
+                    <a:lnR w="720">
+                      <a:solidFill>
+                        <a:srgbClr val="FFFFFF"/>
+                      </a:solidFill>
+                    </a:lnR>
+                    <a:lnT w="720">
+                      <a:solidFill>
+                        <a:srgbClr val="FFFFFF"/>
+                      </a:solidFill>
+                    </a:lnT>
+                    <a:lnB w="720" cap="flat" cmpd="sng" algn="ctr">
+                      <a:solidFill>
+                        <a:srgbClr val="FFFFFF"/>
+                      </a:solidFill>
+                      <a:prstDash val="solid"/>
+                      <a:round/>
+                      <a:headEnd type="none" w="med" len="med"/>
+                      <a:tailEnd type="none" w="med" len="med"/>
+                    </a:lnB>
+                    <a:solidFill>
+                      <a:srgbClr val="B3B3B3"/>
+                    </a:solidFill>
+                  </a:tcPr>
+                </a:tc>
+                <a:extLst>
+                  <a:ext uri="{0D108BD9-81ED-4DB2-BD59-A6C34878D82A}">
+                    <a16:rowId xmlns:a16="http://schemas.microsoft.com/office/drawing/2014/main" val="10000"/>
+                  </a:ext>
+                </a:extLst>
+              </a:tr>
+              <a:tr h="247320">
+                <a:tc>
+                  <a:txBody>
+                    <a:bodyPr/>
+                    <a:lstStyle/>
+                    <a:p>
+                      <a:r>
+                        <a:rPr lang="en-US" sz="1100"/>
+                        <a:t>&lt;sos&gt; a man in an orange hat starring at something &lt;eos&gt;</a:t>
+                      </a:r>
+                    </a:p>
+                  </a:txBody>
+                  <a:tcPr anchor="ctr">
+                    <a:lnL w="720">
+                      <a:solidFill>
+                        <a:srgbClr val="FFFFFF"/>
+                      </a:solidFill>
+                    </a:lnL>
+                    <a:lnR w="720">
+                      <a:solidFill>
+                        <a:srgbClr val="FFFFFF"/>
+                      </a:solidFill>
+                    </a:lnR>
+                    <a:lnT w="720">
+                      <a:solidFill>
+                        <a:srgbClr val="FFFFFF"/>
+                      </a:solidFill>
+                    </a:lnT>
+                    <a:lnB w="720" cap="flat" cmpd="sng" algn="ctr">
+                      <a:solidFill>
+                        <a:srgbClr val="FFFFFF"/>
+                      </a:solidFill>
+                      <a:prstDash val="solid"/>
+                      <a:round/>
+                      <a:headEnd type="none" w="med" len="med"/>
+                      <a:tailEnd type="none" w="med" len="med"/>
+                    </a:lnB>
+                    <a:solidFill>
+                      <a:srgbClr val="CCCCCC"/>
+                    </a:solidFill>
+                  </a:tcPr>
+                </a:tc>
+                <a:tc>
+                  <a:txBody>
+                    <a:bodyPr/>
+                    <a:lstStyle/>
+                    <a:p>
+                      <a:r>
+                        <a:rPr lang="en-US" sz="1100" dirty="0"/>
+                        <a:t>&lt;</a:t>
+                      </a:r>
+                      <a:r>
+                        <a:rPr lang="en-US" sz="1100" dirty="0" err="1"/>
+                        <a:t>sos</a:t>
+                      </a:r>
+                      <a:r>
+                        <a:rPr lang="en-US" sz="1100" dirty="0"/>
+                        <a:t>&gt; a man in an orange hat s hat is &lt;</a:t>
+                      </a:r>
+                      <a:r>
+                        <a:rPr lang="en-US" sz="1100" dirty="0" err="1"/>
+                        <a:t>unk</a:t>
+                      </a:r>
+                      <a:r>
+                        <a:rPr lang="en-US" sz="1100" dirty="0"/>
+                        <a:t>&gt; something &lt;</a:t>
+                      </a:r>
+                      <a:r>
+                        <a:rPr lang="en-US" sz="1100" dirty="0" err="1"/>
+                        <a:t>eos</a:t>
+                      </a:r>
+                      <a:r>
+                        <a:rPr lang="en-US" sz="1100" dirty="0"/>
+                        <a:t>&gt;</a:t>
+                      </a:r>
+                    </a:p>
+                  </a:txBody>
+                  <a:tcPr anchor="ctr">
+                    <a:lnL w="720">
+                      <a:solidFill>
+                        <a:srgbClr val="FFFFFF"/>
+                      </a:solidFill>
+                    </a:lnL>
+                    <a:lnR w="720">
+                      <a:solidFill>
+                        <a:srgbClr val="FFFFFF"/>
+                      </a:solidFill>
+                    </a:lnR>
+                    <a:lnT w="720">
+                      <a:solidFill>
+                        <a:srgbClr val="FFFFFF"/>
+                      </a:solidFill>
+                    </a:lnT>
+                    <a:lnB w="720" cap="flat" cmpd="sng" algn="ctr">
+                      <a:solidFill>
+                        <a:srgbClr val="FFFFFF"/>
+                      </a:solidFill>
+                      <a:prstDash val="solid"/>
+                      <a:round/>
+                      <a:headEnd type="none" w="med" len="med"/>
+                      <a:tailEnd type="none" w="med" len="med"/>
+                    </a:lnB>
+                    <a:solidFill>
+                      <a:srgbClr val="CCCCCC"/>
+                    </a:solidFill>
+                  </a:tcPr>
+                </a:tc>
+                <a:extLst>
+                  <a:ext uri="{0D108BD9-81ED-4DB2-BD59-A6C34878D82A}">
+                    <a16:rowId xmlns:a16="http://schemas.microsoft.com/office/drawing/2014/main" val="10001"/>
+                  </a:ext>
+                </a:extLst>
+              </a:tr>
+              <a:tr h="428760">
+                <a:tc>
+                  <a:txBody>
+                    <a:bodyPr/>
+                    <a:lstStyle/>
+                    <a:p>
+                      <a:r>
+                        <a:rPr lang="en-US" sz="1100" dirty="0"/>
+                        <a:t>&lt;</a:t>
+                      </a:r>
+                      <a:r>
+                        <a:rPr lang="en-US" sz="1100" dirty="0" err="1"/>
+                        <a:t>sos</a:t>
+                      </a:r>
+                      <a:r>
+                        <a:rPr lang="en-US" sz="1100" dirty="0"/>
+                        <a:t>&gt; a </a:t>
+                      </a:r>
+                      <a:r>
+                        <a:rPr lang="en-US" sz="1100" dirty="0" err="1"/>
+                        <a:t>boston</a:t>
+                      </a:r>
+                      <a:r>
+                        <a:rPr lang="en-US" sz="1100" dirty="0"/>
+                        <a:t> terrier is running on lush green grass in front of a white fence &lt;</a:t>
+                      </a:r>
+                      <a:r>
+                        <a:rPr lang="en-US" sz="1100" dirty="0" err="1"/>
+                        <a:t>eos</a:t>
+                      </a:r>
+                      <a:r>
+                        <a:rPr lang="en-US" sz="1100" dirty="0"/>
+                        <a:t>&gt;</a:t>
+                      </a:r>
+                    </a:p>
+                  </a:txBody>
+                  <a:tcPr anchor="ctr">
+                    <a:lnL w="720">
+                      <a:solidFill>
+                        <a:srgbClr val="FFFFFF"/>
+                      </a:solidFill>
+                    </a:lnL>
+                    <a:lnR w="720">
+                      <a:solidFill>
+                        <a:srgbClr val="FFFFFF"/>
+                      </a:solidFill>
+                    </a:lnR>
+                    <a:lnT w="720" cap="flat" cmpd="sng" algn="ctr">
+                      <a:solidFill>
+                        <a:srgbClr val="FFFFFF"/>
+                      </a:solidFill>
+                      <a:prstDash val="solid"/>
+                      <a:round/>
+                      <a:headEnd type="none" w="med" len="med"/>
+                      <a:tailEnd type="none" w="med" len="med"/>
+                    </a:lnT>
+                    <a:lnB w="720">
+                      <a:solidFill>
+                        <a:srgbClr val="FFFFFF"/>
+                      </a:solidFill>
+                    </a:lnB>
+                    <a:solidFill>
+                      <a:srgbClr val="E6E6E6"/>
+                    </a:solidFill>
+                  </a:tcPr>
+                </a:tc>
+                <a:tc>
+                  <a:txBody>
+                    <a:bodyPr/>
+                    <a:lstStyle/>
+                    <a:p>
+                      <a:r>
+                        <a:rPr lang="en-US" sz="1100" dirty="0"/>
+                        <a:t>&lt;</a:t>
+                      </a:r>
+                      <a:r>
+                        <a:rPr lang="en-US" sz="1100" dirty="0" err="1"/>
+                        <a:t>sos</a:t>
+                      </a:r>
+                      <a:r>
+                        <a:rPr lang="en-US" sz="1100" dirty="0"/>
+                        <a:t>&gt; a </a:t>
+                      </a:r>
+                      <a:r>
+                        <a:rPr lang="en-US" sz="1100" dirty="0" err="1"/>
+                        <a:t>boston</a:t>
+                      </a:r>
+                      <a:r>
+                        <a:rPr lang="en-US" sz="1100" dirty="0"/>
+                        <a:t> &lt;</a:t>
+                      </a:r>
+                      <a:r>
+                        <a:rPr lang="en-US" sz="1100" dirty="0" err="1"/>
+                        <a:t>unk</a:t>
+                      </a:r>
+                      <a:r>
+                        <a:rPr lang="en-US" sz="1100" dirty="0"/>
+                        <a:t>&gt; dog is running through tall green grass in front of a white fence &lt;</a:t>
+                      </a:r>
+                      <a:r>
+                        <a:rPr lang="en-US" sz="1100" dirty="0" err="1"/>
+                        <a:t>eos</a:t>
+                      </a:r>
+                      <a:r>
+                        <a:rPr lang="en-US" sz="1100" dirty="0"/>
+                        <a:t>&gt;</a:t>
+                      </a:r>
+                    </a:p>
+                  </a:txBody>
+                  <a:tcPr anchor="ctr">
+                    <a:lnL w="720">
+                      <a:solidFill>
+                        <a:srgbClr val="FFFFFF"/>
+                      </a:solidFill>
+                    </a:lnL>
+                    <a:lnR w="720">
+                      <a:solidFill>
+                        <a:srgbClr val="FFFFFF"/>
+                      </a:solidFill>
+                    </a:lnR>
+                    <a:lnT w="720" cap="flat" cmpd="sng" algn="ctr">
+                      <a:solidFill>
+                        <a:srgbClr val="FFFFFF"/>
+                      </a:solidFill>
+                      <a:prstDash val="solid"/>
+                      <a:round/>
+                      <a:headEnd type="none" w="med" len="med"/>
+                      <a:tailEnd type="none" w="med" len="med"/>
+                    </a:lnT>
+                    <a:lnB w="720">
+                      <a:solidFill>
+                        <a:srgbClr val="FFFFFF"/>
+                      </a:solidFill>
+                    </a:lnB>
+                    <a:solidFill>
+                      <a:srgbClr val="E6E6E6"/>
+                    </a:solidFill>
+                  </a:tcPr>
+                </a:tc>
+                <a:extLst>
+                  <a:ext uri="{0D108BD9-81ED-4DB2-BD59-A6C34878D82A}">
+                    <a16:rowId xmlns:a16="http://schemas.microsoft.com/office/drawing/2014/main" val="10002"/>
+                  </a:ext>
+                </a:extLst>
+              </a:tr>
+              <a:tr h="428760">
+                <a:tc>
+                  <a:txBody>
+                    <a:bodyPr/>
+                    <a:lstStyle/>
+                    <a:p>
+                      <a:r>
+                        <a:rPr lang="en-US" sz="1100" dirty="0"/>
+                        <a:t>&lt;</a:t>
+                      </a:r>
+                      <a:r>
+                        <a:rPr lang="en-US" sz="1100" dirty="0" err="1"/>
+                        <a:t>sos</a:t>
+                      </a:r>
+                      <a:r>
+                        <a:rPr lang="en-US" sz="1100" dirty="0"/>
+                        <a:t>&gt; a girl in karate uniform breaking a stick with a front kick &lt;</a:t>
+                      </a:r>
+                      <a:r>
+                        <a:rPr lang="en-US" sz="1100" dirty="0" err="1"/>
+                        <a:t>eos</a:t>
+                      </a:r>
+                      <a:r>
+                        <a:rPr lang="en-US" sz="1100" dirty="0"/>
+                        <a:t>&gt;</a:t>
+                      </a:r>
+                    </a:p>
+                  </a:txBody>
+                  <a:tcPr marL="90000" marR="90000">
+                    <a:lnL w="720">
+                      <a:solidFill>
+                        <a:srgbClr val="FFFFFF"/>
+                      </a:solidFill>
+                    </a:lnL>
+                    <a:lnR w="720">
+                      <a:solidFill>
+                        <a:srgbClr val="FFFFFF"/>
+                      </a:solidFill>
+                    </a:lnR>
+                    <a:lnT w="720" cap="flat" cmpd="sng" algn="ctr">
+                      <a:solidFill>
+                        <a:srgbClr val="FFFFFF"/>
+                      </a:solidFill>
+                      <a:prstDash val="solid"/>
+                      <a:round/>
+                      <a:headEnd type="none" w="med" len="med"/>
+                      <a:tailEnd type="none" w="med" len="med"/>
+                    </a:lnT>
+                    <a:lnB w="720">
+                      <a:solidFill>
+                        <a:srgbClr val="FFFFFF"/>
+                      </a:solidFill>
+                    </a:lnB>
+                    <a:solidFill>
+                      <a:srgbClr val="CCCCCC"/>
+                    </a:solidFill>
+                  </a:tcPr>
+                </a:tc>
+                <a:tc>
+                  <a:txBody>
+                    <a:bodyPr/>
+                    <a:lstStyle/>
+                    <a:p>
+                      <a:r>
+                        <a:rPr lang="en-US" sz="1100" dirty="0"/>
+                        <a:t>&lt;</a:t>
+                      </a:r>
+                      <a:r>
+                        <a:rPr lang="en-US" sz="1100" dirty="0" err="1"/>
+                        <a:t>sos</a:t>
+                      </a:r>
+                      <a:r>
+                        <a:rPr lang="en-US" sz="1100" dirty="0"/>
+                        <a:t>&gt; a girl in a karate uniform is using a board with a &lt;</a:t>
+                      </a:r>
+                      <a:r>
+                        <a:rPr lang="en-US" sz="1100" dirty="0" err="1"/>
+                        <a:t>unk</a:t>
+                      </a:r>
+                      <a:r>
+                        <a:rPr lang="en-US" sz="1100" dirty="0"/>
+                        <a:t>&gt; &lt;</a:t>
+                      </a:r>
+                      <a:r>
+                        <a:rPr lang="en-US" sz="1100" dirty="0" err="1"/>
+                        <a:t>eos</a:t>
+                      </a:r>
+                      <a:r>
+                        <a:rPr lang="en-US" sz="1100" dirty="0"/>
+                        <a:t>&gt;</a:t>
+                      </a:r>
+                    </a:p>
+                  </a:txBody>
+                  <a:tcPr marL="90000" marR="90000">
+                    <a:lnL w="720">
+                      <a:solidFill>
+                        <a:srgbClr val="FFFFFF"/>
+                      </a:solidFill>
+                    </a:lnL>
+                    <a:lnR w="720">
+                      <a:solidFill>
+                        <a:srgbClr val="FFFFFF"/>
+                      </a:solidFill>
+                    </a:lnR>
+                    <a:lnT w="720" cap="flat" cmpd="sng" algn="ctr">
+                      <a:solidFill>
+                        <a:srgbClr val="FFFFFF"/>
+                      </a:solidFill>
+                      <a:prstDash val="solid"/>
+                      <a:round/>
+                      <a:headEnd type="none" w="med" len="med"/>
+                      <a:tailEnd type="none" w="med" len="med"/>
+                    </a:lnT>
+                    <a:lnB w="720">
+                      <a:solidFill>
+                        <a:srgbClr val="FFFFFF"/>
+                      </a:solidFill>
+                    </a:lnB>
+                    <a:solidFill>
+                      <a:srgbClr val="CCCCCC"/>
+                    </a:solidFill>
+                  </a:tcPr>
+                </a:tc>
+                <a:extLst>
+                  <a:ext uri="{0D108BD9-81ED-4DB2-BD59-A6C34878D82A}">
+                    <a16:rowId xmlns:a16="http://schemas.microsoft.com/office/drawing/2014/main" val="10003"/>
+                  </a:ext>
+                </a:extLst>
+              </a:tr>
+              <a:tr h="428760">
+                <a:tc>
+                  <a:txBody>
+                    <a:bodyPr/>
+                    <a:lstStyle/>
+                    <a:p>
+                      <a:r>
+                        <a:rPr lang="en-US" sz="1100" dirty="0"/>
+                        <a:t>&lt;</a:t>
+                      </a:r>
+                      <a:r>
+                        <a:rPr lang="en-US" sz="1100" dirty="0" err="1"/>
+                        <a:t>sos</a:t>
+                      </a:r>
+                      <a:r>
+                        <a:rPr lang="en-US" sz="1100" dirty="0"/>
+                        <a:t>&gt; five people wearing winter jackets and helmets stand in the snow with &lt;</a:t>
+                      </a:r>
+                      <a:r>
+                        <a:rPr lang="en-US" sz="1100" dirty="0" err="1"/>
+                        <a:t>unk</a:t>
+                      </a:r>
+                      <a:r>
+                        <a:rPr lang="en-US" sz="1100" dirty="0"/>
+                        <a:t>&gt; in the background &lt;</a:t>
+                      </a:r>
+                      <a:r>
+                        <a:rPr lang="en-US" sz="1100" dirty="0" err="1"/>
+                        <a:t>eos</a:t>
+                      </a:r>
+                      <a:r>
+                        <a:rPr lang="en-US" sz="1100" dirty="0"/>
+                        <a:t>&gt;</a:t>
+                      </a:r>
+                    </a:p>
+                  </a:txBody>
+                  <a:tcPr marL="90000" marR="90000">
+                    <a:lnL w="720">
+                      <a:solidFill>
+                        <a:srgbClr val="FFFFFF"/>
+                      </a:solidFill>
+                    </a:lnL>
+                    <a:lnR w="720">
+                      <a:solidFill>
+                        <a:srgbClr val="FFFFFF"/>
+                      </a:solidFill>
+                    </a:lnR>
+                    <a:lnT w="720">
+                      <a:solidFill>
+                        <a:srgbClr val="FFFFFF"/>
+                      </a:solidFill>
+                    </a:lnT>
+                    <a:lnB w="720">
+                      <a:solidFill>
+                        <a:srgbClr val="FFFFFF"/>
+                      </a:solidFill>
+                    </a:lnB>
+                    <a:solidFill>
+                      <a:srgbClr val="E6E6E6"/>
+                    </a:solidFill>
+                  </a:tcPr>
+                </a:tc>
+                <a:tc>
+                  <a:txBody>
+                    <a:bodyPr/>
+                    <a:lstStyle/>
+                    <a:p>
+                      <a:r>
+                        <a:rPr lang="en-US" sz="1100" dirty="0"/>
+                        <a:t>&lt;</a:t>
+                      </a:r>
+                      <a:r>
+                        <a:rPr lang="en-US" sz="1100" dirty="0" err="1"/>
+                        <a:t>sos</a:t>
+                      </a:r>
+                      <a:r>
+                        <a:rPr lang="en-US" sz="1100" dirty="0"/>
+                        <a:t>&gt; five people in helmets and helmets stand with helmets in the background &lt;</a:t>
+                      </a:r>
+                      <a:r>
+                        <a:rPr lang="en-US" sz="1100" dirty="0" err="1"/>
+                        <a:t>eos</a:t>
+                      </a:r>
+                      <a:r>
+                        <a:rPr lang="en-US" sz="1100" dirty="0"/>
+                        <a:t>&gt;</a:t>
+                      </a:r>
+                    </a:p>
+                  </a:txBody>
+                  <a:tcPr marL="90000" marR="90000">
+                    <a:lnL w="720">
+                      <a:solidFill>
+                        <a:srgbClr val="FFFFFF"/>
+                      </a:solidFill>
+                    </a:lnL>
+                    <a:lnR w="720">
+                      <a:solidFill>
+                        <a:srgbClr val="FFFFFF"/>
+                      </a:solidFill>
+                    </a:lnR>
+                    <a:lnT w="720">
+                      <a:solidFill>
+                        <a:srgbClr val="FFFFFF"/>
+                      </a:solidFill>
+                    </a:lnT>
+                    <a:lnB w="720">
+                      <a:solidFill>
+                        <a:srgbClr val="FFFFFF"/>
+                      </a:solidFill>
+                    </a:lnB>
+                    <a:solidFill>
+                      <a:srgbClr val="E6E6E6"/>
+                    </a:solidFill>
+                  </a:tcPr>
+                </a:tc>
+                <a:extLst>
+                  <a:ext uri="{0D108BD9-81ED-4DB2-BD59-A6C34878D82A}">
+                    <a16:rowId xmlns:a16="http://schemas.microsoft.com/office/drawing/2014/main" val="10004"/>
+                  </a:ext>
+                </a:extLst>
+              </a:tr>
+              <a:tr h="428760">
+                <a:tc>
+                  <a:txBody>
+                    <a:bodyPr/>
+                    <a:lstStyle/>
+                    <a:p>
+                      <a:r>
+                        <a:rPr lang="en-US" sz="1100" dirty="0"/>
+                        <a:t>&lt;</a:t>
+                      </a:r>
+                      <a:r>
+                        <a:rPr lang="en-US" sz="1100" dirty="0" err="1"/>
+                        <a:t>sos</a:t>
+                      </a:r>
+                      <a:r>
+                        <a:rPr lang="en-US" sz="1100" dirty="0"/>
+                        <a:t>&gt; people are fixing the roof of a house &lt;</a:t>
+                      </a:r>
+                      <a:r>
+                        <a:rPr lang="en-US" sz="1100" dirty="0" err="1"/>
+                        <a:t>eos</a:t>
+                      </a:r>
+                      <a:r>
+                        <a:rPr lang="en-US" sz="1100" dirty="0"/>
+                        <a:t>&gt;</a:t>
+                      </a:r>
+                    </a:p>
+                  </a:txBody>
+                  <a:tcPr marL="90000" marR="90000">
+                    <a:lnL w="720">
+                      <a:solidFill>
+                        <a:srgbClr val="FFFFFF"/>
+                      </a:solidFill>
+                    </a:lnL>
+                    <a:lnR w="720">
+                      <a:solidFill>
+                        <a:srgbClr val="FFFFFF"/>
+                      </a:solidFill>
+                    </a:lnR>
+                    <a:lnT w="720">
+                      <a:solidFill>
+                        <a:srgbClr val="FFFFFF"/>
+                      </a:solidFill>
+                    </a:lnT>
+                    <a:lnB w="720">
+                      <a:solidFill>
+                        <a:srgbClr val="FFFFFF"/>
+                      </a:solidFill>
+                    </a:lnB>
+                    <a:solidFill>
+                      <a:srgbClr val="CCCCCC"/>
+                    </a:solidFill>
+                  </a:tcPr>
+                </a:tc>
+                <a:tc>
+                  <a:txBody>
+                    <a:bodyPr/>
+                    <a:lstStyle/>
+                    <a:p>
+                      <a:r>
+                        <a:rPr lang="en-US" sz="1100" dirty="0"/>
+                        <a:t>&lt;</a:t>
+                      </a:r>
+                      <a:r>
+                        <a:rPr lang="en-US" sz="1100" dirty="0" err="1"/>
+                        <a:t>sos</a:t>
+                      </a:r>
+                      <a:r>
+                        <a:rPr lang="en-US" sz="1100" dirty="0"/>
+                        <a:t>&gt; people are fixing the roof of a house &lt;</a:t>
+                      </a:r>
+                      <a:r>
+                        <a:rPr lang="en-US" sz="1100" dirty="0" err="1"/>
+                        <a:t>eos</a:t>
+                      </a:r>
+                      <a:r>
+                        <a:rPr lang="en-US" sz="1100" dirty="0"/>
+                        <a:t>&gt;</a:t>
+                      </a:r>
+                    </a:p>
+                  </a:txBody>
+                  <a:tcPr marL="90000" marR="90000">
+                    <a:lnL w="720">
+                      <a:solidFill>
+                        <a:srgbClr val="FFFFFF"/>
+                      </a:solidFill>
+                    </a:lnL>
+                    <a:lnR w="720">
+                      <a:solidFill>
+                        <a:srgbClr val="FFFFFF"/>
+                      </a:solidFill>
+                    </a:lnR>
+                    <a:lnT w="720">
+                      <a:solidFill>
+                        <a:srgbClr val="FFFFFF"/>
+                      </a:solidFill>
+                    </a:lnT>
+                    <a:lnB w="720">
+                      <a:solidFill>
+                        <a:srgbClr val="FFFFFF"/>
+                      </a:solidFill>
+                    </a:lnB>
+                    <a:solidFill>
+                      <a:srgbClr val="CCCCCC"/>
+                    </a:solidFill>
+                  </a:tcPr>
+                </a:tc>
+                <a:extLst>
+                  <a:ext uri="{0D108BD9-81ED-4DB2-BD59-A6C34878D82A}">
+                    <a16:rowId xmlns:a16="http://schemas.microsoft.com/office/drawing/2014/main" val="10005"/>
+                  </a:ext>
+                </a:extLst>
+              </a:tr>
+              <a:tr h="428760">
+                <a:tc>
+                  <a:txBody>
+                    <a:bodyPr/>
+                    <a:lstStyle/>
+                    <a:p>
+                      <a:r>
+                        <a:rPr lang="en-US" sz="1100" dirty="0"/>
+                        <a:t>&lt;</a:t>
+                      </a:r>
+                      <a:r>
+                        <a:rPr lang="en-US" sz="1100" dirty="0" err="1"/>
+                        <a:t>sos</a:t>
+                      </a:r>
+                      <a:r>
+                        <a:rPr lang="en-US" sz="1100" dirty="0"/>
+                        <a:t>&gt; a group of people standing in front of an igloo &lt;</a:t>
+                      </a:r>
+                      <a:r>
+                        <a:rPr lang="en-US" sz="1100" dirty="0" err="1"/>
+                        <a:t>eos</a:t>
+                      </a:r>
+                      <a:r>
+                        <a:rPr lang="en-US" sz="1100" dirty="0"/>
+                        <a:t>&gt;</a:t>
+                      </a:r>
+                    </a:p>
+                  </a:txBody>
+                  <a:tcPr marL="90000" marR="90000">
+                    <a:lnL w="720">
+                      <a:solidFill>
+                        <a:srgbClr val="FFFFFF"/>
+                      </a:solidFill>
+                    </a:lnL>
+                    <a:lnR w="720">
+                      <a:solidFill>
+                        <a:srgbClr val="FFFFFF"/>
+                      </a:solidFill>
+                    </a:lnR>
+                    <a:lnT w="720">
+                      <a:solidFill>
+                        <a:srgbClr val="FFFFFF"/>
+                      </a:solidFill>
+                    </a:lnT>
+                    <a:lnB w="720">
+                      <a:solidFill>
+                        <a:srgbClr val="FFFFFF"/>
+                      </a:solidFill>
+                    </a:lnB>
+                    <a:solidFill>
+                      <a:srgbClr val="E6E6E6"/>
+                    </a:solidFill>
+                  </a:tcPr>
+                </a:tc>
+                <a:tc>
+                  <a:txBody>
+                    <a:bodyPr/>
+                    <a:lstStyle/>
+                    <a:p>
+                      <a:r>
+                        <a:rPr lang="en-US" sz="1100" dirty="0"/>
+                        <a:t>&lt;</a:t>
+                      </a:r>
+                      <a:r>
+                        <a:rPr lang="en-US" sz="1100" dirty="0" err="1"/>
+                        <a:t>sos</a:t>
+                      </a:r>
+                      <a:r>
+                        <a:rPr lang="en-US" sz="1100" dirty="0"/>
+                        <a:t>&gt; a group of people stand in front of a stone building &lt;</a:t>
+                      </a:r>
+                      <a:r>
+                        <a:rPr lang="en-US" sz="1100" dirty="0" err="1"/>
+                        <a:t>eos</a:t>
+                      </a:r>
+                      <a:r>
+                        <a:rPr lang="en-US" sz="1100" dirty="0"/>
+                        <a:t>&gt;</a:t>
+                      </a:r>
+                    </a:p>
+                  </a:txBody>
+                  <a:tcPr marL="90000" marR="90000">
+                    <a:lnL w="720">
+                      <a:solidFill>
+                        <a:srgbClr val="FFFFFF"/>
+                      </a:solidFill>
+                    </a:lnL>
+                    <a:lnR w="720">
+                      <a:solidFill>
+                        <a:srgbClr val="FFFFFF"/>
+                      </a:solidFill>
+                    </a:lnR>
+                    <a:lnT w="720">
+                      <a:solidFill>
+                        <a:srgbClr val="FFFFFF"/>
+                      </a:solidFill>
+                    </a:lnT>
+                    <a:lnB w="720">
+                      <a:solidFill>
+                        <a:srgbClr val="FFFFFF"/>
+                      </a:solidFill>
+                    </a:lnB>
+                    <a:solidFill>
+                      <a:srgbClr val="E6E6E6"/>
+                    </a:solidFill>
+                  </a:tcPr>
+                </a:tc>
+                <a:extLst>
+                  <a:ext uri="{0D108BD9-81ED-4DB2-BD59-A6C34878D82A}">
+                    <a16:rowId xmlns:a16="http://schemas.microsoft.com/office/drawing/2014/main" val="10006"/>
+                  </a:ext>
+                </a:extLst>
+              </a:tr>
+              <a:tr h="428760">
+                <a:tc>
+                  <a:txBody>
+                    <a:bodyPr/>
+                    <a:lstStyle/>
+                    <a:p>
+                      <a:r>
+                        <a:rPr lang="en-US" sz="1100" dirty="0"/>
+                        <a:t>&lt;</a:t>
+                      </a:r>
+                      <a:r>
+                        <a:rPr lang="en-US" sz="1100" dirty="0" err="1"/>
+                        <a:t>sos</a:t>
+                      </a:r>
+                      <a:r>
+                        <a:rPr lang="en-US" sz="1100" dirty="0"/>
+                        <a:t>&gt; a guy works on a building &lt;</a:t>
+                      </a:r>
+                      <a:r>
+                        <a:rPr lang="en-US" sz="1100" dirty="0" err="1"/>
+                        <a:t>eos</a:t>
+                      </a:r>
+                      <a:r>
+                        <a:rPr lang="en-US" sz="1100" dirty="0"/>
+                        <a:t>&gt;</a:t>
+                      </a:r>
+                    </a:p>
+                  </a:txBody>
+                  <a:tcPr marL="90000" marR="90000">
+                    <a:lnL w="720">
+                      <a:solidFill>
+                        <a:srgbClr val="FFFFFF"/>
+                      </a:solidFill>
+                    </a:lnL>
+                    <a:lnR w="720">
+                      <a:solidFill>
+                        <a:srgbClr val="FFFFFF"/>
+                      </a:solidFill>
+                    </a:lnR>
+                    <a:lnT w="720">
+                      <a:solidFill>
+                        <a:srgbClr val="FFFFFF"/>
+                      </a:solidFill>
+                    </a:lnT>
+                    <a:lnB w="720">
+                      <a:solidFill>
+                        <a:srgbClr val="FFFFFF"/>
+                      </a:solidFill>
+                    </a:lnB>
+                    <a:solidFill>
+                      <a:srgbClr val="CCCCCC"/>
+                    </a:solidFill>
+                  </a:tcPr>
+                </a:tc>
+                <a:tc>
+                  <a:txBody>
+                    <a:bodyPr/>
+                    <a:lstStyle/>
+                    <a:p>
+                      <a:r>
+                        <a:rPr lang="en-US" sz="1100" dirty="0"/>
+                        <a:t>&lt;</a:t>
+                      </a:r>
+                      <a:r>
+                        <a:rPr lang="en-US" sz="1100" dirty="0" err="1"/>
+                        <a:t>sos</a:t>
+                      </a:r>
+                      <a:r>
+                        <a:rPr lang="en-US" sz="1100" dirty="0"/>
+                        <a:t>&gt; a guy working on a building using a building &lt;</a:t>
+                      </a:r>
+                      <a:r>
+                        <a:rPr lang="en-US" sz="1100" dirty="0" err="1"/>
+                        <a:t>eos</a:t>
+                      </a:r>
+                      <a:r>
+                        <a:rPr lang="en-US" sz="1100" dirty="0"/>
+                        <a:t>&gt;</a:t>
+                      </a:r>
+                    </a:p>
+                  </a:txBody>
+                  <a:tcPr marL="90000" marR="90000">
+                    <a:lnL w="720">
+                      <a:solidFill>
+                        <a:srgbClr val="FFFFFF"/>
+                      </a:solidFill>
+                    </a:lnL>
+                    <a:lnR w="720">
+                      <a:solidFill>
+                        <a:srgbClr val="FFFFFF"/>
+                      </a:solidFill>
+                    </a:lnR>
+                    <a:lnT w="720">
+                      <a:solidFill>
+                        <a:srgbClr val="FFFFFF"/>
+                      </a:solidFill>
+                    </a:lnT>
+                    <a:lnB w="720">
+                      <a:solidFill>
+                        <a:srgbClr val="FFFFFF"/>
+                      </a:solidFill>
+                    </a:lnB>
+                    <a:solidFill>
+                      <a:srgbClr val="CCCCCC"/>
+                    </a:solidFill>
+                  </a:tcPr>
+                </a:tc>
+                <a:extLst>
+                  <a:ext uri="{0D108BD9-81ED-4DB2-BD59-A6C34878D82A}">
+                    <a16:rowId xmlns:a16="http://schemas.microsoft.com/office/drawing/2014/main" val="10007"/>
+                  </a:ext>
+                </a:extLst>
+              </a:tr>
+              <a:tr h="428760">
+                <a:tc>
+                  <a:txBody>
+                    <a:bodyPr/>
+                    <a:lstStyle/>
+                    <a:p>
+                      <a:r>
+                        <a:rPr lang="en-US" sz="1100" dirty="0"/>
+                        <a:t>&lt;</a:t>
+                      </a:r>
+                      <a:r>
+                        <a:rPr lang="en-US" sz="1100" dirty="0" err="1"/>
+                        <a:t>sos</a:t>
+                      </a:r>
+                      <a:r>
+                        <a:rPr lang="en-US" sz="1100" dirty="0"/>
+                        <a:t>&gt; a man in a vest is sitting in a chair and holding magazines &lt;</a:t>
+                      </a:r>
+                      <a:r>
+                        <a:rPr lang="en-US" sz="1100" dirty="0" err="1"/>
+                        <a:t>eos</a:t>
+                      </a:r>
+                      <a:r>
+                        <a:rPr lang="en-US" sz="1100" dirty="0"/>
+                        <a:t>&gt;</a:t>
+                      </a:r>
+                    </a:p>
+                  </a:txBody>
+                  <a:tcPr marL="90000" marR="90000">
+                    <a:lnL w="720">
+                      <a:solidFill>
+                        <a:srgbClr val="FFFFFF"/>
+                      </a:solidFill>
+                    </a:lnL>
+                    <a:lnR w="720">
+                      <a:solidFill>
+                        <a:srgbClr val="FFFFFF"/>
+                      </a:solidFill>
+                    </a:lnR>
+                    <a:lnT w="720">
+                      <a:solidFill>
+                        <a:srgbClr val="FFFFFF"/>
+                      </a:solidFill>
+                    </a:lnT>
+                    <a:lnB w="720">
+                      <a:solidFill>
+                        <a:srgbClr val="FFFFFF"/>
+                      </a:solidFill>
+                    </a:lnB>
+                    <a:solidFill>
+                      <a:srgbClr val="E6E6E6"/>
+                    </a:solidFill>
+                  </a:tcPr>
+                </a:tc>
+                <a:tc>
+                  <a:txBody>
+                    <a:bodyPr/>
+                    <a:lstStyle/>
+                    <a:p>
+                      <a:r>
+                        <a:rPr lang="en-US" sz="1100" dirty="0"/>
+                        <a:t>&lt;</a:t>
+                      </a:r>
+                      <a:r>
+                        <a:rPr lang="en-US" sz="1100" dirty="0" err="1"/>
+                        <a:t>sos</a:t>
+                      </a:r>
+                      <a:r>
+                        <a:rPr lang="en-US" sz="1100" dirty="0"/>
+                        <a:t>&gt; a man in a vest is sitting on a chair holding a desk &lt;</a:t>
+                      </a:r>
+                      <a:r>
+                        <a:rPr lang="en-US" sz="1100" dirty="0" err="1"/>
+                        <a:t>eos</a:t>
+                      </a:r>
+                      <a:r>
+                        <a:rPr lang="en-US" sz="1100" dirty="0"/>
+                        <a:t>&gt;</a:t>
+                      </a:r>
+                    </a:p>
+                  </a:txBody>
+                  <a:tcPr marL="90000" marR="90000">
+                    <a:lnL w="720">
+                      <a:solidFill>
+                        <a:srgbClr val="FFFFFF"/>
+                      </a:solidFill>
+                    </a:lnL>
+                    <a:lnR w="720">
+                      <a:solidFill>
+                        <a:srgbClr val="FFFFFF"/>
+                      </a:solidFill>
+                    </a:lnR>
+                    <a:lnT w="720">
+                      <a:solidFill>
+                        <a:srgbClr val="FFFFFF"/>
+                      </a:solidFill>
+                    </a:lnT>
+                    <a:lnB w="720">
+                      <a:solidFill>
+                        <a:srgbClr val="FFFFFF"/>
+                      </a:solidFill>
+                    </a:lnB>
+                    <a:solidFill>
+                      <a:srgbClr val="E6E6E6"/>
+                    </a:solidFill>
+                  </a:tcPr>
+                </a:tc>
+                <a:extLst>
+                  <a:ext uri="{0D108BD9-81ED-4DB2-BD59-A6C34878D82A}">
+                    <a16:rowId xmlns:a16="http://schemas.microsoft.com/office/drawing/2014/main" val="10008"/>
+                  </a:ext>
+                </a:extLst>
+              </a:tr>
+              <a:tr h="428760">
+                <a:tc>
+                  <a:txBody>
+                    <a:bodyPr/>
+                    <a:lstStyle/>
+                    <a:p>
+                      <a:r>
+                        <a:rPr lang="en-US" sz="1100" dirty="0"/>
+                        <a:t>&lt;</a:t>
+                      </a:r>
+                      <a:r>
+                        <a:rPr lang="en-US" sz="1100" dirty="0" err="1"/>
+                        <a:t>sos</a:t>
+                      </a:r>
+                      <a:r>
+                        <a:rPr lang="en-US" sz="1100" dirty="0"/>
+                        <a:t>&gt; a mother and her young son enjoying a beautiful day outside &lt;</a:t>
+                      </a:r>
+                      <a:r>
+                        <a:rPr lang="en-US" sz="1100" dirty="0" err="1"/>
+                        <a:t>eos</a:t>
+                      </a:r>
+                      <a:r>
+                        <a:rPr lang="en-US" sz="1100" dirty="0"/>
+                        <a:t>&gt;</a:t>
+                      </a:r>
+                    </a:p>
+                  </a:txBody>
+                  <a:tcPr marL="90000" marR="90000">
+                    <a:lnL w="720">
+                      <a:solidFill>
+                        <a:srgbClr val="FFFFFF"/>
+                      </a:solidFill>
+                    </a:lnL>
+                    <a:lnR w="720">
+                      <a:solidFill>
+                        <a:srgbClr val="FFFFFF"/>
+                      </a:solidFill>
+                    </a:lnR>
+                    <a:lnT w="720">
+                      <a:solidFill>
+                        <a:srgbClr val="FFFFFF"/>
+                      </a:solidFill>
+                    </a:lnT>
+                    <a:lnB w="720">
+                      <a:solidFill>
+                        <a:srgbClr val="FFFFFF"/>
+                      </a:solidFill>
+                    </a:lnB>
+                    <a:solidFill>
+                      <a:srgbClr val="CCCCCC"/>
+                    </a:solidFill>
+                  </a:tcPr>
+                </a:tc>
+                <a:tc>
+                  <a:txBody>
+                    <a:bodyPr/>
+                    <a:lstStyle/>
+                    <a:p>
+                      <a:r>
+                        <a:rPr lang="en-US" sz="1100" dirty="0"/>
+                        <a:t>&lt;</a:t>
+                      </a:r>
+                      <a:r>
+                        <a:rPr lang="en-US" sz="1100" dirty="0" err="1"/>
+                        <a:t>sos</a:t>
+                      </a:r>
+                      <a:r>
+                        <a:rPr lang="en-US" sz="1100" dirty="0"/>
+                        <a:t>&gt; a mother and her son enjoying a beautiful day outdoors &lt;</a:t>
+                      </a:r>
+                      <a:r>
+                        <a:rPr lang="en-US" sz="1100" dirty="0" err="1"/>
+                        <a:t>eos</a:t>
+                      </a:r>
+                      <a:r>
+                        <a:rPr lang="en-US" sz="1100" dirty="0"/>
+                        <a:t>&gt;</a:t>
+                      </a:r>
+                    </a:p>
+                  </a:txBody>
+                  <a:tcPr marL="90000" marR="90000">
+                    <a:lnL w="720">
+                      <a:solidFill>
+                        <a:srgbClr val="FFFFFF"/>
+                      </a:solidFill>
+                    </a:lnL>
+                    <a:lnR w="720">
+                      <a:solidFill>
+                        <a:srgbClr val="FFFFFF"/>
+                      </a:solidFill>
+                    </a:lnR>
+                    <a:lnT w="720">
+                      <a:solidFill>
+                        <a:srgbClr val="FFFFFF"/>
+                      </a:solidFill>
+                    </a:lnT>
+                    <a:lnB w="720">
+                      <a:solidFill>
+                        <a:srgbClr val="FFFFFF"/>
+                      </a:solidFill>
+                    </a:lnB>
+                    <a:solidFill>
+                      <a:srgbClr val="CCCCCC"/>
+                    </a:solidFill>
+                  </a:tcPr>
+                </a:tc>
+                <a:extLst>
+                  <a:ext uri="{0D108BD9-81ED-4DB2-BD59-A6C34878D82A}">
+                    <a16:rowId xmlns:a16="http://schemas.microsoft.com/office/drawing/2014/main" val="10009"/>
+                  </a:ext>
+                </a:extLst>
+              </a:tr>
+            </a:tbl>
+          </a:graphicData>
+        </a:graphic>
+      </p:graphicFrame>
     </p:spTree>
   </p:cSld>
   <p:clrMapOvr>
@@ -7966,28 +8281,28 @@
           <p:nvPr>
             <p:extLst>
               <p:ext uri="{D42A27DB-BD31-4B8C-83A1-F6EECF244321}">
-                <p14:modId xmlns:p14="http://schemas.microsoft.com/office/powerpoint/2010/main" val="3236800253"/>
+                <p14:modId xmlns:p14="http://schemas.microsoft.com/office/powerpoint/2010/main" val="1727538533"/>
               </p:ext>
             </p:extLst>
           </p:nvPr>
         </p:nvGraphicFramePr>
         <p:xfrm>
-          <a:off x="0" y="752327"/>
-          <a:ext cx="9144000" cy="4054920"/>
+          <a:off x="0" y="901454"/>
+          <a:ext cx="9144000" cy="3950193"/>
         </p:xfrm>
         <a:graphic>
           <a:graphicData uri="http://schemas.openxmlformats.org/drawingml/2006/table">
             <a:tbl>
               <a:tblPr/>
               <a:tblGrid>
-                <a:gridCol w="4571280">
+                <a:gridCol w="4464424">
                   <a:extLst>
                     <a:ext uri="{9D8B030D-6E8A-4147-A177-3AD203B41FA5}">
                       <a16:colId xmlns:a16="http://schemas.microsoft.com/office/drawing/2014/main" val="20000"/>
                     </a:ext>
                   </a:extLst>
                 </a:gridCol>
-                <a:gridCol w="4572720">
+                <a:gridCol w="4679576">
                   <a:extLst>
                     <a:ext uri="{9D8B030D-6E8A-4147-A177-3AD203B41FA5}">
                       <a16:colId xmlns:a16="http://schemas.microsoft.com/office/drawing/2014/main" val="20001"/>
@@ -7995,7 +8310,7 @@
                   </a:extLst>
                 </a:gridCol>
               </a:tblGrid>
-              <a:tr h="347760">
+              <a:tr h="357844">
                 <a:tc>
                   <a:txBody>
                     <a:bodyPr/>
@@ -8080,10 +8395,14 @@
                         <a:srgbClr val="FFFFFF"/>
                       </a:solidFill>
                     </a:lnT>
-                    <a:lnB w="720">
-                      <a:solidFill>
-                        <a:srgbClr val="FFFFFF"/>
-                      </a:solidFill>
+                    <a:lnB w="720" cap="flat" cmpd="sng" algn="ctr">
+                      <a:solidFill>
+                        <a:srgbClr val="FFFFFF"/>
+                      </a:solidFill>
+                      <a:prstDash val="solid"/>
+                      <a:round/>
+                      <a:headEnd type="none" w="med" len="med"/>
+                      <a:tailEnd type="none" w="med" len="med"/>
                     </a:lnB>
                     <a:solidFill>
                       <a:srgbClr val="B3B3B3"/>
@@ -8096,7 +8415,7 @@
                   </a:ext>
                 </a:extLst>
               </a:tr>
-              <a:tr h="247320">
+              <a:tr h="253473">
                 <a:tc>
                   <a:txBody>
                     <a:bodyPr/>
@@ -8108,35 +8427,28 @@
                         </a:lnSpc>
                       </a:pPr>
                       <a:r>
-                        <a:rPr lang="en-US" sz="1100" b="0" strike="noStrike" spc="-1" dirty="0">
-                          <a:latin typeface="Arial"/>
-                        </a:rPr>
-                        <a:t>‘&lt;</a:t>
-                      </a:r>
-                      <a:r>
-                        <a:rPr lang="en-US" sz="1100" b="0" strike="noStrike" spc="-1" dirty="0" err="1">
-                          <a:latin typeface="Arial"/>
-                        </a:rPr>
+                        <a:rPr lang="en-US" sz="1100" dirty="0"/>
+                        <a:t>&lt;</a:t>
+                      </a:r>
+                      <a:r>
+                        <a:rPr lang="en-US" sz="1100" dirty="0" err="1"/>
                         <a:t>sos</a:t>
                       </a:r>
                       <a:r>
-                        <a:rPr lang="en-US" sz="1100" b="0" strike="noStrike" spc="-1" dirty="0">
-                          <a:latin typeface="Arial"/>
-                        </a:rPr>
-                        <a:t>&gt;'word_1’,’word_2’,….., '&lt;</a:t>
-                      </a:r>
-                      <a:r>
-                        <a:rPr lang="en-US" sz="1100" b="0" strike="noStrike" spc="-1" dirty="0" err="1">
-                          <a:latin typeface="Arial"/>
-                        </a:rPr>
+                        <a:rPr lang="en-US" sz="1100" dirty="0"/>
+                        <a:t>&gt; a man in an orange hat staring at something &lt;</a:t>
+                      </a:r>
+                      <a:r>
+                        <a:rPr lang="en-US" sz="1100" dirty="0" err="1"/>
                         <a:t>eos</a:t>
                       </a:r>
                       <a:r>
-                        <a:rPr lang="en-US" sz="1100" b="0" strike="noStrike" spc="-1" dirty="0">
-                          <a:latin typeface="Arial"/>
-                        </a:rPr>
-                        <a:t>&gt;'</a:t>
-                      </a:r>
+                        <a:rPr lang="en-US" sz="1100" dirty="0"/>
+                        <a:t>&gt;</a:t>
+                      </a:r>
+                      <a:endParaRPr lang="en-US" sz="1100" b="0" strike="noStrike" spc="-1" dirty="0">
+                        <a:latin typeface="Arial"/>
+                      </a:endParaRPr>
                     </a:p>
                   </a:txBody>
                   <a:tcPr marL="90000" marR="90000">
@@ -8145,10 +8457,14 @@
                         <a:srgbClr val="FFFFFF"/>
                       </a:solidFill>
                     </a:lnL>
-                    <a:lnR w="720">
-                      <a:solidFill>
-                        <a:srgbClr val="FFFFFF"/>
-                      </a:solidFill>
+                    <a:lnR w="720" cap="flat" cmpd="sng" algn="ctr">
+                      <a:solidFill>
+                        <a:srgbClr val="FFFFFF"/>
+                      </a:solidFill>
+                      <a:prstDash val="solid"/>
+                      <a:round/>
+                      <a:headEnd type="none" w="med" len="med"/>
+                      <a:tailEnd type="none" w="med" len="med"/>
                     </a:lnR>
                     <a:lnT w="720">
                       <a:solidFill>
@@ -8176,13 +8492,27 @@
                         </a:lnSpc>
                       </a:pPr>
                       <a:r>
-                        <a:rPr lang="en-US" sz="1100" b="0" strike="noStrike" spc="-1">
-                          <a:latin typeface="Times New Roman"/>
-                        </a:rPr>
-                        <a:t>‘&lt;sos&gt;'word_1’,’word_2’,….., '&lt;eos&gt;'</a:t>
-                      </a:r>
-                      <a:endParaRPr lang="en-US" sz="1100" b="0" strike="noStrike" spc="-1">
-                        <a:latin typeface="Arial"/>
+                        <a:rPr lang="en-US" sz="1100" dirty="0"/>
+                        <a:t>&lt;</a:t>
+                      </a:r>
+                      <a:r>
+                        <a:rPr lang="en-US" sz="1100" dirty="0" err="1"/>
+                        <a:t>sos</a:t>
+                      </a:r>
+                      <a:r>
+                        <a:rPr lang="en-US" sz="1100" dirty="0"/>
+                        <a:t>&gt; a man in an orange hat staring at something &lt;</a:t>
+                      </a:r>
+                      <a:r>
+                        <a:rPr lang="en-US" sz="1100" dirty="0" err="1"/>
+                        <a:t>eos</a:t>
+                      </a:r>
+                      <a:r>
+                        <a:rPr lang="en-US" sz="1100" dirty="0"/>
+                        <a:t>&gt;</a:t>
+                      </a:r>
+                      <a:endParaRPr lang="en-US" sz="1100" b="0" strike="noStrike" spc="-1" dirty="0">
+                        <a:latin typeface="+mn-lt"/>
                       </a:endParaRPr>
                     </a:p>
                   </a:txBody>
@@ -8218,13 +8548,40 @@
                   </a:ext>
                 </a:extLst>
               </a:tr>
-              <a:tr h="428760">
+              <a:tr h="417485">
                 <a:tc>
                   <a:txBody>
                     <a:bodyPr/>
                     <a:lstStyle/>
                     <a:p>
-                      <a:endParaRPr lang="en-US" sz="1100" dirty="0"/>
+                      <a:r>
+                        <a:rPr lang="en-US" sz="1100" dirty="0"/>
+                        <a:t>&lt;</a:t>
+                      </a:r>
+                      <a:r>
+                        <a:rPr lang="en-US" sz="1100" dirty="0" err="1"/>
+                        <a:t>sos</a:t>
+                      </a:r>
+                      <a:r>
+                        <a:rPr lang="en-US" sz="1100" dirty="0"/>
+                        <a:t>&gt; a </a:t>
+                      </a:r>
+                      <a:r>
+                        <a:rPr lang="en-US" sz="1100" dirty="0" err="1"/>
+                        <a:t>boston</a:t>
+                      </a:r>
+                      <a:r>
+                        <a:rPr lang="en-US" sz="1100" dirty="0"/>
+                        <a:t> terrier is running on lush green grass in front of a white fence &lt;</a:t>
+                      </a:r>
+                      <a:r>
+                        <a:rPr lang="en-US" sz="1100" dirty="0" err="1"/>
+                        <a:t>eos</a:t>
+                      </a:r>
+                      <a:r>
+                        <a:rPr lang="en-US" sz="1100" dirty="0"/>
+                        <a:t>&gt;</a:t>
+                      </a:r>
                     </a:p>
                   </a:txBody>
                   <a:tcPr marL="90000" marR="90000">
@@ -8233,15 +8590,23 @@
                         <a:srgbClr val="FFFFFF"/>
                       </a:solidFill>
                     </a:lnL>
-                    <a:lnR w="720">
-                      <a:solidFill>
-                        <a:srgbClr val="FFFFFF"/>
-                      </a:solidFill>
+                    <a:lnR w="720" cap="flat" cmpd="sng" algn="ctr">
+                      <a:solidFill>
+                        <a:srgbClr val="FFFFFF"/>
+                      </a:solidFill>
+                      <a:prstDash val="solid"/>
+                      <a:round/>
+                      <a:headEnd type="none" w="med" len="med"/>
+                      <a:tailEnd type="none" w="med" len="med"/>
                     </a:lnR>
-                    <a:lnT w="720">
-                      <a:solidFill>
-                        <a:srgbClr val="FFFFFF"/>
-                      </a:solidFill>
+                    <a:lnT w="720" cap="flat" cmpd="sng" algn="ctr">
+                      <a:solidFill>
+                        <a:srgbClr val="FFFFFF"/>
+                      </a:solidFill>
+                      <a:prstDash val="solid"/>
+                      <a:round/>
+                      <a:headEnd type="none" w="med" len="med"/>
+                      <a:tailEnd type="none" w="med" len="med"/>
                     </a:lnT>
                     <a:lnB w="720">
                       <a:solidFill>
@@ -8258,7 +8623,34 @@
                     <a:bodyPr/>
                     <a:lstStyle/>
                     <a:p>
-                      <a:endParaRPr lang="en-US" sz="1100"/>
+                      <a:r>
+                        <a:rPr lang="en-US" sz="1100" dirty="0"/>
+                        <a:t>&lt;</a:t>
+                      </a:r>
+                      <a:r>
+                        <a:rPr lang="en-US" sz="1100" dirty="0" err="1"/>
+                        <a:t>sos</a:t>
+                      </a:r>
+                      <a:r>
+                        <a:rPr lang="en-US" sz="1100" dirty="0"/>
+                        <a:t>&gt; a </a:t>
+                      </a:r>
+                      <a:r>
+                        <a:rPr lang="en-US" sz="1100" dirty="0" err="1"/>
+                        <a:t>boston</a:t>
+                      </a:r>
+                      <a:r>
+                        <a:rPr lang="en-US" sz="1100" dirty="0"/>
+                        <a:t> terrier is running on lush green grass in front of a white fence &lt;</a:t>
+                      </a:r>
+                      <a:r>
+                        <a:rPr lang="en-US" sz="1100" dirty="0" err="1"/>
+                        <a:t>eos</a:t>
+                      </a:r>
+                      <a:r>
+                        <a:rPr lang="en-US" sz="1100" dirty="0"/>
+                        <a:t>&gt;</a:t>
+                      </a:r>
                     </a:p>
                   </a:txBody>
                   <a:tcPr marL="90000" marR="90000">
@@ -8272,10 +8664,14 @@
                         <a:srgbClr val="FFFFFF"/>
                       </a:solidFill>
                     </a:lnR>
-                    <a:lnT w="720">
-                      <a:solidFill>
-                        <a:srgbClr val="FFFFFF"/>
-                      </a:solidFill>
+                    <a:lnT w="720" cap="flat" cmpd="sng" algn="ctr">
+                      <a:solidFill>
+                        <a:srgbClr val="FFFFFF"/>
+                      </a:solidFill>
+                      <a:prstDash val="solid"/>
+                      <a:round/>
+                      <a:headEnd type="none" w="med" len="med"/>
+                      <a:tailEnd type="none" w="med" len="med"/>
                     </a:lnT>
                     <a:lnB w="720">
                       <a:solidFill>
@@ -8293,13 +8689,32 @@
                   </a:ext>
                 </a:extLst>
               </a:tr>
-              <a:tr h="428760">
+              <a:tr h="417485">
                 <a:tc>
                   <a:txBody>
                     <a:bodyPr/>
                     <a:lstStyle/>
                     <a:p>
-                      <a:endParaRPr lang="en-US" sz="1100" dirty="0"/>
+                      <a:r>
+                        <a:rPr lang="en-US" sz="1100" dirty="0"/>
+                        <a:t>&lt;</a:t>
+                      </a:r>
+                      <a:r>
+                        <a:rPr lang="en-US" sz="1100" dirty="0" err="1"/>
+                        <a:t>sos</a:t>
+                      </a:r>
+                      <a:r>
+                        <a:rPr lang="en-US" sz="1100" dirty="0"/>
+                        <a:t>&gt; a girl in karate uniform breaking a stick with a front kick &lt;</a:t>
+                      </a:r>
+                      <a:r>
+                        <a:rPr lang="en-US" sz="1100" dirty="0" err="1"/>
+                        <a:t>eos</a:t>
+                      </a:r>
+                      <a:r>
+                        <a:rPr lang="en-US" sz="1100" dirty="0"/>
+                        <a:t>&gt;</a:t>
+                      </a:r>
                     </a:p>
                   </a:txBody>
                   <a:tcPr marL="90000" marR="90000">
@@ -8308,10 +8723,14 @@
                         <a:srgbClr val="FFFFFF"/>
                       </a:solidFill>
                     </a:lnL>
-                    <a:lnR w="720">
-                      <a:solidFill>
-                        <a:srgbClr val="FFFFFF"/>
-                      </a:solidFill>
+                    <a:lnR w="720" cap="flat" cmpd="sng" algn="ctr">
+                      <a:solidFill>
+                        <a:srgbClr val="FFFFFF"/>
+                      </a:solidFill>
+                      <a:prstDash val="solid"/>
+                      <a:round/>
+                      <a:headEnd type="none" w="med" len="med"/>
+                      <a:tailEnd type="none" w="med" len="med"/>
                     </a:lnR>
                     <a:lnT w="720">
                       <a:solidFill>
@@ -8333,7 +8752,26 @@
                     <a:bodyPr/>
                     <a:lstStyle/>
                     <a:p>
-                      <a:endParaRPr lang="en-US" sz="1100" dirty="0"/>
+                      <a:r>
+                        <a:rPr lang="en-US" sz="1100" dirty="0"/>
+                        <a:t>&lt;</a:t>
+                      </a:r>
+                      <a:r>
+                        <a:rPr lang="en-US" sz="1100" dirty="0" err="1"/>
+                        <a:t>sos</a:t>
+                      </a:r>
+                      <a:r>
+                        <a:rPr lang="en-US" sz="1100" dirty="0"/>
+                        <a:t>&gt; a girl in karate uniform breaking a stick with a front kick &lt;</a:t>
+                      </a:r>
+                      <a:r>
+                        <a:rPr lang="en-US" sz="1100" dirty="0" err="1"/>
+                        <a:t>eos</a:t>
+                      </a:r>
+                      <a:r>
+                        <a:rPr lang="en-US" sz="1100" dirty="0"/>
+                        <a:t>&gt;</a:t>
+                      </a:r>
                     </a:p>
                   </a:txBody>
                   <a:tcPr marL="90000" marR="90000">
@@ -8368,13 +8806,40 @@
                   </a:ext>
                 </a:extLst>
               </a:tr>
-              <a:tr h="428760">
+              <a:tr h="417485">
                 <a:tc>
                   <a:txBody>
                     <a:bodyPr/>
                     <a:lstStyle/>
                     <a:p>
-                      <a:endParaRPr lang="en-US" sz="1100" dirty="0"/>
+                      <a:r>
+                        <a:rPr lang="en-US" sz="1100" dirty="0"/>
+                        <a:t>&lt;</a:t>
+                      </a:r>
+                      <a:r>
+                        <a:rPr lang="en-US" sz="1100" dirty="0" err="1"/>
+                        <a:t>sos</a:t>
+                      </a:r>
+                      <a:r>
+                        <a:rPr lang="en-US" sz="1100" dirty="0"/>
+                        <a:t>&gt; five people wearing winter jackets and helmets stand in the snow with &lt;</a:t>
+                      </a:r>
+                      <a:r>
+                        <a:rPr lang="en-US" sz="1100" dirty="0" err="1"/>
+                        <a:t>unk</a:t>
+                      </a:r>
+                      <a:r>
+                        <a:rPr lang="en-US" sz="1100" dirty="0"/>
+                        <a:t>&gt; in the background &lt;</a:t>
+                      </a:r>
+                      <a:r>
+                        <a:rPr lang="en-US" sz="1100" dirty="0" err="1"/>
+                        <a:t>eos</a:t>
+                      </a:r>
+                      <a:r>
+                        <a:rPr lang="en-US" sz="1100" dirty="0"/>
+                        <a:t>&gt;</a:t>
+                      </a:r>
                     </a:p>
                   </a:txBody>
                   <a:tcPr marL="90000" marR="90000">
@@ -8383,10 +8848,14 @@
                         <a:srgbClr val="FFFFFF"/>
                       </a:solidFill>
                     </a:lnL>
-                    <a:lnR w="720">
-                      <a:solidFill>
-                        <a:srgbClr val="FFFFFF"/>
-                      </a:solidFill>
+                    <a:lnR w="720" cap="flat" cmpd="sng" algn="ctr">
+                      <a:solidFill>
+                        <a:srgbClr val="FFFFFF"/>
+                      </a:solidFill>
+                      <a:prstDash val="solid"/>
+                      <a:round/>
+                      <a:headEnd type="none" w="med" len="med"/>
+                      <a:tailEnd type="none" w="med" len="med"/>
                     </a:lnR>
                     <a:lnT w="720">
                       <a:solidFill>
@@ -8408,7 +8877,34 @@
                     <a:bodyPr/>
                     <a:lstStyle/>
                     <a:p>
-                      <a:endParaRPr lang="en-US" sz="1100" dirty="0"/>
+                      <a:r>
+                        <a:rPr lang="en-US" sz="1100" dirty="0"/>
+                        <a:t>&lt;</a:t>
+                      </a:r>
+                      <a:r>
+                        <a:rPr lang="en-US" sz="1100" dirty="0" err="1"/>
+                        <a:t>sos</a:t>
+                      </a:r>
+                      <a:r>
+                        <a:rPr lang="en-US" sz="1100" dirty="0"/>
+                        <a:t>&gt; five people wearing winter jackets and helmets stand in the snow with &lt;</a:t>
+                      </a:r>
+                      <a:r>
+                        <a:rPr lang="en-US" sz="1100" dirty="0" err="1"/>
+                        <a:t>unk</a:t>
+                      </a:r>
+                      <a:r>
+                        <a:rPr lang="en-US" sz="1100" dirty="0"/>
+                        <a:t>&gt; in the background &lt;</a:t>
+                      </a:r>
+                      <a:r>
+                        <a:rPr lang="en-US" sz="1100" dirty="0" err="1"/>
+                        <a:t>eos</a:t>
+                      </a:r>
+                      <a:r>
+                        <a:rPr lang="en-US" sz="1100" dirty="0"/>
+                        <a:t>&gt;</a:t>
+                      </a:r>
                     </a:p>
                   </a:txBody>
                   <a:tcPr marL="90000" marR="90000">
@@ -8443,13 +8939,32 @@
                   </a:ext>
                 </a:extLst>
               </a:tr>
-              <a:tr h="428760">
+              <a:tr h="387134">
                 <a:tc>
                   <a:txBody>
                     <a:bodyPr/>
                     <a:lstStyle/>
                     <a:p>
-                      <a:endParaRPr lang="en-US" sz="1100"/>
+                      <a:r>
+                        <a:rPr lang="en-US" sz="1100" dirty="0"/>
+                        <a:t>&lt;</a:t>
+                      </a:r>
+                      <a:r>
+                        <a:rPr lang="en-US" sz="1100" dirty="0" err="1"/>
+                        <a:t>sos</a:t>
+                      </a:r>
+                      <a:r>
+                        <a:rPr lang="en-US" sz="1100" dirty="0"/>
+                        <a:t>&gt; people are fixing the roof of a house &lt;</a:t>
+                      </a:r>
+                      <a:r>
+                        <a:rPr lang="en-US" sz="1100" dirty="0" err="1"/>
+                        <a:t>eos</a:t>
+                      </a:r>
+                      <a:r>
+                        <a:rPr lang="en-US" sz="1100" dirty="0"/>
+                        <a:t>&gt;</a:t>
+                      </a:r>
                     </a:p>
                   </a:txBody>
                   <a:tcPr marL="90000" marR="90000">
@@ -8483,7 +8998,43 @@
                     <a:bodyPr/>
                     <a:lstStyle/>
                     <a:p>
-                      <a:endParaRPr lang="en-US" sz="1100" dirty="0"/>
+                      <a:pPr marL="0" marR="0" lvl="0" indent="0" algn="l" defTabSz="914400" rtl="0" eaLnBrk="1" fontAlgn="auto" latinLnBrk="0" hangingPunct="1">
+                        <a:lnSpc>
+                          <a:spcPct val="100000"/>
+                        </a:lnSpc>
+                        <a:spcBef>
+                          <a:spcPts val="0"/>
+                        </a:spcBef>
+                        <a:spcAft>
+                          <a:spcPts val="0"/>
+                        </a:spcAft>
+                        <a:buClrTx/>
+                        <a:buSzTx/>
+                        <a:buFontTx/>
+                        <a:buNone/>
+                        <a:tabLst/>
+                        <a:defRPr/>
+                      </a:pPr>
+                      <a:r>
+                        <a:rPr lang="en-US" sz="1100" dirty="0"/>
+                        <a:t>&lt;</a:t>
+                      </a:r>
+                      <a:r>
+                        <a:rPr lang="en-US" sz="1100" dirty="0" err="1"/>
+                        <a:t>sos</a:t>
+                      </a:r>
+                      <a:r>
+                        <a:rPr lang="en-US" sz="1100" dirty="0"/>
+                        <a:t>&gt; people are fixing the roof of a house &lt;</a:t>
+                      </a:r>
+                      <a:r>
+                        <a:rPr lang="en-US" sz="1100" dirty="0" err="1"/>
+                        <a:t>eos</a:t>
+                      </a:r>
+                      <a:r>
+                        <a:rPr lang="en-US" sz="1100" dirty="0"/>
+                        <a:t>&gt;</a:t>
+                      </a:r>
                     </a:p>
                   </a:txBody>
                   <a:tcPr marL="90000" marR="90000">
@@ -8497,10 +9048,14 @@
                         <a:srgbClr val="FFFFFF"/>
                       </a:solidFill>
                     </a:lnR>
-                    <a:lnT w="720">
-                      <a:solidFill>
-                        <a:srgbClr val="FFFFFF"/>
-                      </a:solidFill>
+                    <a:lnT w="720" cap="flat" cmpd="sng" algn="ctr">
+                      <a:solidFill>
+                        <a:srgbClr val="FFFFFF"/>
+                      </a:solidFill>
+                      <a:prstDash val="solid"/>
+                      <a:round/>
+                      <a:headEnd type="none" w="med" len="med"/>
+                      <a:tailEnd type="none" w="med" len="med"/>
                     </a:lnT>
                     <a:lnB w="720">
                       <a:solidFill>
@@ -8518,13 +9073,52 @@
                   </a:ext>
                 </a:extLst>
               </a:tr>
-              <a:tr h="428760">
+              <a:tr h="417485">
                 <a:tc>
                   <a:txBody>
                     <a:bodyPr/>
                     <a:lstStyle/>
                     <a:p>
-                      <a:endParaRPr lang="en-US" sz="1100"/>
+                      <a:pPr marL="0" marR="0" lvl="0" indent="0" algn="l" defTabSz="914400" rtl="0" eaLnBrk="1" fontAlgn="auto" latinLnBrk="0" hangingPunct="1">
+                        <a:lnSpc>
+                          <a:spcPct val="100000"/>
+                        </a:lnSpc>
+                        <a:spcBef>
+                          <a:spcPts val="0"/>
+                        </a:spcBef>
+                        <a:spcAft>
+                          <a:spcPts val="0"/>
+                        </a:spcAft>
+                        <a:buClrTx/>
+                        <a:buSzTx/>
+                        <a:buFontTx/>
+                        <a:buNone/>
+                        <a:tabLst/>
+                        <a:defRPr/>
+                      </a:pPr>
+                      <a:r>
+                        <a:rPr lang="en-US" sz="1100" dirty="0"/>
+                        <a:t>&lt;</a:t>
+                      </a:r>
+                      <a:r>
+                        <a:rPr lang="en-US" sz="1100" dirty="0" err="1"/>
+                        <a:t>sos</a:t>
+                      </a:r>
+                      <a:r>
+                        <a:rPr lang="en-US" sz="1100" dirty="0"/>
+                        <a:t>&gt; a group of people standing in front of an igloo &lt;</a:t>
+                      </a:r>
+                      <a:r>
+                        <a:rPr lang="en-US" sz="1100" dirty="0" err="1"/>
+                        <a:t>eos</a:t>
+                      </a:r>
+                      <a:r>
+                        <a:rPr lang="en-US" sz="1100" dirty="0"/>
+                        <a:t>&gt;</a:t>
+                      </a:r>
+                    </a:p>
+                    <a:p>
+                      <a:endParaRPr lang="en-US" sz="1100" dirty="0"/>
                     </a:p>
                   </a:txBody>
                   <a:tcPr marL="90000" marR="90000">
@@ -8543,10 +9137,14 @@
                         <a:srgbClr val="FFFFFF"/>
                       </a:solidFill>
                     </a:lnT>
-                    <a:lnB w="720">
-                      <a:solidFill>
-                        <a:srgbClr val="FFFFFF"/>
-                      </a:solidFill>
+                    <a:lnB w="720" cap="flat" cmpd="sng" algn="ctr">
+                      <a:solidFill>
+                        <a:srgbClr val="FFFFFF"/>
+                      </a:solidFill>
+                      <a:prstDash val="solid"/>
+                      <a:round/>
+                      <a:headEnd type="none" w="med" len="med"/>
+                      <a:tailEnd type="none" w="med" len="med"/>
                     </a:lnB>
                     <a:solidFill>
                       <a:srgbClr val="E6E6E6"/>
@@ -8558,6 +9156,45 @@
                     <a:bodyPr/>
                     <a:lstStyle/>
                     <a:p>
+                      <a:pPr marL="0" marR="0" lvl="0" indent="0" algn="l" defTabSz="914400" rtl="0" eaLnBrk="1" fontAlgn="auto" latinLnBrk="0" hangingPunct="1">
+                        <a:lnSpc>
+                          <a:spcPct val="100000"/>
+                        </a:lnSpc>
+                        <a:spcBef>
+                          <a:spcPts val="0"/>
+                        </a:spcBef>
+                        <a:spcAft>
+                          <a:spcPts val="0"/>
+                        </a:spcAft>
+                        <a:buClrTx/>
+                        <a:buSzTx/>
+                        <a:buFontTx/>
+                        <a:buNone/>
+                        <a:tabLst/>
+                        <a:defRPr/>
+                      </a:pPr>
+                      <a:r>
+                        <a:rPr lang="en-US" sz="1100" dirty="0"/>
+                        <a:t>&lt;</a:t>
+                      </a:r>
+                      <a:r>
+                        <a:rPr lang="en-US" sz="1100" dirty="0" err="1"/>
+                        <a:t>sos</a:t>
+                      </a:r>
+                      <a:r>
+                        <a:rPr lang="en-US" sz="1100" dirty="0"/>
+                        <a:t>&gt; a group of people standing in front of an igloo &lt;</a:t>
+                      </a:r>
+                      <a:r>
+                        <a:rPr lang="en-US" sz="1100" dirty="0" err="1"/>
+                        <a:t>eos</a:t>
+                      </a:r>
+                      <a:r>
+                        <a:rPr lang="en-US" sz="1100" dirty="0"/>
+                        <a:t>&gt;</a:t>
+                      </a:r>
+                    </a:p>
+                    <a:p>
                       <a:endParaRPr lang="en-US" sz="1100" dirty="0"/>
                     </a:p>
                   </a:txBody>
@@ -8577,10 +9214,14 @@
                         <a:srgbClr val="FFFFFF"/>
                       </a:solidFill>
                     </a:lnT>
-                    <a:lnB w="720">
-                      <a:solidFill>
-                        <a:srgbClr val="FFFFFF"/>
-                      </a:solidFill>
+                    <a:lnB w="720" cap="flat" cmpd="sng" algn="ctr">
+                      <a:solidFill>
+                        <a:srgbClr val="FFFFFF"/>
+                      </a:solidFill>
+                      <a:prstDash val="solid"/>
+                      <a:round/>
+                      <a:headEnd type="none" w="med" len="med"/>
+                      <a:tailEnd type="none" w="med" len="med"/>
                     </a:lnB>
                     <a:solidFill>
                       <a:srgbClr val="E6E6E6"/>
@@ -8593,13 +9234,32 @@
                   </a:ext>
                 </a:extLst>
               </a:tr>
-              <a:tr h="428760">
+              <a:tr h="387134">
                 <a:tc>
                   <a:txBody>
                     <a:bodyPr/>
                     <a:lstStyle/>
                     <a:p>
-                      <a:endParaRPr lang="en-US" sz="1100"/>
+                      <a:r>
+                        <a:rPr lang="en-US" sz="1100" dirty="0"/>
+                        <a:t>&lt;</a:t>
+                      </a:r>
+                      <a:r>
+                        <a:rPr lang="en-US" sz="1100" dirty="0" err="1"/>
+                        <a:t>sos</a:t>
+                      </a:r>
+                      <a:r>
+                        <a:rPr lang="en-US" sz="1100" dirty="0"/>
+                        <a:t>&gt; a guy works on a building &lt;</a:t>
+                      </a:r>
+                      <a:r>
+                        <a:rPr lang="en-US" sz="1100" dirty="0" err="1"/>
+                        <a:t>eos</a:t>
+                      </a:r>
+                      <a:r>
+                        <a:rPr lang="en-US" sz="1100" dirty="0"/>
+                        <a:t>&gt;</a:t>
+                      </a:r>
                     </a:p>
                   </a:txBody>
                   <a:tcPr marL="90000" marR="90000">
@@ -8608,10 +9268,14 @@
                         <a:srgbClr val="FFFFFF"/>
                       </a:solidFill>
                     </a:lnL>
-                    <a:lnR w="720">
-                      <a:solidFill>
-                        <a:srgbClr val="FFFFFF"/>
-                      </a:solidFill>
+                    <a:lnR w="720" cap="flat" cmpd="sng" algn="ctr">
+                      <a:solidFill>
+                        <a:srgbClr val="FFFFFF"/>
+                      </a:solidFill>
+                      <a:prstDash val="solid"/>
+                      <a:round/>
+                      <a:headEnd type="none" w="med" len="med"/>
+                      <a:tailEnd type="none" w="med" len="med"/>
                     </a:lnR>
                     <a:lnT w="720">
                       <a:solidFill>
@@ -8633,14 +9297,37 @@
                     <a:bodyPr/>
                     <a:lstStyle/>
                     <a:p>
-                      <a:endParaRPr lang="en-US" sz="1100" dirty="0"/>
+                      <a:r>
+                        <a:rPr lang="en-US" sz="1100" dirty="0"/>
+                        <a:t>&lt;</a:t>
+                      </a:r>
+                      <a:r>
+                        <a:rPr lang="en-US" sz="1100" dirty="0" err="1"/>
+                        <a:t>sos</a:t>
+                      </a:r>
+                      <a:r>
+                        <a:rPr lang="en-US" sz="1100" dirty="0"/>
+                        <a:t>&gt; a guy works on a building &lt;</a:t>
+                      </a:r>
+                      <a:r>
+                        <a:rPr lang="en-US" sz="1100" dirty="0" err="1"/>
+                        <a:t>eos</a:t>
+                      </a:r>
+                      <a:r>
+                        <a:rPr lang="en-US" sz="1100" dirty="0"/>
+                        <a:t>&gt;</a:t>
+                      </a:r>
                     </a:p>
                   </a:txBody>
                   <a:tcPr marL="90000" marR="90000">
-                    <a:lnL w="720">
-                      <a:solidFill>
-                        <a:srgbClr val="FFFFFF"/>
-                      </a:solidFill>
+                    <a:lnL w="720" cap="flat" cmpd="sng" algn="ctr">
+                      <a:solidFill>
+                        <a:srgbClr val="FFFFFF"/>
+                      </a:solidFill>
+                      <a:prstDash val="solid"/>
+                      <a:round/>
+                      <a:headEnd type="none" w="med" len="med"/>
+                      <a:tailEnd type="none" w="med" len="med"/>
                     </a:lnL>
                     <a:lnR w="720">
                       <a:solidFill>
@@ -8668,13 +9355,32 @@
                   </a:ext>
                 </a:extLst>
               </a:tr>
-              <a:tr h="428760">
+              <a:tr h="417485">
                 <a:tc>
                   <a:txBody>
                     <a:bodyPr/>
                     <a:lstStyle/>
                     <a:p>
-                      <a:endParaRPr lang="en-US" sz="1100"/>
+                      <a:r>
+                        <a:rPr lang="en-US" sz="1100" dirty="0"/>
+                        <a:t>&lt;</a:t>
+                      </a:r>
+                      <a:r>
+                        <a:rPr lang="en-US" sz="1100" dirty="0" err="1"/>
+                        <a:t>sos</a:t>
+                      </a:r>
+                      <a:r>
+                        <a:rPr lang="en-US" sz="1100" dirty="0"/>
+                        <a:t>&gt; a man in a vest is sitting in a chair and holding magazines &lt;</a:t>
+                      </a:r>
+                      <a:r>
+                        <a:rPr lang="en-US" sz="1100" dirty="0" err="1"/>
+                        <a:t>eos</a:t>
+                      </a:r>
+                      <a:r>
+                        <a:rPr lang="en-US" sz="1100" dirty="0"/>
+                        <a:t>&gt;</a:t>
+                      </a:r>
                     </a:p>
                   </a:txBody>
                   <a:tcPr marL="90000" marR="90000">
@@ -8683,10 +9389,14 @@
                         <a:srgbClr val="FFFFFF"/>
                       </a:solidFill>
                     </a:lnL>
-                    <a:lnR w="720">
-                      <a:solidFill>
-                        <a:srgbClr val="FFFFFF"/>
-                      </a:solidFill>
+                    <a:lnR w="720" cap="flat" cmpd="sng" algn="ctr">
+                      <a:solidFill>
+                        <a:srgbClr val="FFFFFF"/>
+                      </a:solidFill>
+                      <a:prstDash val="solid"/>
+                      <a:round/>
+                      <a:headEnd type="none" w="med" len="med"/>
+                      <a:tailEnd type="none" w="med" len="med"/>
                     </a:lnR>
                     <a:lnT w="720">
                       <a:solidFill>
@@ -8708,14 +9418,37 @@
                     <a:bodyPr/>
                     <a:lstStyle/>
                     <a:p>
-                      <a:endParaRPr lang="en-US" sz="1100" dirty="0"/>
+                      <a:r>
+                        <a:rPr lang="en-US" sz="1100" dirty="0"/>
+                        <a:t>&lt;</a:t>
+                      </a:r>
+                      <a:r>
+                        <a:rPr lang="en-US" sz="1100" dirty="0" err="1"/>
+                        <a:t>sos</a:t>
+                      </a:r>
+                      <a:r>
+                        <a:rPr lang="en-US" sz="1100" dirty="0"/>
+                        <a:t>&gt; a man in a vest is sitting in a chair and holding magazines &lt;</a:t>
+                      </a:r>
+                      <a:r>
+                        <a:rPr lang="en-US" sz="1100" dirty="0" err="1"/>
+                        <a:t>eos</a:t>
+                      </a:r>
+                      <a:r>
+                        <a:rPr lang="en-US" sz="1100" dirty="0"/>
+                        <a:t>&gt;</a:t>
+                      </a:r>
                     </a:p>
                   </a:txBody>
                   <a:tcPr marL="90000" marR="90000">
-                    <a:lnL w="720">
-                      <a:solidFill>
-                        <a:srgbClr val="FFFFFF"/>
-                      </a:solidFill>
+                    <a:lnL w="720" cap="flat" cmpd="sng" algn="ctr">
+                      <a:solidFill>
+                        <a:srgbClr val="FFFFFF"/>
+                      </a:solidFill>
+                      <a:prstDash val="solid"/>
+                      <a:round/>
+                      <a:headEnd type="none" w="med" len="med"/>
+                      <a:tailEnd type="none" w="med" len="med"/>
                     </a:lnL>
                     <a:lnR w="720">
                       <a:solidFill>
@@ -8743,13 +9476,32 @@
                   </a:ext>
                 </a:extLst>
               </a:tr>
-              <a:tr h="428760">
+              <a:tr h="417485">
                 <a:tc>
                   <a:txBody>
                     <a:bodyPr/>
                     <a:lstStyle/>
                     <a:p>
-                      <a:endParaRPr lang="en-US" sz="1100" dirty="0"/>
+                      <a:r>
+                        <a:rPr lang="en-US" sz="1100" dirty="0"/>
+                        <a:t>&lt;</a:t>
+                      </a:r>
+                      <a:r>
+                        <a:rPr lang="en-US" sz="1100" dirty="0" err="1"/>
+                        <a:t>sos</a:t>
+                      </a:r>
+                      <a:r>
+                        <a:rPr lang="en-US" sz="1100" dirty="0"/>
+                        <a:t>&gt; a mother and her young son enjoying a beautiful day outside &lt;</a:t>
+                      </a:r>
+                      <a:r>
+                        <a:rPr lang="en-US" sz="1100" dirty="0" err="1"/>
+                        <a:t>eos</a:t>
+                      </a:r>
+                      <a:r>
+                        <a:rPr lang="en-US" sz="1100" dirty="0"/>
+                        <a:t>&gt;</a:t>
+                      </a:r>
                     </a:p>
                   </a:txBody>
                   <a:tcPr marL="90000" marR="90000">
@@ -8758,10 +9510,14 @@
                         <a:srgbClr val="FFFFFF"/>
                       </a:solidFill>
                     </a:lnL>
-                    <a:lnR w="720">
-                      <a:solidFill>
-                        <a:srgbClr val="FFFFFF"/>
-                      </a:solidFill>
+                    <a:lnR w="720" cap="flat" cmpd="sng" algn="ctr">
+                      <a:solidFill>
+                        <a:srgbClr val="FFFFFF"/>
+                      </a:solidFill>
+                      <a:prstDash val="solid"/>
+                      <a:round/>
+                      <a:headEnd type="none" w="med" len="med"/>
+                      <a:tailEnd type="none" w="med" len="med"/>
                     </a:lnR>
                     <a:lnT w="720">
                       <a:solidFill>
@@ -8783,14 +9539,37 @@
                     <a:bodyPr/>
                     <a:lstStyle/>
                     <a:p>
-                      <a:endParaRPr lang="en-US" sz="1100" dirty="0"/>
+                      <a:r>
+                        <a:rPr lang="en-US" sz="1100" dirty="0"/>
+                        <a:t>&lt;</a:t>
+                      </a:r>
+                      <a:r>
+                        <a:rPr lang="en-US" sz="1100" dirty="0" err="1"/>
+                        <a:t>sos</a:t>
+                      </a:r>
+                      <a:r>
+                        <a:rPr lang="en-US" sz="1100" dirty="0"/>
+                        <a:t>&gt; a mother and her young son enjoying a beautiful day outside &lt;</a:t>
+                      </a:r>
+                      <a:r>
+                        <a:rPr lang="en-US" sz="1100" dirty="0" err="1"/>
+                        <a:t>eos</a:t>
+                      </a:r>
+                      <a:r>
+                        <a:rPr lang="en-US" sz="1100" dirty="0"/>
+                        <a:t>&gt;</a:t>
+                      </a:r>
                     </a:p>
                   </a:txBody>
                   <a:tcPr marL="90000" marR="90000">
-                    <a:lnL w="720">
-                      <a:solidFill>
-                        <a:srgbClr val="FFFFFF"/>
-                      </a:solidFill>
+                    <a:lnL w="720" cap="flat" cmpd="sng" algn="ctr">
+                      <a:solidFill>
+                        <a:srgbClr val="FFFFFF"/>
+                      </a:solidFill>
+                      <a:prstDash val="solid"/>
+                      <a:round/>
+                      <a:headEnd type="none" w="med" len="med"/>
+                      <a:tailEnd type="none" w="med" len="med"/>
                     </a:lnL>
                     <a:lnR w="720">
                       <a:solidFill>
@@ -8946,7 +9725,7 @@
         <p:spPr>
           <a:xfrm>
             <a:off x="328773" y="331214"/>
-            <a:ext cx="8034391" cy="600120"/>
+            <a:ext cx="8034391" cy="432579"/>
           </a:xfrm>
           <a:prstGeom prst="rect">
             <a:avLst/>
@@ -9026,6 +9805,16 @@
                 <a:ea typeface="Arial"/>
               </a:rPr>
               <a:t>&gt; tokens for each sentence.</a:t>
+            </a:r>
+            <a:r>
+              <a:rPr lang="zh-CN" altLang="en-US" sz="1200" b="0" strike="noStrike" spc="-1" dirty="0">
+                <a:solidFill>
+                  <a:srgbClr val="595959"/>
+                </a:solidFill>
+                <a:latin typeface="Arial"/>
+                <a:ea typeface="Arial"/>
+              </a:rPr>
+              <a:t> </a:t>
             </a:r>
             <a:endParaRPr lang="en-US" sz="1200" b="0" strike="noStrike" spc="-1" dirty="0">
               <a:latin typeface="Arial"/>
@@ -9090,922 +9879,6 @@
           <a:chExt cx="0" cy="0"/>
         </a:xfrm>
       </p:grpSpPr>
-      <p:graphicFrame>
-        <p:nvGraphicFramePr>
-          <p:cNvPr id="136" name="Table 1"/>
-          <p:cNvGraphicFramePr/>
-          <p:nvPr>
-            <p:extLst>
-              <p:ext uri="{D42A27DB-BD31-4B8C-83A1-F6EECF244321}">
-                <p14:modId xmlns:p14="http://schemas.microsoft.com/office/powerpoint/2010/main" val="2809685046"/>
-              </p:ext>
-            </p:extLst>
-          </p:nvPr>
-        </p:nvGraphicFramePr>
-        <p:xfrm>
-          <a:off x="0" y="742068"/>
-          <a:ext cx="9144000" cy="4054920"/>
-        </p:xfrm>
-        <a:graphic>
-          <a:graphicData uri="http://schemas.openxmlformats.org/drawingml/2006/table">
-            <a:tbl>
-              <a:tblPr/>
-              <a:tblGrid>
-                <a:gridCol w="4571280">
-                  <a:extLst>
-                    <a:ext uri="{9D8B030D-6E8A-4147-A177-3AD203B41FA5}">
-                      <a16:colId xmlns:a16="http://schemas.microsoft.com/office/drawing/2014/main" val="20000"/>
-                    </a:ext>
-                  </a:extLst>
-                </a:gridCol>
-                <a:gridCol w="4572720">
-                  <a:extLst>
-                    <a:ext uri="{9D8B030D-6E8A-4147-A177-3AD203B41FA5}">
-                      <a16:colId xmlns:a16="http://schemas.microsoft.com/office/drawing/2014/main" val="20001"/>
-                    </a:ext>
-                  </a:extLst>
-                </a:gridCol>
-              </a:tblGrid>
-              <a:tr h="347760">
-                <a:tc>
-                  <a:txBody>
-                    <a:bodyPr/>
-                    <a:lstStyle/>
-                    <a:p>
-                      <a:pPr>
-                        <a:lnSpc>
-                          <a:spcPct val="100000"/>
-                        </a:lnSpc>
-                      </a:pPr>
-                      <a:r>
-                        <a:rPr lang="en-US" sz="1800" b="0" strike="noStrike" spc="-1" dirty="0">
-                          <a:latin typeface="+mn-lt"/>
-                        </a:rPr>
-                        <a:t>True Translation</a:t>
-                      </a:r>
-                      <a:endParaRPr lang="en-US" sz="1800" b="0" strike="noStrike" spc="-1" dirty="0">
-                        <a:latin typeface="Arial"/>
-                      </a:endParaRPr>
-                    </a:p>
-                  </a:txBody>
-                  <a:tcPr marL="90000" marR="90000">
-                    <a:lnL w="720">
-                      <a:solidFill>
-                        <a:srgbClr val="FFFFFF"/>
-                      </a:solidFill>
-                    </a:lnL>
-                    <a:lnR w="720">
-                      <a:solidFill>
-                        <a:srgbClr val="FFFFFF"/>
-                      </a:solidFill>
-                    </a:lnR>
-                    <a:lnT w="720">
-                      <a:solidFill>
-                        <a:srgbClr val="FFFFFF"/>
-                      </a:solidFill>
-                    </a:lnT>
-                    <a:lnB w="720">
-                      <a:solidFill>
-                        <a:srgbClr val="FFFFFF"/>
-                      </a:solidFill>
-                    </a:lnB>
-                    <a:solidFill>
-                      <a:srgbClr val="B3B3B3"/>
-                    </a:solidFill>
-                  </a:tcPr>
-                </a:tc>
-                <a:tc>
-                  <a:txBody>
-                    <a:bodyPr/>
-                    <a:lstStyle/>
-                    <a:p>
-                      <a:pPr>
-                        <a:lnSpc>
-                          <a:spcPct val="100000"/>
-                        </a:lnSpc>
-                      </a:pPr>
-                      <a:r>
-                        <a:rPr lang="en-US" sz="1800" b="0" strike="noStrike" spc="-1" dirty="0">
-                          <a:latin typeface="+mn-lt"/>
-                        </a:rPr>
-                        <a:t>Predicted Translation</a:t>
-                      </a:r>
-                      <a:endParaRPr lang="en-US" sz="1800" b="0" strike="noStrike" spc="-1" dirty="0">
-                        <a:latin typeface="Arial"/>
-                      </a:endParaRPr>
-                    </a:p>
-                  </a:txBody>
-                  <a:tcPr marL="90000" marR="90000">
-                    <a:lnL w="720">
-                      <a:solidFill>
-                        <a:srgbClr val="FFFFFF"/>
-                      </a:solidFill>
-                    </a:lnL>
-                    <a:lnR w="720">
-                      <a:solidFill>
-                        <a:srgbClr val="FFFFFF"/>
-                      </a:solidFill>
-                    </a:lnR>
-                    <a:lnT w="720">
-                      <a:solidFill>
-                        <a:srgbClr val="FFFFFF"/>
-                      </a:solidFill>
-                    </a:lnT>
-                    <a:lnB w="720">
-                      <a:solidFill>
-                        <a:srgbClr val="FFFFFF"/>
-                      </a:solidFill>
-                    </a:lnB>
-                    <a:solidFill>
-                      <a:srgbClr val="B3B3B3"/>
-                    </a:solidFill>
-                  </a:tcPr>
-                </a:tc>
-                <a:extLst>
-                  <a:ext uri="{0D108BD9-81ED-4DB2-BD59-A6C34878D82A}">
-                    <a16:rowId xmlns:a16="http://schemas.microsoft.com/office/drawing/2014/main" val="10000"/>
-                  </a:ext>
-                </a:extLst>
-              </a:tr>
-              <a:tr h="247320">
-                <a:tc>
-                  <a:txBody>
-                    <a:bodyPr/>
-                    <a:lstStyle/>
-                    <a:p>
-                      <a:pPr>
-                        <a:lnSpc>
-                          <a:spcPct val="100000"/>
-                        </a:lnSpc>
-                      </a:pPr>
-                      <a:r>
-                        <a:rPr lang="en-US" sz="1100" b="0" strike="noStrike" spc="-1" dirty="0">
-                          <a:latin typeface="Arial"/>
-                        </a:rPr>
-                        <a:t>‘&lt;</a:t>
-                      </a:r>
-                      <a:r>
-                        <a:rPr lang="en-US" sz="1100" b="0" strike="noStrike" spc="-1" dirty="0" err="1">
-                          <a:latin typeface="Arial"/>
-                        </a:rPr>
-                        <a:t>sos</a:t>
-                      </a:r>
-                      <a:r>
-                        <a:rPr lang="en-US" sz="1100" b="0" strike="noStrike" spc="-1" dirty="0">
-                          <a:latin typeface="Arial"/>
-                        </a:rPr>
-                        <a:t>&gt;'word_1’,’word_2’,….., '&lt;</a:t>
-                      </a:r>
-                      <a:r>
-                        <a:rPr lang="en-US" sz="1100" b="0" strike="noStrike" spc="-1" dirty="0" err="1">
-                          <a:latin typeface="Arial"/>
-                        </a:rPr>
-                        <a:t>eos</a:t>
-                      </a:r>
-                      <a:r>
-                        <a:rPr lang="en-US" sz="1100" b="0" strike="noStrike" spc="-1" dirty="0">
-                          <a:latin typeface="Arial"/>
-                        </a:rPr>
-                        <a:t>&gt;'</a:t>
-                      </a:r>
-                    </a:p>
-                  </a:txBody>
-                  <a:tcPr marL="90000" marR="90000">
-                    <a:lnL w="720">
-                      <a:solidFill>
-                        <a:srgbClr val="FFFFFF"/>
-                      </a:solidFill>
-                    </a:lnL>
-                    <a:lnR w="720">
-                      <a:solidFill>
-                        <a:srgbClr val="FFFFFF"/>
-                      </a:solidFill>
-                    </a:lnR>
-                    <a:lnT w="720">
-                      <a:solidFill>
-                        <a:srgbClr val="FFFFFF"/>
-                      </a:solidFill>
-                    </a:lnT>
-                    <a:lnB w="720">
-                      <a:solidFill>
-                        <a:srgbClr val="FFFFFF"/>
-                      </a:solidFill>
-                    </a:lnB>
-                    <a:solidFill>
-                      <a:srgbClr val="CCCCCC"/>
-                    </a:solidFill>
-                  </a:tcPr>
-                </a:tc>
-                <a:tc>
-                  <a:txBody>
-                    <a:bodyPr/>
-                    <a:lstStyle/>
-                    <a:p>
-                      <a:pPr>
-                        <a:lnSpc>
-                          <a:spcPct val="100000"/>
-                        </a:lnSpc>
-                      </a:pPr>
-                      <a:r>
-                        <a:rPr lang="en-US" sz="1100" b="0" strike="noStrike" spc="-1">
-                          <a:latin typeface="Arial"/>
-                        </a:rPr>
-                        <a:t>‘&lt;sos&gt;'word_1’,’word_2’,….., '&lt;eos&gt;'</a:t>
-                      </a:r>
-                    </a:p>
-                  </a:txBody>
-                  <a:tcPr marL="90000" marR="90000">
-                    <a:lnL w="720">
-                      <a:solidFill>
-                        <a:srgbClr val="FFFFFF"/>
-                      </a:solidFill>
-                    </a:lnL>
-                    <a:lnR w="720">
-                      <a:solidFill>
-                        <a:srgbClr val="FFFFFF"/>
-                      </a:solidFill>
-                    </a:lnR>
-                    <a:lnT w="720">
-                      <a:solidFill>
-                        <a:srgbClr val="FFFFFF"/>
-                      </a:solidFill>
-                    </a:lnT>
-                    <a:lnB w="720">
-                      <a:solidFill>
-                        <a:srgbClr val="FFFFFF"/>
-                      </a:solidFill>
-                    </a:lnB>
-                    <a:solidFill>
-                      <a:srgbClr val="CCCCCC"/>
-                    </a:solidFill>
-                  </a:tcPr>
-                </a:tc>
-                <a:extLst>
-                  <a:ext uri="{0D108BD9-81ED-4DB2-BD59-A6C34878D82A}">
-                    <a16:rowId xmlns:a16="http://schemas.microsoft.com/office/drawing/2014/main" val="10001"/>
-                  </a:ext>
-                </a:extLst>
-              </a:tr>
-              <a:tr h="428760">
-                <a:tc>
-                  <a:txBody>
-                    <a:bodyPr/>
-                    <a:lstStyle/>
-                    <a:p>
-                      <a:endParaRPr lang="en-US" sz="1100" dirty="0"/>
-                    </a:p>
-                  </a:txBody>
-                  <a:tcPr marL="90000" marR="90000">
-                    <a:lnL w="720">
-                      <a:solidFill>
-                        <a:srgbClr val="FFFFFF"/>
-                      </a:solidFill>
-                    </a:lnL>
-                    <a:lnR w="720">
-                      <a:solidFill>
-                        <a:srgbClr val="FFFFFF"/>
-                      </a:solidFill>
-                    </a:lnR>
-                    <a:lnT w="720">
-                      <a:solidFill>
-                        <a:srgbClr val="FFFFFF"/>
-                      </a:solidFill>
-                    </a:lnT>
-                    <a:lnB w="720">
-                      <a:solidFill>
-                        <a:srgbClr val="FFFFFF"/>
-                      </a:solidFill>
-                    </a:lnB>
-                    <a:solidFill>
-                      <a:srgbClr val="E6E6E6"/>
-                    </a:solidFill>
-                  </a:tcPr>
-                </a:tc>
-                <a:tc>
-                  <a:txBody>
-                    <a:bodyPr/>
-                    <a:lstStyle/>
-                    <a:p>
-                      <a:endParaRPr lang="en-US" sz="1100" dirty="0"/>
-                    </a:p>
-                  </a:txBody>
-                  <a:tcPr marL="90000" marR="90000">
-                    <a:lnL w="720">
-                      <a:solidFill>
-                        <a:srgbClr val="FFFFFF"/>
-                      </a:solidFill>
-                    </a:lnL>
-                    <a:lnR w="720">
-                      <a:solidFill>
-                        <a:srgbClr val="FFFFFF"/>
-                      </a:solidFill>
-                    </a:lnR>
-                    <a:lnT w="720">
-                      <a:solidFill>
-                        <a:srgbClr val="FFFFFF"/>
-                      </a:solidFill>
-                    </a:lnT>
-                    <a:lnB w="720">
-                      <a:solidFill>
-                        <a:srgbClr val="FFFFFF"/>
-                      </a:solidFill>
-                    </a:lnB>
-                    <a:solidFill>
-                      <a:srgbClr val="E6E6E6"/>
-                    </a:solidFill>
-                  </a:tcPr>
-                </a:tc>
-                <a:extLst>
-                  <a:ext uri="{0D108BD9-81ED-4DB2-BD59-A6C34878D82A}">
-                    <a16:rowId xmlns:a16="http://schemas.microsoft.com/office/drawing/2014/main" val="10002"/>
-                  </a:ext>
-                </a:extLst>
-              </a:tr>
-              <a:tr h="428760">
-                <a:tc>
-                  <a:txBody>
-                    <a:bodyPr/>
-                    <a:lstStyle/>
-                    <a:p>
-                      <a:endParaRPr lang="en-US" sz="1100" dirty="0"/>
-                    </a:p>
-                  </a:txBody>
-                  <a:tcPr marL="90000" marR="90000">
-                    <a:lnL w="720">
-                      <a:solidFill>
-                        <a:srgbClr val="FFFFFF"/>
-                      </a:solidFill>
-                    </a:lnL>
-                    <a:lnR w="720">
-                      <a:solidFill>
-                        <a:srgbClr val="FFFFFF"/>
-                      </a:solidFill>
-                    </a:lnR>
-                    <a:lnT w="720">
-                      <a:solidFill>
-                        <a:srgbClr val="FFFFFF"/>
-                      </a:solidFill>
-                    </a:lnT>
-                    <a:lnB w="720">
-                      <a:solidFill>
-                        <a:srgbClr val="FFFFFF"/>
-                      </a:solidFill>
-                    </a:lnB>
-                    <a:solidFill>
-                      <a:srgbClr val="CCCCCC"/>
-                    </a:solidFill>
-                  </a:tcPr>
-                </a:tc>
-                <a:tc>
-                  <a:txBody>
-                    <a:bodyPr/>
-                    <a:lstStyle/>
-                    <a:p>
-                      <a:endParaRPr lang="en-US" sz="1100" dirty="0"/>
-                    </a:p>
-                  </a:txBody>
-                  <a:tcPr marL="90000" marR="90000">
-                    <a:lnL w="720">
-                      <a:solidFill>
-                        <a:srgbClr val="FFFFFF"/>
-                      </a:solidFill>
-                    </a:lnL>
-                    <a:lnR w="720">
-                      <a:solidFill>
-                        <a:srgbClr val="FFFFFF"/>
-                      </a:solidFill>
-                    </a:lnR>
-                    <a:lnT w="720">
-                      <a:solidFill>
-                        <a:srgbClr val="FFFFFF"/>
-                      </a:solidFill>
-                    </a:lnT>
-                    <a:lnB w="720">
-                      <a:solidFill>
-                        <a:srgbClr val="FFFFFF"/>
-                      </a:solidFill>
-                    </a:lnB>
-                    <a:solidFill>
-                      <a:srgbClr val="CCCCCC"/>
-                    </a:solidFill>
-                  </a:tcPr>
-                </a:tc>
-                <a:extLst>
-                  <a:ext uri="{0D108BD9-81ED-4DB2-BD59-A6C34878D82A}">
-                    <a16:rowId xmlns:a16="http://schemas.microsoft.com/office/drawing/2014/main" val="10003"/>
-                  </a:ext>
-                </a:extLst>
-              </a:tr>
-              <a:tr h="428760">
-                <a:tc>
-                  <a:txBody>
-                    <a:bodyPr/>
-                    <a:lstStyle/>
-                    <a:p>
-                      <a:endParaRPr lang="en-US" sz="1100"/>
-                    </a:p>
-                  </a:txBody>
-                  <a:tcPr marL="90000" marR="90000">
-                    <a:lnL w="720">
-                      <a:solidFill>
-                        <a:srgbClr val="FFFFFF"/>
-                      </a:solidFill>
-                    </a:lnL>
-                    <a:lnR w="720">
-                      <a:solidFill>
-                        <a:srgbClr val="FFFFFF"/>
-                      </a:solidFill>
-                    </a:lnR>
-                    <a:lnT w="720">
-                      <a:solidFill>
-                        <a:srgbClr val="FFFFFF"/>
-                      </a:solidFill>
-                    </a:lnT>
-                    <a:lnB w="720">
-                      <a:solidFill>
-                        <a:srgbClr val="FFFFFF"/>
-                      </a:solidFill>
-                    </a:lnB>
-                    <a:solidFill>
-                      <a:srgbClr val="E6E6E6"/>
-                    </a:solidFill>
-                  </a:tcPr>
-                </a:tc>
-                <a:tc>
-                  <a:txBody>
-                    <a:bodyPr/>
-                    <a:lstStyle/>
-                    <a:p>
-                      <a:endParaRPr lang="en-US" sz="1100" dirty="0"/>
-                    </a:p>
-                  </a:txBody>
-                  <a:tcPr marL="90000" marR="90000">
-                    <a:lnL w="720">
-                      <a:solidFill>
-                        <a:srgbClr val="FFFFFF"/>
-                      </a:solidFill>
-                    </a:lnL>
-                    <a:lnR w="720">
-                      <a:solidFill>
-                        <a:srgbClr val="FFFFFF"/>
-                      </a:solidFill>
-                    </a:lnR>
-                    <a:lnT w="720">
-                      <a:solidFill>
-                        <a:srgbClr val="FFFFFF"/>
-                      </a:solidFill>
-                    </a:lnT>
-                    <a:lnB w="720">
-                      <a:solidFill>
-                        <a:srgbClr val="FFFFFF"/>
-                      </a:solidFill>
-                    </a:lnB>
-                    <a:solidFill>
-                      <a:srgbClr val="E6E6E6"/>
-                    </a:solidFill>
-                  </a:tcPr>
-                </a:tc>
-                <a:extLst>
-                  <a:ext uri="{0D108BD9-81ED-4DB2-BD59-A6C34878D82A}">
-                    <a16:rowId xmlns:a16="http://schemas.microsoft.com/office/drawing/2014/main" val="10004"/>
-                  </a:ext>
-                </a:extLst>
-              </a:tr>
-              <a:tr h="428760">
-                <a:tc>
-                  <a:txBody>
-                    <a:bodyPr/>
-                    <a:lstStyle/>
-                    <a:p>
-                      <a:endParaRPr lang="en-US" sz="1100"/>
-                    </a:p>
-                  </a:txBody>
-                  <a:tcPr marL="90000" marR="90000">
-                    <a:lnL w="720">
-                      <a:solidFill>
-                        <a:srgbClr val="FFFFFF"/>
-                      </a:solidFill>
-                    </a:lnL>
-                    <a:lnR w="720">
-                      <a:solidFill>
-                        <a:srgbClr val="FFFFFF"/>
-                      </a:solidFill>
-                    </a:lnR>
-                    <a:lnT w="720">
-                      <a:solidFill>
-                        <a:srgbClr val="FFFFFF"/>
-                      </a:solidFill>
-                    </a:lnT>
-                    <a:lnB w="720">
-                      <a:solidFill>
-                        <a:srgbClr val="FFFFFF"/>
-                      </a:solidFill>
-                    </a:lnB>
-                    <a:solidFill>
-                      <a:srgbClr val="CCCCCC"/>
-                    </a:solidFill>
-                  </a:tcPr>
-                </a:tc>
-                <a:tc>
-                  <a:txBody>
-                    <a:bodyPr/>
-                    <a:lstStyle/>
-                    <a:p>
-                      <a:endParaRPr lang="en-US" sz="1100" dirty="0"/>
-                    </a:p>
-                  </a:txBody>
-                  <a:tcPr marL="90000" marR="90000">
-                    <a:lnL w="720">
-                      <a:solidFill>
-                        <a:srgbClr val="FFFFFF"/>
-                      </a:solidFill>
-                    </a:lnL>
-                    <a:lnR w="720">
-                      <a:solidFill>
-                        <a:srgbClr val="FFFFFF"/>
-                      </a:solidFill>
-                    </a:lnR>
-                    <a:lnT w="720">
-                      <a:solidFill>
-                        <a:srgbClr val="FFFFFF"/>
-                      </a:solidFill>
-                    </a:lnT>
-                    <a:lnB w="720">
-                      <a:solidFill>
-                        <a:srgbClr val="FFFFFF"/>
-                      </a:solidFill>
-                    </a:lnB>
-                    <a:solidFill>
-                      <a:srgbClr val="CCCCCC"/>
-                    </a:solidFill>
-                  </a:tcPr>
-                </a:tc>
-                <a:extLst>
-                  <a:ext uri="{0D108BD9-81ED-4DB2-BD59-A6C34878D82A}">
-                    <a16:rowId xmlns:a16="http://schemas.microsoft.com/office/drawing/2014/main" val="10005"/>
-                  </a:ext>
-                </a:extLst>
-              </a:tr>
-              <a:tr h="428760">
-                <a:tc>
-                  <a:txBody>
-                    <a:bodyPr/>
-                    <a:lstStyle/>
-                    <a:p>
-                      <a:endParaRPr lang="en-US" sz="1100"/>
-                    </a:p>
-                  </a:txBody>
-                  <a:tcPr marL="90000" marR="90000">
-                    <a:lnL w="720">
-                      <a:solidFill>
-                        <a:srgbClr val="FFFFFF"/>
-                      </a:solidFill>
-                    </a:lnL>
-                    <a:lnR w="720">
-                      <a:solidFill>
-                        <a:srgbClr val="FFFFFF"/>
-                      </a:solidFill>
-                    </a:lnR>
-                    <a:lnT w="720">
-                      <a:solidFill>
-                        <a:srgbClr val="FFFFFF"/>
-                      </a:solidFill>
-                    </a:lnT>
-                    <a:lnB w="720">
-                      <a:solidFill>
-                        <a:srgbClr val="FFFFFF"/>
-                      </a:solidFill>
-                    </a:lnB>
-                    <a:solidFill>
-                      <a:srgbClr val="E6E6E6"/>
-                    </a:solidFill>
-                  </a:tcPr>
-                </a:tc>
-                <a:tc>
-                  <a:txBody>
-                    <a:bodyPr/>
-                    <a:lstStyle/>
-                    <a:p>
-                      <a:endParaRPr lang="en-US" sz="1100" dirty="0"/>
-                    </a:p>
-                  </a:txBody>
-                  <a:tcPr marL="90000" marR="90000">
-                    <a:lnL w="720">
-                      <a:solidFill>
-                        <a:srgbClr val="FFFFFF"/>
-                      </a:solidFill>
-                    </a:lnL>
-                    <a:lnR w="720">
-                      <a:solidFill>
-                        <a:srgbClr val="FFFFFF"/>
-                      </a:solidFill>
-                    </a:lnR>
-                    <a:lnT w="720">
-                      <a:solidFill>
-                        <a:srgbClr val="FFFFFF"/>
-                      </a:solidFill>
-                    </a:lnT>
-                    <a:lnB w="720">
-                      <a:solidFill>
-                        <a:srgbClr val="FFFFFF"/>
-                      </a:solidFill>
-                    </a:lnB>
-                    <a:solidFill>
-                      <a:srgbClr val="E6E6E6"/>
-                    </a:solidFill>
-                  </a:tcPr>
-                </a:tc>
-                <a:extLst>
-                  <a:ext uri="{0D108BD9-81ED-4DB2-BD59-A6C34878D82A}">
-                    <a16:rowId xmlns:a16="http://schemas.microsoft.com/office/drawing/2014/main" val="10006"/>
-                  </a:ext>
-                </a:extLst>
-              </a:tr>
-              <a:tr h="428760">
-                <a:tc>
-                  <a:txBody>
-                    <a:bodyPr/>
-                    <a:lstStyle/>
-                    <a:p>
-                      <a:endParaRPr lang="en-US" sz="1100" dirty="0"/>
-                    </a:p>
-                  </a:txBody>
-                  <a:tcPr marL="90000" marR="90000">
-                    <a:lnL w="720">
-                      <a:solidFill>
-                        <a:srgbClr val="FFFFFF"/>
-                      </a:solidFill>
-                    </a:lnL>
-                    <a:lnR w="720">
-                      <a:solidFill>
-                        <a:srgbClr val="FFFFFF"/>
-                      </a:solidFill>
-                    </a:lnR>
-                    <a:lnT w="720">
-                      <a:solidFill>
-                        <a:srgbClr val="FFFFFF"/>
-                      </a:solidFill>
-                    </a:lnT>
-                    <a:lnB w="720">
-                      <a:solidFill>
-                        <a:srgbClr val="FFFFFF"/>
-                      </a:solidFill>
-                    </a:lnB>
-                    <a:solidFill>
-                      <a:srgbClr val="CCCCCC"/>
-                    </a:solidFill>
-                  </a:tcPr>
-                </a:tc>
-                <a:tc>
-                  <a:txBody>
-                    <a:bodyPr/>
-                    <a:lstStyle/>
-                    <a:p>
-                      <a:endParaRPr lang="en-US" sz="1100" dirty="0"/>
-                    </a:p>
-                  </a:txBody>
-                  <a:tcPr marL="90000" marR="90000">
-                    <a:lnL w="720">
-                      <a:solidFill>
-                        <a:srgbClr val="FFFFFF"/>
-                      </a:solidFill>
-                    </a:lnL>
-                    <a:lnR w="720">
-                      <a:solidFill>
-                        <a:srgbClr val="FFFFFF"/>
-                      </a:solidFill>
-                    </a:lnR>
-                    <a:lnT w="720">
-                      <a:solidFill>
-                        <a:srgbClr val="FFFFFF"/>
-                      </a:solidFill>
-                    </a:lnT>
-                    <a:lnB w="720">
-                      <a:solidFill>
-                        <a:srgbClr val="FFFFFF"/>
-                      </a:solidFill>
-                    </a:lnB>
-                    <a:solidFill>
-                      <a:srgbClr val="CCCCCC"/>
-                    </a:solidFill>
-                  </a:tcPr>
-                </a:tc>
-                <a:extLst>
-                  <a:ext uri="{0D108BD9-81ED-4DB2-BD59-A6C34878D82A}">
-                    <a16:rowId xmlns:a16="http://schemas.microsoft.com/office/drawing/2014/main" val="10007"/>
-                  </a:ext>
-                </a:extLst>
-              </a:tr>
-              <a:tr h="428760">
-                <a:tc>
-                  <a:txBody>
-                    <a:bodyPr/>
-                    <a:lstStyle/>
-                    <a:p>
-                      <a:endParaRPr lang="en-US" sz="1100"/>
-                    </a:p>
-                  </a:txBody>
-                  <a:tcPr marL="90000" marR="90000">
-                    <a:lnL w="720">
-                      <a:solidFill>
-                        <a:srgbClr val="FFFFFF"/>
-                      </a:solidFill>
-                    </a:lnL>
-                    <a:lnR w="720">
-                      <a:solidFill>
-                        <a:srgbClr val="FFFFFF"/>
-                      </a:solidFill>
-                    </a:lnR>
-                    <a:lnT w="720">
-                      <a:solidFill>
-                        <a:srgbClr val="FFFFFF"/>
-                      </a:solidFill>
-                    </a:lnT>
-                    <a:lnB w="720">
-                      <a:solidFill>
-                        <a:srgbClr val="FFFFFF"/>
-                      </a:solidFill>
-                    </a:lnB>
-                    <a:solidFill>
-                      <a:srgbClr val="E6E6E6"/>
-                    </a:solidFill>
-                  </a:tcPr>
-                </a:tc>
-                <a:tc>
-                  <a:txBody>
-                    <a:bodyPr/>
-                    <a:lstStyle/>
-                    <a:p>
-                      <a:endParaRPr lang="en-US" sz="1100" dirty="0"/>
-                    </a:p>
-                  </a:txBody>
-                  <a:tcPr marL="90000" marR="90000">
-                    <a:lnL w="720">
-                      <a:solidFill>
-                        <a:srgbClr val="FFFFFF"/>
-                      </a:solidFill>
-                    </a:lnL>
-                    <a:lnR w="720">
-                      <a:solidFill>
-                        <a:srgbClr val="FFFFFF"/>
-                      </a:solidFill>
-                    </a:lnR>
-                    <a:lnT w="720">
-                      <a:solidFill>
-                        <a:srgbClr val="FFFFFF"/>
-                      </a:solidFill>
-                    </a:lnT>
-                    <a:lnB w="720">
-                      <a:solidFill>
-                        <a:srgbClr val="FFFFFF"/>
-                      </a:solidFill>
-                    </a:lnB>
-                    <a:solidFill>
-                      <a:srgbClr val="E6E6E6"/>
-                    </a:solidFill>
-                  </a:tcPr>
-                </a:tc>
-                <a:extLst>
-                  <a:ext uri="{0D108BD9-81ED-4DB2-BD59-A6C34878D82A}">
-                    <a16:rowId xmlns:a16="http://schemas.microsoft.com/office/drawing/2014/main" val="10008"/>
-                  </a:ext>
-                </a:extLst>
-              </a:tr>
-              <a:tr h="428760">
-                <a:tc>
-                  <a:txBody>
-                    <a:bodyPr/>
-                    <a:lstStyle/>
-                    <a:p>
-                      <a:endParaRPr lang="en-US" sz="1100" dirty="0"/>
-                    </a:p>
-                  </a:txBody>
-                  <a:tcPr marL="90000" marR="90000">
-                    <a:lnL w="720">
-                      <a:solidFill>
-                        <a:srgbClr val="FFFFFF"/>
-                      </a:solidFill>
-                    </a:lnL>
-                    <a:lnR w="720">
-                      <a:solidFill>
-                        <a:srgbClr val="FFFFFF"/>
-                      </a:solidFill>
-                    </a:lnR>
-                    <a:lnT w="720">
-                      <a:solidFill>
-                        <a:srgbClr val="FFFFFF"/>
-                      </a:solidFill>
-                    </a:lnT>
-                    <a:lnB w="720">
-                      <a:solidFill>
-                        <a:srgbClr val="FFFFFF"/>
-                      </a:solidFill>
-                    </a:lnB>
-                    <a:solidFill>
-                      <a:srgbClr val="CCCCCC"/>
-                    </a:solidFill>
-                  </a:tcPr>
-                </a:tc>
-                <a:tc>
-                  <a:txBody>
-                    <a:bodyPr/>
-                    <a:lstStyle/>
-                    <a:p>
-                      <a:endParaRPr lang="en-US" sz="1100" dirty="0"/>
-                    </a:p>
-                  </a:txBody>
-                  <a:tcPr marL="90000" marR="90000">
-                    <a:lnL w="720">
-                      <a:solidFill>
-                        <a:srgbClr val="FFFFFF"/>
-                      </a:solidFill>
-                    </a:lnL>
-                    <a:lnR w="720">
-                      <a:solidFill>
-                        <a:srgbClr val="FFFFFF"/>
-                      </a:solidFill>
-                    </a:lnR>
-                    <a:lnT w="720">
-                      <a:solidFill>
-                        <a:srgbClr val="FFFFFF"/>
-                      </a:solidFill>
-                    </a:lnT>
-                    <a:lnB w="720">
-                      <a:solidFill>
-                        <a:srgbClr val="FFFFFF"/>
-                      </a:solidFill>
-                    </a:lnB>
-                    <a:solidFill>
-                      <a:srgbClr val="CCCCCC"/>
-                    </a:solidFill>
-                  </a:tcPr>
-                </a:tc>
-                <a:extLst>
-                  <a:ext uri="{0D108BD9-81ED-4DB2-BD59-A6C34878D82A}">
-                    <a16:rowId xmlns:a16="http://schemas.microsoft.com/office/drawing/2014/main" val="10009"/>
-                  </a:ext>
-                </a:extLst>
-              </a:tr>
-            </a:tbl>
-          </a:graphicData>
-        </a:graphic>
-      </p:graphicFrame>
-      <p:sp>
-        <p:nvSpPr>
-          <p:cNvPr id="137" name="CustomShape 2"/>
-          <p:cNvSpPr/>
-          <p:nvPr/>
-        </p:nvSpPr>
-        <p:spPr>
-          <a:xfrm>
-            <a:off x="3909600" y="4768618"/>
-            <a:ext cx="1002240" cy="362160"/>
-          </a:xfrm>
-          <a:prstGeom prst="rect">
-            <a:avLst/>
-          </a:prstGeom>
-          <a:noFill/>
-          <a:ln>
-            <a:noFill/>
-          </a:ln>
-        </p:spPr>
-        <p:style>
-          <a:lnRef idx="0">
-            <a:scrgbClr r="0" g="0" b="0"/>
-          </a:lnRef>
-          <a:fillRef idx="0">
-            <a:scrgbClr r="0" g="0" b="0"/>
-          </a:fillRef>
-          <a:effectRef idx="0">
-            <a:scrgbClr r="0" g="0" b="0"/>
-          </a:effectRef>
-          <a:fontRef idx="minor"/>
-        </p:style>
-        <p:txBody>
-          <a:bodyPr lIns="90000" tIns="45000" rIns="90000" bIns="45000"/>
-          <a:lstStyle/>
-          <a:p>
-            <a:pPr>
-              <a:lnSpc>
-                <a:spcPct val="100000"/>
-              </a:lnSpc>
-            </a:pPr>
-            <a:r>
-              <a:rPr lang="en-US" sz="1800" b="0" strike="noStrike" spc="-1" dirty="0">
-                <a:solidFill>
-                  <a:srgbClr val="000000"/>
-                </a:solidFill>
-                <a:latin typeface="Arial"/>
-                <a:ea typeface="DejaVu Sans"/>
-              </a:rPr>
-              <a:t>Table 3</a:t>
-            </a:r>
-            <a:endParaRPr lang="en-US" sz="1800" b="0" strike="noStrike" spc="-1" dirty="0">
-              <a:latin typeface="Arial"/>
-            </a:endParaRPr>
-          </a:p>
-        </p:txBody>
-      </p:sp>
       <p:sp>
         <p:nvSpPr>
           <p:cNvPr id="138" name="CustomShape 3"/>
@@ -10177,6 +10050,1339 @@
           </a:p>
         </p:txBody>
       </p:sp>
+      <p:graphicFrame>
+        <p:nvGraphicFramePr>
+          <p:cNvPr id="4" name="Table 1">
+            <a:extLst>
+              <a:ext uri="{FF2B5EF4-FFF2-40B4-BE49-F238E27FC236}">
+                <a16:creationId xmlns:a16="http://schemas.microsoft.com/office/drawing/2014/main" id="{88CFA326-F36B-F7B9-269A-60AC24F85A0C}"/>
+              </a:ext>
+            </a:extLst>
+          </p:cNvPr>
+          <p:cNvGraphicFramePr/>
+          <p:nvPr>
+            <p:extLst>
+              <p:ext uri="{D42A27DB-BD31-4B8C-83A1-F6EECF244321}">
+                <p14:modId xmlns:p14="http://schemas.microsoft.com/office/powerpoint/2010/main" val="2546290491"/>
+              </p:ext>
+            </p:extLst>
+          </p:nvPr>
+        </p:nvGraphicFramePr>
+        <p:xfrm>
+          <a:off x="0" y="901454"/>
+          <a:ext cx="9144000" cy="3950193"/>
+        </p:xfrm>
+        <a:graphic>
+          <a:graphicData uri="http://schemas.openxmlformats.org/drawingml/2006/table">
+            <a:tbl>
+              <a:tblPr/>
+              <a:tblGrid>
+                <a:gridCol w="4464424">
+                  <a:extLst>
+                    <a:ext uri="{9D8B030D-6E8A-4147-A177-3AD203B41FA5}">
+                      <a16:colId xmlns:a16="http://schemas.microsoft.com/office/drawing/2014/main" val="20000"/>
+                    </a:ext>
+                  </a:extLst>
+                </a:gridCol>
+                <a:gridCol w="4679576">
+                  <a:extLst>
+                    <a:ext uri="{9D8B030D-6E8A-4147-A177-3AD203B41FA5}">
+                      <a16:colId xmlns:a16="http://schemas.microsoft.com/office/drawing/2014/main" val="20001"/>
+                    </a:ext>
+                  </a:extLst>
+                </a:gridCol>
+              </a:tblGrid>
+              <a:tr h="357844">
+                <a:tc>
+                  <a:txBody>
+                    <a:bodyPr/>
+                    <a:lstStyle/>
+                    <a:p>
+                      <a:pPr>
+                        <a:lnSpc>
+                          <a:spcPct val="100000"/>
+                        </a:lnSpc>
+                      </a:pPr>
+                      <a:r>
+                        <a:rPr lang="en-US" sz="1800" b="0" strike="noStrike" spc="-1" dirty="0">
+                          <a:latin typeface="+mn-lt"/>
+                        </a:rPr>
+                        <a:t>True Translation</a:t>
+                      </a:r>
+                      <a:endParaRPr lang="en-US" sz="1800" b="0" strike="noStrike" spc="-1" dirty="0">
+                        <a:latin typeface="Arial"/>
+                      </a:endParaRPr>
+                    </a:p>
+                  </a:txBody>
+                  <a:tcPr marL="90000" marR="90000">
+                    <a:lnL w="720">
+                      <a:solidFill>
+                        <a:srgbClr val="FFFFFF"/>
+                      </a:solidFill>
+                    </a:lnL>
+                    <a:lnR w="720">
+                      <a:solidFill>
+                        <a:srgbClr val="FFFFFF"/>
+                      </a:solidFill>
+                    </a:lnR>
+                    <a:lnT w="720">
+                      <a:solidFill>
+                        <a:srgbClr val="FFFFFF"/>
+                      </a:solidFill>
+                    </a:lnT>
+                    <a:lnB w="720">
+                      <a:solidFill>
+                        <a:srgbClr val="FFFFFF"/>
+                      </a:solidFill>
+                    </a:lnB>
+                    <a:solidFill>
+                      <a:srgbClr val="B3B3B3"/>
+                    </a:solidFill>
+                  </a:tcPr>
+                </a:tc>
+                <a:tc>
+                  <a:txBody>
+                    <a:bodyPr/>
+                    <a:lstStyle/>
+                    <a:p>
+                      <a:pPr>
+                        <a:lnSpc>
+                          <a:spcPct val="100000"/>
+                        </a:lnSpc>
+                      </a:pPr>
+                      <a:r>
+                        <a:rPr lang="en-US" sz="1800" b="0" strike="noStrike" spc="-1" dirty="0">
+                          <a:latin typeface="+mn-lt"/>
+                        </a:rPr>
+                        <a:t>Predicted Translation</a:t>
+                      </a:r>
+                      <a:endParaRPr lang="en-US" sz="1800" b="0" strike="noStrike" spc="-1" dirty="0">
+                        <a:latin typeface="Arial"/>
+                      </a:endParaRPr>
+                    </a:p>
+                  </a:txBody>
+                  <a:tcPr marL="90000" marR="90000">
+                    <a:lnL w="720">
+                      <a:solidFill>
+                        <a:srgbClr val="FFFFFF"/>
+                      </a:solidFill>
+                    </a:lnL>
+                    <a:lnR w="720">
+                      <a:solidFill>
+                        <a:srgbClr val="FFFFFF"/>
+                      </a:solidFill>
+                    </a:lnR>
+                    <a:lnT w="720">
+                      <a:solidFill>
+                        <a:srgbClr val="FFFFFF"/>
+                      </a:solidFill>
+                    </a:lnT>
+                    <a:lnB w="720" cap="flat" cmpd="sng" algn="ctr">
+                      <a:solidFill>
+                        <a:srgbClr val="FFFFFF"/>
+                      </a:solidFill>
+                      <a:prstDash val="solid"/>
+                      <a:round/>
+                      <a:headEnd type="none" w="med" len="med"/>
+                      <a:tailEnd type="none" w="med" len="med"/>
+                    </a:lnB>
+                    <a:solidFill>
+                      <a:srgbClr val="B3B3B3"/>
+                    </a:solidFill>
+                  </a:tcPr>
+                </a:tc>
+                <a:extLst>
+                  <a:ext uri="{0D108BD9-81ED-4DB2-BD59-A6C34878D82A}">
+                    <a16:rowId xmlns:a16="http://schemas.microsoft.com/office/drawing/2014/main" val="10000"/>
+                  </a:ext>
+                </a:extLst>
+              </a:tr>
+              <a:tr h="253473">
+                <a:tc>
+                  <a:txBody>
+                    <a:bodyPr/>
+                    <a:lstStyle/>
+                    <a:p>
+                      <a:pPr>
+                        <a:lnSpc>
+                          <a:spcPct val="100000"/>
+                        </a:lnSpc>
+                      </a:pPr>
+                      <a:r>
+                        <a:rPr lang="en-US" sz="1100" dirty="0"/>
+                        <a:t>&lt;</a:t>
+                      </a:r>
+                      <a:r>
+                        <a:rPr lang="en-US" sz="1100" dirty="0" err="1"/>
+                        <a:t>sos</a:t>
+                      </a:r>
+                      <a:r>
+                        <a:rPr lang="en-US" sz="1100" dirty="0"/>
+                        <a:t>&gt; a man in an orange hat staring at something &lt;</a:t>
+                      </a:r>
+                      <a:r>
+                        <a:rPr lang="en-US" sz="1100" dirty="0" err="1"/>
+                        <a:t>eos</a:t>
+                      </a:r>
+                      <a:r>
+                        <a:rPr lang="en-US" sz="1100" dirty="0"/>
+                        <a:t>&gt;</a:t>
+                      </a:r>
+                      <a:endParaRPr lang="en-US" sz="1100" b="0" strike="noStrike" spc="-1" dirty="0">
+                        <a:latin typeface="Arial"/>
+                      </a:endParaRPr>
+                    </a:p>
+                  </a:txBody>
+                  <a:tcPr marL="90000" marR="90000">
+                    <a:lnL w="720">
+                      <a:solidFill>
+                        <a:srgbClr val="FFFFFF"/>
+                      </a:solidFill>
+                    </a:lnL>
+                    <a:lnR w="720" cap="flat" cmpd="sng" algn="ctr">
+                      <a:solidFill>
+                        <a:srgbClr val="FFFFFF"/>
+                      </a:solidFill>
+                      <a:prstDash val="solid"/>
+                      <a:round/>
+                      <a:headEnd type="none" w="med" len="med"/>
+                      <a:tailEnd type="none" w="med" len="med"/>
+                    </a:lnR>
+                    <a:lnT w="720">
+                      <a:solidFill>
+                        <a:srgbClr val="FFFFFF"/>
+                      </a:solidFill>
+                    </a:lnT>
+                    <a:lnB w="720">
+                      <a:solidFill>
+                        <a:srgbClr val="FFFFFF"/>
+                      </a:solidFill>
+                    </a:lnB>
+                    <a:solidFill>
+                      <a:srgbClr val="CCCCCC"/>
+                    </a:solidFill>
+                  </a:tcPr>
+                </a:tc>
+                <a:tc>
+                  <a:txBody>
+                    <a:bodyPr/>
+                    <a:lstStyle/>
+                    <a:p>
+                      <a:pPr>
+                        <a:lnSpc>
+                          <a:spcPct val="100000"/>
+                        </a:lnSpc>
+                      </a:pPr>
+                      <a:r>
+                        <a:rPr lang="en-US" sz="1100" dirty="0"/>
+                        <a:t>&lt;</a:t>
+                      </a:r>
+                      <a:r>
+                        <a:rPr lang="en-US" sz="1100" dirty="0" err="1"/>
+                        <a:t>sos</a:t>
+                      </a:r>
+                      <a:r>
+                        <a:rPr lang="en-US" sz="1100" dirty="0"/>
+                        <a:t>&gt; a man in an orange hat staring at something &lt;</a:t>
+                      </a:r>
+                      <a:r>
+                        <a:rPr lang="en-US" sz="1100" dirty="0" err="1"/>
+                        <a:t>eos</a:t>
+                      </a:r>
+                      <a:r>
+                        <a:rPr lang="en-US" sz="1100" dirty="0"/>
+                        <a:t>&gt;</a:t>
+                      </a:r>
+                      <a:endParaRPr lang="en-US" sz="1100" b="0" strike="noStrike" spc="-1" dirty="0">
+                        <a:latin typeface="+mn-lt"/>
+                      </a:endParaRPr>
+                    </a:p>
+                  </a:txBody>
+                  <a:tcPr marL="90000" marR="90000">
+                    <a:lnL w="720">
+                      <a:solidFill>
+                        <a:srgbClr val="FFFFFF"/>
+                      </a:solidFill>
+                    </a:lnL>
+                    <a:lnR w="720">
+                      <a:solidFill>
+                        <a:srgbClr val="FFFFFF"/>
+                      </a:solidFill>
+                    </a:lnR>
+                    <a:lnT w="720">
+                      <a:solidFill>
+                        <a:srgbClr val="FFFFFF"/>
+                      </a:solidFill>
+                    </a:lnT>
+                    <a:lnB w="720">
+                      <a:solidFill>
+                        <a:srgbClr val="FFFFFF"/>
+                      </a:solidFill>
+                    </a:lnB>
+                    <a:solidFill>
+                      <a:srgbClr val="CCCCCC"/>
+                    </a:solidFill>
+                  </a:tcPr>
+                </a:tc>
+                <a:extLst>
+                  <a:ext uri="{0D108BD9-81ED-4DB2-BD59-A6C34878D82A}">
+                    <a16:rowId xmlns:a16="http://schemas.microsoft.com/office/drawing/2014/main" val="10001"/>
+                  </a:ext>
+                </a:extLst>
+              </a:tr>
+              <a:tr h="417485">
+                <a:tc>
+                  <a:txBody>
+                    <a:bodyPr/>
+                    <a:lstStyle/>
+                    <a:p>
+                      <a:r>
+                        <a:rPr lang="en-US" sz="1100" dirty="0"/>
+                        <a:t>&lt;</a:t>
+                      </a:r>
+                      <a:r>
+                        <a:rPr lang="en-US" sz="1100" dirty="0" err="1"/>
+                        <a:t>sos</a:t>
+                      </a:r>
+                      <a:r>
+                        <a:rPr lang="en-US" sz="1100" dirty="0"/>
+                        <a:t>&gt; a </a:t>
+                      </a:r>
+                      <a:r>
+                        <a:rPr lang="en-US" sz="1100" dirty="0" err="1"/>
+                        <a:t>boston</a:t>
+                      </a:r>
+                      <a:r>
+                        <a:rPr lang="en-US" sz="1100" dirty="0"/>
+                        <a:t> terrier is running on lush green grass in front of a white fence &lt;</a:t>
+                      </a:r>
+                      <a:r>
+                        <a:rPr lang="en-US" sz="1100" dirty="0" err="1"/>
+                        <a:t>eos</a:t>
+                      </a:r>
+                      <a:r>
+                        <a:rPr lang="en-US" sz="1100" dirty="0"/>
+                        <a:t>&gt;</a:t>
+                      </a:r>
+                    </a:p>
+                  </a:txBody>
+                  <a:tcPr marL="90000" marR="90000">
+                    <a:lnL w="720">
+                      <a:solidFill>
+                        <a:srgbClr val="FFFFFF"/>
+                      </a:solidFill>
+                    </a:lnL>
+                    <a:lnR w="720" cap="flat" cmpd="sng" algn="ctr">
+                      <a:solidFill>
+                        <a:srgbClr val="FFFFFF"/>
+                      </a:solidFill>
+                      <a:prstDash val="solid"/>
+                      <a:round/>
+                      <a:headEnd type="none" w="med" len="med"/>
+                      <a:tailEnd type="none" w="med" len="med"/>
+                    </a:lnR>
+                    <a:lnT w="720" cap="flat" cmpd="sng" algn="ctr">
+                      <a:solidFill>
+                        <a:srgbClr val="FFFFFF"/>
+                      </a:solidFill>
+                      <a:prstDash val="solid"/>
+                      <a:round/>
+                      <a:headEnd type="none" w="med" len="med"/>
+                      <a:tailEnd type="none" w="med" len="med"/>
+                    </a:lnT>
+                    <a:lnB w="720">
+                      <a:solidFill>
+                        <a:srgbClr val="FFFFFF"/>
+                      </a:solidFill>
+                    </a:lnB>
+                    <a:solidFill>
+                      <a:srgbClr val="E6E6E6"/>
+                    </a:solidFill>
+                  </a:tcPr>
+                </a:tc>
+                <a:tc>
+                  <a:txBody>
+                    <a:bodyPr/>
+                    <a:lstStyle/>
+                    <a:p>
+                      <a:r>
+                        <a:rPr lang="en-US" sz="1100" dirty="0"/>
+                        <a:t>&lt;</a:t>
+                      </a:r>
+                      <a:r>
+                        <a:rPr lang="en-US" sz="1100" dirty="0" err="1"/>
+                        <a:t>sos</a:t>
+                      </a:r>
+                      <a:r>
+                        <a:rPr lang="en-US" sz="1100" dirty="0"/>
+                        <a:t>&gt; a </a:t>
+                      </a:r>
+                      <a:r>
+                        <a:rPr lang="en-US" sz="1100" dirty="0" err="1"/>
+                        <a:t>boston</a:t>
+                      </a:r>
+                      <a:r>
+                        <a:rPr lang="en-US" sz="1100" dirty="0"/>
+                        <a:t> terrier is running on lush green grass in front of a white fence &lt;</a:t>
+                      </a:r>
+                      <a:r>
+                        <a:rPr lang="en-US" sz="1100" dirty="0" err="1"/>
+                        <a:t>eos</a:t>
+                      </a:r>
+                      <a:r>
+                        <a:rPr lang="en-US" sz="1100" dirty="0"/>
+                        <a:t>&gt;</a:t>
+                      </a:r>
+                    </a:p>
+                  </a:txBody>
+                  <a:tcPr marL="90000" marR="90000">
+                    <a:lnL w="720">
+                      <a:solidFill>
+                        <a:srgbClr val="FFFFFF"/>
+                      </a:solidFill>
+                    </a:lnL>
+                    <a:lnR w="720">
+                      <a:solidFill>
+                        <a:srgbClr val="FFFFFF"/>
+                      </a:solidFill>
+                    </a:lnR>
+                    <a:lnT w="720" cap="flat" cmpd="sng" algn="ctr">
+                      <a:solidFill>
+                        <a:srgbClr val="FFFFFF"/>
+                      </a:solidFill>
+                      <a:prstDash val="solid"/>
+                      <a:round/>
+                      <a:headEnd type="none" w="med" len="med"/>
+                      <a:tailEnd type="none" w="med" len="med"/>
+                    </a:lnT>
+                    <a:lnB w="720">
+                      <a:solidFill>
+                        <a:srgbClr val="FFFFFF"/>
+                      </a:solidFill>
+                    </a:lnB>
+                    <a:solidFill>
+                      <a:srgbClr val="E6E6E6"/>
+                    </a:solidFill>
+                  </a:tcPr>
+                </a:tc>
+                <a:extLst>
+                  <a:ext uri="{0D108BD9-81ED-4DB2-BD59-A6C34878D82A}">
+                    <a16:rowId xmlns:a16="http://schemas.microsoft.com/office/drawing/2014/main" val="10002"/>
+                  </a:ext>
+                </a:extLst>
+              </a:tr>
+              <a:tr h="417485">
+                <a:tc>
+                  <a:txBody>
+                    <a:bodyPr/>
+                    <a:lstStyle/>
+                    <a:p>
+                      <a:r>
+                        <a:rPr lang="en-US" sz="1100" dirty="0"/>
+                        <a:t>&lt;</a:t>
+                      </a:r>
+                      <a:r>
+                        <a:rPr lang="en-US" sz="1100" dirty="0" err="1"/>
+                        <a:t>sos</a:t>
+                      </a:r>
+                      <a:r>
+                        <a:rPr lang="en-US" sz="1100" dirty="0"/>
+                        <a:t>&gt; a girl in karate uniform breaking a stick with a front kick &lt;</a:t>
+                      </a:r>
+                      <a:r>
+                        <a:rPr lang="en-US" sz="1100" dirty="0" err="1"/>
+                        <a:t>eos</a:t>
+                      </a:r>
+                      <a:r>
+                        <a:rPr lang="en-US" sz="1100" dirty="0"/>
+                        <a:t>&gt;</a:t>
+                      </a:r>
+                    </a:p>
+                  </a:txBody>
+                  <a:tcPr marL="90000" marR="90000">
+                    <a:lnL w="720">
+                      <a:solidFill>
+                        <a:srgbClr val="FFFFFF"/>
+                      </a:solidFill>
+                    </a:lnL>
+                    <a:lnR w="720" cap="flat" cmpd="sng" algn="ctr">
+                      <a:solidFill>
+                        <a:srgbClr val="FFFFFF"/>
+                      </a:solidFill>
+                      <a:prstDash val="solid"/>
+                      <a:round/>
+                      <a:headEnd type="none" w="med" len="med"/>
+                      <a:tailEnd type="none" w="med" len="med"/>
+                    </a:lnR>
+                    <a:lnT w="720">
+                      <a:solidFill>
+                        <a:srgbClr val="FFFFFF"/>
+                      </a:solidFill>
+                    </a:lnT>
+                    <a:lnB w="720">
+                      <a:solidFill>
+                        <a:srgbClr val="FFFFFF"/>
+                      </a:solidFill>
+                    </a:lnB>
+                    <a:solidFill>
+                      <a:srgbClr val="CCCCCC"/>
+                    </a:solidFill>
+                  </a:tcPr>
+                </a:tc>
+                <a:tc>
+                  <a:txBody>
+                    <a:bodyPr/>
+                    <a:lstStyle/>
+                    <a:p>
+                      <a:r>
+                        <a:rPr lang="en-US" sz="1100" dirty="0"/>
+                        <a:t>&lt;</a:t>
+                      </a:r>
+                      <a:r>
+                        <a:rPr lang="en-US" sz="1100" dirty="0" err="1"/>
+                        <a:t>sos</a:t>
+                      </a:r>
+                      <a:r>
+                        <a:rPr lang="en-US" sz="1100" dirty="0"/>
+                        <a:t>&gt; a girl in karate uniform breaking a stick with a front kick &lt;</a:t>
+                      </a:r>
+                      <a:r>
+                        <a:rPr lang="en-US" sz="1100" dirty="0" err="1"/>
+                        <a:t>eos</a:t>
+                      </a:r>
+                      <a:r>
+                        <a:rPr lang="en-US" sz="1100" dirty="0"/>
+                        <a:t>&gt;</a:t>
+                      </a:r>
+                    </a:p>
+                  </a:txBody>
+                  <a:tcPr marL="90000" marR="90000">
+                    <a:lnL w="720">
+                      <a:solidFill>
+                        <a:srgbClr val="FFFFFF"/>
+                      </a:solidFill>
+                    </a:lnL>
+                    <a:lnR w="720">
+                      <a:solidFill>
+                        <a:srgbClr val="FFFFFF"/>
+                      </a:solidFill>
+                    </a:lnR>
+                    <a:lnT w="720">
+                      <a:solidFill>
+                        <a:srgbClr val="FFFFFF"/>
+                      </a:solidFill>
+                    </a:lnT>
+                    <a:lnB w="720">
+                      <a:solidFill>
+                        <a:srgbClr val="FFFFFF"/>
+                      </a:solidFill>
+                    </a:lnB>
+                    <a:solidFill>
+                      <a:srgbClr val="CCCCCC"/>
+                    </a:solidFill>
+                  </a:tcPr>
+                </a:tc>
+                <a:extLst>
+                  <a:ext uri="{0D108BD9-81ED-4DB2-BD59-A6C34878D82A}">
+                    <a16:rowId xmlns:a16="http://schemas.microsoft.com/office/drawing/2014/main" val="10003"/>
+                  </a:ext>
+                </a:extLst>
+              </a:tr>
+              <a:tr h="417485">
+                <a:tc>
+                  <a:txBody>
+                    <a:bodyPr/>
+                    <a:lstStyle/>
+                    <a:p>
+                      <a:r>
+                        <a:rPr lang="en-US" sz="1100" dirty="0"/>
+                        <a:t>&lt;</a:t>
+                      </a:r>
+                      <a:r>
+                        <a:rPr lang="en-US" sz="1100" dirty="0" err="1"/>
+                        <a:t>sos</a:t>
+                      </a:r>
+                      <a:r>
+                        <a:rPr lang="en-US" sz="1100" dirty="0"/>
+                        <a:t>&gt; five people wearing winter jackets and helmets stand in the snow with &lt;</a:t>
+                      </a:r>
+                      <a:r>
+                        <a:rPr lang="en-US" sz="1100" dirty="0" err="1"/>
+                        <a:t>unk</a:t>
+                      </a:r>
+                      <a:r>
+                        <a:rPr lang="en-US" sz="1100" dirty="0"/>
+                        <a:t>&gt; in the background &lt;</a:t>
+                      </a:r>
+                      <a:r>
+                        <a:rPr lang="en-US" sz="1100" dirty="0" err="1"/>
+                        <a:t>eos</a:t>
+                      </a:r>
+                      <a:r>
+                        <a:rPr lang="en-US" sz="1100" dirty="0"/>
+                        <a:t>&gt;</a:t>
+                      </a:r>
+                    </a:p>
+                  </a:txBody>
+                  <a:tcPr marL="90000" marR="90000">
+                    <a:lnL w="720">
+                      <a:solidFill>
+                        <a:srgbClr val="FFFFFF"/>
+                      </a:solidFill>
+                    </a:lnL>
+                    <a:lnR w="720" cap="flat" cmpd="sng" algn="ctr">
+                      <a:solidFill>
+                        <a:srgbClr val="FFFFFF"/>
+                      </a:solidFill>
+                      <a:prstDash val="solid"/>
+                      <a:round/>
+                      <a:headEnd type="none" w="med" len="med"/>
+                      <a:tailEnd type="none" w="med" len="med"/>
+                    </a:lnR>
+                    <a:lnT w="720">
+                      <a:solidFill>
+                        <a:srgbClr val="FFFFFF"/>
+                      </a:solidFill>
+                    </a:lnT>
+                    <a:lnB w="720">
+                      <a:solidFill>
+                        <a:srgbClr val="FFFFFF"/>
+                      </a:solidFill>
+                    </a:lnB>
+                    <a:solidFill>
+                      <a:srgbClr val="E6E6E6"/>
+                    </a:solidFill>
+                  </a:tcPr>
+                </a:tc>
+                <a:tc>
+                  <a:txBody>
+                    <a:bodyPr/>
+                    <a:lstStyle/>
+                    <a:p>
+                      <a:r>
+                        <a:rPr lang="en-US" sz="1100" dirty="0"/>
+                        <a:t>&lt;</a:t>
+                      </a:r>
+                      <a:r>
+                        <a:rPr lang="en-US" sz="1100" dirty="0" err="1"/>
+                        <a:t>sos</a:t>
+                      </a:r>
+                      <a:r>
+                        <a:rPr lang="en-US" sz="1100" dirty="0"/>
+                        <a:t>&gt; five people wearing winter jackets and helmets stand in the snow with &lt;</a:t>
+                      </a:r>
+                      <a:r>
+                        <a:rPr lang="en-US" sz="1100" dirty="0" err="1"/>
+                        <a:t>unk</a:t>
+                      </a:r>
+                      <a:r>
+                        <a:rPr lang="en-US" sz="1100" dirty="0"/>
+                        <a:t>&gt; in the background &lt;</a:t>
+                      </a:r>
+                      <a:r>
+                        <a:rPr lang="en-US" sz="1100" dirty="0" err="1"/>
+                        <a:t>eos</a:t>
+                      </a:r>
+                      <a:r>
+                        <a:rPr lang="en-US" sz="1100" dirty="0"/>
+                        <a:t>&gt;</a:t>
+                      </a:r>
+                    </a:p>
+                  </a:txBody>
+                  <a:tcPr marL="90000" marR="90000">
+                    <a:lnL w="720">
+                      <a:solidFill>
+                        <a:srgbClr val="FFFFFF"/>
+                      </a:solidFill>
+                    </a:lnL>
+                    <a:lnR w="720">
+                      <a:solidFill>
+                        <a:srgbClr val="FFFFFF"/>
+                      </a:solidFill>
+                    </a:lnR>
+                    <a:lnT w="720">
+                      <a:solidFill>
+                        <a:srgbClr val="FFFFFF"/>
+                      </a:solidFill>
+                    </a:lnT>
+                    <a:lnB w="720">
+                      <a:solidFill>
+                        <a:srgbClr val="FFFFFF"/>
+                      </a:solidFill>
+                    </a:lnB>
+                    <a:solidFill>
+                      <a:srgbClr val="E6E6E6"/>
+                    </a:solidFill>
+                  </a:tcPr>
+                </a:tc>
+                <a:extLst>
+                  <a:ext uri="{0D108BD9-81ED-4DB2-BD59-A6C34878D82A}">
+                    <a16:rowId xmlns:a16="http://schemas.microsoft.com/office/drawing/2014/main" val="10004"/>
+                  </a:ext>
+                </a:extLst>
+              </a:tr>
+              <a:tr h="387134">
+                <a:tc>
+                  <a:txBody>
+                    <a:bodyPr/>
+                    <a:lstStyle/>
+                    <a:p>
+                      <a:r>
+                        <a:rPr lang="en-US" sz="1100" dirty="0"/>
+                        <a:t>&lt;</a:t>
+                      </a:r>
+                      <a:r>
+                        <a:rPr lang="en-US" sz="1100" dirty="0" err="1"/>
+                        <a:t>sos</a:t>
+                      </a:r>
+                      <a:r>
+                        <a:rPr lang="en-US" sz="1100" dirty="0"/>
+                        <a:t>&gt; people are fixing the roof of a house &lt;</a:t>
+                      </a:r>
+                      <a:r>
+                        <a:rPr lang="en-US" sz="1100" dirty="0" err="1"/>
+                        <a:t>eos</a:t>
+                      </a:r>
+                      <a:r>
+                        <a:rPr lang="en-US" sz="1100" dirty="0"/>
+                        <a:t>&gt;</a:t>
+                      </a:r>
+                    </a:p>
+                  </a:txBody>
+                  <a:tcPr marL="90000" marR="90000">
+                    <a:lnL w="720">
+                      <a:solidFill>
+                        <a:srgbClr val="FFFFFF"/>
+                      </a:solidFill>
+                    </a:lnL>
+                    <a:lnR w="720">
+                      <a:solidFill>
+                        <a:srgbClr val="FFFFFF"/>
+                      </a:solidFill>
+                    </a:lnR>
+                    <a:lnT w="720">
+                      <a:solidFill>
+                        <a:srgbClr val="FFFFFF"/>
+                      </a:solidFill>
+                    </a:lnT>
+                    <a:lnB w="720">
+                      <a:solidFill>
+                        <a:srgbClr val="FFFFFF"/>
+                      </a:solidFill>
+                    </a:lnB>
+                    <a:solidFill>
+                      <a:srgbClr val="CCCCCC"/>
+                    </a:solidFill>
+                  </a:tcPr>
+                </a:tc>
+                <a:tc>
+                  <a:txBody>
+                    <a:bodyPr/>
+                    <a:lstStyle/>
+                    <a:p>
+                      <a:pPr marL="0" marR="0" lvl="0" indent="0" algn="l" defTabSz="914400" rtl="0" eaLnBrk="1" fontAlgn="auto" latinLnBrk="0" hangingPunct="1">
+                        <a:lnSpc>
+                          <a:spcPct val="100000"/>
+                        </a:lnSpc>
+                        <a:spcBef>
+                          <a:spcPts val="0"/>
+                        </a:spcBef>
+                        <a:spcAft>
+                          <a:spcPts val="0"/>
+                        </a:spcAft>
+                        <a:buClrTx/>
+                        <a:buSzTx/>
+                        <a:buFontTx/>
+                        <a:buNone/>
+                        <a:tabLst/>
+                        <a:defRPr/>
+                      </a:pPr>
+                      <a:r>
+                        <a:rPr lang="en-US" sz="1100" dirty="0"/>
+                        <a:t>&lt;</a:t>
+                      </a:r>
+                      <a:r>
+                        <a:rPr lang="en-US" sz="1100" dirty="0" err="1"/>
+                        <a:t>sos</a:t>
+                      </a:r>
+                      <a:r>
+                        <a:rPr lang="en-US" sz="1100" dirty="0"/>
+                        <a:t>&gt; people are fixing the roof of a house &lt;</a:t>
+                      </a:r>
+                      <a:r>
+                        <a:rPr lang="en-US" sz="1100" dirty="0" err="1"/>
+                        <a:t>eos</a:t>
+                      </a:r>
+                      <a:r>
+                        <a:rPr lang="en-US" sz="1100" dirty="0"/>
+                        <a:t>&gt;</a:t>
+                      </a:r>
+                    </a:p>
+                  </a:txBody>
+                  <a:tcPr marL="90000" marR="90000">
+                    <a:lnL w="720">
+                      <a:solidFill>
+                        <a:srgbClr val="FFFFFF"/>
+                      </a:solidFill>
+                    </a:lnL>
+                    <a:lnR w="720">
+                      <a:solidFill>
+                        <a:srgbClr val="FFFFFF"/>
+                      </a:solidFill>
+                    </a:lnR>
+                    <a:lnT w="720" cap="flat" cmpd="sng" algn="ctr">
+                      <a:solidFill>
+                        <a:srgbClr val="FFFFFF"/>
+                      </a:solidFill>
+                      <a:prstDash val="solid"/>
+                      <a:round/>
+                      <a:headEnd type="none" w="med" len="med"/>
+                      <a:tailEnd type="none" w="med" len="med"/>
+                    </a:lnT>
+                    <a:lnB w="720">
+                      <a:solidFill>
+                        <a:srgbClr val="FFFFFF"/>
+                      </a:solidFill>
+                    </a:lnB>
+                    <a:solidFill>
+                      <a:srgbClr val="CCCCCC"/>
+                    </a:solidFill>
+                  </a:tcPr>
+                </a:tc>
+                <a:extLst>
+                  <a:ext uri="{0D108BD9-81ED-4DB2-BD59-A6C34878D82A}">
+                    <a16:rowId xmlns:a16="http://schemas.microsoft.com/office/drawing/2014/main" val="10005"/>
+                  </a:ext>
+                </a:extLst>
+              </a:tr>
+              <a:tr h="417485">
+                <a:tc>
+                  <a:txBody>
+                    <a:bodyPr/>
+                    <a:lstStyle/>
+                    <a:p>
+                      <a:pPr marL="0" marR="0" lvl="0" indent="0" algn="l" defTabSz="914400" rtl="0" eaLnBrk="1" fontAlgn="auto" latinLnBrk="0" hangingPunct="1">
+                        <a:lnSpc>
+                          <a:spcPct val="100000"/>
+                        </a:lnSpc>
+                        <a:spcBef>
+                          <a:spcPts val="0"/>
+                        </a:spcBef>
+                        <a:spcAft>
+                          <a:spcPts val="0"/>
+                        </a:spcAft>
+                        <a:buClrTx/>
+                        <a:buSzTx/>
+                        <a:buFontTx/>
+                        <a:buNone/>
+                        <a:tabLst/>
+                        <a:defRPr/>
+                      </a:pPr>
+                      <a:r>
+                        <a:rPr lang="en-US" sz="1100" dirty="0"/>
+                        <a:t>&lt;</a:t>
+                      </a:r>
+                      <a:r>
+                        <a:rPr lang="en-US" sz="1100" dirty="0" err="1"/>
+                        <a:t>sos</a:t>
+                      </a:r>
+                      <a:r>
+                        <a:rPr lang="en-US" sz="1100" dirty="0"/>
+                        <a:t>&gt; a group of people standing in front of an igloo &lt;</a:t>
+                      </a:r>
+                      <a:r>
+                        <a:rPr lang="en-US" sz="1100" dirty="0" err="1"/>
+                        <a:t>eos</a:t>
+                      </a:r>
+                      <a:r>
+                        <a:rPr lang="en-US" sz="1100" dirty="0"/>
+                        <a:t>&gt;</a:t>
+                      </a:r>
+                    </a:p>
+                    <a:p>
+                      <a:endParaRPr lang="en-US" sz="1100" dirty="0"/>
+                    </a:p>
+                  </a:txBody>
+                  <a:tcPr marL="90000" marR="90000">
+                    <a:lnL w="720">
+                      <a:solidFill>
+                        <a:srgbClr val="FFFFFF"/>
+                      </a:solidFill>
+                    </a:lnL>
+                    <a:lnR w="720">
+                      <a:solidFill>
+                        <a:srgbClr val="FFFFFF"/>
+                      </a:solidFill>
+                    </a:lnR>
+                    <a:lnT w="720">
+                      <a:solidFill>
+                        <a:srgbClr val="FFFFFF"/>
+                      </a:solidFill>
+                    </a:lnT>
+                    <a:lnB w="720" cap="flat" cmpd="sng" algn="ctr">
+                      <a:solidFill>
+                        <a:srgbClr val="FFFFFF"/>
+                      </a:solidFill>
+                      <a:prstDash val="solid"/>
+                      <a:round/>
+                      <a:headEnd type="none" w="med" len="med"/>
+                      <a:tailEnd type="none" w="med" len="med"/>
+                    </a:lnB>
+                    <a:solidFill>
+                      <a:srgbClr val="E6E6E6"/>
+                    </a:solidFill>
+                  </a:tcPr>
+                </a:tc>
+                <a:tc>
+                  <a:txBody>
+                    <a:bodyPr/>
+                    <a:lstStyle/>
+                    <a:p>
+                      <a:pPr marL="0" marR="0" lvl="0" indent="0" algn="l" defTabSz="914400" rtl="0" eaLnBrk="1" fontAlgn="auto" latinLnBrk="0" hangingPunct="1">
+                        <a:lnSpc>
+                          <a:spcPct val="100000"/>
+                        </a:lnSpc>
+                        <a:spcBef>
+                          <a:spcPts val="0"/>
+                        </a:spcBef>
+                        <a:spcAft>
+                          <a:spcPts val="0"/>
+                        </a:spcAft>
+                        <a:buClrTx/>
+                        <a:buSzTx/>
+                        <a:buFontTx/>
+                        <a:buNone/>
+                        <a:tabLst/>
+                        <a:defRPr/>
+                      </a:pPr>
+                      <a:r>
+                        <a:rPr lang="en-US" sz="1100" dirty="0"/>
+                        <a:t>&lt;</a:t>
+                      </a:r>
+                      <a:r>
+                        <a:rPr lang="en-US" sz="1100" dirty="0" err="1"/>
+                        <a:t>sos</a:t>
+                      </a:r>
+                      <a:r>
+                        <a:rPr lang="en-US" sz="1100" dirty="0"/>
+                        <a:t>&gt; a group of people standing in front of an igloo &lt;</a:t>
+                      </a:r>
+                      <a:r>
+                        <a:rPr lang="en-US" sz="1100" dirty="0" err="1"/>
+                        <a:t>eos</a:t>
+                      </a:r>
+                      <a:r>
+                        <a:rPr lang="en-US" sz="1100" dirty="0"/>
+                        <a:t>&gt;</a:t>
+                      </a:r>
+                    </a:p>
+                    <a:p>
+                      <a:endParaRPr lang="en-US" sz="1100" dirty="0"/>
+                    </a:p>
+                  </a:txBody>
+                  <a:tcPr marL="90000" marR="90000">
+                    <a:lnL w="720">
+                      <a:solidFill>
+                        <a:srgbClr val="FFFFFF"/>
+                      </a:solidFill>
+                    </a:lnL>
+                    <a:lnR w="720">
+                      <a:solidFill>
+                        <a:srgbClr val="FFFFFF"/>
+                      </a:solidFill>
+                    </a:lnR>
+                    <a:lnT w="720">
+                      <a:solidFill>
+                        <a:srgbClr val="FFFFFF"/>
+                      </a:solidFill>
+                    </a:lnT>
+                    <a:lnB w="720" cap="flat" cmpd="sng" algn="ctr">
+                      <a:solidFill>
+                        <a:srgbClr val="FFFFFF"/>
+                      </a:solidFill>
+                      <a:prstDash val="solid"/>
+                      <a:round/>
+                      <a:headEnd type="none" w="med" len="med"/>
+                      <a:tailEnd type="none" w="med" len="med"/>
+                    </a:lnB>
+                    <a:solidFill>
+                      <a:srgbClr val="E6E6E6"/>
+                    </a:solidFill>
+                  </a:tcPr>
+                </a:tc>
+                <a:extLst>
+                  <a:ext uri="{0D108BD9-81ED-4DB2-BD59-A6C34878D82A}">
+                    <a16:rowId xmlns:a16="http://schemas.microsoft.com/office/drawing/2014/main" val="10006"/>
+                  </a:ext>
+                </a:extLst>
+              </a:tr>
+              <a:tr h="387134">
+                <a:tc>
+                  <a:txBody>
+                    <a:bodyPr/>
+                    <a:lstStyle/>
+                    <a:p>
+                      <a:r>
+                        <a:rPr lang="en-US" sz="1100" dirty="0"/>
+                        <a:t>&lt;</a:t>
+                      </a:r>
+                      <a:r>
+                        <a:rPr lang="en-US" sz="1100" dirty="0" err="1"/>
+                        <a:t>sos</a:t>
+                      </a:r>
+                      <a:r>
+                        <a:rPr lang="en-US" sz="1100" dirty="0"/>
+                        <a:t>&gt; a guy works on a building &lt;</a:t>
+                      </a:r>
+                      <a:r>
+                        <a:rPr lang="en-US" sz="1100" dirty="0" err="1"/>
+                        <a:t>eos</a:t>
+                      </a:r>
+                      <a:r>
+                        <a:rPr lang="en-US" sz="1100" dirty="0"/>
+                        <a:t>&gt;</a:t>
+                      </a:r>
+                    </a:p>
+                  </a:txBody>
+                  <a:tcPr marL="90000" marR="90000">
+                    <a:lnL w="720">
+                      <a:solidFill>
+                        <a:srgbClr val="FFFFFF"/>
+                      </a:solidFill>
+                    </a:lnL>
+                    <a:lnR w="720" cap="flat" cmpd="sng" algn="ctr">
+                      <a:solidFill>
+                        <a:srgbClr val="FFFFFF"/>
+                      </a:solidFill>
+                      <a:prstDash val="solid"/>
+                      <a:round/>
+                      <a:headEnd type="none" w="med" len="med"/>
+                      <a:tailEnd type="none" w="med" len="med"/>
+                    </a:lnR>
+                    <a:lnT w="720">
+                      <a:solidFill>
+                        <a:srgbClr val="FFFFFF"/>
+                      </a:solidFill>
+                    </a:lnT>
+                    <a:lnB w="720">
+                      <a:solidFill>
+                        <a:srgbClr val="FFFFFF"/>
+                      </a:solidFill>
+                    </a:lnB>
+                    <a:solidFill>
+                      <a:srgbClr val="CCCCCC"/>
+                    </a:solidFill>
+                  </a:tcPr>
+                </a:tc>
+                <a:tc>
+                  <a:txBody>
+                    <a:bodyPr/>
+                    <a:lstStyle/>
+                    <a:p>
+                      <a:r>
+                        <a:rPr lang="en-US" sz="1100" dirty="0"/>
+                        <a:t>&lt;</a:t>
+                      </a:r>
+                      <a:r>
+                        <a:rPr lang="en-US" sz="1100" dirty="0" err="1"/>
+                        <a:t>sos</a:t>
+                      </a:r>
+                      <a:r>
+                        <a:rPr lang="en-US" sz="1100" dirty="0"/>
+                        <a:t>&gt; a guy works on a building &lt;</a:t>
+                      </a:r>
+                      <a:r>
+                        <a:rPr lang="en-US" sz="1100" dirty="0" err="1"/>
+                        <a:t>eos</a:t>
+                      </a:r>
+                      <a:r>
+                        <a:rPr lang="en-US" sz="1100" dirty="0"/>
+                        <a:t>&gt;</a:t>
+                      </a:r>
+                    </a:p>
+                  </a:txBody>
+                  <a:tcPr marL="90000" marR="90000">
+                    <a:lnL w="720" cap="flat" cmpd="sng" algn="ctr">
+                      <a:solidFill>
+                        <a:srgbClr val="FFFFFF"/>
+                      </a:solidFill>
+                      <a:prstDash val="solid"/>
+                      <a:round/>
+                      <a:headEnd type="none" w="med" len="med"/>
+                      <a:tailEnd type="none" w="med" len="med"/>
+                    </a:lnL>
+                    <a:lnR w="720">
+                      <a:solidFill>
+                        <a:srgbClr val="FFFFFF"/>
+                      </a:solidFill>
+                    </a:lnR>
+                    <a:lnT w="720">
+                      <a:solidFill>
+                        <a:srgbClr val="FFFFFF"/>
+                      </a:solidFill>
+                    </a:lnT>
+                    <a:lnB w="720">
+                      <a:solidFill>
+                        <a:srgbClr val="FFFFFF"/>
+                      </a:solidFill>
+                    </a:lnB>
+                    <a:solidFill>
+                      <a:srgbClr val="CCCCCC"/>
+                    </a:solidFill>
+                  </a:tcPr>
+                </a:tc>
+                <a:extLst>
+                  <a:ext uri="{0D108BD9-81ED-4DB2-BD59-A6C34878D82A}">
+                    <a16:rowId xmlns:a16="http://schemas.microsoft.com/office/drawing/2014/main" val="10007"/>
+                  </a:ext>
+                </a:extLst>
+              </a:tr>
+              <a:tr h="417485">
+                <a:tc>
+                  <a:txBody>
+                    <a:bodyPr/>
+                    <a:lstStyle/>
+                    <a:p>
+                      <a:r>
+                        <a:rPr lang="en-US" sz="1100" dirty="0"/>
+                        <a:t>&lt;</a:t>
+                      </a:r>
+                      <a:r>
+                        <a:rPr lang="en-US" sz="1100" dirty="0" err="1"/>
+                        <a:t>sos</a:t>
+                      </a:r>
+                      <a:r>
+                        <a:rPr lang="en-US" sz="1100" dirty="0"/>
+                        <a:t>&gt; a man in a vest is sitting in a chair and holding magazines &lt;</a:t>
+                      </a:r>
+                      <a:r>
+                        <a:rPr lang="en-US" sz="1100" dirty="0" err="1"/>
+                        <a:t>eos</a:t>
+                      </a:r>
+                      <a:r>
+                        <a:rPr lang="en-US" sz="1100" dirty="0"/>
+                        <a:t>&gt;</a:t>
+                      </a:r>
+                    </a:p>
+                  </a:txBody>
+                  <a:tcPr marL="90000" marR="90000">
+                    <a:lnL w="720">
+                      <a:solidFill>
+                        <a:srgbClr val="FFFFFF"/>
+                      </a:solidFill>
+                    </a:lnL>
+                    <a:lnR w="720" cap="flat" cmpd="sng" algn="ctr">
+                      <a:solidFill>
+                        <a:srgbClr val="FFFFFF"/>
+                      </a:solidFill>
+                      <a:prstDash val="solid"/>
+                      <a:round/>
+                      <a:headEnd type="none" w="med" len="med"/>
+                      <a:tailEnd type="none" w="med" len="med"/>
+                    </a:lnR>
+                    <a:lnT w="720">
+                      <a:solidFill>
+                        <a:srgbClr val="FFFFFF"/>
+                      </a:solidFill>
+                    </a:lnT>
+                    <a:lnB w="720">
+                      <a:solidFill>
+                        <a:srgbClr val="FFFFFF"/>
+                      </a:solidFill>
+                    </a:lnB>
+                    <a:solidFill>
+                      <a:srgbClr val="E6E6E6"/>
+                    </a:solidFill>
+                  </a:tcPr>
+                </a:tc>
+                <a:tc>
+                  <a:txBody>
+                    <a:bodyPr/>
+                    <a:lstStyle/>
+                    <a:p>
+                      <a:r>
+                        <a:rPr lang="en-US" sz="1100" dirty="0"/>
+                        <a:t>&lt;</a:t>
+                      </a:r>
+                      <a:r>
+                        <a:rPr lang="en-US" sz="1100" dirty="0" err="1"/>
+                        <a:t>sos</a:t>
+                      </a:r>
+                      <a:r>
+                        <a:rPr lang="en-US" sz="1100" dirty="0"/>
+                        <a:t>&gt; a man in a vest is sitting in a chair and holding magazines &lt;</a:t>
+                      </a:r>
+                      <a:r>
+                        <a:rPr lang="en-US" sz="1100" dirty="0" err="1"/>
+                        <a:t>eos</a:t>
+                      </a:r>
+                      <a:r>
+                        <a:rPr lang="en-US" sz="1100" dirty="0"/>
+                        <a:t>&gt;</a:t>
+                      </a:r>
+                    </a:p>
+                  </a:txBody>
+                  <a:tcPr marL="90000" marR="90000">
+                    <a:lnL w="720" cap="flat" cmpd="sng" algn="ctr">
+                      <a:solidFill>
+                        <a:srgbClr val="FFFFFF"/>
+                      </a:solidFill>
+                      <a:prstDash val="solid"/>
+                      <a:round/>
+                      <a:headEnd type="none" w="med" len="med"/>
+                      <a:tailEnd type="none" w="med" len="med"/>
+                    </a:lnL>
+                    <a:lnR w="720">
+                      <a:solidFill>
+                        <a:srgbClr val="FFFFFF"/>
+                      </a:solidFill>
+                    </a:lnR>
+                    <a:lnT w="720">
+                      <a:solidFill>
+                        <a:srgbClr val="FFFFFF"/>
+                      </a:solidFill>
+                    </a:lnT>
+                    <a:lnB w="720">
+                      <a:solidFill>
+                        <a:srgbClr val="FFFFFF"/>
+                      </a:solidFill>
+                    </a:lnB>
+                    <a:solidFill>
+                      <a:srgbClr val="E6E6E6"/>
+                    </a:solidFill>
+                  </a:tcPr>
+                </a:tc>
+                <a:extLst>
+                  <a:ext uri="{0D108BD9-81ED-4DB2-BD59-A6C34878D82A}">
+                    <a16:rowId xmlns:a16="http://schemas.microsoft.com/office/drawing/2014/main" val="10008"/>
+                  </a:ext>
+                </a:extLst>
+              </a:tr>
+              <a:tr h="417485">
+                <a:tc>
+                  <a:txBody>
+                    <a:bodyPr/>
+                    <a:lstStyle/>
+                    <a:p>
+                      <a:r>
+                        <a:rPr lang="en-US" sz="1100" dirty="0"/>
+                        <a:t>&lt;</a:t>
+                      </a:r>
+                      <a:r>
+                        <a:rPr lang="en-US" sz="1100" dirty="0" err="1"/>
+                        <a:t>sos</a:t>
+                      </a:r>
+                      <a:r>
+                        <a:rPr lang="en-US" sz="1100" dirty="0"/>
+                        <a:t>&gt; a mother and her young son enjoying a beautiful day outside &lt;</a:t>
+                      </a:r>
+                      <a:r>
+                        <a:rPr lang="en-US" sz="1100" dirty="0" err="1"/>
+                        <a:t>eos</a:t>
+                      </a:r>
+                      <a:r>
+                        <a:rPr lang="en-US" sz="1100" dirty="0"/>
+                        <a:t>&gt;</a:t>
+                      </a:r>
+                    </a:p>
+                  </a:txBody>
+                  <a:tcPr marL="90000" marR="90000">
+                    <a:lnL w="720">
+                      <a:solidFill>
+                        <a:srgbClr val="FFFFFF"/>
+                      </a:solidFill>
+                    </a:lnL>
+                    <a:lnR w="720" cap="flat" cmpd="sng" algn="ctr">
+                      <a:solidFill>
+                        <a:srgbClr val="FFFFFF"/>
+                      </a:solidFill>
+                      <a:prstDash val="solid"/>
+                      <a:round/>
+                      <a:headEnd type="none" w="med" len="med"/>
+                      <a:tailEnd type="none" w="med" len="med"/>
+                    </a:lnR>
+                    <a:lnT w="720">
+                      <a:solidFill>
+                        <a:srgbClr val="FFFFFF"/>
+                      </a:solidFill>
+                    </a:lnT>
+                    <a:lnB w="720">
+                      <a:solidFill>
+                        <a:srgbClr val="FFFFFF"/>
+                      </a:solidFill>
+                    </a:lnB>
+                    <a:solidFill>
+                      <a:srgbClr val="CCCCCC"/>
+                    </a:solidFill>
+                  </a:tcPr>
+                </a:tc>
+                <a:tc>
+                  <a:txBody>
+                    <a:bodyPr/>
+                    <a:lstStyle/>
+                    <a:p>
+                      <a:r>
+                        <a:rPr lang="en-US" sz="1100" dirty="0"/>
+                        <a:t>&lt;</a:t>
+                      </a:r>
+                      <a:r>
+                        <a:rPr lang="en-US" sz="1100" dirty="0" err="1"/>
+                        <a:t>sos</a:t>
+                      </a:r>
+                      <a:r>
+                        <a:rPr lang="en-US" sz="1100" dirty="0"/>
+                        <a:t>&gt; a mother and her young son enjoying a beautiful day outside &lt;</a:t>
+                      </a:r>
+                      <a:r>
+                        <a:rPr lang="en-US" sz="1100" dirty="0" err="1"/>
+                        <a:t>eos</a:t>
+                      </a:r>
+                      <a:r>
+                        <a:rPr lang="en-US" sz="1100" dirty="0"/>
+                        <a:t>&gt;</a:t>
+                      </a:r>
+                    </a:p>
+                  </a:txBody>
+                  <a:tcPr marL="90000" marR="90000">
+                    <a:lnL w="720" cap="flat" cmpd="sng" algn="ctr">
+                      <a:solidFill>
+                        <a:srgbClr val="FFFFFF"/>
+                      </a:solidFill>
+                      <a:prstDash val="solid"/>
+                      <a:round/>
+                      <a:headEnd type="none" w="med" len="med"/>
+                      <a:tailEnd type="none" w="med" len="med"/>
+                    </a:lnL>
+                    <a:lnR w="720">
+                      <a:solidFill>
+                        <a:srgbClr val="FFFFFF"/>
+                      </a:solidFill>
+                    </a:lnR>
+                    <a:lnT w="720">
+                      <a:solidFill>
+                        <a:srgbClr val="FFFFFF"/>
+                      </a:solidFill>
+                    </a:lnT>
+                    <a:lnB w="720">
+                      <a:solidFill>
+                        <a:srgbClr val="FFFFFF"/>
+                      </a:solidFill>
+                    </a:lnB>
+                    <a:solidFill>
+                      <a:srgbClr val="CCCCCC"/>
+                    </a:solidFill>
+                  </a:tcPr>
+                </a:tc>
+                <a:extLst>
+                  <a:ext uri="{0D108BD9-81ED-4DB2-BD59-A6C34878D82A}">
+                    <a16:rowId xmlns:a16="http://schemas.microsoft.com/office/drawing/2014/main" val="10009"/>
+                  </a:ext>
+                </a:extLst>
+              </a:tr>
+            </a:tbl>
+          </a:graphicData>
+        </a:graphic>
+      </p:graphicFrame>
     </p:spTree>
   </p:cSld>
   <p:clrMapOvr>
@@ -10410,6 +11616,722 @@
               </a:solidFill>
               <a:latin typeface="Arial"/>
             </a:endParaRPr>
+          </a:p>
+        </p:txBody>
+      </p:sp>
+      <p:sp>
+        <p:nvSpPr>
+          <p:cNvPr id="2" name="TextBox 1">
+            <a:extLst>
+              <a:ext uri="{FF2B5EF4-FFF2-40B4-BE49-F238E27FC236}">
+                <a16:creationId xmlns:a16="http://schemas.microsoft.com/office/drawing/2014/main" id="{0551CB68-773B-CE93-A1D8-DC5F83DBFEF7}"/>
+              </a:ext>
+            </a:extLst>
+          </p:cNvPr>
+          <p:cNvSpPr txBox="1"/>
+          <p:nvPr/>
+        </p:nvSpPr>
+        <p:spPr>
+          <a:xfrm>
+            <a:off x="344159" y="1241669"/>
+            <a:ext cx="8024117" cy="4068999"/>
+          </a:xfrm>
+          <a:prstGeom prst="rect">
+            <a:avLst/>
+          </a:prstGeom>
+          <a:noFill/>
+        </p:spPr>
+        <p:txBody>
+          <a:bodyPr wrap="square" rtlCol="0">
+            <a:spAutoFit/>
+          </a:bodyPr>
+          <a:lstStyle/>
+          <a:p>
+            <a:pPr>
+              <a:lnSpc>
+                <a:spcPts val="2400"/>
+              </a:lnSpc>
+            </a:pPr>
+            <a:r>
+              <a:rPr lang="en-US" altLang="zh-CN" dirty="0"/>
+              <a:t>Quantitative</a:t>
+            </a:r>
+            <a:r>
+              <a:rPr lang="zh-CN" altLang="en-US" dirty="0"/>
+              <a:t> </a:t>
+            </a:r>
+            <a:r>
+              <a:rPr lang="en-US" altLang="zh-CN" dirty="0"/>
+              <a:t>Comparison</a:t>
+            </a:r>
+            <a:r>
+              <a:rPr lang="zh-CN" altLang="en-US" dirty="0"/>
+              <a:t> </a:t>
+            </a:r>
+            <a:r>
+              <a:rPr lang="en-US" altLang="zh-CN" dirty="0"/>
+              <a:t>(validation/perplexity/loss):</a:t>
+            </a:r>
+            <a:r>
+              <a:rPr lang="zh-CN" altLang="en-US" dirty="0"/>
+              <a:t> </a:t>
+            </a:r>
+            <a:endParaRPr lang="en-US" altLang="zh-CN" dirty="0"/>
+          </a:p>
+          <a:p>
+            <a:pPr marL="285750" indent="-285750">
+              <a:lnSpc>
+                <a:spcPts val="2400"/>
+              </a:lnSpc>
+              <a:buFontTx/>
+              <a:buChar char="-"/>
+            </a:pPr>
+            <a:r>
+              <a:rPr lang="en-US" altLang="zh-CN" dirty="0"/>
+              <a:t>Encoder</a:t>
+            </a:r>
+            <a:r>
+              <a:rPr lang="zh-CN" altLang="en-US" dirty="0"/>
+              <a:t> </a:t>
+            </a:r>
+            <a:r>
+              <a:rPr lang="en-US" altLang="zh-CN" dirty="0"/>
+              <a:t>only</a:t>
+            </a:r>
+            <a:r>
+              <a:rPr lang="zh-CN" altLang="en-US" dirty="0"/>
+              <a:t> </a:t>
+            </a:r>
+            <a:r>
+              <a:rPr lang="en-US" altLang="zh-CN" dirty="0"/>
+              <a:t>transformer</a:t>
+            </a:r>
+            <a:r>
+              <a:rPr lang="zh-CN" altLang="en-US" dirty="0"/>
+              <a:t> </a:t>
+            </a:r>
+            <a:r>
+              <a:rPr lang="en-US" altLang="zh-CN" dirty="0"/>
+              <a:t>is</a:t>
+            </a:r>
+            <a:r>
+              <a:rPr lang="zh-CN" altLang="en-US" dirty="0"/>
+              <a:t> </a:t>
+            </a:r>
+            <a:r>
+              <a:rPr lang="en-US" altLang="zh-CN" dirty="0"/>
+              <a:t>of</a:t>
+            </a:r>
+            <a:r>
+              <a:rPr lang="zh-CN" altLang="en-US" dirty="0"/>
+              <a:t> </a:t>
+            </a:r>
+            <a:r>
+              <a:rPr lang="en-US" altLang="zh-CN" dirty="0"/>
+              <a:t>21.89</a:t>
+            </a:r>
+            <a:r>
+              <a:rPr lang="zh-CN" altLang="en-US" dirty="0"/>
+              <a:t> </a:t>
+            </a:r>
+            <a:r>
+              <a:rPr lang="en-US" altLang="zh-CN" dirty="0"/>
+              <a:t>validation</a:t>
+            </a:r>
+            <a:r>
+              <a:rPr lang="zh-CN" altLang="en-US" dirty="0"/>
+              <a:t> </a:t>
+            </a:r>
+            <a:r>
+              <a:rPr lang="en-US" altLang="zh-CN" dirty="0"/>
+              <a:t>perplexity</a:t>
+            </a:r>
+            <a:r>
+              <a:rPr lang="zh-CN" altLang="en-US" dirty="0"/>
+              <a:t> </a:t>
+            </a:r>
+            <a:r>
+              <a:rPr lang="en-US" altLang="zh-CN" dirty="0"/>
+              <a:t>while</a:t>
+            </a:r>
+            <a:r>
+              <a:rPr lang="zh-CN" altLang="en-US" dirty="0"/>
+              <a:t> </a:t>
+            </a:r>
+            <a:r>
+              <a:rPr lang="en-US" altLang="zh-CN" dirty="0"/>
+              <a:t>the</a:t>
+            </a:r>
+            <a:r>
+              <a:rPr lang="zh-CN" altLang="en-US" dirty="0"/>
+              <a:t> </a:t>
+            </a:r>
+            <a:r>
+              <a:rPr lang="en-US" altLang="zh-CN" dirty="0"/>
+              <a:t>full</a:t>
+            </a:r>
+            <a:r>
+              <a:rPr lang="zh-CN" altLang="en-US" dirty="0"/>
+              <a:t> </a:t>
+            </a:r>
+            <a:r>
+              <a:rPr lang="en-US" altLang="zh-CN" dirty="0"/>
+              <a:t>transformer</a:t>
+            </a:r>
+            <a:r>
+              <a:rPr lang="zh-CN" altLang="en-US" dirty="0"/>
+              <a:t> </a:t>
+            </a:r>
+            <a:r>
+              <a:rPr lang="en-US" altLang="zh-CN" dirty="0"/>
+              <a:t>is</a:t>
+            </a:r>
+            <a:r>
+              <a:rPr lang="zh-CN" altLang="en-US" dirty="0"/>
+              <a:t> </a:t>
+            </a:r>
+            <a:r>
+              <a:rPr lang="en-US" altLang="zh-CN" dirty="0"/>
+              <a:t>of</a:t>
+            </a:r>
+            <a:r>
+              <a:rPr lang="zh-CN" altLang="en-US" dirty="0"/>
+              <a:t> </a:t>
+            </a:r>
+            <a:r>
+              <a:rPr lang="en-US" altLang="zh-CN" dirty="0"/>
+              <a:t>6.36</a:t>
+            </a:r>
+            <a:r>
+              <a:rPr lang="zh-CN" altLang="en-US" dirty="0"/>
+              <a:t> </a:t>
+            </a:r>
+            <a:r>
+              <a:rPr lang="en-US" altLang="zh-CN" dirty="0"/>
+              <a:t>of</a:t>
+            </a:r>
+            <a:r>
+              <a:rPr lang="zh-CN" altLang="en-US" dirty="0"/>
+              <a:t> </a:t>
+            </a:r>
+            <a:r>
+              <a:rPr lang="en-US" altLang="zh-CN" dirty="0"/>
+              <a:t>it.</a:t>
+            </a:r>
+          </a:p>
+          <a:p>
+            <a:pPr marL="285750" indent="-285750">
+              <a:lnSpc>
+                <a:spcPts val="2400"/>
+              </a:lnSpc>
+              <a:buFontTx/>
+              <a:buChar char="-"/>
+            </a:pPr>
+            <a:r>
+              <a:rPr lang="zh-CN" altLang="en-US" dirty="0"/>
+              <a:t> </a:t>
+            </a:r>
+            <a:r>
+              <a:rPr lang="en-US" altLang="zh-CN" dirty="0"/>
+              <a:t>Encoder</a:t>
+            </a:r>
+            <a:r>
+              <a:rPr lang="zh-CN" altLang="en-US" dirty="0"/>
+              <a:t> </a:t>
+            </a:r>
+            <a:r>
+              <a:rPr lang="en-US" altLang="zh-CN" dirty="0"/>
+              <a:t>only</a:t>
+            </a:r>
+            <a:r>
+              <a:rPr lang="zh-CN" altLang="en-US" dirty="0"/>
+              <a:t> </a:t>
+            </a:r>
+            <a:r>
+              <a:rPr lang="en-US" altLang="zh-CN" dirty="0"/>
+              <a:t>transformer</a:t>
+            </a:r>
+            <a:r>
+              <a:rPr lang="zh-CN" altLang="en-US" dirty="0"/>
+              <a:t> </a:t>
+            </a:r>
+            <a:r>
+              <a:rPr lang="en-US" altLang="zh-CN" dirty="0"/>
+              <a:t>misses</a:t>
+            </a:r>
+            <a:r>
+              <a:rPr lang="zh-CN" altLang="en-US" dirty="0"/>
+              <a:t> </a:t>
+            </a:r>
+            <a:r>
+              <a:rPr lang="en-US" altLang="zh-CN" dirty="0"/>
+              <a:t>words</a:t>
+            </a:r>
+            <a:r>
+              <a:rPr lang="zh-CN" altLang="en-US" dirty="0"/>
+              <a:t> </a:t>
+            </a:r>
+            <a:r>
+              <a:rPr lang="en-US" altLang="zh-CN" dirty="0"/>
+              <a:t>or</a:t>
+            </a:r>
+            <a:r>
+              <a:rPr lang="zh-CN" altLang="en-US" dirty="0"/>
+              <a:t> </a:t>
+            </a:r>
+            <a:r>
+              <a:rPr lang="en-US" altLang="zh-CN" dirty="0"/>
+              <a:t>their</a:t>
+            </a:r>
+            <a:r>
+              <a:rPr lang="zh-CN" altLang="en-US" dirty="0"/>
+              <a:t> </a:t>
+            </a:r>
+            <a:r>
+              <a:rPr lang="en-US" altLang="zh-CN" dirty="0"/>
+              <a:t>order</a:t>
+            </a:r>
+            <a:r>
+              <a:rPr lang="zh-CN" altLang="en-US" dirty="0"/>
+              <a:t> </a:t>
+            </a:r>
+            <a:r>
+              <a:rPr lang="en-US" altLang="zh-CN" dirty="0"/>
+              <a:t>sometimes,</a:t>
+            </a:r>
+            <a:r>
+              <a:rPr lang="zh-CN" altLang="en-US" dirty="0"/>
+              <a:t> </a:t>
+            </a:r>
+            <a:r>
+              <a:rPr lang="en-US" altLang="zh-CN" dirty="0"/>
+              <a:t>whereas</a:t>
+            </a:r>
+            <a:r>
+              <a:rPr lang="zh-CN" altLang="en-US" dirty="0"/>
+              <a:t> </a:t>
+            </a:r>
+            <a:r>
+              <a:rPr lang="en-US" altLang="zh-CN" dirty="0"/>
+              <a:t>the</a:t>
+            </a:r>
+            <a:r>
+              <a:rPr lang="zh-CN" altLang="en-US" dirty="0"/>
+              <a:t> </a:t>
+            </a:r>
+            <a:r>
+              <a:rPr lang="en-US" altLang="zh-CN" dirty="0"/>
+              <a:t>full</a:t>
+            </a:r>
+            <a:r>
+              <a:rPr lang="zh-CN" altLang="en-US" dirty="0"/>
+              <a:t> </a:t>
+            </a:r>
+            <a:r>
+              <a:rPr lang="en-US" altLang="zh-CN" dirty="0"/>
+              <a:t>transformer</a:t>
+            </a:r>
+            <a:r>
+              <a:rPr lang="zh-CN" altLang="en-US" dirty="0"/>
+              <a:t> </a:t>
+            </a:r>
+            <a:r>
+              <a:rPr lang="en-US" altLang="zh-CN" dirty="0"/>
+              <a:t>can</a:t>
+            </a:r>
+            <a:r>
+              <a:rPr lang="zh-CN" altLang="en-US" dirty="0"/>
+              <a:t> </a:t>
+            </a:r>
+            <a:r>
+              <a:rPr lang="en-US" altLang="zh-CN" dirty="0"/>
+              <a:t>execute</a:t>
+            </a:r>
+            <a:r>
+              <a:rPr lang="zh-CN" altLang="en-US" dirty="0"/>
+              <a:t> </a:t>
+            </a:r>
+            <a:r>
+              <a:rPr lang="en-US" altLang="zh-CN" dirty="0"/>
+              <a:t>the</a:t>
+            </a:r>
+            <a:r>
+              <a:rPr lang="zh-CN" altLang="en-US" dirty="0"/>
+              <a:t> </a:t>
+            </a:r>
+            <a:r>
+              <a:rPr lang="en-US" altLang="zh-CN" dirty="0"/>
+              <a:t>sentences</a:t>
+            </a:r>
+            <a:r>
+              <a:rPr lang="zh-CN" altLang="en-US" dirty="0"/>
+              <a:t> </a:t>
+            </a:r>
+            <a:r>
+              <a:rPr lang="en-US" altLang="zh-CN" dirty="0" err="1"/>
+              <a:t>gramatically</a:t>
+            </a:r>
+            <a:r>
+              <a:rPr lang="zh-CN" altLang="en-US" dirty="0"/>
+              <a:t> </a:t>
+            </a:r>
+            <a:r>
+              <a:rPr lang="en-US" altLang="zh-CN" dirty="0"/>
+              <a:t>correct</a:t>
+            </a:r>
+            <a:r>
+              <a:rPr lang="zh-CN" altLang="en-US" dirty="0"/>
+              <a:t> </a:t>
+            </a:r>
+            <a:r>
+              <a:rPr lang="en-US" altLang="zh-CN" dirty="0"/>
+              <a:t>and</a:t>
+            </a:r>
+            <a:r>
+              <a:rPr lang="zh-CN" altLang="en-US" dirty="0"/>
+              <a:t> </a:t>
+            </a:r>
+            <a:r>
+              <a:rPr lang="en-US" altLang="zh-CN" dirty="0"/>
+              <a:t>better</a:t>
+            </a:r>
+            <a:r>
+              <a:rPr lang="zh-CN" altLang="en-US" dirty="0"/>
+              <a:t> </a:t>
+            </a:r>
+            <a:r>
+              <a:rPr lang="en-US" altLang="zh-CN" dirty="0"/>
+              <a:t>preserve</a:t>
+            </a:r>
+            <a:r>
+              <a:rPr lang="zh-CN" altLang="en-US" dirty="0"/>
+              <a:t> </a:t>
+            </a:r>
+            <a:r>
+              <a:rPr lang="en-US" altLang="zh-CN" dirty="0"/>
+              <a:t>meaning</a:t>
+            </a:r>
+          </a:p>
+          <a:p>
+            <a:pPr marL="742950" lvl="1" indent="-285750">
+              <a:lnSpc>
+                <a:spcPts val="2400"/>
+              </a:lnSpc>
+              <a:buFontTx/>
+              <a:buChar char="-"/>
+            </a:pPr>
+            <a:endParaRPr lang="en-US" altLang="zh-CN" dirty="0"/>
+          </a:p>
+          <a:p>
+            <a:pPr>
+              <a:lnSpc>
+                <a:spcPts val="2400"/>
+              </a:lnSpc>
+            </a:pPr>
+            <a:r>
+              <a:rPr lang="en-US" altLang="zh-CN" dirty="0"/>
+              <a:t>Why:</a:t>
+            </a:r>
+          </a:p>
+          <a:p>
+            <a:pPr marL="285750" indent="-285750">
+              <a:lnSpc>
+                <a:spcPts val="2400"/>
+              </a:lnSpc>
+              <a:buFontTx/>
+              <a:buChar char="-"/>
+            </a:pPr>
+            <a:r>
+              <a:rPr lang="en-US" altLang="zh-CN" dirty="0"/>
+              <a:t>Full</a:t>
+            </a:r>
+            <a:r>
+              <a:rPr lang="zh-CN" altLang="en-US" dirty="0"/>
+              <a:t> </a:t>
+            </a:r>
+            <a:r>
+              <a:rPr lang="en-US" altLang="zh-CN" dirty="0"/>
+              <a:t>transformer</a:t>
+            </a:r>
+            <a:r>
+              <a:rPr lang="zh-CN" altLang="en-US" dirty="0"/>
+              <a:t> </a:t>
+            </a:r>
+            <a:r>
+              <a:rPr lang="en-US" altLang="zh-CN" dirty="0"/>
+              <a:t>uses</a:t>
+            </a:r>
+            <a:r>
+              <a:rPr lang="zh-CN" altLang="en-US" dirty="0"/>
+              <a:t> </a:t>
+            </a:r>
+            <a:r>
+              <a:rPr lang="en-US" altLang="zh-CN" dirty="0"/>
+              <a:t>both</a:t>
+            </a:r>
+            <a:r>
+              <a:rPr lang="zh-CN" altLang="en-US" dirty="0"/>
+              <a:t> </a:t>
+            </a:r>
+            <a:r>
+              <a:rPr lang="en-US" altLang="zh-CN" dirty="0"/>
+              <a:t>encoder,</a:t>
+            </a:r>
+            <a:r>
+              <a:rPr lang="zh-CN" altLang="en-US" dirty="0"/>
+              <a:t> </a:t>
+            </a:r>
+            <a:r>
+              <a:rPr lang="en-US" altLang="zh-CN" dirty="0"/>
+              <a:t>decoder</a:t>
+            </a:r>
+            <a:r>
+              <a:rPr lang="zh-CN" altLang="en-US" dirty="0"/>
+              <a:t> </a:t>
+            </a:r>
+            <a:r>
+              <a:rPr lang="en-US" altLang="zh-CN" dirty="0"/>
+              <a:t>with</a:t>
+            </a:r>
+            <a:r>
+              <a:rPr lang="zh-CN" altLang="en-US" dirty="0"/>
+              <a:t> </a:t>
+            </a:r>
+            <a:r>
+              <a:rPr lang="en-US" altLang="zh-CN" dirty="0"/>
+              <a:t>attentions</a:t>
+            </a:r>
+            <a:r>
+              <a:rPr lang="zh-CN" altLang="en-US" dirty="0"/>
+              <a:t> </a:t>
+            </a:r>
+            <a:r>
+              <a:rPr lang="en-US" altLang="zh-CN" dirty="0"/>
+              <a:t>that</a:t>
+            </a:r>
+            <a:r>
+              <a:rPr lang="zh-CN" altLang="en-US" dirty="0"/>
+              <a:t> </a:t>
+            </a:r>
+            <a:r>
+              <a:rPr lang="en-US" altLang="zh-CN" dirty="0"/>
+              <a:t>allows</a:t>
+            </a:r>
+            <a:r>
+              <a:rPr lang="zh-CN" altLang="en-US" dirty="0"/>
+              <a:t> </a:t>
+            </a:r>
+            <a:r>
+              <a:rPr lang="en-US" altLang="zh-CN" dirty="0"/>
+              <a:t>every</a:t>
+            </a:r>
+            <a:r>
+              <a:rPr lang="zh-CN" altLang="en-US" dirty="0"/>
+              <a:t> </a:t>
+            </a:r>
+            <a:r>
+              <a:rPr lang="en-US" altLang="zh-CN" dirty="0"/>
+              <a:t>token</a:t>
+            </a:r>
+            <a:r>
+              <a:rPr lang="zh-CN" altLang="en-US" dirty="0"/>
+              <a:t> </a:t>
+            </a:r>
+            <a:r>
+              <a:rPr lang="en-US" altLang="zh-CN" dirty="0"/>
+              <a:t>to</a:t>
+            </a:r>
+            <a:r>
+              <a:rPr lang="zh-CN" altLang="en-US" dirty="0"/>
+              <a:t> </a:t>
+            </a:r>
+            <a:r>
+              <a:rPr lang="en-US" altLang="zh-CN" dirty="0"/>
+              <a:t>attend</a:t>
+            </a:r>
+            <a:r>
+              <a:rPr lang="zh-CN" altLang="en-US" dirty="0"/>
+              <a:t> </a:t>
+            </a:r>
+            <a:r>
+              <a:rPr lang="en-US" altLang="zh-CN" dirty="0"/>
+              <a:t>the</a:t>
+            </a:r>
+            <a:r>
+              <a:rPr lang="zh-CN" altLang="en-US" dirty="0"/>
+              <a:t> </a:t>
+            </a:r>
+            <a:r>
+              <a:rPr lang="en-US" altLang="zh-CN" dirty="0"/>
+              <a:t>full</a:t>
+            </a:r>
+            <a:r>
+              <a:rPr lang="zh-CN" altLang="en-US" dirty="0"/>
+              <a:t> </a:t>
+            </a:r>
+            <a:r>
+              <a:rPr lang="en-US" altLang="zh-CN" dirty="0"/>
+              <a:t>sequence</a:t>
+            </a:r>
+            <a:r>
+              <a:rPr lang="zh-CN" altLang="en-US" dirty="0"/>
+              <a:t> </a:t>
+            </a:r>
+            <a:r>
+              <a:rPr lang="en-US" altLang="zh-CN" dirty="0"/>
+              <a:t>source</a:t>
+            </a:r>
+            <a:r>
+              <a:rPr lang="zh-CN" altLang="en-US" dirty="0"/>
+              <a:t> </a:t>
+            </a:r>
+            <a:r>
+              <a:rPr lang="en-US" altLang="zh-CN" dirty="0"/>
+              <a:t>while</a:t>
+            </a:r>
+            <a:r>
+              <a:rPr lang="zh-CN" altLang="en-US" dirty="0"/>
+              <a:t> </a:t>
+            </a:r>
+            <a:r>
+              <a:rPr lang="en-US" altLang="zh-CN" dirty="0"/>
+              <a:t>decoding.</a:t>
+            </a:r>
+          </a:p>
+          <a:p>
+            <a:pPr marL="285750" indent="-285750">
+              <a:lnSpc>
+                <a:spcPts val="2400"/>
+              </a:lnSpc>
+              <a:buFontTx/>
+              <a:buChar char="-"/>
+            </a:pPr>
+            <a:r>
+              <a:rPr lang="en-US" altLang="zh-CN" dirty="0"/>
+              <a:t>Encoder</a:t>
+            </a:r>
+            <a:r>
+              <a:rPr lang="zh-CN" altLang="en-US" dirty="0"/>
+              <a:t> </a:t>
+            </a:r>
+            <a:r>
+              <a:rPr lang="en-US" altLang="zh-CN" dirty="0"/>
+              <a:t>only</a:t>
+            </a:r>
+            <a:r>
+              <a:rPr lang="zh-CN" altLang="en-US" dirty="0"/>
+              <a:t> </a:t>
+            </a:r>
+            <a:r>
+              <a:rPr lang="en-US" altLang="zh-CN" dirty="0"/>
+              <a:t>transformer</a:t>
+            </a:r>
+            <a:r>
+              <a:rPr lang="zh-CN" altLang="en-US" dirty="0"/>
+              <a:t> </a:t>
+            </a:r>
+            <a:r>
+              <a:rPr lang="en-US" altLang="zh-CN" dirty="0"/>
+              <a:t>can</a:t>
+            </a:r>
+            <a:r>
+              <a:rPr lang="zh-CN" altLang="en-US" dirty="0"/>
+              <a:t> </a:t>
+            </a:r>
+            <a:r>
+              <a:rPr lang="en-US" altLang="zh-CN" dirty="0"/>
+              <a:t>not</a:t>
+            </a:r>
+            <a:r>
+              <a:rPr lang="zh-CN" altLang="en-US" dirty="0"/>
+              <a:t> </a:t>
+            </a:r>
+            <a:r>
+              <a:rPr lang="en-US" altLang="zh-CN" dirty="0"/>
+              <a:t>model</a:t>
+            </a:r>
+            <a:r>
+              <a:rPr lang="zh-CN" altLang="en-US" dirty="0"/>
+              <a:t> </a:t>
+            </a:r>
+            <a:r>
+              <a:rPr lang="en-US" altLang="zh-CN" dirty="0"/>
+              <a:t>autoregressive</a:t>
+            </a:r>
+            <a:r>
+              <a:rPr lang="zh-CN" altLang="en-US" dirty="0"/>
+              <a:t> </a:t>
+            </a:r>
+            <a:r>
+              <a:rPr lang="en-US" altLang="zh-CN" dirty="0"/>
+              <a:t>dependencies</a:t>
+            </a:r>
+            <a:r>
+              <a:rPr lang="zh-CN" altLang="en-US" dirty="0"/>
+              <a:t> </a:t>
+            </a:r>
+            <a:r>
+              <a:rPr lang="en-US" altLang="zh-CN" dirty="0"/>
+              <a:t>while</a:t>
+            </a:r>
+            <a:r>
+              <a:rPr lang="zh-CN" altLang="en-US" dirty="0"/>
+              <a:t> </a:t>
+            </a:r>
+            <a:r>
+              <a:rPr lang="en-US" altLang="zh-CN" dirty="0"/>
+              <a:t>decoding.</a:t>
+            </a:r>
+            <a:r>
+              <a:rPr lang="zh-CN" altLang="en-US" dirty="0"/>
+              <a:t> </a:t>
+            </a:r>
+            <a:r>
+              <a:rPr lang="en-US" altLang="zh-CN" dirty="0"/>
+              <a:t>It</a:t>
+            </a:r>
+            <a:r>
+              <a:rPr lang="zh-CN" altLang="en-US" dirty="0"/>
+              <a:t> </a:t>
+            </a:r>
+            <a:r>
+              <a:rPr lang="en-US" altLang="zh-CN" dirty="0"/>
+              <a:t>only</a:t>
+            </a:r>
+            <a:r>
+              <a:rPr lang="zh-CN" altLang="en-US" dirty="0"/>
+              <a:t> </a:t>
+            </a:r>
+            <a:r>
+              <a:rPr lang="en-US" altLang="zh-CN" dirty="0"/>
+              <a:t>provides</a:t>
+            </a:r>
+            <a:r>
+              <a:rPr lang="zh-CN" altLang="en-US" dirty="0"/>
+              <a:t> </a:t>
+            </a:r>
+            <a:r>
+              <a:rPr lang="en-US" altLang="zh-CN" dirty="0"/>
+              <a:t>context</a:t>
+            </a:r>
+            <a:r>
+              <a:rPr lang="zh-CN" altLang="en-US" dirty="0"/>
+              <a:t> </a:t>
+            </a:r>
+            <a:r>
+              <a:rPr lang="en-US" altLang="zh-CN" dirty="0"/>
+              <a:t>embedding</a:t>
+            </a:r>
+          </a:p>
+          <a:p>
+            <a:pPr marL="742950" lvl="1" indent="-285750">
+              <a:lnSpc>
+                <a:spcPts val="2400"/>
+              </a:lnSpc>
+              <a:buFontTx/>
+              <a:buChar char="-"/>
+            </a:pPr>
+            <a:endParaRPr lang="en-US" dirty="0"/>
           </a:p>
         </p:txBody>
       </p:sp>
@@ -10676,6 +12598,1071 @@
               </a:solidFill>
               <a:latin typeface="Arial"/>
             </a:endParaRPr>
+          </a:p>
+        </p:txBody>
+      </p:sp>
+      <p:sp>
+        <p:nvSpPr>
+          <p:cNvPr id="2" name="TextBox 1">
+            <a:extLst>
+              <a:ext uri="{FF2B5EF4-FFF2-40B4-BE49-F238E27FC236}">
+                <a16:creationId xmlns:a16="http://schemas.microsoft.com/office/drawing/2014/main" id="{BA6EFEC2-81DE-7449-1E04-F5142F21B8A5}"/>
+              </a:ext>
+            </a:extLst>
+          </p:cNvPr>
+          <p:cNvSpPr txBox="1"/>
+          <p:nvPr/>
+        </p:nvSpPr>
+        <p:spPr>
+          <a:xfrm>
+            <a:off x="344159" y="1037272"/>
+            <a:ext cx="8024117" cy="4376776"/>
+          </a:xfrm>
+          <a:prstGeom prst="rect">
+            <a:avLst/>
+          </a:prstGeom>
+          <a:noFill/>
+        </p:spPr>
+        <p:txBody>
+          <a:bodyPr wrap="square" rtlCol="0">
+            <a:spAutoFit/>
+          </a:bodyPr>
+          <a:lstStyle/>
+          <a:p>
+            <a:pPr>
+              <a:lnSpc>
+                <a:spcPts val="2400"/>
+              </a:lnSpc>
+            </a:pPr>
+            <a:r>
+              <a:rPr lang="en-US" altLang="zh-CN" dirty="0"/>
+              <a:t>Quantitative</a:t>
+            </a:r>
+            <a:r>
+              <a:rPr lang="zh-CN" altLang="en-US" dirty="0"/>
+              <a:t> </a:t>
+            </a:r>
+            <a:r>
+              <a:rPr lang="en-US" altLang="zh-CN" dirty="0"/>
+              <a:t>Comparison</a:t>
+            </a:r>
+            <a:r>
+              <a:rPr lang="zh-CN" altLang="en-US" dirty="0"/>
+              <a:t> </a:t>
+            </a:r>
+            <a:r>
+              <a:rPr lang="en-US" altLang="zh-CN" dirty="0"/>
+              <a:t>(validation/perplexity/loss):</a:t>
+            </a:r>
+            <a:r>
+              <a:rPr lang="zh-CN" altLang="en-US" dirty="0"/>
+              <a:t> </a:t>
+            </a:r>
+            <a:endParaRPr lang="en-US" altLang="zh-CN" dirty="0"/>
+          </a:p>
+          <a:p>
+            <a:pPr marL="285750" indent="-285750">
+              <a:lnSpc>
+                <a:spcPts val="2400"/>
+              </a:lnSpc>
+              <a:buFontTx/>
+              <a:buChar char="-"/>
+            </a:pPr>
+            <a:r>
+              <a:rPr lang="en-US" altLang="zh-CN" dirty="0"/>
+              <a:t>Best</a:t>
+            </a:r>
+            <a:r>
+              <a:rPr lang="zh-CN" altLang="en-US" dirty="0"/>
+              <a:t> </a:t>
+            </a:r>
+            <a:r>
+              <a:rPr lang="en-US" altLang="zh-CN" dirty="0"/>
+              <a:t>seq2seq(RNN</a:t>
+            </a:r>
+            <a:r>
+              <a:rPr lang="zh-CN" altLang="en-US" dirty="0"/>
+              <a:t> </a:t>
+            </a:r>
+            <a:r>
+              <a:rPr lang="en-US" altLang="zh-CN" dirty="0"/>
+              <a:t>+</a:t>
+            </a:r>
+            <a:r>
+              <a:rPr lang="zh-CN" altLang="en-US" dirty="0"/>
+              <a:t> </a:t>
+            </a:r>
+            <a:r>
+              <a:rPr lang="en-US" altLang="zh-CN" dirty="0"/>
+              <a:t>Attention)</a:t>
+            </a:r>
+            <a:r>
+              <a:rPr lang="zh-CN" altLang="en-US" dirty="0"/>
+              <a:t> </a:t>
+            </a:r>
+            <a:r>
+              <a:rPr lang="en-US" altLang="zh-CN" dirty="0"/>
+              <a:t>is</a:t>
+            </a:r>
+            <a:r>
+              <a:rPr lang="zh-CN" altLang="en-US" dirty="0"/>
+              <a:t> </a:t>
+            </a:r>
+            <a:r>
+              <a:rPr lang="en-US" altLang="zh-CN" dirty="0"/>
+              <a:t>of</a:t>
+            </a:r>
+            <a:r>
+              <a:rPr lang="zh-CN" altLang="en-US" dirty="0"/>
+              <a:t> </a:t>
+            </a:r>
+            <a:r>
+              <a:rPr lang="en-US" dirty="0"/>
+              <a:t>Validation Perplexity: </a:t>
+            </a:r>
+            <a:r>
+              <a:rPr lang="en-US" altLang="zh-CN" dirty="0"/>
+              <a:t>6.37,</a:t>
+            </a:r>
+            <a:r>
+              <a:rPr lang="zh-CN" altLang="en-US" dirty="0"/>
+              <a:t> </a:t>
+            </a:r>
+            <a:r>
+              <a:rPr lang="en-US" altLang="zh-CN" dirty="0"/>
+              <a:t>roughly</a:t>
+            </a:r>
+            <a:r>
+              <a:rPr lang="zh-CN" altLang="en-US" dirty="0"/>
+              <a:t> </a:t>
+            </a:r>
+            <a:r>
+              <a:rPr lang="en-US" altLang="zh-CN" dirty="0"/>
+              <a:t>the</a:t>
+            </a:r>
+            <a:r>
+              <a:rPr lang="zh-CN" altLang="en-US" dirty="0"/>
+              <a:t> </a:t>
+            </a:r>
+            <a:r>
+              <a:rPr lang="en-US" altLang="zh-CN" dirty="0"/>
+              <a:t>same</a:t>
+            </a:r>
+            <a:r>
+              <a:rPr lang="zh-CN" altLang="en-US" dirty="0"/>
+              <a:t> </a:t>
+            </a:r>
+            <a:r>
+              <a:rPr lang="en-US" altLang="zh-CN" dirty="0"/>
+              <a:t>as</a:t>
+            </a:r>
+            <a:r>
+              <a:rPr lang="zh-CN" altLang="en-US" dirty="0"/>
+              <a:t> </a:t>
+            </a:r>
+            <a:r>
+              <a:rPr lang="en-US" altLang="zh-CN" dirty="0"/>
+              <a:t>the</a:t>
+            </a:r>
+            <a:r>
+              <a:rPr lang="zh-CN" altLang="en-US" dirty="0"/>
+              <a:t> </a:t>
+            </a:r>
+            <a:r>
+              <a:rPr lang="en-US" altLang="zh-CN" dirty="0"/>
+              <a:t>best</a:t>
+            </a:r>
+            <a:r>
+              <a:rPr lang="zh-CN" altLang="en-US" dirty="0"/>
+              <a:t> </a:t>
+            </a:r>
+            <a:r>
+              <a:rPr lang="en-US" altLang="zh-CN" dirty="0"/>
+              <a:t>transformer</a:t>
+            </a:r>
+            <a:r>
+              <a:rPr lang="zh-CN" altLang="en-US" dirty="0"/>
+              <a:t> </a:t>
+            </a:r>
+            <a:r>
+              <a:rPr lang="en-US" altLang="zh-CN" dirty="0"/>
+              <a:t>(full</a:t>
+            </a:r>
+            <a:r>
+              <a:rPr lang="zh-CN" altLang="en-US" dirty="0"/>
+              <a:t> </a:t>
+            </a:r>
+            <a:r>
+              <a:rPr lang="en-US" altLang="zh-CN" dirty="0"/>
+              <a:t>transformer</a:t>
+            </a:r>
+            <a:r>
+              <a:rPr lang="zh-CN" altLang="en-US" dirty="0"/>
+              <a:t> </a:t>
+            </a:r>
+            <a:r>
+              <a:rPr lang="en-US" altLang="zh-CN" dirty="0"/>
+              <a:t>best),</a:t>
+            </a:r>
+            <a:r>
+              <a:rPr lang="zh-CN" altLang="en-US" dirty="0"/>
+              <a:t> </a:t>
+            </a:r>
+            <a:r>
+              <a:rPr lang="en-US" altLang="zh-CN" sz="1400" i="1" dirty="0">
+                <a:solidFill>
+                  <a:schemeClr val="accent1">
+                    <a:lumMod val="75000"/>
+                  </a:schemeClr>
+                </a:solidFill>
+              </a:rPr>
+              <a:t>in</a:t>
+            </a:r>
+            <a:r>
+              <a:rPr lang="zh-CN" altLang="en-US" sz="1400" i="1" dirty="0">
+                <a:solidFill>
+                  <a:schemeClr val="accent1">
+                    <a:lumMod val="75000"/>
+                  </a:schemeClr>
+                </a:solidFill>
+              </a:rPr>
+              <a:t> </a:t>
+            </a:r>
+            <a:r>
+              <a:rPr lang="en-US" altLang="zh-CN" sz="1400" i="1" dirty="0">
+                <a:solidFill>
+                  <a:schemeClr val="accent1">
+                    <a:lumMod val="75000"/>
+                  </a:schemeClr>
+                </a:solidFill>
+              </a:rPr>
+              <a:t>my</a:t>
+            </a:r>
+            <a:r>
+              <a:rPr lang="zh-CN" altLang="en-US" sz="1400" i="1" dirty="0">
+                <a:solidFill>
+                  <a:schemeClr val="accent1">
+                    <a:lumMod val="75000"/>
+                  </a:schemeClr>
+                </a:solidFill>
+              </a:rPr>
+              <a:t> </a:t>
+            </a:r>
+            <a:r>
+              <a:rPr lang="en-US" altLang="zh-CN" sz="1400" i="1" dirty="0">
+                <a:solidFill>
+                  <a:schemeClr val="accent1">
+                    <a:lumMod val="75000"/>
+                  </a:schemeClr>
+                </a:solidFill>
+              </a:rPr>
+              <a:t>case</a:t>
+            </a:r>
+            <a:r>
+              <a:rPr lang="zh-CN" altLang="en-US" sz="1400" i="1" dirty="0">
+                <a:solidFill>
+                  <a:schemeClr val="accent1">
+                    <a:lumMod val="75000"/>
+                  </a:schemeClr>
+                </a:solidFill>
+              </a:rPr>
+              <a:t> </a:t>
+            </a:r>
+            <a:r>
+              <a:rPr lang="en-US" altLang="zh-CN" sz="1400" i="1" dirty="0">
+                <a:solidFill>
+                  <a:schemeClr val="accent1">
+                    <a:lumMod val="75000"/>
+                  </a:schemeClr>
+                </a:solidFill>
+              </a:rPr>
+              <a:t>they</a:t>
+            </a:r>
+            <a:r>
+              <a:rPr lang="zh-CN" altLang="en-US" sz="1400" i="1" dirty="0">
+                <a:solidFill>
+                  <a:schemeClr val="accent1">
+                    <a:lumMod val="75000"/>
+                  </a:schemeClr>
+                </a:solidFill>
+              </a:rPr>
+              <a:t> </a:t>
+            </a:r>
+            <a:r>
+              <a:rPr lang="en-US" altLang="zh-CN" sz="1400" i="1" dirty="0">
+                <a:solidFill>
+                  <a:schemeClr val="accent1">
+                    <a:lumMod val="75000"/>
+                  </a:schemeClr>
+                </a:solidFill>
+              </a:rPr>
+              <a:t>two</a:t>
+            </a:r>
+            <a:r>
+              <a:rPr lang="zh-CN" altLang="en-US" sz="1400" i="1" dirty="0">
+                <a:solidFill>
+                  <a:schemeClr val="accent1">
+                    <a:lumMod val="75000"/>
+                  </a:schemeClr>
+                </a:solidFill>
+              </a:rPr>
+              <a:t> </a:t>
+            </a:r>
+            <a:r>
+              <a:rPr lang="en-US" altLang="zh-CN" sz="1400" i="1" dirty="0">
+                <a:solidFill>
+                  <a:schemeClr val="accent1">
+                    <a:lumMod val="75000"/>
+                  </a:schemeClr>
+                </a:solidFill>
+              </a:rPr>
+              <a:t>are</a:t>
+            </a:r>
+            <a:r>
+              <a:rPr lang="zh-CN" altLang="en-US" sz="1400" i="1" dirty="0">
+                <a:solidFill>
+                  <a:schemeClr val="accent1">
+                    <a:lumMod val="75000"/>
+                  </a:schemeClr>
+                </a:solidFill>
+              </a:rPr>
+              <a:t> </a:t>
+            </a:r>
+            <a:r>
+              <a:rPr lang="en-US" altLang="zh-CN" sz="1400" i="1" dirty="0">
+                <a:solidFill>
+                  <a:schemeClr val="accent1">
+                    <a:lumMod val="75000"/>
+                  </a:schemeClr>
+                </a:solidFill>
+              </a:rPr>
+              <a:t>identical</a:t>
+            </a:r>
+            <a:r>
+              <a:rPr lang="zh-CN" altLang="en-US" sz="1400" i="1" dirty="0">
+                <a:solidFill>
+                  <a:schemeClr val="accent1">
+                    <a:lumMod val="75000"/>
+                  </a:schemeClr>
+                </a:solidFill>
+              </a:rPr>
+              <a:t> </a:t>
+            </a:r>
+            <a:r>
+              <a:rPr lang="en-US" altLang="zh-CN" sz="1400" i="1" dirty="0">
+                <a:solidFill>
+                  <a:schemeClr val="accent1">
+                    <a:lumMod val="75000"/>
+                  </a:schemeClr>
+                </a:solidFill>
+              </a:rPr>
+              <a:t>after</a:t>
+            </a:r>
+            <a:r>
+              <a:rPr lang="zh-CN" altLang="en-US" sz="1400" i="1" dirty="0">
+                <a:solidFill>
+                  <a:schemeClr val="accent1">
+                    <a:lumMod val="75000"/>
+                  </a:schemeClr>
+                </a:solidFill>
+              </a:rPr>
+              <a:t> </a:t>
+            </a:r>
+            <a:r>
+              <a:rPr lang="en-US" altLang="zh-CN" sz="1400" i="1" dirty="0">
+                <a:solidFill>
+                  <a:schemeClr val="accent1">
+                    <a:lumMod val="75000"/>
+                  </a:schemeClr>
+                </a:solidFill>
+              </a:rPr>
+              <a:t>rounding</a:t>
+            </a:r>
+            <a:r>
+              <a:rPr lang="zh-CN" altLang="en-US" sz="1400" i="1" dirty="0">
+                <a:solidFill>
+                  <a:schemeClr val="accent1">
+                    <a:lumMod val="75000"/>
+                  </a:schemeClr>
+                </a:solidFill>
+              </a:rPr>
+              <a:t> </a:t>
+            </a:r>
+            <a:r>
+              <a:rPr lang="en-US" altLang="zh-CN" sz="1400" i="1" dirty="0">
+                <a:solidFill>
+                  <a:schemeClr val="accent1">
+                    <a:lumMod val="75000"/>
+                  </a:schemeClr>
+                </a:solidFill>
+              </a:rPr>
+              <a:t>up,</a:t>
+            </a:r>
+            <a:r>
+              <a:rPr lang="zh-CN" altLang="en-US" sz="1400" i="1" dirty="0">
+                <a:solidFill>
+                  <a:schemeClr val="accent1">
+                    <a:lumMod val="75000"/>
+                  </a:schemeClr>
+                </a:solidFill>
+              </a:rPr>
+              <a:t> </a:t>
+            </a:r>
+            <a:r>
+              <a:rPr lang="en-US" altLang="zh-CN" sz="1400" i="1" dirty="0">
+                <a:solidFill>
+                  <a:schemeClr val="accent1">
+                    <a:lumMod val="75000"/>
+                  </a:schemeClr>
+                </a:solidFill>
+              </a:rPr>
+              <a:t>usually</a:t>
+            </a:r>
+            <a:r>
+              <a:rPr lang="zh-CN" altLang="en-US" sz="1400" i="1" dirty="0">
+                <a:solidFill>
+                  <a:schemeClr val="accent1">
+                    <a:lumMod val="75000"/>
+                  </a:schemeClr>
+                </a:solidFill>
+              </a:rPr>
+              <a:t> </a:t>
+            </a:r>
+            <a:r>
+              <a:rPr lang="en-US" altLang="zh-CN" sz="1400" i="1" dirty="0">
+                <a:solidFill>
+                  <a:schemeClr val="accent1">
+                    <a:lumMod val="75000"/>
+                  </a:schemeClr>
+                </a:solidFill>
+              </a:rPr>
+              <a:t>full</a:t>
+            </a:r>
+            <a:r>
+              <a:rPr lang="zh-CN" altLang="en-US" sz="1400" i="1" dirty="0">
+                <a:solidFill>
+                  <a:schemeClr val="accent1">
+                    <a:lumMod val="75000"/>
+                  </a:schemeClr>
+                </a:solidFill>
+              </a:rPr>
+              <a:t> </a:t>
+            </a:r>
+            <a:r>
+              <a:rPr lang="en-US" altLang="zh-CN" sz="1400" i="1" dirty="0">
+                <a:solidFill>
+                  <a:schemeClr val="accent1">
+                    <a:lumMod val="75000"/>
+                  </a:schemeClr>
+                </a:solidFill>
+              </a:rPr>
+              <a:t>transformer</a:t>
+            </a:r>
+            <a:r>
+              <a:rPr lang="zh-CN" altLang="en-US" sz="1400" i="1" dirty="0">
+                <a:solidFill>
+                  <a:schemeClr val="accent1">
+                    <a:lumMod val="75000"/>
+                  </a:schemeClr>
+                </a:solidFill>
+              </a:rPr>
+              <a:t> </a:t>
+            </a:r>
+            <a:r>
+              <a:rPr lang="en-US" altLang="zh-CN" sz="1400" i="1" dirty="0">
+                <a:solidFill>
+                  <a:schemeClr val="accent1">
+                    <a:lumMod val="75000"/>
+                  </a:schemeClr>
+                </a:solidFill>
+              </a:rPr>
+              <a:t>can</a:t>
+            </a:r>
+            <a:r>
+              <a:rPr lang="zh-CN" altLang="en-US" sz="1400" i="1" dirty="0">
+                <a:solidFill>
+                  <a:schemeClr val="accent1">
+                    <a:lumMod val="75000"/>
+                  </a:schemeClr>
+                </a:solidFill>
+              </a:rPr>
+              <a:t> </a:t>
+            </a:r>
+            <a:r>
+              <a:rPr lang="en-US" altLang="zh-CN" sz="1400" i="1" dirty="0">
+                <a:solidFill>
+                  <a:schemeClr val="accent1">
+                    <a:lumMod val="75000"/>
+                  </a:schemeClr>
+                </a:solidFill>
+              </a:rPr>
+              <a:t>scale</a:t>
+            </a:r>
+            <a:r>
+              <a:rPr lang="zh-CN" altLang="en-US" sz="1400" i="1" dirty="0">
+                <a:solidFill>
+                  <a:schemeClr val="accent1">
+                    <a:lumMod val="75000"/>
+                  </a:schemeClr>
+                </a:solidFill>
+              </a:rPr>
+              <a:t> </a:t>
+            </a:r>
+            <a:r>
+              <a:rPr lang="en-US" altLang="zh-CN" sz="1400" i="1" dirty="0">
+                <a:solidFill>
+                  <a:schemeClr val="accent1">
+                    <a:lumMod val="75000"/>
+                  </a:schemeClr>
+                </a:solidFill>
+              </a:rPr>
+              <a:t>better</a:t>
+            </a:r>
+            <a:r>
+              <a:rPr lang="zh-CN" altLang="en-US" sz="1400" i="1" dirty="0">
+                <a:solidFill>
+                  <a:schemeClr val="accent1">
+                    <a:lumMod val="75000"/>
+                  </a:schemeClr>
+                </a:solidFill>
+              </a:rPr>
+              <a:t> </a:t>
+            </a:r>
+            <a:r>
+              <a:rPr lang="en-US" altLang="zh-CN" sz="1400" i="1" dirty="0">
+                <a:solidFill>
+                  <a:schemeClr val="accent1">
+                    <a:lumMod val="75000"/>
+                  </a:schemeClr>
+                </a:solidFill>
+              </a:rPr>
+              <a:t>in</a:t>
+            </a:r>
+            <a:r>
+              <a:rPr lang="zh-CN" altLang="en-US" sz="1400" i="1" dirty="0">
+                <a:solidFill>
+                  <a:schemeClr val="accent1">
+                    <a:lumMod val="75000"/>
+                  </a:schemeClr>
+                </a:solidFill>
+              </a:rPr>
+              <a:t> </a:t>
+            </a:r>
+            <a:r>
+              <a:rPr lang="en-US" altLang="zh-CN" sz="1400" i="1" dirty="0">
+                <a:solidFill>
+                  <a:schemeClr val="accent1">
+                    <a:lumMod val="75000"/>
+                  </a:schemeClr>
+                </a:solidFill>
+              </a:rPr>
+              <a:t>longer</a:t>
+            </a:r>
+            <a:r>
+              <a:rPr lang="zh-CN" altLang="en-US" sz="1400" i="1" dirty="0">
+                <a:solidFill>
+                  <a:schemeClr val="accent1">
+                    <a:lumMod val="75000"/>
+                  </a:schemeClr>
+                </a:solidFill>
+              </a:rPr>
+              <a:t> </a:t>
+            </a:r>
+            <a:r>
+              <a:rPr lang="en-US" altLang="zh-CN" sz="1400" i="1" dirty="0">
+                <a:solidFill>
+                  <a:schemeClr val="accent1">
+                    <a:lumMod val="75000"/>
+                  </a:schemeClr>
+                </a:solidFill>
+              </a:rPr>
+              <a:t>sequence</a:t>
+            </a:r>
+          </a:p>
+          <a:p>
+            <a:pPr marL="285750" indent="-285750">
+              <a:lnSpc>
+                <a:spcPts val="2400"/>
+              </a:lnSpc>
+              <a:buFontTx/>
+              <a:buChar char="-"/>
+            </a:pPr>
+            <a:r>
+              <a:rPr lang="zh-CN" altLang="en-US" dirty="0"/>
+              <a:t> </a:t>
+            </a:r>
+            <a:r>
+              <a:rPr lang="en-US" altLang="zh-CN" dirty="0"/>
+              <a:t>seq2seq</a:t>
+            </a:r>
+            <a:r>
+              <a:rPr lang="zh-CN" altLang="en-US" dirty="0"/>
+              <a:t> </a:t>
+            </a:r>
+            <a:r>
+              <a:rPr lang="en-US" altLang="zh-CN" dirty="0"/>
+              <a:t>may</a:t>
+            </a:r>
+            <a:r>
+              <a:rPr lang="zh-CN" altLang="en-US" dirty="0"/>
+              <a:t> </a:t>
+            </a:r>
+            <a:r>
+              <a:rPr lang="en-US" altLang="zh-CN" dirty="0"/>
+              <a:t>make</a:t>
+            </a:r>
+            <a:r>
+              <a:rPr lang="zh-CN" altLang="en-US" dirty="0"/>
+              <a:t> </a:t>
+            </a:r>
+            <a:r>
+              <a:rPr lang="en-US" altLang="zh-CN" dirty="0"/>
+              <a:t>small</a:t>
+            </a:r>
+            <a:r>
+              <a:rPr lang="zh-CN" altLang="en-US" dirty="0"/>
+              <a:t> </a:t>
+            </a:r>
+            <a:r>
+              <a:rPr lang="en-US" altLang="zh-CN" dirty="0"/>
+              <a:t>errors</a:t>
+            </a:r>
+            <a:r>
+              <a:rPr lang="zh-CN" altLang="en-US" dirty="0"/>
+              <a:t> </a:t>
+            </a:r>
+            <a:r>
+              <a:rPr lang="en-US" altLang="zh-CN" dirty="0"/>
+              <a:t>than</a:t>
+            </a:r>
+            <a:r>
+              <a:rPr lang="zh-CN" altLang="en-US" dirty="0"/>
+              <a:t> </a:t>
+            </a:r>
+            <a:r>
+              <a:rPr lang="en-US" altLang="zh-CN" dirty="0"/>
+              <a:t>best</a:t>
+            </a:r>
+            <a:r>
+              <a:rPr lang="zh-CN" altLang="en-US" dirty="0"/>
+              <a:t> </a:t>
+            </a:r>
+            <a:r>
+              <a:rPr lang="en-US" altLang="zh-CN" dirty="0"/>
+              <a:t>transformer</a:t>
+            </a:r>
+            <a:r>
+              <a:rPr lang="zh-CN" altLang="en-US" dirty="0"/>
+              <a:t> </a:t>
+            </a:r>
+            <a:r>
+              <a:rPr lang="en-US" altLang="zh-CN" dirty="0"/>
+              <a:t>on</a:t>
+            </a:r>
+            <a:r>
+              <a:rPr lang="zh-CN" altLang="en-US" dirty="0"/>
+              <a:t> </a:t>
+            </a:r>
+            <a:r>
+              <a:rPr lang="en-US" altLang="zh-CN" dirty="0"/>
+              <a:t>long</a:t>
+            </a:r>
+            <a:r>
+              <a:rPr lang="zh-CN" altLang="en-US" dirty="0"/>
+              <a:t> </a:t>
+            </a:r>
+            <a:r>
+              <a:rPr lang="en-US" altLang="zh-CN" dirty="0"/>
+              <a:t>sentence</a:t>
+            </a:r>
+            <a:r>
+              <a:rPr lang="zh-CN" altLang="en-US" dirty="0"/>
+              <a:t> </a:t>
+            </a:r>
+            <a:r>
+              <a:rPr lang="en-US" altLang="zh-CN" dirty="0"/>
+              <a:t>or</a:t>
+            </a:r>
+            <a:r>
+              <a:rPr lang="zh-CN" altLang="en-US" dirty="0"/>
+              <a:t> </a:t>
+            </a:r>
+            <a:r>
+              <a:rPr lang="en-US" altLang="zh-CN" dirty="0"/>
+              <a:t>rare</a:t>
+            </a:r>
+            <a:r>
+              <a:rPr lang="zh-CN" altLang="en-US" dirty="0"/>
+              <a:t> </a:t>
+            </a:r>
+            <a:r>
+              <a:rPr lang="en-US" altLang="zh-CN" dirty="0"/>
+              <a:t>words.</a:t>
+            </a:r>
+          </a:p>
+          <a:p>
+            <a:pPr marL="285750" indent="-285750">
+              <a:lnSpc>
+                <a:spcPts val="2400"/>
+              </a:lnSpc>
+              <a:buFontTx/>
+              <a:buChar char="-"/>
+            </a:pPr>
+            <a:r>
+              <a:rPr lang="en-US" altLang="zh-CN" dirty="0"/>
+              <a:t>Full</a:t>
+            </a:r>
+            <a:r>
+              <a:rPr lang="zh-CN" altLang="en-US" dirty="0"/>
+              <a:t> </a:t>
+            </a:r>
+            <a:r>
+              <a:rPr lang="en-US" altLang="zh-CN" dirty="0"/>
+              <a:t>transformer</a:t>
+            </a:r>
+            <a:r>
+              <a:rPr lang="zh-CN" altLang="en-US" dirty="0"/>
+              <a:t> </a:t>
+            </a:r>
+            <a:r>
+              <a:rPr lang="en-US" altLang="zh-CN" dirty="0"/>
+              <a:t>produces</a:t>
+            </a:r>
+            <a:r>
+              <a:rPr lang="zh-CN" altLang="en-US" dirty="0"/>
+              <a:t> </a:t>
+            </a:r>
+            <a:r>
+              <a:rPr lang="en-US" altLang="zh-CN" dirty="0"/>
+              <a:t>smoother</a:t>
+            </a:r>
+            <a:r>
+              <a:rPr lang="zh-CN" altLang="en-US" dirty="0"/>
+              <a:t> </a:t>
+            </a:r>
+            <a:r>
+              <a:rPr lang="en-US" altLang="zh-CN" dirty="0"/>
+              <a:t>sentence</a:t>
+            </a:r>
+            <a:r>
+              <a:rPr lang="zh-CN" altLang="en-US" dirty="0"/>
+              <a:t> </a:t>
+            </a:r>
+            <a:r>
+              <a:rPr lang="en-US" altLang="zh-CN" dirty="0"/>
+              <a:t>with</a:t>
+            </a:r>
+            <a:r>
+              <a:rPr lang="zh-CN" altLang="en-US" dirty="0"/>
+              <a:t> </a:t>
+            </a:r>
+            <a:r>
+              <a:rPr lang="en-US" altLang="zh-CN" dirty="0"/>
+              <a:t>good</a:t>
+            </a:r>
+            <a:r>
+              <a:rPr lang="zh-CN" altLang="en-US" dirty="0"/>
+              <a:t> </a:t>
+            </a:r>
+            <a:r>
+              <a:rPr lang="en-US" altLang="zh-CN" dirty="0"/>
+              <a:t>grammar,</a:t>
+            </a:r>
+            <a:r>
+              <a:rPr lang="zh-CN" altLang="en-US" dirty="0"/>
+              <a:t> </a:t>
+            </a:r>
+            <a:r>
+              <a:rPr lang="en-US" altLang="zh-CN" dirty="0"/>
+              <a:t>better</a:t>
+            </a:r>
+            <a:r>
+              <a:rPr lang="zh-CN" altLang="en-US" dirty="0"/>
+              <a:t> </a:t>
+            </a:r>
+            <a:r>
+              <a:rPr lang="en-US" altLang="zh-CN" dirty="0"/>
+              <a:t>long-range</a:t>
+            </a:r>
+            <a:r>
+              <a:rPr lang="zh-CN" altLang="en-US" dirty="0"/>
+              <a:t> </a:t>
+            </a:r>
+            <a:r>
+              <a:rPr lang="en-US" altLang="zh-CN" dirty="0"/>
+              <a:t>sequence.</a:t>
+            </a:r>
+          </a:p>
+          <a:p>
+            <a:pPr>
+              <a:lnSpc>
+                <a:spcPts val="2400"/>
+              </a:lnSpc>
+            </a:pPr>
+            <a:r>
+              <a:rPr lang="en-US" altLang="zh-CN" dirty="0"/>
+              <a:t>Why:</a:t>
+            </a:r>
+          </a:p>
+          <a:p>
+            <a:pPr marL="285750" indent="-285750">
+              <a:lnSpc>
+                <a:spcPts val="2400"/>
+              </a:lnSpc>
+              <a:buFontTx/>
+              <a:buChar char="-"/>
+            </a:pPr>
+            <a:r>
+              <a:rPr lang="en-US" altLang="zh-CN" dirty="0"/>
+              <a:t>Seq2seq</a:t>
+            </a:r>
+            <a:r>
+              <a:rPr lang="zh-CN" altLang="en-US" dirty="0"/>
+              <a:t> </a:t>
+            </a:r>
+            <a:r>
+              <a:rPr lang="en-US" altLang="zh-CN" dirty="0"/>
+              <a:t>relies</a:t>
+            </a:r>
+            <a:r>
+              <a:rPr lang="zh-CN" altLang="en-US" dirty="0"/>
+              <a:t> </a:t>
+            </a:r>
+            <a:r>
+              <a:rPr lang="en-US" altLang="zh-CN" dirty="0"/>
+              <a:t>on</a:t>
+            </a:r>
+            <a:r>
+              <a:rPr lang="zh-CN" altLang="en-US" dirty="0"/>
+              <a:t> </a:t>
+            </a:r>
+            <a:r>
+              <a:rPr lang="en-US" altLang="zh-CN" dirty="0"/>
+              <a:t>recurrent</a:t>
+            </a:r>
+            <a:r>
+              <a:rPr lang="zh-CN" altLang="en-US" dirty="0"/>
+              <a:t> </a:t>
+            </a:r>
+            <a:r>
+              <a:rPr lang="en-US" altLang="zh-CN" dirty="0"/>
+              <a:t>connections</a:t>
+            </a:r>
+            <a:r>
+              <a:rPr lang="zh-CN" altLang="en-US" dirty="0"/>
+              <a:t> </a:t>
+            </a:r>
+            <a:r>
+              <a:rPr lang="en-US" altLang="zh-CN" dirty="0"/>
+              <a:t>and</a:t>
+            </a:r>
+            <a:r>
+              <a:rPr lang="zh-CN" altLang="en-US" dirty="0"/>
+              <a:t> </a:t>
+            </a:r>
+            <a:r>
+              <a:rPr lang="en-US" altLang="zh-CN" dirty="0"/>
+              <a:t>attention</a:t>
+            </a:r>
+            <a:r>
+              <a:rPr lang="zh-CN" altLang="en-US" dirty="0"/>
+              <a:t> </a:t>
+            </a:r>
+            <a:r>
+              <a:rPr lang="en-US" altLang="zh-CN" dirty="0"/>
+              <a:t>to</a:t>
+            </a:r>
+            <a:r>
+              <a:rPr lang="zh-CN" altLang="en-US" dirty="0"/>
+              <a:t> </a:t>
+            </a:r>
+            <a:r>
+              <a:rPr lang="en-US" altLang="zh-CN" dirty="0"/>
+              <a:t>selective</a:t>
+            </a:r>
+            <a:r>
+              <a:rPr lang="zh-CN" altLang="en-US" dirty="0"/>
+              <a:t> </a:t>
+            </a:r>
+            <a:r>
+              <a:rPr lang="en-US" altLang="zh-CN" dirty="0"/>
+              <a:t>focus,</a:t>
+            </a:r>
+            <a:r>
+              <a:rPr lang="zh-CN" altLang="en-US" dirty="0"/>
+              <a:t> </a:t>
+            </a:r>
+            <a:r>
+              <a:rPr lang="en-US" altLang="zh-CN" dirty="0"/>
+              <a:t>but</a:t>
+            </a:r>
+            <a:r>
+              <a:rPr lang="zh-CN" altLang="en-US" dirty="0"/>
+              <a:t> </a:t>
+            </a:r>
+            <a:r>
+              <a:rPr lang="en-US" altLang="zh-CN" dirty="0"/>
+              <a:t>it</a:t>
+            </a:r>
+            <a:r>
+              <a:rPr lang="zh-CN" altLang="en-US" dirty="0"/>
+              <a:t> </a:t>
+            </a:r>
+            <a:r>
+              <a:rPr lang="en-US" altLang="zh-CN" dirty="0"/>
+              <a:t>still</a:t>
+            </a:r>
+            <a:r>
+              <a:rPr lang="zh-CN" altLang="en-US" dirty="0"/>
+              <a:t> </a:t>
+            </a:r>
+            <a:r>
+              <a:rPr lang="en-US" altLang="zh-CN" dirty="0"/>
+              <a:t>process</a:t>
+            </a:r>
+            <a:r>
+              <a:rPr lang="zh-CN" altLang="en-US" dirty="0"/>
+              <a:t> </a:t>
+            </a:r>
+            <a:r>
+              <a:rPr lang="en-US" altLang="zh-CN" dirty="0"/>
+              <a:t>sequence</a:t>
+            </a:r>
+            <a:r>
+              <a:rPr lang="zh-CN" altLang="en-US" dirty="0"/>
+              <a:t> </a:t>
+            </a:r>
+            <a:r>
+              <a:rPr lang="en-US" altLang="zh-CN" dirty="0"/>
+              <a:t>sequentially.</a:t>
+            </a:r>
+          </a:p>
+          <a:p>
+            <a:pPr marL="285750" indent="-285750">
+              <a:lnSpc>
+                <a:spcPts val="2400"/>
+              </a:lnSpc>
+              <a:buFontTx/>
+              <a:buChar char="-"/>
+            </a:pPr>
+            <a:r>
+              <a:rPr lang="en-US" altLang="zh-CN" dirty="0"/>
+              <a:t>Full</a:t>
+            </a:r>
+            <a:r>
+              <a:rPr lang="zh-CN" altLang="en-US" dirty="0"/>
+              <a:t> </a:t>
+            </a:r>
+            <a:r>
+              <a:rPr lang="en-US" altLang="zh-CN" dirty="0"/>
+              <a:t>transformer</a:t>
+            </a:r>
+            <a:r>
+              <a:rPr lang="zh-CN" altLang="en-US" dirty="0"/>
+              <a:t> </a:t>
+            </a:r>
+            <a:r>
+              <a:rPr lang="en-US" altLang="zh-CN" dirty="0"/>
+              <a:t>is</a:t>
+            </a:r>
+            <a:r>
+              <a:rPr lang="zh-CN" altLang="en-US" dirty="0"/>
+              <a:t> </a:t>
+            </a:r>
+            <a:r>
+              <a:rPr lang="en-US" altLang="zh-CN" dirty="0"/>
+              <a:t>parallelized</a:t>
+            </a:r>
+            <a:r>
+              <a:rPr lang="zh-CN" altLang="en-US" dirty="0"/>
+              <a:t> </a:t>
+            </a:r>
+            <a:r>
+              <a:rPr lang="en-US" altLang="zh-CN" dirty="0"/>
+              <a:t>and</a:t>
+            </a:r>
+            <a:r>
+              <a:rPr lang="zh-CN" altLang="en-US" dirty="0"/>
+              <a:t> </a:t>
+            </a:r>
+            <a:r>
+              <a:rPr lang="en-US" altLang="zh-CN" dirty="0"/>
+              <a:t>uses</a:t>
+            </a:r>
+            <a:r>
+              <a:rPr lang="zh-CN" altLang="en-US" dirty="0"/>
+              <a:t> </a:t>
+            </a:r>
+            <a:r>
+              <a:rPr lang="en-US" altLang="zh-CN" dirty="0"/>
+              <a:t>multi</a:t>
+            </a:r>
+            <a:r>
+              <a:rPr lang="zh-CN" altLang="en-US" dirty="0"/>
+              <a:t> </a:t>
+            </a:r>
+            <a:r>
+              <a:rPr lang="en-US" altLang="zh-CN" dirty="0"/>
+              <a:t>head</a:t>
+            </a:r>
+            <a:r>
+              <a:rPr lang="zh-CN" altLang="en-US" dirty="0"/>
+              <a:t> </a:t>
+            </a:r>
+            <a:r>
+              <a:rPr lang="en-US" altLang="zh-CN" dirty="0"/>
+              <a:t>attention</a:t>
+            </a:r>
+            <a:r>
+              <a:rPr lang="zh-CN" altLang="en-US" dirty="0"/>
+              <a:t> </a:t>
+            </a:r>
+            <a:r>
+              <a:rPr lang="en-US" altLang="zh-CN" dirty="0"/>
+              <a:t>to</a:t>
+            </a:r>
+            <a:r>
+              <a:rPr lang="zh-CN" altLang="en-US" dirty="0"/>
+              <a:t> </a:t>
+            </a:r>
+            <a:r>
+              <a:rPr lang="en-US" altLang="zh-CN" dirty="0"/>
+              <a:t>capture</a:t>
+            </a:r>
+            <a:r>
+              <a:rPr lang="zh-CN" altLang="en-US" dirty="0"/>
+              <a:t> </a:t>
+            </a:r>
+            <a:r>
+              <a:rPr lang="en-US" altLang="zh-CN" dirty="0"/>
+              <a:t>the</a:t>
+            </a:r>
+            <a:r>
+              <a:rPr lang="zh-CN" altLang="en-US" dirty="0"/>
+              <a:t> </a:t>
+            </a:r>
+            <a:r>
+              <a:rPr lang="en-US" altLang="zh-CN" dirty="0"/>
+              <a:t>dependencies</a:t>
+            </a:r>
+            <a:r>
+              <a:rPr lang="zh-CN" altLang="en-US" dirty="0"/>
+              <a:t> </a:t>
+            </a:r>
+            <a:r>
+              <a:rPr lang="en-US" altLang="zh-CN" dirty="0"/>
+              <a:t>globally</a:t>
+            </a:r>
+          </a:p>
+          <a:p>
+            <a:pPr marL="742950" lvl="1" indent="-285750">
+              <a:lnSpc>
+                <a:spcPts val="2400"/>
+              </a:lnSpc>
+              <a:buFontTx/>
+              <a:buChar char="-"/>
+            </a:pPr>
+            <a:endParaRPr lang="en-US" dirty="0"/>
           </a:p>
         </p:txBody>
       </p:sp>
